--- a/docs/workflow.pptx
+++ b/docs/workflow.pptx
@@ -118,7 +118,7 @@
             <a:srgbClr val="A4A3A4"/>
           </p15:clr>
         </p15:guide>
-        <p15:guide id="2" pos="2138" userDrawn="1">
+        <p15:guide id="2" pos="2156" userDrawn="1">
           <p15:clr>
             <a:srgbClr val="A4A3A4"/>
           </p15:clr>
@@ -3526,10 +3526,10 @@
         </p:nvGrpSpPr>
         <p:grpSpPr>
           <a:xfrm>
-            <a:off x="3491865" y="1946275"/>
-            <a:ext cx="3268345" cy="861695"/>
-            <a:chOff x="5456" y="5876"/>
-            <a:chExt cx="5147" cy="1357"/>
+            <a:off x="3495040" y="82550"/>
+            <a:ext cx="3268345" cy="854075"/>
+            <a:chOff x="5456" y="5888"/>
+            <a:chExt cx="5147" cy="1345"/>
           </a:xfrm>
         </p:grpSpPr>
         <p:sp>
@@ -4821,8 +4821,8 @@
           </p:nvSpPr>
           <p:spPr>
             <a:xfrm>
-              <a:off x="5456" y="5876"/>
-              <a:ext cx="5147" cy="1357"/>
+              <a:off x="5456" y="5963"/>
+              <a:ext cx="5147" cy="1270"/>
             </a:xfrm>
             <a:prstGeom prst="rect">
               <a:avLst/>
@@ -4927,7 +4927,7 @@
         </p:nvGrpSpPr>
         <p:grpSpPr>
           <a:xfrm>
-            <a:off x="3491865" y="2904490"/>
+            <a:off x="3495040" y="1050290"/>
             <a:ext cx="3275965" cy="832485"/>
             <a:chOff x="5444" y="5922"/>
             <a:chExt cx="5159" cy="1311"/>
@@ -5517,7 +5517,7 @@
         </p:nvGrpSpPr>
         <p:grpSpPr>
           <a:xfrm>
-            <a:off x="103505" y="3469005"/>
+            <a:off x="83185" y="3850640"/>
             <a:ext cx="3274695" cy="855345"/>
             <a:chOff x="5446" y="5886"/>
             <a:chExt cx="5157" cy="1347"/>
@@ -6106,7 +6106,7 @@
         </p:nvGrpSpPr>
         <p:grpSpPr>
           <a:xfrm>
-            <a:off x="3491865" y="3833495"/>
+            <a:off x="3495040" y="1996440"/>
             <a:ext cx="3287395" cy="1233805"/>
             <a:chOff x="5426" y="3338"/>
             <a:chExt cx="5177" cy="1943"/>
@@ -7043,10 +7043,10 @@
         </p:nvGrpSpPr>
         <p:grpSpPr>
           <a:xfrm>
-            <a:off x="3491865" y="5163820"/>
-            <a:ext cx="3272790" cy="1246505"/>
+            <a:off x="3495040" y="3343910"/>
+            <a:ext cx="3272790" cy="833755"/>
             <a:chOff x="5554" y="5558"/>
-            <a:chExt cx="5154" cy="1963"/>
+            <a:chExt cx="5154" cy="1313"/>
           </a:xfrm>
         </p:grpSpPr>
         <p:grpSp>
@@ -7058,9 +7058,9 @@
           <p:grpSpPr>
             <a:xfrm>
               <a:off x="5554" y="5558"/>
-              <a:ext cx="5154" cy="1963"/>
+              <a:ext cx="5154" cy="1293"/>
               <a:chOff x="5449" y="5895"/>
-              <a:chExt cx="5154" cy="1963"/>
+              <a:chExt cx="5154" cy="1293"/>
             </a:xfrm>
           </p:grpSpPr>
           <p:sp>
@@ -7072,7 +7072,7 @@
             <p:spPr>
               <a:xfrm>
                 <a:off x="5591" y="6335"/>
-                <a:ext cx="2253" cy="1189"/>
+                <a:ext cx="2253" cy="608"/>
               </a:xfrm>
               <a:prstGeom prst="rect">
                 <a:avLst/>
@@ -7166,116 +7166,6 @@
                     <a:sym typeface="+mn-ea"/>
                   </a:rPr>
                   <a:t>codon3.fasta</a:t>
-                </a:r>
-                <a:endParaRPr lang="en-US" altLang="zh-CN" sz="400">
-                  <a:solidFill>
-                    <a:schemeClr val="tx1"/>
-                  </a:solidFill>
-                  <a:latin typeface="Ubuntu Mono" panose="020B0509030602030204" charset="0"/>
-                  <a:cs typeface="Ubuntu Mono" panose="020B0509030602030204" charset="0"/>
-                </a:endParaRPr>
-              </a:p>
-              <a:p>
-                <a:pPr indent="0" algn="l" fontAlgn="auto">
-                  <a:lnSpc>
-                    <a:spcPct val="120000"/>
-                  </a:lnSpc>
-                </a:pPr>
-                <a:r>
-                  <a:rPr lang="en-US" altLang="zh-CN" sz="400">
-                    <a:latin typeface="Ubuntu Mono" panose="020B0509030602030204" charset="0"/>
-                    <a:cs typeface="Ubuntu Mono" panose="020B0509030602030204" charset="0"/>
-                    <a:sym typeface="+mn-ea"/>
-                  </a:rPr>
-                  <a:t>codon4.fasta</a:t>
-                </a:r>
-                <a:endParaRPr lang="en-US" altLang="zh-CN" sz="400">
-                  <a:solidFill>
-                    <a:schemeClr val="tx1"/>
-                  </a:solidFill>
-                  <a:latin typeface="Ubuntu Mono" panose="020B0509030602030204" charset="0"/>
-                  <a:cs typeface="Ubuntu Mono" panose="020B0509030602030204" charset="0"/>
-                </a:endParaRPr>
-              </a:p>
-              <a:p>
-                <a:pPr indent="0" algn="l" fontAlgn="auto">
-                  <a:lnSpc>
-                    <a:spcPct val="120000"/>
-                  </a:lnSpc>
-                </a:pPr>
-                <a:r>
-                  <a:rPr lang="en-US" altLang="zh-CN" sz="400">
-                    <a:latin typeface="Ubuntu Mono" panose="020B0509030602030204" charset="0"/>
-                    <a:cs typeface="Ubuntu Mono" panose="020B0509030602030204" charset="0"/>
-                    <a:sym typeface="+mn-ea"/>
-                  </a:rPr>
-                  <a:t>codon5.fasta</a:t>
-                </a:r>
-                <a:endParaRPr lang="en-US" altLang="zh-CN" sz="400">
-                  <a:solidFill>
-                    <a:schemeClr val="tx1"/>
-                  </a:solidFill>
-                  <a:latin typeface="Ubuntu Mono" panose="020B0509030602030204" charset="0"/>
-                  <a:cs typeface="Ubuntu Mono" panose="020B0509030602030204" charset="0"/>
-                </a:endParaRPr>
-              </a:p>
-              <a:p>
-                <a:pPr indent="0" algn="l" fontAlgn="auto">
-                  <a:lnSpc>
-                    <a:spcPct val="120000"/>
-                  </a:lnSpc>
-                </a:pPr>
-                <a:r>
-                  <a:rPr lang="en-US" altLang="zh-CN" sz="400">
-                    <a:latin typeface="Ubuntu Mono" panose="020B0509030602030204" charset="0"/>
-                    <a:cs typeface="Ubuntu Mono" panose="020B0509030602030204" charset="0"/>
-                    <a:sym typeface="+mn-ea"/>
-                  </a:rPr>
-                  <a:t>codon6.fasta</a:t>
-                </a:r>
-                <a:endParaRPr lang="en-US" altLang="zh-CN" sz="400">
-                  <a:solidFill>
-                    <a:schemeClr val="tx1"/>
-                  </a:solidFill>
-                  <a:latin typeface="Ubuntu Mono" panose="020B0509030602030204" charset="0"/>
-                  <a:cs typeface="Ubuntu Mono" panose="020B0509030602030204" charset="0"/>
-                </a:endParaRPr>
-              </a:p>
-              <a:p>
-                <a:pPr indent="0" algn="l" fontAlgn="auto">
-                  <a:lnSpc>
-                    <a:spcPct val="120000"/>
-                  </a:lnSpc>
-                </a:pPr>
-                <a:r>
-                  <a:rPr lang="en-US" altLang="zh-CN" sz="400">
-                    <a:latin typeface="Ubuntu Mono" panose="020B0509030602030204" charset="0"/>
-                    <a:cs typeface="Ubuntu Mono" panose="020B0509030602030204" charset="0"/>
-                    <a:sym typeface="+mn-ea"/>
-                  </a:rPr>
-                  <a:t>codon7.fasta</a:t>
-                </a:r>
-                <a:endParaRPr lang="en-US" altLang="zh-CN" sz="400">
-                  <a:solidFill>
-                    <a:schemeClr val="tx1"/>
-                  </a:solidFill>
-                  <a:latin typeface="Ubuntu Mono" panose="020B0509030602030204" charset="0"/>
-                  <a:cs typeface="Ubuntu Mono" panose="020B0509030602030204" charset="0"/>
-                </a:endParaRPr>
-              </a:p>
-              <a:p>
-                <a:pPr indent="0" algn="l" fontAlgn="auto">
-                  <a:lnSpc>
-                    <a:spcPct val="120000"/>
-                  </a:lnSpc>
-                </a:pPr>
-                <a:r>
-                  <a:rPr lang="en-US" altLang="zh-CN" sz="400">
-                    <a:latin typeface="Ubuntu Mono" panose="020B0509030602030204" charset="0"/>
-                    <a:cs typeface="Ubuntu Mono" panose="020B0509030602030204" charset="0"/>
-                    <a:sym typeface="+mn-ea"/>
-                  </a:rPr>
-                  <a:t>codon8.fasta</a:t>
                 </a:r>
                 <a:endParaRPr lang="en-US" altLang="zh-CN" sz="400">
                   <a:solidFill>
@@ -7345,8 +7235,8 @@
             </p:nvSpPr>
             <p:spPr>
               <a:xfrm>
-                <a:off x="5456" y="5895"/>
-                <a:ext cx="5147" cy="1963"/>
+                <a:off x="5456" y="5896"/>
+                <a:ext cx="5147" cy="1292"/>
               </a:xfrm>
               <a:prstGeom prst="rect">
                 <a:avLst/>
@@ -7405,7 +7295,7 @@
           <p:spPr>
             <a:xfrm>
               <a:off x="8576" y="5998"/>
-              <a:ext cx="2012" cy="1190"/>
+              <a:ext cx="2012" cy="608"/>
             </a:xfrm>
             <a:prstGeom prst="rect">
               <a:avLst/>
@@ -7573,136 +7463,6 @@
                 <a:sym typeface="+mn-ea"/>
               </a:endParaRPr>
             </a:p>
-            <a:p>
-              <a:pPr indent="0" algn="l" fontAlgn="auto">
-                <a:lnSpc>
-                  <a:spcPct val="120000"/>
-                </a:lnSpc>
-              </a:pPr>
-              <a:r>
-                <a:rPr lang="en-US" altLang="zh-CN" sz="400">
-                  <a:latin typeface="Ubuntu Mono" panose="020B0509030602030204" charset="0"/>
-                  <a:cs typeface="Ubuntu Mono" panose="020B0509030602030204" charset="0"/>
-                  <a:sym typeface="+mn-ea"/>
-                </a:rPr>
-                <a:t>codon4  S1   S2   XX        XX </a:t>
-              </a:r>
-              <a:endParaRPr lang="en-US" altLang="zh-CN" sz="400">
-                <a:solidFill>
-                  <a:schemeClr val="tx1"/>
-                </a:solidFill>
-                <a:latin typeface="Ubuntu Mono" panose="020B0509030602030204" charset="0"/>
-                <a:cs typeface="Ubuntu Mono" panose="020B0509030602030204" charset="0"/>
-                <a:sym typeface="+mn-ea"/>
-              </a:endParaRPr>
-            </a:p>
-            <a:p>
-              <a:pPr indent="0" algn="l" fontAlgn="auto">
-                <a:lnSpc>
-                  <a:spcPct val="120000"/>
-                </a:lnSpc>
-              </a:pPr>
-              <a:r>
-                <a:rPr lang="en-US" altLang="zh-CN" sz="400">
-                  <a:latin typeface="Ubuntu Mono" panose="020B0509030602030204" charset="0"/>
-                  <a:cs typeface="Ubuntu Mono" panose="020B0509030602030204" charset="0"/>
-                  <a:sym typeface="+mn-ea"/>
-                </a:rPr>
-                <a:t>codon5  S1   S2   XX        XX </a:t>
-              </a:r>
-              <a:endParaRPr lang="en-US" altLang="zh-CN" sz="400">
-                <a:solidFill>
-                  <a:schemeClr val="tx1"/>
-                </a:solidFill>
-                <a:latin typeface="Ubuntu Mono" panose="020B0509030602030204" charset="0"/>
-                <a:cs typeface="Ubuntu Mono" panose="020B0509030602030204" charset="0"/>
-                <a:sym typeface="+mn-ea"/>
-              </a:endParaRPr>
-            </a:p>
-            <a:p>
-              <a:pPr indent="0" algn="l" fontAlgn="auto">
-                <a:lnSpc>
-                  <a:spcPct val="120000"/>
-                </a:lnSpc>
-              </a:pPr>
-              <a:r>
-                <a:rPr lang="en-US" altLang="zh-CN" sz="400">
-                  <a:latin typeface="Ubuntu Mono" panose="020B0509030602030204" charset="0"/>
-                  <a:cs typeface="Ubuntu Mono" panose="020B0509030602030204" charset="0"/>
-                  <a:sym typeface="+mn-ea"/>
-                </a:rPr>
-                <a:t>codon6  S1   S2   XX        XX </a:t>
-              </a:r>
-              <a:endParaRPr lang="en-US" altLang="zh-CN" sz="400">
-                <a:solidFill>
-                  <a:schemeClr val="tx1"/>
-                </a:solidFill>
-                <a:latin typeface="Ubuntu Mono" panose="020B0509030602030204" charset="0"/>
-                <a:cs typeface="Ubuntu Mono" panose="020B0509030602030204" charset="0"/>
-                <a:sym typeface="+mn-ea"/>
-              </a:endParaRPr>
-            </a:p>
-            <a:p>
-              <a:pPr indent="0" algn="l" fontAlgn="auto">
-                <a:lnSpc>
-                  <a:spcPct val="120000"/>
-                </a:lnSpc>
-              </a:pPr>
-              <a:r>
-                <a:rPr lang="en-US" altLang="zh-CN" sz="400">
-                  <a:latin typeface="Ubuntu Mono" panose="020B0509030602030204" charset="0"/>
-                  <a:cs typeface="Ubuntu Mono" panose="020B0509030602030204" charset="0"/>
-                  <a:sym typeface="+mn-ea"/>
-                </a:rPr>
-                <a:t>codon7  S1   S2   XX        XX </a:t>
-              </a:r>
-              <a:endParaRPr lang="en-US" altLang="zh-CN" sz="400">
-                <a:solidFill>
-                  <a:schemeClr val="tx1"/>
-                </a:solidFill>
-                <a:latin typeface="Ubuntu Mono" panose="020B0509030602030204" charset="0"/>
-                <a:cs typeface="Ubuntu Mono" panose="020B0509030602030204" charset="0"/>
-                <a:sym typeface="+mn-ea"/>
-              </a:endParaRPr>
-            </a:p>
-            <a:p>
-              <a:pPr indent="0" algn="l" fontAlgn="auto">
-                <a:lnSpc>
-                  <a:spcPct val="120000"/>
-                </a:lnSpc>
-              </a:pPr>
-              <a:r>
-                <a:rPr lang="en-US" altLang="zh-CN" sz="400">
-                  <a:latin typeface="Ubuntu Mono" panose="020B0509030602030204" charset="0"/>
-                  <a:cs typeface="Ubuntu Mono" panose="020B0509030602030204" charset="0"/>
-                  <a:sym typeface="+mn-ea"/>
-                </a:rPr>
-                <a:t>codon8  S1   S2   XX        XX </a:t>
-              </a:r>
-              <a:endParaRPr lang="en-US" altLang="zh-CN" sz="400">
-                <a:solidFill>
-                  <a:schemeClr val="tx1"/>
-                </a:solidFill>
-                <a:latin typeface="Ubuntu Mono" panose="020B0509030602030204" charset="0"/>
-                <a:cs typeface="Ubuntu Mono" panose="020B0509030602030204" charset="0"/>
-                <a:sym typeface="+mn-ea"/>
-              </a:endParaRPr>
-            </a:p>
-            <a:p>
-              <a:pPr indent="0" algn="l" fontAlgn="auto">
-                <a:lnSpc>
-                  <a:spcPct val="120000"/>
-                </a:lnSpc>
-              </a:pPr>
-              <a:endParaRPr lang="en-US" altLang="zh-CN" sz="400">
-                <a:solidFill>
-                  <a:schemeClr val="tx1"/>
-                </a:solidFill>
-                <a:latin typeface="Ubuntu Mono" panose="020B0509030602030204" charset="0"/>
-                <a:cs typeface="Ubuntu Mono" panose="020B0509030602030204" charset="0"/>
-                <a:sym typeface="+mn-ea"/>
-              </a:endParaRPr>
-            </a:p>
           </p:txBody>
         </p:sp>
         <p:sp>
@@ -7713,7 +7473,7 @@
           </p:nvSpPr>
           <p:spPr>
             <a:xfrm>
-              <a:off x="8201" y="6536"/>
+              <a:off x="8141" y="6243"/>
               <a:ext cx="225" cy="119"/>
             </a:xfrm>
             <a:prstGeom prst="rightArrow">
@@ -7760,7 +7520,7 @@
           </p:nvSpPr>
           <p:spPr>
             <a:xfrm>
-              <a:off x="5561" y="7256"/>
+              <a:off x="5554" y="6606"/>
               <a:ext cx="4982" cy="265"/>
             </a:xfrm>
             <a:prstGeom prst="rect">
@@ -7802,7 +7562,7 @@
         </p:nvGrpSpPr>
         <p:grpSpPr>
           <a:xfrm>
-            <a:off x="103505" y="4435475"/>
+            <a:off x="3495040" y="5313045"/>
             <a:ext cx="3274060" cy="1893570"/>
             <a:chOff x="169" y="7080"/>
             <a:chExt cx="5156" cy="2982"/>
@@ -8273,7 +8033,7 @@
                     <a:latin typeface="Arial" panose="020B0604020202020204" pitchFamily="34" charset="0"/>
                     <a:cs typeface="Arial" panose="020B0604020202020204" pitchFamily="34" charset="0"/>
                   </a:rPr>
-                  <a:t>D</a:t>
+                  <a:t>L</a:t>
                 </a:r>
                 <a:endParaRPr lang="en-US" sz="1000" b="1">
                   <a:latin typeface="Arial" panose="020B0604020202020204" pitchFamily="34" charset="0"/>
@@ -9350,7 +9110,7 @@
         </p:nvSpPr>
         <p:spPr>
           <a:xfrm>
-            <a:off x="1863090" y="249555"/>
+            <a:off x="1840865" y="7538085"/>
             <a:ext cx="3192145" cy="1515745"/>
           </a:xfrm>
           <a:prstGeom prst="rect">
@@ -9408,8 +9168,8 @@
         </p:nvSpPr>
         <p:spPr>
           <a:xfrm>
-            <a:off x="182245" y="334645"/>
-            <a:ext cx="1332230" cy="1344930"/>
+            <a:off x="160020" y="7623175"/>
+            <a:ext cx="1332230" cy="1449705"/>
           </a:xfrm>
           <a:prstGeom prst="rect">
             <a:avLst/>
@@ -9422,7 +9182,7 @@
         </p:spPr>
         <p:txBody>
           <a:bodyPr wrap="square" rtlCol="0">
-            <a:spAutoFit/>
+            <a:noAutofit/>
           </a:bodyPr>
           <a:p>
             <a:pPr indent="0" algn="l" fontAlgn="auto">
@@ -9559,6 +9319,32 @@
                 <a:sym typeface="+mn-ea"/>
               </a:rPr>
               <a:t>--seqtype nucl</a:t>
+            </a:r>
+            <a:endParaRPr lang="en-US" altLang="zh-CN" sz="400">
+              <a:solidFill>
+                <a:schemeClr val="tx1"/>
+              </a:solidFill>
+              <a:latin typeface="Ubuntu Mono" panose="020B0509030602030204" charset="0"/>
+              <a:cs typeface="Ubuntu Mono" panose="020B0509030602030204" charset="0"/>
+              <a:sym typeface="+mn-ea"/>
+            </a:endParaRPr>
+          </a:p>
+          <a:p>
+            <a:pPr indent="0" algn="l" fontAlgn="auto">
+              <a:lnSpc>
+                <a:spcPct val="120000"/>
+              </a:lnSpc>
+            </a:pPr>
+            <a:r>
+              <a:rPr lang="en-US" altLang="zh-CN" sz="400">
+                <a:solidFill>
+                  <a:schemeClr val="tx1"/>
+                </a:solidFill>
+                <a:latin typeface="Ubuntu Mono" panose="020B0509030602030204" charset="0"/>
+                <a:cs typeface="Ubuntu Mono" panose="020B0509030602030204" charset="0"/>
+                <a:sym typeface="+mn-ea"/>
+              </a:rPr>
+              <a:t>--seqtype pseudogene</a:t>
             </a:r>
             <a:endParaRPr lang="en-US" altLang="zh-CN" sz="400">
               <a:solidFill>
@@ -9859,1157 +9645,1164 @@
       </p:sp>
       <p:grpSp>
         <p:nvGrpSpPr>
-          <p:cNvPr id="214" name="组合 213"/>
+          <p:cNvPr id="189" name="组合 188"/>
           <p:cNvGrpSpPr/>
           <p:nvPr/>
         </p:nvGrpSpPr>
         <p:grpSpPr>
-          <a:xfrm>
-            <a:off x="1863090" y="249555"/>
-            <a:ext cx="3086100" cy="1430020"/>
-            <a:chOff x="2364" y="9036"/>
-            <a:chExt cx="4860" cy="2252"/>
+          <a:xfrm rot="0">
+            <a:off x="1840865" y="7538085"/>
+            <a:ext cx="843280" cy="468630"/>
+            <a:chOff x="2391" y="9036"/>
+            <a:chExt cx="1328" cy="738"/>
           </a:xfrm>
         </p:grpSpPr>
-        <p:grpSp>
-          <p:nvGrpSpPr>
-            <p:cNvPr id="189" name="组合 188"/>
-            <p:cNvGrpSpPr/>
+        <p:sp>
+          <p:nvSpPr>
+            <p:cNvPr id="180" name="文本框 179"/>
+            <p:cNvSpPr txBox="1"/>
             <p:nvPr/>
-          </p:nvGrpSpPr>
-          <p:grpSpPr>
+          </p:nvSpPr>
+          <p:spPr>
             <a:xfrm>
-              <a:off x="2364" y="9036"/>
-              <a:ext cx="1328" cy="738"/>
-              <a:chOff x="2391" y="9036"/>
-              <a:chExt cx="1328" cy="738"/>
+              <a:off x="2391" y="9036"/>
+              <a:ext cx="1328" cy="289"/>
             </a:xfrm>
-          </p:grpSpPr>
-          <p:sp>
-            <p:nvSpPr>
-              <p:cNvPr id="180" name="文本框 179"/>
-              <p:cNvSpPr txBox="1"/>
-              <p:nvPr/>
-            </p:nvSpPr>
-            <p:spPr>
-              <a:xfrm>
-                <a:off x="2391" y="9036"/>
-                <a:ext cx="1328" cy="289"/>
-              </a:xfrm>
-              <a:prstGeom prst="rect">
-                <a:avLst/>
-              </a:prstGeom>
-              <a:noFill/>
-            </p:spPr>
-            <p:txBody>
-              <a:bodyPr wrap="square" rtlCol="0" anchor="t">
-                <a:spAutoFit/>
-              </a:bodyPr>
-              <a:p>
-                <a:pPr indent="0" algn="l" fontAlgn="auto">
-                  <a:lnSpc>
-                    <a:spcPct val="120000"/>
-                  </a:lnSpc>
-                </a:pPr>
-                <a:r>
-                  <a:rPr lang="en-US" altLang="zh-CN" sz="500" b="1">
-                    <a:latin typeface="Arial" panose="020B0604020202020204" pitchFamily="34" charset="0"/>
-                    <a:cs typeface="Arial" panose="020B0604020202020204" pitchFamily="34" charset="0"/>
-                    <a:sym typeface="+mn-ea"/>
-                  </a:rPr>
-                  <a:t>1. Codon workfow</a:t>
-                </a:r>
-                <a:endParaRPr lang="en-US" altLang="zh-CN" sz="500" b="1">
+            <a:prstGeom prst="rect">
+              <a:avLst/>
+            </a:prstGeom>
+            <a:noFill/>
+          </p:spPr>
+          <p:txBody>
+            <a:bodyPr wrap="square" rtlCol="0" anchor="t">
+              <a:spAutoFit/>
+            </a:bodyPr>
+            <a:p>
+              <a:pPr indent="0" algn="l" fontAlgn="auto">
+                <a:lnSpc>
+                  <a:spcPct val="120000"/>
+                </a:lnSpc>
+              </a:pPr>
+              <a:r>
+                <a:rPr lang="en-US" altLang="zh-CN" sz="500" b="1">
                   <a:latin typeface="Arial" panose="020B0604020202020204" pitchFamily="34" charset="0"/>
                   <a:cs typeface="Arial" panose="020B0604020202020204" pitchFamily="34" charset="0"/>
                   <a:sym typeface="+mn-ea"/>
-                </a:endParaRPr>
-              </a:p>
-            </p:txBody>
-          </p:sp>
-          <p:sp>
-            <p:nvSpPr>
-              <p:cNvPr id="188" name="文本框 187"/>
-              <p:cNvSpPr txBox="1"/>
-              <p:nvPr/>
-            </p:nvSpPr>
-            <p:spPr>
-              <a:xfrm>
-                <a:off x="2549" y="9244"/>
-                <a:ext cx="1035" cy="530"/>
-              </a:xfrm>
-              <a:prstGeom prst="rect">
-                <a:avLst/>
-              </a:prstGeom>
-              <a:solidFill>
-                <a:schemeClr val="bg1">
-                  <a:lumMod val="95000"/>
-                </a:schemeClr>
-              </a:solidFill>
-            </p:spPr>
-            <p:txBody>
-              <a:bodyPr wrap="square" rtlCol="0" anchor="ctr" anchorCtr="0">
-                <a:noAutofit/>
-              </a:bodyPr>
-              <a:p>
-                <a:pPr indent="0" algn="ctr" fontAlgn="auto">
-                  <a:lnSpc>
-                    <a:spcPct val="120000"/>
-                  </a:lnSpc>
-                </a:pPr>
-                <a:r>
-                  <a:rPr lang="en-US" altLang="zh-CN" sz="400">
-                    <a:solidFill>
-                      <a:schemeClr val="tx1"/>
-                    </a:solidFill>
-                    <a:latin typeface="Arial" panose="020B0604020202020204" pitchFamily="34" charset="0"/>
-                    <a:cs typeface="Arial" panose="020B0604020202020204" pitchFamily="34" charset="0"/>
-                    <a:sym typeface="+mn-ea"/>
-                  </a:rPr>
-                  <a:t>Clean CDS</a:t>
-                </a:r>
-                <a:endParaRPr lang="en-US" altLang="zh-CN" sz="400">
+                </a:rPr>
+                <a:t>1. Codon workfow</a:t>
+              </a:r>
+              <a:endParaRPr lang="en-US" altLang="zh-CN" sz="500" b="1">
+                <a:latin typeface="Arial" panose="020B0604020202020204" pitchFamily="34" charset="0"/>
+                <a:cs typeface="Arial" panose="020B0604020202020204" pitchFamily="34" charset="0"/>
+                <a:sym typeface="+mn-ea"/>
+              </a:endParaRPr>
+            </a:p>
+          </p:txBody>
+        </p:sp>
+        <p:sp>
+          <p:nvSpPr>
+            <p:cNvPr id="188" name="文本框 187"/>
+            <p:cNvSpPr txBox="1"/>
+            <p:nvPr/>
+          </p:nvSpPr>
+          <p:spPr>
+            <a:xfrm>
+              <a:off x="2549" y="9244"/>
+              <a:ext cx="1035" cy="530"/>
+            </a:xfrm>
+            <a:prstGeom prst="rect">
+              <a:avLst/>
+            </a:prstGeom>
+            <a:solidFill>
+              <a:schemeClr val="bg1">
+                <a:lumMod val="95000"/>
+              </a:schemeClr>
+            </a:solidFill>
+          </p:spPr>
+          <p:txBody>
+            <a:bodyPr wrap="square" rtlCol="0" anchor="ctr" anchorCtr="0">
+              <a:noAutofit/>
+            </a:bodyPr>
+            <a:p>
+              <a:pPr indent="0" algn="ctr" fontAlgn="auto">
+                <a:lnSpc>
+                  <a:spcPct val="120000"/>
+                </a:lnSpc>
+              </a:pPr>
+              <a:r>
+                <a:rPr lang="en-US" altLang="zh-CN" sz="400">
                   <a:solidFill>
                     <a:schemeClr val="tx1"/>
                   </a:solidFill>
                   <a:latin typeface="Arial" panose="020B0604020202020204" pitchFamily="34" charset="0"/>
                   <a:cs typeface="Arial" panose="020B0604020202020204" pitchFamily="34" charset="0"/>
                   <a:sym typeface="+mn-ea"/>
-                </a:endParaRPr>
-              </a:p>
-            </p:txBody>
-          </p:sp>
-        </p:grpSp>
-        <p:grpSp>
-          <p:nvGrpSpPr>
-            <p:cNvPr id="190" name="组合 189"/>
-            <p:cNvGrpSpPr/>
-            <p:nvPr/>
-          </p:nvGrpSpPr>
-          <p:grpSpPr>
-            <a:xfrm>
-              <a:off x="2364" y="9793"/>
-              <a:ext cx="1328" cy="738"/>
-              <a:chOff x="2391" y="9036"/>
-              <a:chExt cx="1328" cy="738"/>
-            </a:xfrm>
-          </p:grpSpPr>
-          <p:sp>
-            <p:nvSpPr>
-              <p:cNvPr id="191" name="文本框 190"/>
-              <p:cNvSpPr txBox="1"/>
-              <p:nvPr/>
-            </p:nvSpPr>
-            <p:spPr>
-              <a:xfrm>
-                <a:off x="2391" y="9036"/>
-                <a:ext cx="1328" cy="289"/>
-              </a:xfrm>
-              <a:prstGeom prst="rect">
-                <a:avLst/>
-              </a:prstGeom>
-              <a:noFill/>
-            </p:spPr>
-            <p:txBody>
-              <a:bodyPr wrap="square" rtlCol="0" anchor="t">
-                <a:spAutoFit/>
-              </a:bodyPr>
-              <a:p>
-                <a:pPr indent="0" algn="l" fontAlgn="auto">
-                  <a:lnSpc>
-                    <a:spcPct val="120000"/>
-                  </a:lnSpc>
-                </a:pPr>
-                <a:r>
-                  <a:rPr lang="en-US" altLang="zh-CN" sz="500" b="1">
-                    <a:latin typeface="Arial" panose="020B0604020202020204" pitchFamily="34" charset="0"/>
-                    <a:cs typeface="Arial" panose="020B0604020202020204" pitchFamily="34" charset="0"/>
-                    <a:sym typeface="+mn-ea"/>
-                  </a:rPr>
-                  <a:t>2. Protein workfow</a:t>
-                </a:r>
-                <a:endParaRPr lang="en-US" altLang="zh-CN" sz="500" b="1">
+                </a:rPr>
+                <a:t>CDS FASTA</a:t>
+              </a:r>
+              <a:br>
+                <a:rPr lang="en-US" altLang="zh-CN" sz="400">
+                  <a:solidFill>
+                    <a:schemeClr val="tx1"/>
+                  </a:solidFill>
                   <a:latin typeface="Arial" panose="020B0604020202020204" pitchFamily="34" charset="0"/>
                   <a:cs typeface="Arial" panose="020B0604020202020204" pitchFamily="34" charset="0"/>
                   <a:sym typeface="+mn-ea"/>
-                </a:endParaRPr>
-              </a:p>
-            </p:txBody>
-          </p:sp>
-          <p:sp>
-            <p:nvSpPr>
-              <p:cNvPr id="192" name="文本框 191"/>
-              <p:cNvSpPr txBox="1"/>
-              <p:nvPr/>
-            </p:nvSpPr>
-            <p:spPr>
-              <a:xfrm>
-                <a:off x="2549" y="9244"/>
-                <a:ext cx="1035" cy="530"/>
-              </a:xfrm>
-              <a:prstGeom prst="rect">
-                <a:avLst/>
-              </a:prstGeom>
-              <a:solidFill>
-                <a:schemeClr val="bg1">
-                  <a:lumMod val="95000"/>
-                </a:schemeClr>
-              </a:solidFill>
-            </p:spPr>
-            <p:txBody>
-              <a:bodyPr wrap="square" rtlCol="0" anchor="ctr" anchorCtr="0">
-                <a:noAutofit/>
-              </a:bodyPr>
-              <a:p>
-                <a:pPr indent="0" algn="ctr" fontAlgn="auto">
-                  <a:lnSpc>
-                    <a:spcPct val="120000"/>
-                  </a:lnSpc>
-                </a:pPr>
-                <a:r>
-                  <a:rPr lang="en-US" altLang="zh-CN" sz="400">
-                    <a:latin typeface="Arial" panose="020B0604020202020204" pitchFamily="34" charset="0"/>
-                    <a:cs typeface="Arial" panose="020B0604020202020204" pitchFamily="34" charset="0"/>
-                    <a:sym typeface="+mn-ea"/>
-                  </a:rPr>
-                  <a:t>Protein FASTA</a:t>
-                </a:r>
-                <a:endParaRPr lang="en-US" altLang="zh-CN" sz="400">
-                  <a:solidFill>
-                    <a:schemeClr val="tx1"/>
-                  </a:solidFill>
+                </a:rPr>
+              </a:br>
+              <a:r>
+                <a:rPr lang="en-US" altLang="zh-CN" sz="400">
                   <a:latin typeface="Arial" panose="020B0604020202020204" pitchFamily="34" charset="0"/>
                   <a:cs typeface="Arial" panose="020B0604020202020204" pitchFamily="34" charset="0"/>
                   <a:sym typeface="+mn-ea"/>
-                </a:endParaRPr>
-              </a:p>
-            </p:txBody>
-          </p:sp>
-        </p:grpSp>
-        <p:grpSp>
-          <p:nvGrpSpPr>
-            <p:cNvPr id="193" name="组合 192"/>
-            <p:cNvGrpSpPr/>
+                </a:rPr>
+                <a:t>(Allowing stops) </a:t>
+              </a:r>
+              <a:endParaRPr lang="en-US" altLang="zh-CN" sz="400">
+                <a:solidFill>
+                  <a:schemeClr val="tx1"/>
+                </a:solidFill>
+                <a:latin typeface="Arial" panose="020B0604020202020204" pitchFamily="34" charset="0"/>
+                <a:cs typeface="Arial" panose="020B0604020202020204" pitchFamily="34" charset="0"/>
+                <a:sym typeface="+mn-ea"/>
+              </a:endParaRPr>
+            </a:p>
+          </p:txBody>
+        </p:sp>
+      </p:grpSp>
+      <p:grpSp>
+        <p:nvGrpSpPr>
+          <p:cNvPr id="190" name="组合 189"/>
+          <p:cNvGrpSpPr/>
+          <p:nvPr/>
+        </p:nvGrpSpPr>
+        <p:grpSpPr>
+          <a:xfrm rot="0">
+            <a:off x="1840865" y="8018780"/>
+            <a:ext cx="843280" cy="311785"/>
+            <a:chOff x="2391" y="9036"/>
+            <a:chExt cx="1328" cy="491"/>
+          </a:xfrm>
+        </p:grpSpPr>
+        <p:sp>
+          <p:nvSpPr>
+            <p:cNvPr id="191" name="文本框 190"/>
+            <p:cNvSpPr txBox="1"/>
             <p:nvPr/>
-          </p:nvGrpSpPr>
-          <p:grpSpPr>
+          </p:nvSpPr>
+          <p:spPr>
             <a:xfrm>
-              <a:off x="2364" y="10550"/>
-              <a:ext cx="1385" cy="738"/>
-              <a:chOff x="2391" y="9036"/>
-              <a:chExt cx="1385" cy="738"/>
+              <a:off x="2391" y="9036"/>
+              <a:ext cx="1328" cy="289"/>
             </a:xfrm>
-          </p:grpSpPr>
-          <p:sp>
-            <p:nvSpPr>
-              <p:cNvPr id="194" name="文本框 193"/>
-              <p:cNvSpPr txBox="1"/>
-              <p:nvPr/>
-            </p:nvSpPr>
-            <p:spPr>
-              <a:xfrm>
-                <a:off x="2391" y="9036"/>
-                <a:ext cx="1385" cy="289"/>
-              </a:xfrm>
-              <a:prstGeom prst="rect">
-                <a:avLst/>
-              </a:prstGeom>
-              <a:noFill/>
-            </p:spPr>
-            <p:txBody>
-              <a:bodyPr wrap="square" rtlCol="0" anchor="t">
-                <a:spAutoFit/>
-              </a:bodyPr>
-              <a:p>
-                <a:pPr indent="0" algn="l" fontAlgn="auto">
-                  <a:lnSpc>
-                    <a:spcPct val="120000"/>
-                  </a:lnSpc>
-                </a:pPr>
-                <a:r>
-                  <a:rPr lang="en-US" altLang="zh-CN" sz="500" b="1">
-                    <a:latin typeface="Arial" panose="020B0604020202020204" pitchFamily="34" charset="0"/>
-                    <a:cs typeface="Arial" panose="020B0604020202020204" pitchFamily="34" charset="0"/>
-                    <a:sym typeface="+mn-ea"/>
-                  </a:rPr>
-                  <a:t>3. Nucleotide workfow</a:t>
-                </a:r>
-                <a:endParaRPr lang="en-US" altLang="zh-CN" sz="500" b="1">
+            <a:prstGeom prst="rect">
+              <a:avLst/>
+            </a:prstGeom>
+            <a:noFill/>
+          </p:spPr>
+          <p:txBody>
+            <a:bodyPr wrap="square" rtlCol="0" anchor="t">
+              <a:spAutoFit/>
+            </a:bodyPr>
+            <a:p>
+              <a:pPr indent="0" algn="l" fontAlgn="auto">
+                <a:lnSpc>
+                  <a:spcPct val="120000"/>
+                </a:lnSpc>
+              </a:pPr>
+              <a:r>
+                <a:rPr lang="en-US" altLang="zh-CN" sz="500" b="1">
                   <a:latin typeface="Arial" panose="020B0604020202020204" pitchFamily="34" charset="0"/>
                   <a:cs typeface="Arial" panose="020B0604020202020204" pitchFamily="34" charset="0"/>
                   <a:sym typeface="+mn-ea"/>
-                </a:endParaRPr>
-              </a:p>
-            </p:txBody>
-          </p:sp>
-          <p:sp>
-            <p:nvSpPr>
-              <p:cNvPr id="195" name="文本框 194"/>
-              <p:cNvSpPr txBox="1"/>
-              <p:nvPr/>
-            </p:nvSpPr>
-            <p:spPr>
-              <a:xfrm>
-                <a:off x="2549" y="9244"/>
-                <a:ext cx="1035" cy="530"/>
-              </a:xfrm>
-              <a:prstGeom prst="rect">
-                <a:avLst/>
-              </a:prstGeom>
-              <a:solidFill>
-                <a:schemeClr val="bg1">
-                  <a:lumMod val="95000"/>
-                </a:schemeClr>
-              </a:solidFill>
-            </p:spPr>
-            <p:txBody>
-              <a:bodyPr wrap="square" rtlCol="0" anchor="ctr" anchorCtr="0">
-                <a:noAutofit/>
-              </a:bodyPr>
-              <a:p>
-                <a:pPr indent="0" algn="ctr" fontAlgn="auto">
-                  <a:lnSpc>
-                    <a:spcPct val="120000"/>
-                  </a:lnSpc>
-                </a:pPr>
-                <a:r>
-                  <a:rPr lang="en-US" altLang="zh-CN" sz="400">
-                    <a:solidFill>
-                      <a:schemeClr val="tx1"/>
-                    </a:solidFill>
-                    <a:latin typeface="Arial" panose="020B0604020202020204" pitchFamily="34" charset="0"/>
-                    <a:cs typeface="Arial" panose="020B0604020202020204" pitchFamily="34" charset="0"/>
-                    <a:sym typeface="+mn-ea"/>
-                  </a:rPr>
-                  <a:t>Nucleotide FASTA</a:t>
-                </a:r>
-                <a:endParaRPr lang="en-US" altLang="zh-CN" sz="400">
-                  <a:solidFill>
-                    <a:schemeClr val="tx1"/>
-                  </a:solidFill>
+                </a:rPr>
+                <a:t>2. Protein workfow</a:t>
+              </a:r>
+              <a:endParaRPr lang="en-US" altLang="zh-CN" sz="500" b="1">
+                <a:latin typeface="Arial" panose="020B0604020202020204" pitchFamily="34" charset="0"/>
+                <a:cs typeface="Arial" panose="020B0604020202020204" pitchFamily="34" charset="0"/>
+                <a:sym typeface="+mn-ea"/>
+              </a:endParaRPr>
+            </a:p>
+          </p:txBody>
+        </p:sp>
+        <p:sp>
+          <p:nvSpPr>
+            <p:cNvPr id="192" name="文本框 191"/>
+            <p:cNvSpPr txBox="1"/>
+            <p:nvPr/>
+          </p:nvSpPr>
+          <p:spPr>
+            <a:xfrm>
+              <a:off x="2549" y="9244"/>
+              <a:ext cx="1035" cy="283"/>
+            </a:xfrm>
+            <a:prstGeom prst="rect">
+              <a:avLst/>
+            </a:prstGeom>
+            <a:solidFill>
+              <a:schemeClr val="bg1">
+                <a:lumMod val="95000"/>
+              </a:schemeClr>
+            </a:solidFill>
+          </p:spPr>
+          <p:txBody>
+            <a:bodyPr wrap="square" rtlCol="0" anchor="ctr" anchorCtr="0">
+              <a:noAutofit/>
+            </a:bodyPr>
+            <a:p>
+              <a:pPr indent="0" algn="ctr" fontAlgn="auto">
+                <a:lnSpc>
+                  <a:spcPct val="120000"/>
+                </a:lnSpc>
+              </a:pPr>
+              <a:r>
+                <a:rPr lang="en-US" altLang="zh-CN" sz="400">
                   <a:latin typeface="Arial" panose="020B0604020202020204" pitchFamily="34" charset="0"/>
                   <a:cs typeface="Arial" panose="020B0604020202020204" pitchFamily="34" charset="0"/>
                   <a:sym typeface="+mn-ea"/>
-                </a:endParaRPr>
-              </a:p>
-            </p:txBody>
-          </p:sp>
-        </p:grpSp>
-        <p:grpSp>
-          <p:nvGrpSpPr>
-            <p:cNvPr id="213" name="组合 212"/>
-            <p:cNvGrpSpPr/>
+                </a:rPr>
+                <a:t>Protein FASTA</a:t>
+              </a:r>
+              <a:endParaRPr lang="en-US" altLang="zh-CN" sz="400">
+                <a:solidFill>
+                  <a:schemeClr val="tx1"/>
+                </a:solidFill>
+                <a:latin typeface="Arial" panose="020B0604020202020204" pitchFamily="34" charset="0"/>
+                <a:cs typeface="Arial" panose="020B0604020202020204" pitchFamily="34" charset="0"/>
+                <a:sym typeface="+mn-ea"/>
+              </a:endParaRPr>
+            </a:p>
+          </p:txBody>
+        </p:sp>
+      </p:grpSp>
+      <p:grpSp>
+        <p:nvGrpSpPr>
+          <p:cNvPr id="193" name="组合 192"/>
+          <p:cNvGrpSpPr/>
+          <p:nvPr/>
+        </p:nvGrpSpPr>
+        <p:grpSpPr>
+          <a:xfrm rot="0">
+            <a:off x="1840865" y="8298815"/>
+            <a:ext cx="879475" cy="328930"/>
+            <a:chOff x="2391" y="8774"/>
+            <a:chExt cx="1385" cy="518"/>
+          </a:xfrm>
+        </p:grpSpPr>
+        <p:sp>
+          <p:nvSpPr>
+            <p:cNvPr id="194" name="文本框 193"/>
+            <p:cNvSpPr txBox="1"/>
             <p:nvPr/>
-          </p:nvGrpSpPr>
-          <p:grpSpPr>
+          </p:nvSpPr>
+          <p:spPr>
             <a:xfrm>
-              <a:off x="3598" y="9263"/>
-              <a:ext cx="3626" cy="2024"/>
-              <a:chOff x="3598" y="9263"/>
-              <a:chExt cx="3626" cy="2024"/>
+              <a:off x="2391" y="8774"/>
+              <a:ext cx="1385" cy="289"/>
             </a:xfrm>
-          </p:grpSpPr>
-          <p:sp>
-            <p:nvSpPr>
-              <p:cNvPr id="196" name="文本框 195"/>
-              <p:cNvSpPr txBox="1"/>
-              <p:nvPr/>
-            </p:nvSpPr>
-            <p:spPr>
-              <a:xfrm>
-                <a:off x="3868" y="9263"/>
-                <a:ext cx="640" cy="530"/>
-              </a:xfrm>
-              <a:prstGeom prst="rect">
-                <a:avLst/>
-              </a:prstGeom>
-              <a:solidFill>
-                <a:schemeClr val="bg1">
-                  <a:lumMod val="95000"/>
-                </a:schemeClr>
-              </a:solidFill>
-            </p:spPr>
-            <p:txBody>
-              <a:bodyPr wrap="square" rtlCol="0" anchor="ctr" anchorCtr="0">
-                <a:noAutofit/>
-              </a:bodyPr>
-              <a:p>
-                <a:pPr indent="0" algn="ctr" fontAlgn="auto">
-                  <a:lnSpc>
-                    <a:spcPct val="120000"/>
-                  </a:lnSpc>
-                </a:pPr>
-                <a:r>
-                  <a:rPr lang="en-US" altLang="zh-CN" sz="400">
-                    <a:solidFill>
-                      <a:schemeClr val="tx1"/>
-                    </a:solidFill>
-                    <a:latin typeface="Arial" panose="020B0604020202020204" pitchFamily="34" charset="0"/>
-                    <a:cs typeface="Arial" panose="020B0604020202020204" pitchFamily="34" charset="0"/>
-                    <a:sym typeface="+mn-ea"/>
-                  </a:rPr>
-                  <a:t>Translate</a:t>
-                </a:r>
-                <a:endParaRPr lang="en-US" altLang="zh-CN" sz="400">
-                  <a:solidFill>
-                    <a:schemeClr val="tx1"/>
-                  </a:solidFill>
+            <a:prstGeom prst="rect">
+              <a:avLst/>
+            </a:prstGeom>
+            <a:noFill/>
+          </p:spPr>
+          <p:txBody>
+            <a:bodyPr wrap="square" rtlCol="0" anchor="t">
+              <a:spAutoFit/>
+            </a:bodyPr>
+            <a:p>
+              <a:pPr indent="0" algn="l" fontAlgn="auto">
+                <a:lnSpc>
+                  <a:spcPct val="120000"/>
+                </a:lnSpc>
+              </a:pPr>
+              <a:r>
+                <a:rPr lang="en-US" altLang="zh-CN" sz="500" b="1">
                   <a:latin typeface="Arial" panose="020B0604020202020204" pitchFamily="34" charset="0"/>
                   <a:cs typeface="Arial" panose="020B0604020202020204" pitchFamily="34" charset="0"/>
                   <a:sym typeface="+mn-ea"/>
-                </a:endParaRPr>
-              </a:p>
-            </p:txBody>
-          </p:sp>
-          <p:sp>
-            <p:nvSpPr>
-              <p:cNvPr id="197" name="文本框 196"/>
-              <p:cNvSpPr txBox="1"/>
-              <p:nvPr/>
-            </p:nvSpPr>
-            <p:spPr>
-              <a:xfrm>
-                <a:off x="4452" y="10757"/>
-                <a:ext cx="1035" cy="530"/>
-              </a:xfrm>
-              <a:prstGeom prst="rect">
-                <a:avLst/>
-              </a:prstGeom>
-              <a:solidFill>
-                <a:schemeClr val="bg1">
-                  <a:lumMod val="95000"/>
-                </a:schemeClr>
-              </a:solidFill>
-            </p:spPr>
-            <p:txBody>
-              <a:bodyPr wrap="square" rtlCol="0" anchor="ctr" anchorCtr="0">
-                <a:noAutofit/>
-              </a:bodyPr>
-              <a:p>
-                <a:pPr indent="0" algn="ctr" fontAlgn="auto">
-                  <a:lnSpc>
-                    <a:spcPct val="120000"/>
-                  </a:lnSpc>
-                </a:pPr>
-                <a:r>
-                  <a:rPr lang="en-US" altLang="zh-CN" sz="400">
-                    <a:solidFill>
-                      <a:schemeClr val="tx1"/>
-                    </a:solidFill>
-                    <a:latin typeface="Arial" panose="020B0604020202020204" pitchFamily="34" charset="0"/>
-                    <a:cs typeface="Arial" panose="020B0604020202020204" pitchFamily="34" charset="0"/>
-                    <a:sym typeface="+mn-ea"/>
-                  </a:rPr>
-                  <a:t>Sequence Align</a:t>
-                </a:r>
-                <a:endParaRPr lang="en-US" altLang="zh-CN" sz="400">
+                </a:rPr>
+                <a:t>3. Nucleotide workfow</a:t>
+              </a:r>
+              <a:endParaRPr lang="en-US" altLang="zh-CN" sz="500" b="1">
+                <a:latin typeface="Arial" panose="020B0604020202020204" pitchFamily="34" charset="0"/>
+                <a:cs typeface="Arial" panose="020B0604020202020204" pitchFamily="34" charset="0"/>
+                <a:sym typeface="+mn-ea"/>
+              </a:endParaRPr>
+            </a:p>
+          </p:txBody>
+        </p:sp>
+        <p:sp>
+          <p:nvSpPr>
+            <p:cNvPr id="195" name="文本框 194"/>
+            <p:cNvSpPr txBox="1"/>
+            <p:nvPr/>
+          </p:nvSpPr>
+          <p:spPr>
+            <a:xfrm>
+              <a:off x="2549" y="9009"/>
+              <a:ext cx="1035" cy="283"/>
+            </a:xfrm>
+            <a:prstGeom prst="rect">
+              <a:avLst/>
+            </a:prstGeom>
+            <a:solidFill>
+              <a:schemeClr val="bg1">
+                <a:lumMod val="95000"/>
+              </a:schemeClr>
+            </a:solidFill>
+          </p:spPr>
+          <p:txBody>
+            <a:bodyPr wrap="square" rtlCol="0" anchor="ctr" anchorCtr="0">
+              <a:noAutofit/>
+            </a:bodyPr>
+            <a:p>
+              <a:pPr indent="0" algn="ctr" fontAlgn="auto">
+                <a:lnSpc>
+                  <a:spcPct val="120000"/>
+                </a:lnSpc>
+              </a:pPr>
+              <a:r>
+                <a:rPr lang="en-US" altLang="zh-CN" sz="400">
                   <a:solidFill>
                     <a:schemeClr val="tx1"/>
                   </a:solidFill>
                   <a:latin typeface="Arial" panose="020B0604020202020204" pitchFamily="34" charset="0"/>
                   <a:cs typeface="Arial" panose="020B0604020202020204" pitchFamily="34" charset="0"/>
                   <a:sym typeface="+mn-ea"/>
-                </a:endParaRPr>
-              </a:p>
-            </p:txBody>
-          </p:sp>
-          <p:sp>
-            <p:nvSpPr>
-              <p:cNvPr id="198" name="文本框 197"/>
-              <p:cNvSpPr txBox="1"/>
-              <p:nvPr/>
-            </p:nvSpPr>
-            <p:spPr>
-              <a:xfrm>
-                <a:off x="4423" y="10001"/>
-                <a:ext cx="1035" cy="530"/>
-              </a:xfrm>
-              <a:prstGeom prst="rect">
-                <a:avLst/>
-              </a:prstGeom>
+                </a:rPr>
+                <a:t>Nucleotide FASTA</a:t>
+              </a:r>
+              <a:endParaRPr lang="en-US" altLang="zh-CN" sz="400">
+                <a:solidFill>
+                  <a:schemeClr val="tx1"/>
+                </a:solidFill>
+                <a:latin typeface="Arial" panose="020B0604020202020204" pitchFamily="34" charset="0"/>
+                <a:cs typeface="Arial" panose="020B0604020202020204" pitchFamily="34" charset="0"/>
+                <a:sym typeface="+mn-ea"/>
+              </a:endParaRPr>
+            </a:p>
+          </p:txBody>
+        </p:sp>
+      </p:grpSp>
+      <p:sp>
+        <p:nvSpPr>
+          <p:cNvPr id="196" name="文本框 195"/>
+          <p:cNvSpPr txBox="1"/>
+          <p:nvPr/>
+        </p:nvSpPr>
+        <p:spPr>
+          <a:xfrm>
+            <a:off x="2795905" y="7682230"/>
+            <a:ext cx="406400" cy="336550"/>
+          </a:xfrm>
+          <a:prstGeom prst="rect">
+            <a:avLst/>
+          </a:prstGeom>
+          <a:solidFill>
+            <a:schemeClr val="bg1">
+              <a:lumMod val="95000"/>
+            </a:schemeClr>
+          </a:solidFill>
+        </p:spPr>
+        <p:txBody>
+          <a:bodyPr wrap="square" rtlCol="0" anchor="ctr" anchorCtr="0">
+            <a:noAutofit/>
+          </a:bodyPr>
+          <a:p>
+            <a:pPr indent="0" algn="ctr" fontAlgn="auto">
+              <a:lnSpc>
+                <a:spcPct val="120000"/>
+              </a:lnSpc>
+            </a:pPr>
+            <a:r>
+              <a:rPr lang="en-US" altLang="zh-CN" sz="400">
+                <a:latin typeface="Arial" panose="020B0604020202020204" pitchFamily="34" charset="0"/>
+                <a:cs typeface="Arial" panose="020B0604020202020204" pitchFamily="34" charset="0"/>
+                <a:sym typeface="+mn-ea"/>
+              </a:rPr>
+              <a:t>Clean CDS</a:t>
+            </a:r>
+            <a:r>
+              <a:rPr lang="en-US" altLang="zh-CN" sz="400">
+                <a:solidFill>
+                  <a:schemeClr val="tx1"/>
+                </a:solidFill>
+                <a:latin typeface="Arial" panose="020B0604020202020204" pitchFamily="34" charset="0"/>
+                <a:cs typeface="Arial" panose="020B0604020202020204" pitchFamily="34" charset="0"/>
+                <a:sym typeface="+mn-ea"/>
+              </a:rPr>
+              <a:t> + </a:t>
+            </a:r>
+            <a:r>
+              <a:rPr lang="en-US" altLang="zh-CN" sz="400">
+                <a:solidFill>
+                  <a:schemeClr val="tx1"/>
+                </a:solidFill>
+                <a:latin typeface="Arial" panose="020B0604020202020204" pitchFamily="34" charset="0"/>
+                <a:cs typeface="Arial" panose="020B0604020202020204" pitchFamily="34" charset="0"/>
+                <a:sym typeface="+mn-ea"/>
+              </a:rPr>
+              <a:t>Translate</a:t>
+            </a:r>
+            <a:endParaRPr lang="en-US" altLang="zh-CN" sz="400">
               <a:solidFill>
-                <a:schemeClr val="bg1">
-                  <a:lumMod val="95000"/>
-                </a:schemeClr>
+                <a:schemeClr val="tx1"/>
               </a:solidFill>
-            </p:spPr>
-            <p:txBody>
-              <a:bodyPr wrap="square" rtlCol="0" anchor="ctr" anchorCtr="0">
-                <a:noAutofit/>
-              </a:bodyPr>
-              <a:p>
-                <a:pPr indent="0" algn="ctr" fontAlgn="auto">
-                  <a:lnSpc>
-                    <a:spcPct val="120000"/>
-                  </a:lnSpc>
-                </a:pPr>
-                <a:r>
-                  <a:rPr lang="en-US" altLang="zh-CN" sz="400">
-                    <a:solidFill>
-                      <a:schemeClr val="tx1"/>
-                    </a:solidFill>
-                    <a:latin typeface="Arial" panose="020B0604020202020204" pitchFamily="34" charset="0"/>
-                    <a:cs typeface="Arial" panose="020B0604020202020204" pitchFamily="34" charset="0"/>
-                    <a:sym typeface="+mn-ea"/>
-                  </a:rPr>
-                  <a:t>Sequence Align</a:t>
-                </a:r>
-                <a:endParaRPr lang="en-US" altLang="zh-CN" sz="400">
-                  <a:solidFill>
-                    <a:schemeClr val="tx1"/>
-                  </a:solidFill>
-                  <a:latin typeface="Arial" panose="020B0604020202020204" pitchFamily="34" charset="0"/>
-                  <a:cs typeface="Arial" panose="020B0604020202020204" pitchFamily="34" charset="0"/>
-                  <a:sym typeface="+mn-ea"/>
-                </a:endParaRPr>
-              </a:p>
-            </p:txBody>
-          </p:sp>
-          <p:sp>
-            <p:nvSpPr>
-              <p:cNvPr id="199" name="文本框 198"/>
-              <p:cNvSpPr txBox="1"/>
-              <p:nvPr/>
-            </p:nvSpPr>
-            <p:spPr>
-              <a:xfrm>
-                <a:off x="6189" y="10001"/>
-                <a:ext cx="1035" cy="530"/>
-              </a:xfrm>
-              <a:prstGeom prst="rect">
-                <a:avLst/>
-              </a:prstGeom>
+              <a:latin typeface="Arial" panose="020B0604020202020204" pitchFamily="34" charset="0"/>
+              <a:cs typeface="Arial" panose="020B0604020202020204" pitchFamily="34" charset="0"/>
+              <a:sym typeface="+mn-ea"/>
+            </a:endParaRPr>
+          </a:p>
+        </p:txBody>
+      </p:sp>
+      <p:sp>
+        <p:nvSpPr>
+          <p:cNvPr id="197" name="文本框 196"/>
+          <p:cNvSpPr txBox="1"/>
+          <p:nvPr/>
+        </p:nvSpPr>
+        <p:spPr>
+          <a:xfrm>
+            <a:off x="3166745" y="8447405"/>
+            <a:ext cx="657225" cy="180000"/>
+          </a:xfrm>
+          <a:prstGeom prst="rect">
+            <a:avLst/>
+          </a:prstGeom>
+          <a:solidFill>
+            <a:schemeClr val="bg1">
+              <a:lumMod val="95000"/>
+            </a:schemeClr>
+          </a:solidFill>
+        </p:spPr>
+        <p:txBody>
+          <a:bodyPr wrap="square" rtlCol="0" anchor="ctr" anchorCtr="0">
+            <a:noAutofit/>
+          </a:bodyPr>
+          <a:p>
+            <a:pPr indent="0" algn="ctr" fontAlgn="auto">
+              <a:lnSpc>
+                <a:spcPct val="120000"/>
+              </a:lnSpc>
+            </a:pPr>
+            <a:r>
+              <a:rPr lang="en-US" altLang="zh-CN" sz="400">
+                <a:solidFill>
+                  <a:schemeClr val="tx1"/>
+                </a:solidFill>
+                <a:latin typeface="Arial" panose="020B0604020202020204" pitchFamily="34" charset="0"/>
+                <a:cs typeface="Arial" panose="020B0604020202020204" pitchFamily="34" charset="0"/>
+                <a:sym typeface="+mn-ea"/>
+              </a:rPr>
+              <a:t>Sequence Align</a:t>
+            </a:r>
+            <a:endParaRPr lang="en-US" altLang="zh-CN" sz="400">
               <a:solidFill>
-                <a:schemeClr val="bg1">
-                  <a:lumMod val="95000"/>
-                </a:schemeClr>
+                <a:schemeClr val="tx1"/>
               </a:solidFill>
-            </p:spPr>
-            <p:txBody>
-              <a:bodyPr wrap="square" rtlCol="0" anchor="ctr" anchorCtr="0">
-                <a:noAutofit/>
-              </a:bodyPr>
-              <a:p>
-                <a:pPr indent="0" algn="ctr" fontAlgn="auto">
-                  <a:lnSpc>
-                    <a:spcPct val="120000"/>
-                  </a:lnSpc>
-                </a:pPr>
-                <a:r>
-                  <a:rPr lang="en-US" altLang="zh-CN" sz="400">
-                    <a:latin typeface="Arial" panose="020B0604020202020204" pitchFamily="34" charset="0"/>
-                    <a:cs typeface="Arial" panose="020B0604020202020204" pitchFamily="34" charset="0"/>
-                    <a:sym typeface="+mn-ea"/>
-                  </a:rPr>
-                  <a:t>Trim protein alignments</a:t>
-                </a:r>
-                <a:endParaRPr lang="en-US" altLang="zh-CN" sz="400">
-                  <a:solidFill>
-                    <a:schemeClr val="tx1"/>
-                  </a:solidFill>
-                  <a:latin typeface="Arial" panose="020B0604020202020204" pitchFamily="34" charset="0"/>
-                  <a:cs typeface="Arial" panose="020B0604020202020204" pitchFamily="34" charset="0"/>
-                  <a:sym typeface="+mn-ea"/>
-                </a:endParaRPr>
-              </a:p>
-            </p:txBody>
-          </p:sp>
-          <p:sp>
-            <p:nvSpPr>
-              <p:cNvPr id="200" name="文本框 199"/>
-              <p:cNvSpPr txBox="1"/>
-              <p:nvPr/>
-            </p:nvSpPr>
-            <p:spPr>
-              <a:xfrm>
-                <a:off x="6190" y="10727"/>
-                <a:ext cx="1035" cy="530"/>
-              </a:xfrm>
-              <a:prstGeom prst="rect">
-                <a:avLst/>
-              </a:prstGeom>
+              <a:latin typeface="Arial" panose="020B0604020202020204" pitchFamily="34" charset="0"/>
+              <a:cs typeface="Arial" panose="020B0604020202020204" pitchFamily="34" charset="0"/>
+              <a:sym typeface="+mn-ea"/>
+            </a:endParaRPr>
+          </a:p>
+        </p:txBody>
+      </p:sp>
+      <p:sp>
+        <p:nvSpPr>
+          <p:cNvPr id="198" name="文本框 197"/>
+          <p:cNvSpPr txBox="1"/>
+          <p:nvPr/>
+        </p:nvSpPr>
+        <p:spPr>
+          <a:xfrm>
+            <a:off x="3148330" y="8150860"/>
+            <a:ext cx="657225" cy="180000"/>
+          </a:xfrm>
+          <a:prstGeom prst="rect">
+            <a:avLst/>
+          </a:prstGeom>
+          <a:solidFill>
+            <a:schemeClr val="bg1">
+              <a:lumMod val="95000"/>
+            </a:schemeClr>
+          </a:solidFill>
+        </p:spPr>
+        <p:txBody>
+          <a:bodyPr wrap="square" rtlCol="0" anchor="ctr" anchorCtr="0">
+            <a:noAutofit/>
+          </a:bodyPr>
+          <a:p>
+            <a:pPr indent="0" algn="ctr" fontAlgn="auto">
+              <a:lnSpc>
+                <a:spcPct val="120000"/>
+              </a:lnSpc>
+            </a:pPr>
+            <a:r>
+              <a:rPr lang="en-US" altLang="zh-CN" sz="400">
+                <a:solidFill>
+                  <a:schemeClr val="tx1"/>
+                </a:solidFill>
+                <a:latin typeface="Arial" panose="020B0604020202020204" pitchFamily="34" charset="0"/>
+                <a:cs typeface="Arial" panose="020B0604020202020204" pitchFamily="34" charset="0"/>
+                <a:sym typeface="+mn-ea"/>
+              </a:rPr>
+              <a:t>Sequence Align</a:t>
+            </a:r>
+            <a:endParaRPr lang="en-US" altLang="zh-CN" sz="400">
               <a:solidFill>
-                <a:schemeClr val="bg1">
-                  <a:lumMod val="95000"/>
-                </a:schemeClr>
+                <a:schemeClr val="tx1"/>
               </a:solidFill>
-            </p:spPr>
-            <p:txBody>
-              <a:bodyPr wrap="square" rtlCol="0" anchor="ctr" anchorCtr="0">
-                <a:noAutofit/>
-              </a:bodyPr>
-              <a:p>
-                <a:pPr indent="0" algn="ctr" fontAlgn="auto">
-                  <a:lnSpc>
-                    <a:spcPct val="120000"/>
-                  </a:lnSpc>
-                </a:pPr>
-                <a:r>
-                  <a:rPr lang="en-US" altLang="zh-CN" sz="400">
-                    <a:solidFill>
-                      <a:schemeClr val="tx1"/>
-                    </a:solidFill>
-                    <a:latin typeface="Arial" panose="020B0604020202020204" pitchFamily="34" charset="0"/>
-                    <a:cs typeface="Arial" panose="020B0604020202020204" pitchFamily="34" charset="0"/>
-                    <a:sym typeface="+mn-ea"/>
-                  </a:rPr>
-                  <a:t>Trim n</a:t>
-                </a:r>
-                <a:r>
-                  <a:rPr lang="en-US" altLang="zh-CN" sz="400">
-                    <a:latin typeface="Ubuntu Mono" panose="020B0509030602030204" charset="0"/>
-                    <a:cs typeface="Ubuntu Mono" panose="020B0509030602030204" charset="0"/>
-                    <a:sym typeface="+mn-ea"/>
-                  </a:rPr>
-                  <a:t>ucleotide </a:t>
-                </a:r>
-                <a:r>
-                  <a:rPr lang="en-US" altLang="zh-CN" sz="400">
-                    <a:latin typeface="Arial" panose="020B0604020202020204" pitchFamily="34" charset="0"/>
-                    <a:cs typeface="Arial" panose="020B0604020202020204" pitchFamily="34" charset="0"/>
-                    <a:sym typeface="+mn-ea"/>
-                  </a:rPr>
-                  <a:t>alignments</a:t>
-                </a:r>
-                <a:endParaRPr lang="en-US" altLang="zh-CN" sz="400">
-                  <a:solidFill>
-                    <a:schemeClr val="tx1"/>
-                  </a:solidFill>
-                  <a:latin typeface="Arial" panose="020B0604020202020204" pitchFamily="34" charset="0"/>
-                  <a:cs typeface="Arial" panose="020B0604020202020204" pitchFamily="34" charset="0"/>
-                  <a:sym typeface="+mn-ea"/>
-                </a:endParaRPr>
-              </a:p>
-            </p:txBody>
-          </p:sp>
-          <p:sp>
-            <p:nvSpPr>
-              <p:cNvPr id="201" name="文本框 200"/>
-              <p:cNvSpPr txBox="1"/>
-              <p:nvPr/>
-            </p:nvSpPr>
-            <p:spPr>
-              <a:xfrm>
-                <a:off x="4759" y="9263"/>
-                <a:ext cx="673" cy="530"/>
-              </a:xfrm>
-              <a:prstGeom prst="rect">
-                <a:avLst/>
-              </a:prstGeom>
+              <a:latin typeface="Arial" panose="020B0604020202020204" pitchFamily="34" charset="0"/>
+              <a:cs typeface="Arial" panose="020B0604020202020204" pitchFamily="34" charset="0"/>
+              <a:sym typeface="+mn-ea"/>
+            </a:endParaRPr>
+          </a:p>
+        </p:txBody>
+      </p:sp>
+      <p:sp>
+        <p:nvSpPr>
+          <p:cNvPr id="199" name="文本框 198"/>
+          <p:cNvSpPr txBox="1"/>
+          <p:nvPr/>
+        </p:nvSpPr>
+        <p:spPr>
+          <a:xfrm>
+            <a:off x="4270375" y="8150860"/>
+            <a:ext cx="657225" cy="180000"/>
+          </a:xfrm>
+          <a:prstGeom prst="rect">
+            <a:avLst/>
+          </a:prstGeom>
+          <a:solidFill>
+            <a:schemeClr val="bg1">
+              <a:lumMod val="95000"/>
+            </a:schemeClr>
+          </a:solidFill>
+        </p:spPr>
+        <p:txBody>
+          <a:bodyPr wrap="square" rtlCol="0" anchor="ctr" anchorCtr="0">
+            <a:noAutofit/>
+          </a:bodyPr>
+          <a:p>
+            <a:pPr indent="0" algn="ctr" fontAlgn="auto">
+              <a:lnSpc>
+                <a:spcPct val="120000"/>
+              </a:lnSpc>
+            </a:pPr>
+            <a:r>
+              <a:rPr lang="en-US" altLang="zh-CN" sz="400">
+                <a:latin typeface="Arial" panose="020B0604020202020204" pitchFamily="34" charset="0"/>
+                <a:cs typeface="Arial" panose="020B0604020202020204" pitchFamily="34" charset="0"/>
+                <a:sym typeface="+mn-ea"/>
+              </a:rPr>
+              <a:t>Trim protein alignments</a:t>
+            </a:r>
+            <a:endParaRPr lang="en-US" altLang="zh-CN" sz="400">
               <a:solidFill>
-                <a:schemeClr val="bg1">
-                  <a:lumMod val="95000"/>
-                </a:schemeClr>
+                <a:schemeClr val="tx1"/>
               </a:solidFill>
-            </p:spPr>
-            <p:txBody>
-              <a:bodyPr wrap="square" rtlCol="0" anchor="ctr" anchorCtr="0">
-                <a:noAutofit/>
-              </a:bodyPr>
-              <a:p>
-                <a:pPr indent="0" algn="ctr" fontAlgn="auto">
-                  <a:lnSpc>
-                    <a:spcPct val="120000"/>
-                  </a:lnSpc>
-                </a:pPr>
-                <a:r>
-                  <a:rPr lang="en-US" altLang="zh-CN" sz="400">
-                    <a:solidFill>
-                      <a:schemeClr val="tx1"/>
-                    </a:solidFill>
-                    <a:latin typeface="Arial" panose="020B0604020202020204" pitchFamily="34" charset="0"/>
-                    <a:cs typeface="Arial" panose="020B0604020202020204" pitchFamily="34" charset="0"/>
-                    <a:sym typeface="+mn-ea"/>
-                  </a:rPr>
-                  <a:t>Sequence Align</a:t>
-                </a:r>
-                <a:endParaRPr lang="en-US" altLang="zh-CN" sz="400">
-                  <a:solidFill>
-                    <a:schemeClr val="tx1"/>
-                  </a:solidFill>
-                  <a:latin typeface="Arial" panose="020B0604020202020204" pitchFamily="34" charset="0"/>
-                  <a:cs typeface="Arial" panose="020B0604020202020204" pitchFamily="34" charset="0"/>
-                  <a:sym typeface="+mn-ea"/>
-                </a:endParaRPr>
-              </a:p>
-            </p:txBody>
-          </p:sp>
-          <p:sp>
-            <p:nvSpPr>
-              <p:cNvPr id="202" name="文本框 201"/>
-              <p:cNvSpPr txBox="1"/>
-              <p:nvPr/>
-            </p:nvSpPr>
-            <p:spPr>
-              <a:xfrm>
-                <a:off x="5692" y="9263"/>
-                <a:ext cx="610" cy="530"/>
-              </a:xfrm>
-              <a:prstGeom prst="rect">
-                <a:avLst/>
-              </a:prstGeom>
+              <a:latin typeface="Arial" panose="020B0604020202020204" pitchFamily="34" charset="0"/>
+              <a:cs typeface="Arial" panose="020B0604020202020204" pitchFamily="34" charset="0"/>
+              <a:sym typeface="+mn-ea"/>
+            </a:endParaRPr>
+          </a:p>
+        </p:txBody>
+      </p:sp>
+      <p:sp>
+        <p:nvSpPr>
+          <p:cNvPr id="200" name="文本框 199"/>
+          <p:cNvSpPr txBox="1"/>
+          <p:nvPr/>
+        </p:nvSpPr>
+        <p:spPr>
+          <a:xfrm>
+            <a:off x="4270375" y="8448040"/>
+            <a:ext cx="657225" cy="180000"/>
+          </a:xfrm>
+          <a:prstGeom prst="rect">
+            <a:avLst/>
+          </a:prstGeom>
+          <a:solidFill>
+            <a:schemeClr val="bg1">
+              <a:lumMod val="95000"/>
+            </a:schemeClr>
+          </a:solidFill>
+        </p:spPr>
+        <p:txBody>
+          <a:bodyPr wrap="square" rtlCol="0" anchor="ctr" anchorCtr="0">
+            <a:noAutofit/>
+          </a:bodyPr>
+          <a:p>
+            <a:pPr indent="0" algn="ctr" fontAlgn="auto">
+              <a:lnSpc>
+                <a:spcPct val="120000"/>
+              </a:lnSpc>
+            </a:pPr>
+            <a:r>
+              <a:rPr lang="en-US" altLang="zh-CN" sz="400">
+                <a:solidFill>
+                  <a:schemeClr val="tx1"/>
+                </a:solidFill>
+                <a:latin typeface="Arial" panose="020B0604020202020204" pitchFamily="34" charset="0"/>
+                <a:cs typeface="Arial" panose="020B0604020202020204" pitchFamily="34" charset="0"/>
+                <a:sym typeface="+mn-ea"/>
+              </a:rPr>
+              <a:t>Trim n</a:t>
+            </a:r>
+            <a:r>
+              <a:rPr lang="en-US" altLang="zh-CN" sz="400">
+                <a:latin typeface="Ubuntu Mono" panose="020B0509030602030204" charset="0"/>
+                <a:cs typeface="Ubuntu Mono" panose="020B0509030602030204" charset="0"/>
+                <a:sym typeface="+mn-ea"/>
+              </a:rPr>
+              <a:t>ucleotide </a:t>
+            </a:r>
+            <a:r>
+              <a:rPr lang="en-US" altLang="zh-CN" sz="400">
+                <a:latin typeface="Arial" panose="020B0604020202020204" pitchFamily="34" charset="0"/>
+                <a:cs typeface="Arial" panose="020B0604020202020204" pitchFamily="34" charset="0"/>
+                <a:sym typeface="+mn-ea"/>
+              </a:rPr>
+              <a:t>alignments</a:t>
+            </a:r>
+            <a:endParaRPr lang="en-US" altLang="zh-CN" sz="400">
               <a:solidFill>
-                <a:schemeClr val="bg1">
-                  <a:lumMod val="95000"/>
-                </a:schemeClr>
+                <a:schemeClr val="tx1"/>
               </a:solidFill>
-            </p:spPr>
-            <p:txBody>
-              <a:bodyPr wrap="square" rtlCol="0" anchor="ctr" anchorCtr="0">
-                <a:noAutofit/>
-              </a:bodyPr>
-              <a:p>
-                <a:pPr indent="0" algn="ctr" fontAlgn="auto">
-                  <a:lnSpc>
-                    <a:spcPct val="120000"/>
-                  </a:lnSpc>
-                </a:pPr>
-                <a:r>
-                  <a:rPr lang="en-US" altLang="zh-CN" sz="400">
-                    <a:solidFill>
-                      <a:schemeClr val="tx1"/>
-                    </a:solidFill>
-                    <a:latin typeface="Arial" panose="020B0604020202020204" pitchFamily="34" charset="0"/>
-                    <a:cs typeface="Arial" panose="020B0604020202020204" pitchFamily="34" charset="0"/>
-                    <a:sym typeface="+mn-ea"/>
-                  </a:rPr>
-                  <a:t>Back-translate</a:t>
-                </a:r>
-                <a:endParaRPr lang="en-US" altLang="zh-CN" sz="400">
-                  <a:solidFill>
-                    <a:schemeClr val="tx1"/>
-                  </a:solidFill>
-                  <a:latin typeface="Arial" panose="020B0604020202020204" pitchFamily="34" charset="0"/>
-                  <a:cs typeface="Arial" panose="020B0604020202020204" pitchFamily="34" charset="0"/>
-                  <a:sym typeface="+mn-ea"/>
-                </a:endParaRPr>
-              </a:p>
-            </p:txBody>
-          </p:sp>
-          <p:sp>
-            <p:nvSpPr>
-              <p:cNvPr id="203" name="文本框 202"/>
-              <p:cNvSpPr txBox="1"/>
-              <p:nvPr/>
-            </p:nvSpPr>
-            <p:spPr>
-              <a:xfrm>
-                <a:off x="6551" y="9263"/>
-                <a:ext cx="673" cy="530"/>
-              </a:xfrm>
-              <a:prstGeom prst="rect">
-                <a:avLst/>
-              </a:prstGeom>
+              <a:latin typeface="Arial" panose="020B0604020202020204" pitchFamily="34" charset="0"/>
+              <a:cs typeface="Arial" panose="020B0604020202020204" pitchFamily="34" charset="0"/>
+              <a:sym typeface="+mn-ea"/>
+            </a:endParaRPr>
+          </a:p>
+        </p:txBody>
+      </p:sp>
+      <p:sp>
+        <p:nvSpPr>
+          <p:cNvPr id="201" name="文本框 200"/>
+          <p:cNvSpPr txBox="1"/>
+          <p:nvPr/>
+        </p:nvSpPr>
+        <p:spPr>
+          <a:xfrm>
+            <a:off x="3361690" y="7682230"/>
+            <a:ext cx="427355" cy="336550"/>
+          </a:xfrm>
+          <a:prstGeom prst="rect">
+            <a:avLst/>
+          </a:prstGeom>
+          <a:solidFill>
+            <a:schemeClr val="bg1">
+              <a:lumMod val="95000"/>
+            </a:schemeClr>
+          </a:solidFill>
+        </p:spPr>
+        <p:txBody>
+          <a:bodyPr wrap="square" rtlCol="0" anchor="ctr" anchorCtr="0">
+            <a:noAutofit/>
+          </a:bodyPr>
+          <a:p>
+            <a:pPr indent="0" algn="ctr" fontAlgn="auto">
+              <a:lnSpc>
+                <a:spcPct val="120000"/>
+              </a:lnSpc>
+            </a:pPr>
+            <a:r>
+              <a:rPr lang="en-US" altLang="zh-CN" sz="400">
+                <a:solidFill>
+                  <a:schemeClr val="tx1"/>
+                </a:solidFill>
+                <a:latin typeface="Arial" panose="020B0604020202020204" pitchFamily="34" charset="0"/>
+                <a:cs typeface="Arial" panose="020B0604020202020204" pitchFamily="34" charset="0"/>
+                <a:sym typeface="+mn-ea"/>
+              </a:rPr>
+              <a:t>Sequence Align</a:t>
+            </a:r>
+            <a:endParaRPr lang="en-US" altLang="zh-CN" sz="400">
               <a:solidFill>
-                <a:schemeClr val="bg1">
-                  <a:lumMod val="95000"/>
-                </a:schemeClr>
+                <a:schemeClr val="tx1"/>
               </a:solidFill>
-            </p:spPr>
-            <p:txBody>
-              <a:bodyPr wrap="square" rtlCol="0" anchor="ctr" anchorCtr="0">
-                <a:noAutofit/>
-              </a:bodyPr>
-              <a:p>
-                <a:pPr indent="0" algn="ctr" fontAlgn="auto">
-                  <a:lnSpc>
-                    <a:spcPct val="120000"/>
-                  </a:lnSpc>
-                </a:pPr>
-                <a:r>
-                  <a:rPr lang="en-US" altLang="zh-CN" sz="400">
-                    <a:latin typeface="Arial" panose="020B0604020202020204" pitchFamily="34" charset="0"/>
-                    <a:cs typeface="Arial" panose="020B0604020202020204" pitchFamily="34" charset="0"/>
-                    <a:sym typeface="+mn-ea"/>
-                  </a:rPr>
-                  <a:t>Trim protein + codon alignments</a:t>
-                </a:r>
-                <a:endParaRPr lang="en-US" altLang="zh-CN" sz="400">
-                  <a:latin typeface="Arial" panose="020B0604020202020204" pitchFamily="34" charset="0"/>
-                  <a:cs typeface="Arial" panose="020B0604020202020204" pitchFamily="34" charset="0"/>
-                  <a:sym typeface="+mn-ea"/>
-                </a:endParaRPr>
-              </a:p>
-            </p:txBody>
-          </p:sp>
-          <p:sp>
-            <p:nvSpPr>
-              <p:cNvPr id="204" name="右箭头 203"/>
-              <p:cNvSpPr/>
-              <p:nvPr/>
-            </p:nvSpPr>
-            <p:spPr>
-              <a:xfrm>
-                <a:off x="3598" y="9481"/>
-                <a:ext cx="225" cy="119"/>
-              </a:xfrm>
-              <a:prstGeom prst="rightArrow">
-                <a:avLst/>
-              </a:prstGeom>
+              <a:latin typeface="Arial" panose="020B0604020202020204" pitchFamily="34" charset="0"/>
+              <a:cs typeface="Arial" panose="020B0604020202020204" pitchFamily="34" charset="0"/>
+              <a:sym typeface="+mn-ea"/>
+            </a:endParaRPr>
+          </a:p>
+        </p:txBody>
+      </p:sp>
+      <p:sp>
+        <p:nvSpPr>
+          <p:cNvPr id="202" name="文本框 201"/>
+          <p:cNvSpPr txBox="1"/>
+          <p:nvPr/>
+        </p:nvSpPr>
+        <p:spPr>
+          <a:xfrm>
+            <a:off x="3954145" y="7682230"/>
+            <a:ext cx="387350" cy="336550"/>
+          </a:xfrm>
+          <a:prstGeom prst="rect">
+            <a:avLst/>
+          </a:prstGeom>
+          <a:solidFill>
+            <a:schemeClr val="bg1">
+              <a:lumMod val="95000"/>
+            </a:schemeClr>
+          </a:solidFill>
+        </p:spPr>
+        <p:txBody>
+          <a:bodyPr wrap="square" rtlCol="0" anchor="ctr" anchorCtr="0">
+            <a:noAutofit/>
+          </a:bodyPr>
+          <a:p>
+            <a:pPr indent="0" algn="ctr" fontAlgn="auto">
+              <a:lnSpc>
+                <a:spcPct val="120000"/>
+              </a:lnSpc>
+            </a:pPr>
+            <a:r>
+              <a:rPr lang="en-US" altLang="zh-CN" sz="400">
+                <a:solidFill>
+                  <a:schemeClr val="tx1"/>
+                </a:solidFill>
+                <a:latin typeface="Arial" panose="020B0604020202020204" pitchFamily="34" charset="0"/>
+                <a:cs typeface="Arial" panose="020B0604020202020204" pitchFamily="34" charset="0"/>
+                <a:sym typeface="+mn-ea"/>
+              </a:rPr>
+              <a:t>Back-translate</a:t>
+            </a:r>
+            <a:endParaRPr lang="en-US" altLang="zh-CN" sz="400">
               <a:solidFill>
-                <a:schemeClr val="bg1">
-                  <a:lumMod val="75000"/>
-                </a:schemeClr>
+                <a:schemeClr val="tx1"/>
               </a:solidFill>
-              <a:ln>
-                <a:noFill/>
-              </a:ln>
-            </p:spPr>
-            <p:style>
-              <a:lnRef idx="2">
-                <a:schemeClr val="accent1">
-                  <a:lumMod val="75000"/>
-                </a:schemeClr>
-              </a:lnRef>
-              <a:fillRef idx="1">
-                <a:schemeClr val="accent1"/>
-              </a:fillRef>
-              <a:effectRef idx="0">
-                <a:srgbClr val="FFFFFF"/>
-              </a:effectRef>
-              <a:fontRef idx="minor">
-                <a:schemeClr val="lt1"/>
-              </a:fontRef>
-            </p:style>
-            <p:txBody>
-              <a:bodyPr rtlCol="0" anchor="ctr"/>
-              <a:p>
-                <a:pPr algn="ctr"/>
-                <a:endParaRPr lang="zh-CN" altLang="en-US"/>
-              </a:p>
-            </p:txBody>
-          </p:sp>
-          <p:sp>
-            <p:nvSpPr>
-              <p:cNvPr id="205" name="右箭头 204"/>
-              <p:cNvSpPr/>
-              <p:nvPr/>
-            </p:nvSpPr>
-            <p:spPr>
-              <a:xfrm>
-                <a:off x="4525" y="9481"/>
-                <a:ext cx="225" cy="119"/>
-              </a:xfrm>
-              <a:prstGeom prst="rightArrow">
-                <a:avLst/>
-              </a:prstGeom>
-              <a:solidFill>
-                <a:schemeClr val="bg1">
-                  <a:lumMod val="75000"/>
-                </a:schemeClr>
-              </a:solidFill>
-              <a:ln>
-                <a:noFill/>
-              </a:ln>
-            </p:spPr>
-            <p:style>
-              <a:lnRef idx="2">
-                <a:schemeClr val="accent1">
-                  <a:lumMod val="75000"/>
-                </a:schemeClr>
-              </a:lnRef>
-              <a:fillRef idx="1">
-                <a:schemeClr val="accent1"/>
-              </a:fillRef>
-              <a:effectRef idx="0">
-                <a:srgbClr val="FFFFFF"/>
-              </a:effectRef>
-              <a:fontRef idx="minor">
-                <a:schemeClr val="lt1"/>
-              </a:fontRef>
-            </p:style>
-            <p:txBody>
-              <a:bodyPr rtlCol="0" anchor="ctr"/>
-              <a:p>
-                <a:pPr algn="ctr"/>
-                <a:endParaRPr lang="zh-CN" altLang="en-US"/>
-              </a:p>
-            </p:txBody>
-          </p:sp>
-          <p:sp>
-            <p:nvSpPr>
-              <p:cNvPr id="206" name="右箭头 205"/>
-              <p:cNvSpPr/>
-              <p:nvPr/>
-            </p:nvSpPr>
-            <p:spPr>
-              <a:xfrm>
-                <a:off x="5444" y="9481"/>
-                <a:ext cx="225" cy="119"/>
-              </a:xfrm>
-              <a:prstGeom prst="rightArrow">
-                <a:avLst/>
-              </a:prstGeom>
-              <a:solidFill>
-                <a:schemeClr val="bg1">
-                  <a:lumMod val="75000"/>
-                </a:schemeClr>
-              </a:solidFill>
-              <a:ln>
-                <a:noFill/>
-              </a:ln>
-            </p:spPr>
-            <p:style>
-              <a:lnRef idx="2">
-                <a:schemeClr val="accent1">
-                  <a:lumMod val="75000"/>
-                </a:schemeClr>
-              </a:lnRef>
-              <a:fillRef idx="1">
-                <a:schemeClr val="accent1"/>
-              </a:fillRef>
-              <a:effectRef idx="0">
-                <a:srgbClr val="FFFFFF"/>
-              </a:effectRef>
-              <a:fontRef idx="minor">
-                <a:schemeClr val="lt1"/>
-              </a:fontRef>
-            </p:style>
-            <p:txBody>
-              <a:bodyPr rtlCol="0" anchor="ctr"/>
-              <a:p>
-                <a:pPr algn="ctr"/>
-                <a:endParaRPr lang="zh-CN" altLang="en-US"/>
-              </a:p>
-            </p:txBody>
-          </p:sp>
-          <p:sp>
-            <p:nvSpPr>
-              <p:cNvPr id="207" name="右箭头 206"/>
-              <p:cNvSpPr/>
-              <p:nvPr/>
-            </p:nvSpPr>
-            <p:spPr>
-              <a:xfrm>
-                <a:off x="6326" y="9481"/>
-                <a:ext cx="225" cy="119"/>
-              </a:xfrm>
-              <a:prstGeom prst="rightArrow">
-                <a:avLst/>
-              </a:prstGeom>
-              <a:solidFill>
-                <a:schemeClr val="bg1">
-                  <a:lumMod val="75000"/>
-                </a:schemeClr>
-              </a:solidFill>
-              <a:ln>
-                <a:noFill/>
-              </a:ln>
-            </p:spPr>
-            <p:style>
-              <a:lnRef idx="2">
-                <a:schemeClr val="accent1">
-                  <a:lumMod val="75000"/>
-                </a:schemeClr>
-              </a:lnRef>
-              <a:fillRef idx="1">
-                <a:schemeClr val="accent1"/>
-              </a:fillRef>
-              <a:effectRef idx="0">
-                <a:srgbClr val="FFFFFF"/>
-              </a:effectRef>
-              <a:fontRef idx="minor">
-                <a:schemeClr val="lt1"/>
-              </a:fontRef>
-            </p:style>
-            <p:txBody>
-              <a:bodyPr rtlCol="0" anchor="ctr"/>
-              <a:p>
-                <a:pPr algn="ctr"/>
-                <a:endParaRPr lang="zh-CN" altLang="en-US"/>
-              </a:p>
-            </p:txBody>
-          </p:sp>
-          <p:sp>
-            <p:nvSpPr>
-              <p:cNvPr id="208" name="右箭头 207"/>
-              <p:cNvSpPr/>
-              <p:nvPr/>
-            </p:nvSpPr>
-            <p:spPr>
-              <a:xfrm>
-                <a:off x="3798" y="10207"/>
-                <a:ext cx="225" cy="119"/>
-              </a:xfrm>
-              <a:prstGeom prst="rightArrow">
-                <a:avLst/>
-              </a:prstGeom>
-              <a:solidFill>
-                <a:schemeClr val="bg1">
-                  <a:lumMod val="75000"/>
-                </a:schemeClr>
-              </a:solidFill>
-              <a:ln>
-                <a:noFill/>
-              </a:ln>
-            </p:spPr>
-            <p:style>
-              <a:lnRef idx="2">
-                <a:schemeClr val="accent1">
-                  <a:lumMod val="75000"/>
-                </a:schemeClr>
-              </a:lnRef>
-              <a:fillRef idx="1">
-                <a:schemeClr val="accent1"/>
-              </a:fillRef>
-              <a:effectRef idx="0">
-                <a:srgbClr val="FFFFFF"/>
-              </a:effectRef>
-              <a:fontRef idx="minor">
-                <a:schemeClr val="lt1"/>
-              </a:fontRef>
-            </p:style>
-            <p:txBody>
-              <a:bodyPr rtlCol="0" anchor="ctr"/>
-              <a:p>
-                <a:pPr algn="ctr"/>
-                <a:endParaRPr lang="zh-CN" altLang="en-US"/>
-              </a:p>
-            </p:txBody>
-          </p:sp>
-          <p:sp>
-            <p:nvSpPr>
-              <p:cNvPr id="209" name="右箭头 208"/>
-              <p:cNvSpPr/>
-              <p:nvPr/>
-            </p:nvSpPr>
-            <p:spPr>
-              <a:xfrm>
-                <a:off x="3798" y="10932"/>
-                <a:ext cx="225" cy="119"/>
-              </a:xfrm>
-              <a:prstGeom prst="rightArrow">
-                <a:avLst/>
-              </a:prstGeom>
-              <a:solidFill>
-                <a:schemeClr val="bg1">
-                  <a:lumMod val="75000"/>
-                </a:schemeClr>
-              </a:solidFill>
-              <a:ln>
-                <a:noFill/>
-              </a:ln>
-            </p:spPr>
-            <p:style>
-              <a:lnRef idx="2">
-                <a:schemeClr val="accent1">
-                  <a:lumMod val="75000"/>
-                </a:schemeClr>
-              </a:lnRef>
-              <a:fillRef idx="1">
-                <a:schemeClr val="accent1"/>
-              </a:fillRef>
-              <a:effectRef idx="0">
-                <a:srgbClr val="FFFFFF"/>
-              </a:effectRef>
-              <a:fontRef idx="minor">
-                <a:schemeClr val="lt1"/>
-              </a:fontRef>
-            </p:style>
-            <p:txBody>
-              <a:bodyPr rtlCol="0" anchor="ctr"/>
-              <a:p>
-                <a:pPr algn="ctr"/>
-                <a:endParaRPr lang="zh-CN" altLang="en-US"/>
-              </a:p>
-            </p:txBody>
-          </p:sp>
-          <p:sp>
-            <p:nvSpPr>
-              <p:cNvPr id="210" name="右箭头 209"/>
-              <p:cNvSpPr/>
-              <p:nvPr/>
-            </p:nvSpPr>
-            <p:spPr>
-              <a:xfrm>
-                <a:off x="5738" y="10207"/>
-                <a:ext cx="225" cy="119"/>
-              </a:xfrm>
-              <a:prstGeom prst="rightArrow">
-                <a:avLst/>
-              </a:prstGeom>
-              <a:solidFill>
-                <a:schemeClr val="bg1">
-                  <a:lumMod val="75000"/>
-                </a:schemeClr>
-              </a:solidFill>
-              <a:ln>
-                <a:noFill/>
-              </a:ln>
-            </p:spPr>
-            <p:style>
-              <a:lnRef idx="2">
-                <a:schemeClr val="accent1">
-                  <a:lumMod val="75000"/>
-                </a:schemeClr>
-              </a:lnRef>
-              <a:fillRef idx="1">
-                <a:schemeClr val="accent1"/>
-              </a:fillRef>
-              <a:effectRef idx="0">
-                <a:srgbClr val="FFFFFF"/>
-              </a:effectRef>
-              <a:fontRef idx="minor">
-                <a:schemeClr val="lt1"/>
-              </a:fontRef>
-            </p:style>
-            <p:txBody>
-              <a:bodyPr rtlCol="0" anchor="ctr"/>
-              <a:p>
-                <a:pPr algn="ctr"/>
-                <a:endParaRPr lang="zh-CN" altLang="en-US"/>
-              </a:p>
-            </p:txBody>
-          </p:sp>
-          <p:sp>
-            <p:nvSpPr>
-              <p:cNvPr id="211" name="右箭头 210"/>
-              <p:cNvSpPr/>
-              <p:nvPr/>
-            </p:nvSpPr>
-            <p:spPr>
-              <a:xfrm>
-                <a:off x="5738" y="10932"/>
-                <a:ext cx="225" cy="119"/>
-              </a:xfrm>
-              <a:prstGeom prst="rightArrow">
-                <a:avLst/>
-              </a:prstGeom>
-              <a:solidFill>
-                <a:schemeClr val="bg1">
-                  <a:lumMod val="75000"/>
-                </a:schemeClr>
-              </a:solidFill>
-              <a:ln>
-                <a:noFill/>
-              </a:ln>
-            </p:spPr>
-            <p:style>
-              <a:lnRef idx="2">
-                <a:schemeClr val="accent1">
-                  <a:lumMod val="75000"/>
-                </a:schemeClr>
-              </a:lnRef>
-              <a:fillRef idx="1">
-                <a:schemeClr val="accent1"/>
-              </a:fillRef>
-              <a:effectRef idx="0">
-                <a:srgbClr val="FFFFFF"/>
-              </a:effectRef>
-              <a:fontRef idx="minor">
-                <a:schemeClr val="lt1"/>
-              </a:fontRef>
-            </p:style>
-            <p:txBody>
-              <a:bodyPr rtlCol="0" anchor="ctr"/>
-              <a:p>
-                <a:pPr algn="ctr"/>
-                <a:endParaRPr lang="zh-CN" altLang="en-US"/>
-              </a:p>
-            </p:txBody>
-          </p:sp>
-        </p:grpSp>
-      </p:grpSp>
+              <a:latin typeface="Arial" panose="020B0604020202020204" pitchFamily="34" charset="0"/>
+              <a:cs typeface="Arial" panose="020B0604020202020204" pitchFamily="34" charset="0"/>
+              <a:sym typeface="+mn-ea"/>
+            </a:endParaRPr>
+          </a:p>
+        </p:txBody>
+      </p:sp>
+      <p:sp>
+        <p:nvSpPr>
+          <p:cNvPr id="203" name="文本框 202"/>
+          <p:cNvSpPr txBox="1"/>
+          <p:nvPr/>
+        </p:nvSpPr>
+        <p:spPr>
+          <a:xfrm>
+            <a:off x="4499610" y="7682230"/>
+            <a:ext cx="427355" cy="336550"/>
+          </a:xfrm>
+          <a:prstGeom prst="rect">
+            <a:avLst/>
+          </a:prstGeom>
+          <a:solidFill>
+            <a:schemeClr val="bg1">
+              <a:lumMod val="95000"/>
+            </a:schemeClr>
+          </a:solidFill>
+        </p:spPr>
+        <p:txBody>
+          <a:bodyPr wrap="square" rtlCol="0" anchor="ctr" anchorCtr="0">
+            <a:noAutofit/>
+          </a:bodyPr>
+          <a:p>
+            <a:pPr indent="0" algn="ctr" fontAlgn="auto">
+              <a:lnSpc>
+                <a:spcPct val="120000"/>
+              </a:lnSpc>
+            </a:pPr>
+            <a:r>
+              <a:rPr lang="en-US" altLang="zh-CN" sz="400">
+                <a:latin typeface="Arial" panose="020B0604020202020204" pitchFamily="34" charset="0"/>
+                <a:cs typeface="Arial" panose="020B0604020202020204" pitchFamily="34" charset="0"/>
+                <a:sym typeface="+mn-ea"/>
+              </a:rPr>
+              <a:t>Trim protein + codon alignments</a:t>
+            </a:r>
+            <a:endParaRPr lang="en-US" altLang="zh-CN" sz="400">
+              <a:latin typeface="Arial" panose="020B0604020202020204" pitchFamily="34" charset="0"/>
+              <a:cs typeface="Arial" panose="020B0604020202020204" pitchFamily="34" charset="0"/>
+              <a:sym typeface="+mn-ea"/>
+            </a:endParaRPr>
+          </a:p>
+        </p:txBody>
+      </p:sp>
+      <p:sp>
+        <p:nvSpPr>
+          <p:cNvPr id="204" name="右箭头 203"/>
+          <p:cNvSpPr/>
+          <p:nvPr/>
+        </p:nvSpPr>
+        <p:spPr>
+          <a:xfrm>
+            <a:off x="2624455" y="7820660"/>
+            <a:ext cx="142875" cy="75565"/>
+          </a:xfrm>
+          <a:prstGeom prst="rightArrow">
+            <a:avLst/>
+          </a:prstGeom>
+          <a:solidFill>
+            <a:schemeClr val="bg1">
+              <a:lumMod val="75000"/>
+            </a:schemeClr>
+          </a:solidFill>
+          <a:ln>
+            <a:noFill/>
+          </a:ln>
+        </p:spPr>
+        <p:style>
+          <a:lnRef idx="2">
+            <a:schemeClr val="accent1">
+              <a:lumMod val="75000"/>
+            </a:schemeClr>
+          </a:lnRef>
+          <a:fillRef idx="1">
+            <a:schemeClr val="accent1"/>
+          </a:fillRef>
+          <a:effectRef idx="0">
+            <a:srgbClr val="FFFFFF"/>
+          </a:effectRef>
+          <a:fontRef idx="minor">
+            <a:schemeClr val="lt1"/>
+          </a:fontRef>
+        </p:style>
+        <p:txBody>
+          <a:bodyPr rtlCol="0" anchor="ctr"/>
+          <a:p>
+            <a:pPr algn="ctr"/>
+            <a:endParaRPr lang="zh-CN" altLang="en-US"/>
+          </a:p>
+        </p:txBody>
+      </p:sp>
+      <p:sp>
+        <p:nvSpPr>
+          <p:cNvPr id="205" name="右箭头 204"/>
+          <p:cNvSpPr/>
+          <p:nvPr/>
+        </p:nvSpPr>
+        <p:spPr>
+          <a:xfrm>
+            <a:off x="3213100" y="7820660"/>
+            <a:ext cx="142875" cy="75565"/>
+          </a:xfrm>
+          <a:prstGeom prst="rightArrow">
+            <a:avLst/>
+          </a:prstGeom>
+          <a:solidFill>
+            <a:schemeClr val="bg1">
+              <a:lumMod val="75000"/>
+            </a:schemeClr>
+          </a:solidFill>
+          <a:ln>
+            <a:noFill/>
+          </a:ln>
+        </p:spPr>
+        <p:style>
+          <a:lnRef idx="2">
+            <a:schemeClr val="accent1">
+              <a:lumMod val="75000"/>
+            </a:schemeClr>
+          </a:lnRef>
+          <a:fillRef idx="1">
+            <a:schemeClr val="accent1"/>
+          </a:fillRef>
+          <a:effectRef idx="0">
+            <a:srgbClr val="FFFFFF"/>
+          </a:effectRef>
+          <a:fontRef idx="minor">
+            <a:schemeClr val="lt1"/>
+          </a:fontRef>
+        </p:style>
+        <p:txBody>
+          <a:bodyPr rtlCol="0" anchor="ctr"/>
+          <a:p>
+            <a:pPr algn="ctr"/>
+            <a:endParaRPr lang="zh-CN" altLang="en-US"/>
+          </a:p>
+        </p:txBody>
+      </p:sp>
+      <p:sp>
+        <p:nvSpPr>
+          <p:cNvPr id="206" name="右箭头 205"/>
+          <p:cNvSpPr/>
+          <p:nvPr/>
+        </p:nvSpPr>
+        <p:spPr>
+          <a:xfrm>
+            <a:off x="3796665" y="7820660"/>
+            <a:ext cx="142875" cy="75565"/>
+          </a:xfrm>
+          <a:prstGeom prst="rightArrow">
+            <a:avLst/>
+          </a:prstGeom>
+          <a:solidFill>
+            <a:schemeClr val="bg1">
+              <a:lumMod val="75000"/>
+            </a:schemeClr>
+          </a:solidFill>
+          <a:ln>
+            <a:noFill/>
+          </a:ln>
+        </p:spPr>
+        <p:style>
+          <a:lnRef idx="2">
+            <a:schemeClr val="accent1">
+              <a:lumMod val="75000"/>
+            </a:schemeClr>
+          </a:lnRef>
+          <a:fillRef idx="1">
+            <a:schemeClr val="accent1"/>
+          </a:fillRef>
+          <a:effectRef idx="0">
+            <a:srgbClr val="FFFFFF"/>
+          </a:effectRef>
+          <a:fontRef idx="minor">
+            <a:schemeClr val="lt1"/>
+          </a:fontRef>
+        </p:style>
+        <p:txBody>
+          <a:bodyPr rtlCol="0" anchor="ctr"/>
+          <a:p>
+            <a:pPr algn="ctr"/>
+            <a:endParaRPr lang="zh-CN" altLang="en-US"/>
+          </a:p>
+        </p:txBody>
+      </p:sp>
+      <p:sp>
+        <p:nvSpPr>
+          <p:cNvPr id="207" name="右箭头 206"/>
+          <p:cNvSpPr/>
+          <p:nvPr/>
+        </p:nvSpPr>
+        <p:spPr>
+          <a:xfrm>
+            <a:off x="4356735" y="7820660"/>
+            <a:ext cx="142875" cy="75565"/>
+          </a:xfrm>
+          <a:prstGeom prst="rightArrow">
+            <a:avLst/>
+          </a:prstGeom>
+          <a:solidFill>
+            <a:schemeClr val="bg1">
+              <a:lumMod val="75000"/>
+            </a:schemeClr>
+          </a:solidFill>
+          <a:ln>
+            <a:noFill/>
+          </a:ln>
+        </p:spPr>
+        <p:style>
+          <a:lnRef idx="2">
+            <a:schemeClr val="accent1">
+              <a:lumMod val="75000"/>
+            </a:schemeClr>
+          </a:lnRef>
+          <a:fillRef idx="1">
+            <a:schemeClr val="accent1"/>
+          </a:fillRef>
+          <a:effectRef idx="0">
+            <a:srgbClr val="FFFFFF"/>
+          </a:effectRef>
+          <a:fontRef idx="minor">
+            <a:schemeClr val="lt1"/>
+          </a:fontRef>
+        </p:style>
+        <p:txBody>
+          <a:bodyPr rtlCol="0" anchor="ctr"/>
+          <a:p>
+            <a:pPr algn="ctr"/>
+            <a:endParaRPr lang="zh-CN" altLang="en-US"/>
+          </a:p>
+        </p:txBody>
+      </p:sp>
+      <p:sp>
+        <p:nvSpPr>
+          <p:cNvPr id="208" name="右箭头 207"/>
+          <p:cNvSpPr/>
+          <p:nvPr/>
+        </p:nvSpPr>
+        <p:spPr>
+          <a:xfrm>
+            <a:off x="2795905" y="8202295"/>
+            <a:ext cx="142875" cy="75565"/>
+          </a:xfrm>
+          <a:prstGeom prst="rightArrow">
+            <a:avLst/>
+          </a:prstGeom>
+          <a:solidFill>
+            <a:schemeClr val="bg1">
+              <a:lumMod val="75000"/>
+            </a:schemeClr>
+          </a:solidFill>
+          <a:ln>
+            <a:noFill/>
+          </a:ln>
+        </p:spPr>
+        <p:style>
+          <a:lnRef idx="2">
+            <a:schemeClr val="accent1">
+              <a:lumMod val="75000"/>
+            </a:schemeClr>
+          </a:lnRef>
+          <a:fillRef idx="1">
+            <a:schemeClr val="accent1"/>
+          </a:fillRef>
+          <a:effectRef idx="0">
+            <a:srgbClr val="FFFFFF"/>
+          </a:effectRef>
+          <a:fontRef idx="minor">
+            <a:schemeClr val="lt1"/>
+          </a:fontRef>
+        </p:style>
+        <p:txBody>
+          <a:bodyPr rtlCol="0" anchor="ctr"/>
+          <a:p>
+            <a:pPr algn="ctr"/>
+            <a:endParaRPr lang="zh-CN" altLang="en-US"/>
+          </a:p>
+        </p:txBody>
+      </p:sp>
+      <p:sp>
+        <p:nvSpPr>
+          <p:cNvPr id="209" name="右箭头 208"/>
+          <p:cNvSpPr/>
+          <p:nvPr/>
+        </p:nvSpPr>
+        <p:spPr>
+          <a:xfrm>
+            <a:off x="2795905" y="8482330"/>
+            <a:ext cx="142875" cy="75565"/>
+          </a:xfrm>
+          <a:prstGeom prst="rightArrow">
+            <a:avLst/>
+          </a:prstGeom>
+          <a:solidFill>
+            <a:schemeClr val="bg1">
+              <a:lumMod val="75000"/>
+            </a:schemeClr>
+          </a:solidFill>
+          <a:ln>
+            <a:noFill/>
+          </a:ln>
+        </p:spPr>
+        <p:style>
+          <a:lnRef idx="2">
+            <a:schemeClr val="accent1">
+              <a:lumMod val="75000"/>
+            </a:schemeClr>
+          </a:lnRef>
+          <a:fillRef idx="1">
+            <a:schemeClr val="accent1"/>
+          </a:fillRef>
+          <a:effectRef idx="0">
+            <a:srgbClr val="FFFFFF"/>
+          </a:effectRef>
+          <a:fontRef idx="minor">
+            <a:schemeClr val="lt1"/>
+          </a:fontRef>
+        </p:style>
+        <p:txBody>
+          <a:bodyPr rtlCol="0" anchor="ctr"/>
+          <a:p>
+            <a:pPr algn="ctr"/>
+            <a:endParaRPr lang="zh-CN" altLang="en-US"/>
+          </a:p>
+        </p:txBody>
+      </p:sp>
+      <p:sp>
+        <p:nvSpPr>
+          <p:cNvPr id="210" name="右箭头 209"/>
+          <p:cNvSpPr/>
+          <p:nvPr/>
+        </p:nvSpPr>
+        <p:spPr>
+          <a:xfrm>
+            <a:off x="3983355" y="8202295"/>
+            <a:ext cx="142875" cy="75565"/>
+          </a:xfrm>
+          <a:prstGeom prst="rightArrow">
+            <a:avLst/>
+          </a:prstGeom>
+          <a:solidFill>
+            <a:schemeClr val="bg1">
+              <a:lumMod val="75000"/>
+            </a:schemeClr>
+          </a:solidFill>
+          <a:ln>
+            <a:noFill/>
+          </a:ln>
+        </p:spPr>
+        <p:style>
+          <a:lnRef idx="2">
+            <a:schemeClr val="accent1">
+              <a:lumMod val="75000"/>
+            </a:schemeClr>
+          </a:lnRef>
+          <a:fillRef idx="1">
+            <a:schemeClr val="accent1"/>
+          </a:fillRef>
+          <a:effectRef idx="0">
+            <a:srgbClr val="FFFFFF"/>
+          </a:effectRef>
+          <a:fontRef idx="minor">
+            <a:schemeClr val="lt1"/>
+          </a:fontRef>
+        </p:style>
+        <p:txBody>
+          <a:bodyPr rtlCol="0" anchor="ctr"/>
+          <a:p>
+            <a:pPr algn="ctr"/>
+            <a:endParaRPr lang="zh-CN" altLang="en-US"/>
+          </a:p>
+        </p:txBody>
+      </p:sp>
+      <p:sp>
+        <p:nvSpPr>
+          <p:cNvPr id="211" name="右箭头 210"/>
+          <p:cNvSpPr/>
+          <p:nvPr/>
+        </p:nvSpPr>
+        <p:spPr>
+          <a:xfrm>
+            <a:off x="3983355" y="8482330"/>
+            <a:ext cx="142875" cy="75565"/>
+          </a:xfrm>
+          <a:prstGeom prst="rightArrow">
+            <a:avLst/>
+          </a:prstGeom>
+          <a:solidFill>
+            <a:schemeClr val="bg1">
+              <a:lumMod val="75000"/>
+            </a:schemeClr>
+          </a:solidFill>
+          <a:ln>
+            <a:noFill/>
+          </a:ln>
+        </p:spPr>
+        <p:style>
+          <a:lnRef idx="2">
+            <a:schemeClr val="accent1">
+              <a:lumMod val="75000"/>
+            </a:schemeClr>
+          </a:lnRef>
+          <a:fillRef idx="1">
+            <a:schemeClr val="accent1"/>
+          </a:fillRef>
+          <a:effectRef idx="0">
+            <a:srgbClr val="FFFFFF"/>
+          </a:effectRef>
+          <a:fontRef idx="minor">
+            <a:schemeClr val="lt1"/>
+          </a:fontRef>
+        </p:style>
+        <p:txBody>
+          <a:bodyPr rtlCol="0" anchor="ctr"/>
+          <a:p>
+            <a:pPr algn="ctr"/>
+            <a:endParaRPr lang="zh-CN" altLang="en-US"/>
+          </a:p>
+        </p:txBody>
+      </p:sp>
       <p:sp>
         <p:nvSpPr>
           <p:cNvPr id="212" name="文本框 211"/>
@@ -11018,7 +10811,7 @@
         </p:nvSpPr>
         <p:spPr>
           <a:xfrm>
-            <a:off x="5297170" y="249555"/>
+            <a:off x="5274945" y="7538085"/>
             <a:ext cx="1332230" cy="557530"/>
           </a:xfrm>
           <a:prstGeom prst="rect">
@@ -11213,7 +11006,7 @@
         </p:nvSpPr>
         <p:spPr>
           <a:xfrm>
-            <a:off x="1597660" y="993140"/>
+            <a:off x="1575435" y="8281670"/>
             <a:ext cx="142875" cy="75565"/>
           </a:xfrm>
           <a:prstGeom prst="rightArrow">
@@ -11260,7 +11053,7 @@
         </p:nvSpPr>
         <p:spPr>
           <a:xfrm>
-            <a:off x="5099685" y="607695"/>
+            <a:off x="5077460" y="7896225"/>
             <a:ext cx="142875" cy="75565"/>
           </a:xfrm>
           <a:prstGeom prst="rightArrow">
@@ -11307,7 +11100,7 @@
         </p:nvSpPr>
         <p:spPr>
           <a:xfrm>
-            <a:off x="124460" y="12700"/>
+            <a:off x="102235" y="7301230"/>
             <a:ext cx="2603500" cy="321945"/>
           </a:xfrm>
           <a:prstGeom prst="rect">
@@ -11326,7 +11119,7 @@
                 <a:latin typeface="Arial" panose="020B0604020202020204" pitchFamily="34" charset="0"/>
                 <a:cs typeface="Arial" panose="020B0604020202020204" pitchFamily="34" charset="0"/>
               </a:rPr>
-              <a:t>A</a:t>
+              <a:t>F</a:t>
             </a:r>
             <a:endParaRPr sz="1000" b="1">
               <a:latin typeface="Arial" panose="020B0604020202020204" pitchFamily="34" charset="0"/>
@@ -11357,8 +11150,8 @@
         </p:nvSpPr>
         <p:spPr>
           <a:xfrm>
-            <a:off x="124460" y="53975"/>
-            <a:ext cx="6635750" cy="1794510"/>
+            <a:off x="102235" y="7300595"/>
+            <a:ext cx="6668135" cy="1941195"/>
           </a:xfrm>
           <a:prstGeom prst="rect">
             <a:avLst/>
@@ -11415,7 +11208,7 @@
         </p:nvSpPr>
         <p:spPr>
           <a:xfrm>
-            <a:off x="71755" y="1679575"/>
+            <a:off x="91440" y="9072880"/>
             <a:ext cx="3163570" cy="168275"/>
           </a:xfrm>
           <a:prstGeom prst="rect">
@@ -11456,7 +11249,7 @@
         </p:nvSpPr>
         <p:spPr>
           <a:xfrm>
-            <a:off x="5297170" y="1595755"/>
+            <a:off x="5274945" y="8884285"/>
             <a:ext cx="1332230" cy="169545"/>
           </a:xfrm>
           <a:prstGeom prst="rect">
@@ -11508,7 +11301,7 @@
         </p:nvSpPr>
         <p:spPr>
           <a:xfrm rot="5400000">
-            <a:off x="5892165" y="1454150"/>
+            <a:off x="5869940" y="8742680"/>
             <a:ext cx="142875" cy="75565"/>
           </a:xfrm>
           <a:prstGeom prst="rightArrow">
@@ -11555,10 +11348,10 @@
         </p:nvGrpSpPr>
         <p:grpSpPr>
           <a:xfrm>
-            <a:off x="103505" y="6440170"/>
-            <a:ext cx="3274060" cy="908050"/>
+            <a:off x="3495040" y="4291330"/>
+            <a:ext cx="3274695" cy="908050"/>
             <a:chOff x="169" y="10263"/>
-            <a:chExt cx="5156" cy="1430"/>
+            <a:chExt cx="5157" cy="1430"/>
           </a:xfrm>
         </p:grpSpPr>
         <p:sp>
@@ -11644,7 +11437,29 @@
                   <a:cs typeface="Ubuntu Mono" panose="020B0509030602030204" charset="0"/>
                   <a:sym typeface="+mn-ea"/>
                 </a:rPr>
-                <a:t> TGC GGA CCT AAA TTA --- GGC</a:t>
+                <a:t> TGC GGA CCT AAA TTA </a:t>
+              </a:r>
+              <a:r>
+                <a:rPr lang="en-US" altLang="zh-CN" sz="400">
+                  <a:solidFill>
+                    <a:srgbClr val="E68822"/>
+                  </a:solidFill>
+                  <a:latin typeface="Ubuntu Mono" panose="020B0509030602030204" charset="0"/>
+                  <a:cs typeface="Ubuntu Mono" panose="020B0509030602030204" charset="0"/>
+                  <a:sym typeface="+mn-ea"/>
+                </a:rPr>
+                <a:t>NNN</a:t>
+              </a:r>
+              <a:r>
+                <a:rPr lang="en-US" altLang="zh-CN" sz="400">
+                  <a:solidFill>
+                    <a:schemeClr val="tx1"/>
+                  </a:solidFill>
+                  <a:latin typeface="Ubuntu Mono" panose="020B0509030602030204" charset="0"/>
+                  <a:cs typeface="Ubuntu Mono" panose="020B0509030602030204" charset="0"/>
+                  <a:sym typeface="+mn-ea"/>
+                </a:rPr>
+                <a:t> GGC</a:t>
               </a:r>
               <a:endParaRPr lang="en-US" altLang="zh-CN" sz="400">
                 <a:solidFill>
@@ -11695,7 +11510,29 @@
                   <a:cs typeface="Ubuntu Mono" panose="020B0509030602030204" charset="0"/>
                   <a:sym typeface="+mn-ea"/>
                 </a:rPr>
-                <a:t> TGC GGA CCA AAA TTA GGT GCC</a:t>
+                <a:t> TGC GGA CCA AAA TTA </a:t>
+              </a:r>
+              <a:r>
+                <a:rPr lang="en-US" altLang="zh-CN" sz="400">
+                  <a:solidFill>
+                    <a:srgbClr val="E68822"/>
+                  </a:solidFill>
+                  <a:latin typeface="Ubuntu Mono" panose="020B0509030602030204" charset="0"/>
+                  <a:cs typeface="Ubuntu Mono" panose="020B0509030602030204" charset="0"/>
+                  <a:sym typeface="+mn-ea"/>
+                </a:rPr>
+                <a:t>NNN</a:t>
+              </a:r>
+              <a:r>
+                <a:rPr lang="en-US" altLang="zh-CN" sz="400">
+                  <a:solidFill>
+                    <a:schemeClr val="tx1"/>
+                  </a:solidFill>
+                  <a:latin typeface="Ubuntu Mono" panose="020B0509030602030204" charset="0"/>
+                  <a:cs typeface="Ubuntu Mono" panose="020B0509030602030204" charset="0"/>
+                  <a:sym typeface="+mn-ea"/>
+                </a:rPr>
+                <a:t> GCC</a:t>
               </a:r>
               <a:endParaRPr lang="en-US" altLang="zh-CN" sz="400">
                 <a:solidFill>
@@ -12025,7 +11862,7 @@
                   <a:latin typeface="Arial" panose="020B0604020202020204" pitchFamily="34" charset="0"/>
                   <a:cs typeface="Arial" panose="020B0604020202020204" pitchFamily="34" charset="0"/>
                 </a:rPr>
-                <a:t>E</a:t>
+                <a:t>K</a:t>
               </a:r>
               <a:endParaRPr lang="en-US" sz="1000" b="1">
                 <a:latin typeface="Arial" panose="020B0604020202020204" pitchFamily="34" charset="0"/>
@@ -12156,7 +11993,7 @@
         </p:nvGrpSpPr>
         <p:grpSpPr>
           <a:xfrm>
-            <a:off x="103505" y="7459345"/>
+            <a:off x="83185" y="4892675"/>
             <a:ext cx="3274695" cy="1072515"/>
             <a:chOff x="163" y="11871"/>
             <a:chExt cx="5157" cy="1689"/>
@@ -12189,7 +12026,7 @@
                   <a:latin typeface="Arial" panose="020B0604020202020204" pitchFamily="34" charset="0"/>
                   <a:cs typeface="Arial" panose="020B0604020202020204" pitchFamily="34" charset="0"/>
                 </a:rPr>
-                <a:t>F</a:t>
+                <a:t>D</a:t>
               </a:r>
               <a:endParaRPr lang="en-US" sz="1000" b="1">
                 <a:latin typeface="Arial" panose="020B0604020202020204" pitchFamily="34" charset="0"/>
@@ -12404,7 +12241,7 @@
                 <a:rPr lang="en-US" altLang="zh-CN" sz="400">
                   <a:sym typeface="+mn-ea"/>
                 </a:rPr>
-                <a:t> ,X-raito, Gap-raito</a:t>
+                <a:t>, X-raito, Gap-raito</a:t>
               </a:r>
               <a:endParaRPr lang="en-US" altLang="zh-CN" sz="400">
                 <a:sym typeface="+mn-ea"/>
@@ -12967,10 +12804,10 @@
         </p:nvGrpSpPr>
         <p:grpSpPr>
           <a:xfrm>
-            <a:off x="3491865" y="6506845"/>
-            <a:ext cx="3274695" cy="1172845"/>
-            <a:chOff x="5467" y="10289"/>
-            <a:chExt cx="5157" cy="1847"/>
+            <a:off x="95885" y="6151880"/>
+            <a:ext cx="3274695" cy="1080770"/>
+            <a:chOff x="5467" y="10365"/>
+            <a:chExt cx="5157" cy="1702"/>
           </a:xfrm>
         </p:grpSpPr>
         <p:sp>
@@ -13349,7 +13186,7 @@
                   <a:latin typeface="Arial" panose="020B0604020202020204" pitchFamily="34" charset="0"/>
                   <a:cs typeface="Arial" panose="020B0604020202020204" pitchFamily="34" charset="0"/>
                 </a:rPr>
-                <a:t>K</a:t>
+                <a:t>E</a:t>
               </a:r>
               <a:endParaRPr lang="en-US" sz="1000" b="1">
                 <a:latin typeface="Arial" panose="020B0604020202020204" pitchFamily="34" charset="0"/>
@@ -13380,8 +13217,8 @@
           </p:nvSpPr>
           <p:spPr>
             <a:xfrm>
-              <a:off x="5477" y="10289"/>
-              <a:ext cx="5147" cy="1814"/>
+              <a:off x="5477" y="10366"/>
+              <a:ext cx="5147" cy="1663"/>
             </a:xfrm>
             <a:prstGeom prst="rect">
               <a:avLst/>
@@ -13438,7 +13275,7 @@
           </p:nvSpPr>
           <p:spPr>
             <a:xfrm>
-              <a:off x="5482" y="11871"/>
+              <a:off x="5482" y="11802"/>
               <a:ext cx="4982" cy="265"/>
             </a:xfrm>
             <a:prstGeom prst="rect">
@@ -14073,10 +13910,10 @@
         </p:nvGrpSpPr>
         <p:grpSpPr>
           <a:xfrm>
-            <a:off x="103505" y="1945640"/>
-            <a:ext cx="3290570" cy="1412240"/>
+            <a:off x="83185" y="2251710"/>
+            <a:ext cx="3274060" cy="1412240"/>
             <a:chOff x="-87" y="3190"/>
-            <a:chExt cx="5182" cy="2224"/>
+            <a:chExt cx="5156" cy="2224"/>
           </a:xfrm>
         </p:grpSpPr>
         <p:grpSp>
@@ -14088,9 +13925,9 @@
           <p:grpSpPr>
             <a:xfrm>
               <a:off x="-87" y="3190"/>
-              <a:ext cx="5182" cy="2224"/>
+              <a:ext cx="5156" cy="2224"/>
               <a:chOff x="79" y="-27"/>
-              <a:chExt cx="5182" cy="2224"/>
+              <a:chExt cx="5156" cy="2224"/>
             </a:xfrm>
           </p:grpSpPr>
           <p:sp>
@@ -14432,8 +14269,8 @@
             </p:nvSpPr>
             <p:spPr>
               <a:xfrm>
-                <a:off x="114" y="-26"/>
-                <a:ext cx="5147" cy="2202"/>
+                <a:off x="90" y="-26"/>
+                <a:ext cx="5145" cy="2202"/>
               </a:xfrm>
               <a:prstGeom prst="rect">
                 <a:avLst/>
@@ -14714,7 +14551,7 @@
         </p:nvSpPr>
         <p:spPr>
           <a:xfrm>
-            <a:off x="5297170" y="1068705"/>
+            <a:off x="5274945" y="8357235"/>
             <a:ext cx="1332230" cy="285750"/>
           </a:xfrm>
           <a:prstGeom prst="rect">
@@ -14777,7 +14614,7 @@
         </p:nvSpPr>
         <p:spPr>
           <a:xfrm rot="5400000">
-            <a:off x="5892165" y="883920"/>
+            <a:off x="5869940" y="8172450"/>
             <a:ext cx="142875" cy="75565"/>
           </a:xfrm>
           <a:prstGeom prst="rightArrow">
@@ -14816,6 +14653,1496 @@
           </a:p>
         </p:txBody>
       </p:sp>
+      <p:grpSp>
+        <p:nvGrpSpPr>
+          <p:cNvPr id="3" name="组合 2"/>
+          <p:cNvGrpSpPr/>
+          <p:nvPr/>
+        </p:nvGrpSpPr>
+        <p:grpSpPr>
+          <a:xfrm rot="0">
+            <a:off x="1840865" y="8609965"/>
+            <a:ext cx="926465" cy="328930"/>
+            <a:chOff x="2391" y="8774"/>
+            <a:chExt cx="1459" cy="518"/>
+          </a:xfrm>
+        </p:grpSpPr>
+        <p:sp>
+          <p:nvSpPr>
+            <p:cNvPr id="4" name="文本框 3"/>
+            <p:cNvSpPr txBox="1"/>
+            <p:nvPr/>
+          </p:nvSpPr>
+          <p:spPr>
+            <a:xfrm>
+              <a:off x="2391" y="8774"/>
+              <a:ext cx="1459" cy="289"/>
+            </a:xfrm>
+            <a:prstGeom prst="rect">
+              <a:avLst/>
+            </a:prstGeom>
+            <a:noFill/>
+          </p:spPr>
+          <p:txBody>
+            <a:bodyPr wrap="square" rtlCol="0" anchor="t">
+              <a:spAutoFit/>
+            </a:bodyPr>
+            <a:p>
+              <a:pPr indent="0" algn="l" fontAlgn="auto">
+                <a:lnSpc>
+                  <a:spcPct val="120000"/>
+                </a:lnSpc>
+              </a:pPr>
+              <a:r>
+                <a:rPr lang="en-US" altLang="zh-CN" sz="500" b="1">
+                  <a:latin typeface="Arial" panose="020B0604020202020204" pitchFamily="34" charset="0"/>
+                  <a:cs typeface="Arial" panose="020B0604020202020204" pitchFamily="34" charset="0"/>
+                  <a:sym typeface="+mn-ea"/>
+                </a:rPr>
+                <a:t>4. pseudogene workfow</a:t>
+              </a:r>
+              <a:endParaRPr lang="en-US" altLang="zh-CN" sz="500" b="1">
+                <a:latin typeface="Arial" panose="020B0604020202020204" pitchFamily="34" charset="0"/>
+                <a:cs typeface="Arial" panose="020B0604020202020204" pitchFamily="34" charset="0"/>
+                <a:sym typeface="+mn-ea"/>
+              </a:endParaRPr>
+            </a:p>
+          </p:txBody>
+        </p:sp>
+        <p:sp>
+          <p:nvSpPr>
+            <p:cNvPr id="5" name="文本框 4"/>
+            <p:cNvSpPr txBox="1"/>
+            <p:nvPr/>
+          </p:nvSpPr>
+          <p:spPr>
+            <a:xfrm>
+              <a:off x="2549" y="9009"/>
+              <a:ext cx="1300" cy="283"/>
+            </a:xfrm>
+            <a:prstGeom prst="rect">
+              <a:avLst/>
+            </a:prstGeom>
+            <a:solidFill>
+              <a:schemeClr val="bg1">
+                <a:lumMod val="95000"/>
+              </a:schemeClr>
+            </a:solidFill>
+          </p:spPr>
+          <p:txBody>
+            <a:bodyPr wrap="square" rtlCol="0" anchor="ctr" anchorCtr="0">
+              <a:noAutofit/>
+            </a:bodyPr>
+            <a:p>
+              <a:pPr indent="0" algn="ctr" fontAlgn="auto">
+                <a:lnSpc>
+                  <a:spcPct val="120000"/>
+                </a:lnSpc>
+              </a:pPr>
+              <a:r>
+                <a:rPr lang="en-US" altLang="zh-CN" sz="400">
+                  <a:solidFill>
+                    <a:schemeClr val="tx1"/>
+                  </a:solidFill>
+                  <a:latin typeface="Arial" panose="020B0604020202020204" pitchFamily="34" charset="0"/>
+                  <a:cs typeface="Arial" panose="020B0604020202020204" pitchFamily="34" charset="0"/>
+                  <a:sym typeface="+mn-ea"/>
+                </a:rPr>
+                <a:t>CDS FASTA</a:t>
+              </a:r>
+              <a:br>
+                <a:rPr lang="en-US" altLang="zh-CN" sz="400">
+                  <a:solidFill>
+                    <a:schemeClr val="tx1"/>
+                  </a:solidFill>
+                  <a:latin typeface="Arial" panose="020B0604020202020204" pitchFamily="34" charset="0"/>
+                  <a:cs typeface="Arial" panose="020B0604020202020204" pitchFamily="34" charset="0"/>
+                  <a:sym typeface="+mn-ea"/>
+                </a:rPr>
+              </a:br>
+              <a:r>
+                <a:rPr lang="en-US" altLang="zh-CN" sz="400">
+                  <a:solidFill>
+                    <a:schemeClr val="tx1"/>
+                  </a:solidFill>
+                  <a:latin typeface="Arial" panose="020B0604020202020204" pitchFamily="34" charset="0"/>
+                  <a:cs typeface="Arial" panose="020B0604020202020204" pitchFamily="34" charset="0"/>
+                  <a:sym typeface="+mn-ea"/>
+                </a:rPr>
+                <a:t> (Allowing frameshifts/stops) </a:t>
+              </a:r>
+              <a:endParaRPr lang="en-US" altLang="zh-CN" sz="400">
+                <a:solidFill>
+                  <a:schemeClr val="tx1"/>
+                </a:solidFill>
+                <a:latin typeface="Arial" panose="020B0604020202020204" pitchFamily="34" charset="0"/>
+                <a:cs typeface="Arial" panose="020B0604020202020204" pitchFamily="34" charset="0"/>
+                <a:sym typeface="+mn-ea"/>
+              </a:endParaRPr>
+            </a:p>
+          </p:txBody>
+        </p:sp>
+      </p:grpSp>
+      <p:sp>
+        <p:nvSpPr>
+          <p:cNvPr id="6" name="文本框 5"/>
+          <p:cNvSpPr txBox="1"/>
+          <p:nvPr/>
+        </p:nvSpPr>
+        <p:spPr>
+          <a:xfrm>
+            <a:off x="3166745" y="8758555"/>
+            <a:ext cx="657225" cy="180000"/>
+          </a:xfrm>
+          <a:prstGeom prst="rect">
+            <a:avLst/>
+          </a:prstGeom>
+          <a:solidFill>
+            <a:schemeClr val="bg1">
+              <a:lumMod val="95000"/>
+            </a:schemeClr>
+          </a:solidFill>
+        </p:spPr>
+        <p:txBody>
+          <a:bodyPr wrap="square" rtlCol="0" anchor="ctr" anchorCtr="0">
+            <a:noAutofit/>
+          </a:bodyPr>
+          <a:p>
+            <a:pPr indent="0" algn="ctr" fontAlgn="auto">
+              <a:lnSpc>
+                <a:spcPct val="120000"/>
+              </a:lnSpc>
+            </a:pPr>
+            <a:r>
+              <a:rPr lang="en-US" altLang="zh-CN" sz="400">
+                <a:solidFill>
+                  <a:schemeClr val="tx1"/>
+                </a:solidFill>
+                <a:latin typeface="Arial" panose="020B0604020202020204" pitchFamily="34" charset="0"/>
+                <a:cs typeface="Arial" panose="020B0604020202020204" pitchFamily="34" charset="0"/>
+                <a:sym typeface="+mn-ea"/>
+              </a:rPr>
+              <a:t>Sequence Align by macse</a:t>
+            </a:r>
+            <a:endParaRPr lang="en-US" altLang="zh-CN" sz="400">
+              <a:solidFill>
+                <a:schemeClr val="tx1"/>
+              </a:solidFill>
+              <a:latin typeface="Arial" panose="020B0604020202020204" pitchFamily="34" charset="0"/>
+              <a:cs typeface="Arial" panose="020B0604020202020204" pitchFamily="34" charset="0"/>
+              <a:sym typeface="+mn-ea"/>
+            </a:endParaRPr>
+          </a:p>
+        </p:txBody>
+      </p:sp>
+      <p:sp>
+        <p:nvSpPr>
+          <p:cNvPr id="7" name="文本框 6"/>
+          <p:cNvSpPr txBox="1"/>
+          <p:nvPr/>
+        </p:nvSpPr>
+        <p:spPr>
+          <a:xfrm>
+            <a:off x="4270375" y="8759190"/>
+            <a:ext cx="657225" cy="180000"/>
+          </a:xfrm>
+          <a:prstGeom prst="rect">
+            <a:avLst/>
+          </a:prstGeom>
+          <a:solidFill>
+            <a:schemeClr val="bg1">
+              <a:lumMod val="95000"/>
+            </a:schemeClr>
+          </a:solidFill>
+        </p:spPr>
+        <p:txBody>
+          <a:bodyPr wrap="square" rtlCol="0" anchor="ctr" anchorCtr="0">
+            <a:noAutofit/>
+          </a:bodyPr>
+          <a:p>
+            <a:pPr indent="0" algn="ctr" fontAlgn="auto">
+              <a:lnSpc>
+                <a:spcPct val="120000"/>
+              </a:lnSpc>
+            </a:pPr>
+            <a:r>
+              <a:rPr lang="en-US" altLang="zh-CN" sz="400">
+                <a:latin typeface="Arial" panose="020B0604020202020204" pitchFamily="34" charset="0"/>
+                <a:cs typeface="Arial" panose="020B0604020202020204" pitchFamily="34" charset="0"/>
+                <a:sym typeface="+mn-ea"/>
+              </a:rPr>
+              <a:t>Trim protein + codon alignments</a:t>
+            </a:r>
+            <a:endParaRPr lang="en-US" altLang="zh-CN" sz="400">
+              <a:solidFill>
+                <a:schemeClr val="tx1"/>
+              </a:solidFill>
+              <a:latin typeface="Arial" panose="020B0604020202020204" pitchFamily="34" charset="0"/>
+              <a:cs typeface="Arial" panose="020B0604020202020204" pitchFamily="34" charset="0"/>
+              <a:sym typeface="+mn-ea"/>
+            </a:endParaRPr>
+          </a:p>
+        </p:txBody>
+      </p:sp>
+      <p:sp>
+        <p:nvSpPr>
+          <p:cNvPr id="9" name="右箭头 8"/>
+          <p:cNvSpPr/>
+          <p:nvPr/>
+        </p:nvSpPr>
+        <p:spPr>
+          <a:xfrm>
+            <a:off x="2886710" y="8793480"/>
+            <a:ext cx="142875" cy="75565"/>
+          </a:xfrm>
+          <a:prstGeom prst="rightArrow">
+            <a:avLst/>
+          </a:prstGeom>
+          <a:solidFill>
+            <a:schemeClr val="bg1">
+              <a:lumMod val="75000"/>
+            </a:schemeClr>
+          </a:solidFill>
+          <a:ln>
+            <a:noFill/>
+          </a:ln>
+        </p:spPr>
+        <p:style>
+          <a:lnRef idx="2">
+            <a:schemeClr val="accent1">
+              <a:lumMod val="75000"/>
+            </a:schemeClr>
+          </a:lnRef>
+          <a:fillRef idx="1">
+            <a:schemeClr val="accent1"/>
+          </a:fillRef>
+          <a:effectRef idx="0">
+            <a:srgbClr val="FFFFFF"/>
+          </a:effectRef>
+          <a:fontRef idx="minor">
+            <a:schemeClr val="lt1"/>
+          </a:fontRef>
+        </p:style>
+        <p:txBody>
+          <a:bodyPr rtlCol="0" anchor="ctr"/>
+          <a:p>
+            <a:pPr algn="ctr"/>
+            <a:endParaRPr lang="zh-CN" altLang="en-US"/>
+          </a:p>
+        </p:txBody>
+      </p:sp>
+      <p:sp>
+        <p:nvSpPr>
+          <p:cNvPr id="14" name="右箭头 13"/>
+          <p:cNvSpPr/>
+          <p:nvPr/>
+        </p:nvSpPr>
+        <p:spPr>
+          <a:xfrm>
+            <a:off x="3983355" y="8793480"/>
+            <a:ext cx="142875" cy="75565"/>
+          </a:xfrm>
+          <a:prstGeom prst="rightArrow">
+            <a:avLst/>
+          </a:prstGeom>
+          <a:solidFill>
+            <a:schemeClr val="bg1">
+              <a:lumMod val="75000"/>
+            </a:schemeClr>
+          </a:solidFill>
+          <a:ln>
+            <a:noFill/>
+          </a:ln>
+        </p:spPr>
+        <p:style>
+          <a:lnRef idx="2">
+            <a:schemeClr val="accent1">
+              <a:lumMod val="75000"/>
+            </a:schemeClr>
+          </a:lnRef>
+          <a:fillRef idx="1">
+            <a:schemeClr val="accent1"/>
+          </a:fillRef>
+          <a:effectRef idx="0">
+            <a:srgbClr val="FFFFFF"/>
+          </a:effectRef>
+          <a:fontRef idx="minor">
+            <a:schemeClr val="lt1"/>
+          </a:fontRef>
+        </p:style>
+        <p:txBody>
+          <a:bodyPr rtlCol="0" anchor="ctr"/>
+          <a:p>
+            <a:pPr algn="ctr"/>
+            <a:endParaRPr lang="zh-CN" altLang="en-US"/>
+          </a:p>
+        </p:txBody>
+      </p:sp>
+      <p:grpSp>
+        <p:nvGrpSpPr>
+          <p:cNvPr id="83" name="组合 82"/>
+          <p:cNvGrpSpPr/>
+          <p:nvPr/>
+        </p:nvGrpSpPr>
+        <p:grpSpPr>
+          <a:xfrm>
+            <a:off x="83185" y="104140"/>
+            <a:ext cx="3362325" cy="2005330"/>
+            <a:chOff x="235" y="164"/>
+            <a:chExt cx="5295" cy="3158"/>
+          </a:xfrm>
+        </p:grpSpPr>
+        <p:sp>
+          <p:nvSpPr>
+            <p:cNvPr id="2" name="文本框 1"/>
+            <p:cNvSpPr txBox="1"/>
+            <p:nvPr/>
+          </p:nvSpPr>
+          <p:spPr>
+            <a:xfrm>
+              <a:off x="332" y="687"/>
+              <a:ext cx="809" cy="840"/>
+            </a:xfrm>
+            <a:prstGeom prst="rect">
+              <a:avLst/>
+            </a:prstGeom>
+            <a:solidFill>
+              <a:schemeClr val="bg1">
+                <a:lumMod val="95000"/>
+              </a:schemeClr>
+            </a:solidFill>
+          </p:spPr>
+          <p:txBody>
+            <a:bodyPr wrap="square" rtlCol="0">
+              <a:noAutofit/>
+            </a:bodyPr>
+            <a:p>
+              <a:pPr algn="l" fontAlgn="auto">
+                <a:lnSpc>
+                  <a:spcPct val="120000"/>
+                </a:lnSpc>
+                <a:buClrTx/>
+                <a:buSzTx/>
+                <a:buFontTx/>
+              </a:pPr>
+              <a:r>
+                <a:rPr lang="en-US" altLang="zh-CN" sz="400">
+                  <a:sym typeface="+mn-ea"/>
+                </a:rPr>
+                <a:t>taxa</a:t>
+              </a:r>
+              <a:r>
+                <a:rPr lang="en-US" altLang="zh-CN" sz="400">
+                  <a:solidFill>
+                    <a:schemeClr val="tx1"/>
+                  </a:solidFill>
+                  <a:latin typeface="Ubuntu Mono" panose="020B0509030602030204" charset="0"/>
+                  <a:cs typeface="Ubuntu Mono" panose="020B0509030602030204" charset="0"/>
+                  <a:sym typeface="+mn-ea"/>
+                </a:rPr>
+                <a:t>1.fa</a:t>
+              </a:r>
+              <a:endParaRPr lang="en-US" altLang="zh-CN" sz="400">
+                <a:solidFill>
+                  <a:schemeClr val="tx1"/>
+                </a:solidFill>
+                <a:latin typeface="Ubuntu Mono" panose="020B0509030602030204" charset="0"/>
+                <a:cs typeface="Ubuntu Mono" panose="020B0509030602030204" charset="0"/>
+                <a:sym typeface="+mn-ea"/>
+              </a:endParaRPr>
+            </a:p>
+            <a:p>
+              <a:pPr algn="l" fontAlgn="auto">
+                <a:lnSpc>
+                  <a:spcPct val="120000"/>
+                </a:lnSpc>
+                <a:buClrTx/>
+                <a:buSzTx/>
+                <a:buFontTx/>
+              </a:pPr>
+              <a:r>
+                <a:rPr lang="en-US" altLang="zh-CN" sz="400">
+                  <a:sym typeface="+mn-ea"/>
+                </a:rPr>
+                <a:t>taxa</a:t>
+              </a:r>
+              <a:r>
+                <a:rPr lang="en-US" altLang="zh-CN" sz="400">
+                  <a:solidFill>
+                    <a:schemeClr val="tx1"/>
+                  </a:solidFill>
+                  <a:latin typeface="Ubuntu Mono" panose="020B0509030602030204" charset="0"/>
+                  <a:cs typeface="Ubuntu Mono" panose="020B0509030602030204" charset="0"/>
+                  <a:sym typeface="+mn-ea"/>
+                </a:rPr>
+                <a:t>2.fa</a:t>
+              </a:r>
+              <a:endParaRPr lang="en-US" altLang="zh-CN" sz="400">
+                <a:solidFill>
+                  <a:schemeClr val="tx1"/>
+                </a:solidFill>
+                <a:latin typeface="Ubuntu Mono" panose="020B0509030602030204" charset="0"/>
+                <a:cs typeface="Ubuntu Mono" panose="020B0509030602030204" charset="0"/>
+                <a:sym typeface="+mn-ea"/>
+              </a:endParaRPr>
+            </a:p>
+            <a:p>
+              <a:pPr algn="l" fontAlgn="auto">
+                <a:lnSpc>
+                  <a:spcPct val="120000"/>
+                </a:lnSpc>
+                <a:buClrTx/>
+                <a:buSzTx/>
+                <a:buFontTx/>
+              </a:pPr>
+              <a:r>
+                <a:rPr lang="en-US" altLang="zh-CN" sz="400">
+                  <a:sym typeface="+mn-ea"/>
+                </a:rPr>
+                <a:t>taxa</a:t>
+              </a:r>
+              <a:r>
+                <a:rPr lang="en-US" altLang="zh-CN" sz="400">
+                  <a:solidFill>
+                    <a:schemeClr val="tx1"/>
+                  </a:solidFill>
+                  <a:latin typeface="Ubuntu Mono" panose="020B0509030602030204" charset="0"/>
+                  <a:cs typeface="Ubuntu Mono" panose="020B0509030602030204" charset="0"/>
+                  <a:sym typeface="+mn-ea"/>
+                </a:rPr>
+                <a:t>3.fa</a:t>
+              </a:r>
+              <a:endParaRPr lang="en-US" altLang="zh-CN" sz="400">
+                <a:solidFill>
+                  <a:schemeClr val="tx1"/>
+                </a:solidFill>
+                <a:latin typeface="Ubuntu Mono" panose="020B0509030602030204" charset="0"/>
+                <a:cs typeface="Ubuntu Mono" panose="020B0509030602030204" charset="0"/>
+                <a:sym typeface="+mn-ea"/>
+              </a:endParaRPr>
+            </a:p>
+            <a:p>
+              <a:pPr algn="l" fontAlgn="auto">
+                <a:lnSpc>
+                  <a:spcPct val="120000"/>
+                </a:lnSpc>
+                <a:buClrTx/>
+                <a:buSzTx/>
+                <a:buFontTx/>
+              </a:pPr>
+              <a:r>
+                <a:rPr lang="en-US" altLang="zh-CN" sz="400">
+                  <a:sym typeface="+mn-ea"/>
+                </a:rPr>
+                <a:t>taxa4</a:t>
+              </a:r>
+              <a:r>
+                <a:rPr lang="en-US" altLang="zh-CN" sz="400">
+                  <a:solidFill>
+                    <a:schemeClr val="tx1"/>
+                  </a:solidFill>
+                  <a:latin typeface="Ubuntu Mono" panose="020B0509030602030204" charset="0"/>
+                  <a:cs typeface="Ubuntu Mono" panose="020B0509030602030204" charset="0"/>
+                  <a:sym typeface="+mn-ea"/>
+                </a:rPr>
+                <a:t>.fa</a:t>
+              </a:r>
+              <a:endParaRPr lang="en-US" altLang="zh-CN" sz="400">
+                <a:solidFill>
+                  <a:schemeClr val="tx1"/>
+                </a:solidFill>
+                <a:latin typeface="Ubuntu Mono" panose="020B0509030602030204" charset="0"/>
+                <a:cs typeface="Ubuntu Mono" panose="020B0509030602030204" charset="0"/>
+                <a:sym typeface="+mn-ea"/>
+              </a:endParaRPr>
+            </a:p>
+            <a:p>
+              <a:pPr algn="l" fontAlgn="auto">
+                <a:lnSpc>
+                  <a:spcPct val="120000"/>
+                </a:lnSpc>
+                <a:buClrTx/>
+                <a:buSzTx/>
+                <a:buFontTx/>
+              </a:pPr>
+              <a:r>
+                <a:rPr lang="en-US" altLang="zh-CN" sz="400">
+                  <a:sym typeface="+mn-ea"/>
+                </a:rPr>
+                <a:t>taxa5</a:t>
+              </a:r>
+              <a:r>
+                <a:rPr lang="en-US" altLang="zh-CN" sz="400">
+                  <a:solidFill>
+                    <a:schemeClr val="tx1"/>
+                  </a:solidFill>
+                  <a:latin typeface="Ubuntu Mono" panose="020B0509030602030204" charset="0"/>
+                  <a:cs typeface="Ubuntu Mono" panose="020B0509030602030204" charset="0"/>
+                  <a:sym typeface="+mn-ea"/>
+                </a:rPr>
+                <a:t>.fa</a:t>
+              </a:r>
+              <a:endParaRPr lang="en-US" altLang="zh-CN" sz="400">
+                <a:solidFill>
+                  <a:schemeClr val="tx1"/>
+                </a:solidFill>
+                <a:latin typeface="Ubuntu Mono" panose="020B0509030602030204" charset="0"/>
+                <a:cs typeface="Ubuntu Mono" panose="020B0509030602030204" charset="0"/>
+                <a:sym typeface="+mn-ea"/>
+              </a:endParaRPr>
+            </a:p>
+            <a:p>
+              <a:pPr algn="l" fontAlgn="auto">
+                <a:lnSpc>
+                  <a:spcPct val="120000"/>
+                </a:lnSpc>
+                <a:buClrTx/>
+                <a:buSzTx/>
+                <a:buFontTx/>
+              </a:pPr>
+              <a:r>
+                <a:rPr lang="en-US" altLang="zh-CN" sz="400">
+                  <a:sym typeface="+mn-ea"/>
+                </a:rPr>
+                <a:t>taxa6</a:t>
+              </a:r>
+              <a:r>
+                <a:rPr lang="en-US" altLang="zh-CN" sz="400">
+                  <a:latin typeface="Ubuntu Mono" panose="020B0509030602030204" charset="0"/>
+                  <a:cs typeface="Ubuntu Mono" panose="020B0509030602030204" charset="0"/>
+                  <a:sym typeface="+mn-ea"/>
+                </a:rPr>
+                <a:t>.fa</a:t>
+              </a:r>
+              <a:endParaRPr lang="en-US" altLang="zh-CN" sz="400">
+                <a:solidFill>
+                  <a:schemeClr val="tx1"/>
+                </a:solidFill>
+                <a:latin typeface="Ubuntu Mono" panose="020B0509030602030204" charset="0"/>
+                <a:cs typeface="Ubuntu Mono" panose="020B0509030602030204" charset="0"/>
+                <a:sym typeface="+mn-ea"/>
+              </a:endParaRPr>
+            </a:p>
+            <a:p>
+              <a:pPr algn="l" fontAlgn="auto">
+                <a:lnSpc>
+                  <a:spcPct val="120000"/>
+                </a:lnSpc>
+                <a:buClrTx/>
+                <a:buSzTx/>
+                <a:buFontTx/>
+              </a:pPr>
+              <a:endParaRPr lang="en-US" altLang="zh-CN" sz="400">
+                <a:solidFill>
+                  <a:schemeClr val="tx1"/>
+                </a:solidFill>
+                <a:latin typeface="Ubuntu Mono" panose="020B0509030602030204" charset="0"/>
+                <a:cs typeface="Ubuntu Mono" panose="020B0509030602030204" charset="0"/>
+                <a:sym typeface="+mn-ea"/>
+              </a:endParaRPr>
+            </a:p>
+          </p:txBody>
+        </p:sp>
+        <p:sp>
+          <p:nvSpPr>
+            <p:cNvPr id="15" name="文本框 14"/>
+            <p:cNvSpPr txBox="1"/>
+            <p:nvPr/>
+          </p:nvSpPr>
+          <p:spPr>
+            <a:xfrm>
+              <a:off x="1467" y="687"/>
+              <a:ext cx="3791" cy="840"/>
+            </a:xfrm>
+            <a:prstGeom prst="rect">
+              <a:avLst/>
+            </a:prstGeom>
+            <a:solidFill>
+              <a:schemeClr val="bg1">
+                <a:lumMod val="95000"/>
+              </a:schemeClr>
+            </a:solidFill>
+          </p:spPr>
+          <p:txBody>
+            <a:bodyPr wrap="square" rtlCol="0">
+              <a:spAutoFit/>
+            </a:bodyPr>
+            <a:p>
+              <a:pPr algn="l" fontAlgn="auto">
+                <a:lnSpc>
+                  <a:spcPct val="120000"/>
+                </a:lnSpc>
+                <a:buClrTx/>
+                <a:buSzTx/>
+                <a:buFontTx/>
+              </a:pPr>
+              <a:r>
+                <a:rPr lang="en-US" altLang="zh-CN" sz="400">
+                  <a:solidFill>
+                    <a:schemeClr val="tx1"/>
+                  </a:solidFill>
+                  <a:latin typeface="Ubuntu Mono" panose="020B0509030602030204" charset="0"/>
+                  <a:cs typeface="Ubuntu Mono" panose="020B0509030602030204" charset="0"/>
+                  <a:sym typeface="+mn-ea"/>
+                </a:rPr>
+                <a:t>Orthogroup    </a:t>
+              </a:r>
+              <a:r>
+                <a:rPr lang="en-US" altLang="zh-CN" sz="400">
+                  <a:sym typeface="+mn-ea"/>
+                </a:rPr>
+                <a:t>taxa</a:t>
+              </a:r>
+              <a:r>
+                <a:rPr lang="en-US" altLang="zh-CN" sz="400">
+                  <a:solidFill>
+                    <a:schemeClr val="tx1"/>
+                  </a:solidFill>
+                  <a:latin typeface="Ubuntu Mono" panose="020B0509030602030204" charset="0"/>
+                  <a:cs typeface="Ubuntu Mono" panose="020B0509030602030204" charset="0"/>
+                  <a:sym typeface="+mn-ea"/>
+                </a:rPr>
+                <a:t>1</a:t>
+              </a:r>
+              <a:r>
+                <a:rPr lang="en-US" altLang="zh-CN" sz="400">
+                  <a:latin typeface="Ubuntu Mono" panose="020B0509030602030204" charset="0"/>
+                  <a:cs typeface="Ubuntu Mono" panose="020B0509030602030204" charset="0"/>
+                  <a:sym typeface="+mn-ea"/>
+                </a:rPr>
+                <a:t>       </a:t>
+              </a:r>
+              <a:r>
+                <a:rPr lang="en-US" altLang="zh-CN" sz="400">
+                  <a:sym typeface="+mn-ea"/>
+                </a:rPr>
+                <a:t>taxa</a:t>
+              </a:r>
+              <a:r>
+                <a:rPr lang="en-US" altLang="zh-CN" sz="400">
+                  <a:latin typeface="Ubuntu Mono" panose="020B0509030602030204" charset="0"/>
+                  <a:cs typeface="Ubuntu Mono" panose="020B0509030602030204" charset="0"/>
+                  <a:sym typeface="+mn-ea"/>
+                </a:rPr>
+                <a:t>2       </a:t>
+              </a:r>
+              <a:r>
+                <a:rPr lang="en-US" altLang="zh-CN" sz="400">
+                  <a:sym typeface="+mn-ea"/>
+                </a:rPr>
+                <a:t>taxa</a:t>
+              </a:r>
+              <a:r>
+                <a:rPr lang="en-US" altLang="zh-CN" sz="400">
+                  <a:latin typeface="Ubuntu Mono" panose="020B0509030602030204" charset="0"/>
+                  <a:cs typeface="Ubuntu Mono" panose="020B0509030602030204" charset="0"/>
+                  <a:sym typeface="+mn-ea"/>
+                </a:rPr>
+                <a:t>3           </a:t>
+              </a:r>
+              <a:r>
+                <a:rPr lang="en-US" altLang="zh-CN" sz="400">
+                  <a:sym typeface="+mn-ea"/>
+                </a:rPr>
+                <a:t>taxa</a:t>
+              </a:r>
+              <a:r>
+                <a:rPr lang="en-US" altLang="zh-CN" sz="400">
+                  <a:latin typeface="Ubuntu Mono" panose="020B0509030602030204" charset="0"/>
+                  <a:cs typeface="Ubuntu Mono" panose="020B0509030602030204" charset="0"/>
+                  <a:sym typeface="+mn-ea"/>
+                </a:rPr>
+                <a:t>4       </a:t>
+              </a:r>
+              <a:r>
+                <a:rPr lang="en-US" altLang="zh-CN" sz="400">
+                  <a:sym typeface="+mn-ea"/>
+                </a:rPr>
+                <a:t>taxa</a:t>
+              </a:r>
+              <a:r>
+                <a:rPr lang="en-US" altLang="zh-CN" sz="400">
+                  <a:latin typeface="Ubuntu Mono" panose="020B0509030602030204" charset="0"/>
+                  <a:cs typeface="Ubuntu Mono" panose="020B0509030602030204" charset="0"/>
+                  <a:sym typeface="+mn-ea"/>
+                </a:rPr>
+                <a:t>5       </a:t>
+              </a:r>
+              <a:r>
+                <a:rPr lang="en-US" altLang="zh-CN" sz="400">
+                  <a:sym typeface="+mn-ea"/>
+                </a:rPr>
+                <a:t>taxa</a:t>
+              </a:r>
+              <a:r>
+                <a:rPr lang="en-US" altLang="zh-CN" sz="400">
+                  <a:latin typeface="Ubuntu Mono" panose="020B0509030602030204" charset="0"/>
+                  <a:cs typeface="Ubuntu Mono" panose="020B0509030602030204" charset="0"/>
+                  <a:sym typeface="+mn-ea"/>
+                </a:rPr>
+                <a:t>6</a:t>
+              </a:r>
+              <a:endParaRPr lang="en-US" altLang="zh-CN" sz="400">
+                <a:latin typeface="Ubuntu Mono" panose="020B0509030602030204" charset="0"/>
+                <a:cs typeface="Ubuntu Mono" panose="020B0509030602030204" charset="0"/>
+                <a:sym typeface="+mn-ea"/>
+              </a:endParaRPr>
+            </a:p>
+            <a:p>
+              <a:pPr algn="l" fontAlgn="auto">
+                <a:lnSpc>
+                  <a:spcPct val="120000"/>
+                </a:lnSpc>
+                <a:buClrTx/>
+                <a:buSzTx/>
+                <a:buFontTx/>
+              </a:pPr>
+              <a:r>
+                <a:rPr lang="en-US" altLang="zh-CN" sz="400">
+                  <a:solidFill>
+                    <a:schemeClr val="tx1"/>
+                  </a:solidFill>
+                  <a:latin typeface="Ubuntu Mono" panose="020B0509030602030204" charset="0"/>
+                  <a:cs typeface="Ubuntu Mono" panose="020B0509030602030204" charset="0"/>
+                  <a:sym typeface="+mn-ea"/>
+                </a:rPr>
+                <a:t>OG0000000     sp1_g1      </a:t>
+              </a:r>
+              <a:r>
+                <a:rPr lang="en-US" altLang="zh-CN" sz="400">
+                  <a:latin typeface="Ubuntu Mono" panose="020B0509030602030204" charset="0"/>
+                  <a:cs typeface="Ubuntu Mono" panose="020B0509030602030204" charset="0"/>
+                  <a:sym typeface="+mn-ea"/>
+                </a:rPr>
+                <a:t>sp2_g1      sp3_g1          sp4_g1      sp5_g1      sp6_g1</a:t>
+              </a:r>
+              <a:endParaRPr lang="en-US" altLang="zh-CN" sz="400">
+                <a:solidFill>
+                  <a:schemeClr val="tx1"/>
+                </a:solidFill>
+                <a:latin typeface="Ubuntu Mono" panose="020B0509030602030204" charset="0"/>
+                <a:cs typeface="Ubuntu Mono" panose="020B0509030602030204" charset="0"/>
+                <a:sym typeface="+mn-ea"/>
+              </a:endParaRPr>
+            </a:p>
+            <a:p>
+              <a:pPr algn="l" fontAlgn="auto">
+                <a:lnSpc>
+                  <a:spcPct val="120000"/>
+                </a:lnSpc>
+                <a:buClrTx/>
+                <a:buSzTx/>
+                <a:buFontTx/>
+              </a:pPr>
+              <a:r>
+                <a:rPr lang="en-US" altLang="zh-CN" sz="400">
+                  <a:solidFill>
+                    <a:schemeClr val="tx1"/>
+                  </a:solidFill>
+                  <a:latin typeface="Ubuntu Mono" panose="020B0509030602030204" charset="0"/>
+                  <a:cs typeface="Ubuntu Mono" panose="020B0509030602030204" charset="0"/>
+                  <a:sym typeface="+mn-ea"/>
+                </a:rPr>
+                <a:t>OG0000001     </a:t>
+              </a:r>
+              <a:r>
+                <a:rPr lang="en-US" altLang="zh-CN" sz="400">
+                  <a:latin typeface="Ubuntu Mono" panose="020B0509030602030204" charset="0"/>
+                  <a:cs typeface="Ubuntu Mono" panose="020B0509030602030204" charset="0"/>
+                  <a:sym typeface="+mn-ea"/>
+                </a:rPr>
+                <a:t>sp1_g2                  sp3_g2,sp3_g3               sp5_g2      sp6_g2</a:t>
+              </a:r>
+              <a:endParaRPr lang="en-US" altLang="zh-CN" sz="400">
+                <a:solidFill>
+                  <a:schemeClr val="tx1"/>
+                </a:solidFill>
+                <a:latin typeface="Ubuntu Mono" panose="020B0509030602030204" charset="0"/>
+                <a:cs typeface="Ubuntu Mono" panose="020B0509030602030204" charset="0"/>
+                <a:sym typeface="+mn-ea"/>
+              </a:endParaRPr>
+            </a:p>
+            <a:p>
+              <a:pPr algn="l" fontAlgn="auto">
+                <a:lnSpc>
+                  <a:spcPct val="120000"/>
+                </a:lnSpc>
+                <a:buClrTx/>
+                <a:buSzTx/>
+                <a:buFontTx/>
+              </a:pPr>
+              <a:r>
+                <a:rPr lang="en-US" altLang="zh-CN" sz="400">
+                  <a:solidFill>
+                    <a:schemeClr val="tx1"/>
+                  </a:solidFill>
+                  <a:latin typeface="Ubuntu Mono" panose="020B0509030602030204" charset="0"/>
+                  <a:cs typeface="Ubuntu Mono" panose="020B0509030602030204" charset="0"/>
+                  <a:sym typeface="+mn-ea"/>
+                </a:rPr>
+                <a:t>OG0000002     </a:t>
+              </a:r>
+              <a:r>
+                <a:rPr lang="en-US" altLang="zh-CN" sz="400">
+                  <a:latin typeface="Ubuntu Mono" panose="020B0509030602030204" charset="0"/>
+                  <a:cs typeface="Ubuntu Mono" panose="020B0509030602030204" charset="0"/>
+                  <a:sym typeface="+mn-ea"/>
+                </a:rPr>
+                <a:t>sp1_g3      sp2_g2      sp3_g4          sp4_g3      sp5_g3      sp6_g3</a:t>
+              </a:r>
+              <a:endParaRPr lang="en-US" altLang="zh-CN" sz="400">
+                <a:solidFill>
+                  <a:schemeClr val="tx1"/>
+                </a:solidFill>
+                <a:latin typeface="Ubuntu Mono" panose="020B0509030602030204" charset="0"/>
+                <a:cs typeface="Ubuntu Mono" panose="020B0509030602030204" charset="0"/>
+                <a:sym typeface="+mn-ea"/>
+              </a:endParaRPr>
+            </a:p>
+            <a:p>
+              <a:pPr algn="l" fontAlgn="auto">
+                <a:lnSpc>
+                  <a:spcPct val="120000"/>
+                </a:lnSpc>
+                <a:buClrTx/>
+                <a:buSzTx/>
+                <a:buFontTx/>
+              </a:pPr>
+              <a:r>
+                <a:rPr lang="en-US" altLang="zh-CN" sz="400">
+                  <a:solidFill>
+                    <a:schemeClr val="tx1"/>
+                  </a:solidFill>
+                  <a:latin typeface="Ubuntu Mono" panose="020B0509030602030204" charset="0"/>
+                  <a:cs typeface="Ubuntu Mono" panose="020B0509030602030204" charset="0"/>
+                  <a:sym typeface="+mn-ea"/>
+                </a:rPr>
+                <a:t>OG0000003     </a:t>
+              </a:r>
+              <a:r>
+                <a:rPr lang="en-US" altLang="zh-CN" sz="400">
+                  <a:latin typeface="Ubuntu Mono" panose="020B0509030602030204" charset="0"/>
+                  <a:cs typeface="Ubuntu Mono" panose="020B0509030602030204" charset="0"/>
+                  <a:sym typeface="+mn-ea"/>
+                </a:rPr>
+                <a:t>sp1_g4      sp2_g3      sp3_g5,sp3_g6   sp4_g4      sp5_g4      sp6_g4</a:t>
+              </a:r>
+              <a:endParaRPr lang="en-US" altLang="zh-CN" sz="400">
+                <a:solidFill>
+                  <a:schemeClr val="tx1"/>
+                </a:solidFill>
+                <a:latin typeface="Ubuntu Mono" panose="020B0509030602030204" charset="0"/>
+                <a:cs typeface="Ubuntu Mono" panose="020B0509030602030204" charset="0"/>
+                <a:sym typeface="+mn-ea"/>
+              </a:endParaRPr>
+            </a:p>
+            <a:p>
+              <a:pPr algn="l" fontAlgn="auto">
+                <a:lnSpc>
+                  <a:spcPct val="120000"/>
+                </a:lnSpc>
+                <a:buClrTx/>
+                <a:buSzTx/>
+                <a:buFontTx/>
+              </a:pPr>
+              <a:r>
+                <a:rPr lang="en-US" altLang="zh-CN" sz="400">
+                  <a:solidFill>
+                    <a:schemeClr val="tx1"/>
+                  </a:solidFill>
+                  <a:latin typeface="Ubuntu Mono" panose="020B0509030602030204" charset="0"/>
+                  <a:cs typeface="Ubuntu Mono" panose="020B0509030602030204" charset="0"/>
+                  <a:sym typeface="+mn-ea"/>
+                </a:rPr>
+                <a:t>OG0000004     </a:t>
+              </a:r>
+              <a:r>
+                <a:rPr lang="en-US" altLang="zh-CN" sz="400">
+                  <a:latin typeface="Ubuntu Mono" panose="020B0509030602030204" charset="0"/>
+                  <a:cs typeface="Ubuntu Mono" panose="020B0509030602030204" charset="0"/>
+                  <a:sym typeface="+mn-ea"/>
+                </a:rPr>
+                <a:t>sp1_g5                  sp3_g7          sp4_g5      sp5_g5      sp6_g5</a:t>
+              </a:r>
+              <a:endParaRPr lang="en-US" altLang="zh-CN" sz="400">
+                <a:solidFill>
+                  <a:schemeClr val="tx1"/>
+                </a:solidFill>
+                <a:latin typeface="Ubuntu Mono" panose="020B0509030602030204" charset="0"/>
+                <a:cs typeface="Ubuntu Mono" panose="020B0509030602030204" charset="0"/>
+                <a:sym typeface="+mn-ea"/>
+              </a:endParaRPr>
+            </a:p>
+          </p:txBody>
+        </p:sp>
+        <p:sp>
+          <p:nvSpPr>
+            <p:cNvPr id="16" name="加号 15"/>
+            <p:cNvSpPr/>
+            <p:nvPr/>
+          </p:nvSpPr>
+          <p:spPr>
+            <a:xfrm>
+              <a:off x="1191" y="1007"/>
+              <a:ext cx="225" cy="201"/>
+            </a:xfrm>
+            <a:prstGeom prst="mathPlus">
+              <a:avLst/>
+            </a:prstGeom>
+            <a:solidFill>
+              <a:schemeClr val="bg1">
+                <a:lumMod val="75000"/>
+              </a:schemeClr>
+            </a:solidFill>
+            <a:ln>
+              <a:noFill/>
+            </a:ln>
+          </p:spPr>
+          <p:style>
+            <a:lnRef idx="2">
+              <a:schemeClr val="accent1">
+                <a:lumMod val="75000"/>
+              </a:schemeClr>
+            </a:lnRef>
+            <a:fillRef idx="1">
+              <a:schemeClr val="accent1"/>
+            </a:fillRef>
+            <a:effectRef idx="0">
+              <a:srgbClr val="FFFFFF"/>
+            </a:effectRef>
+            <a:fontRef idx="minor">
+              <a:schemeClr val="lt1"/>
+            </a:fontRef>
+          </p:style>
+          <p:txBody>
+            <a:bodyPr rtlCol="0" anchor="ctr"/>
+            <a:p>
+              <a:pPr algn="ctr"/>
+              <a:endParaRPr lang="zh-CN" altLang="en-US"/>
+            </a:p>
+          </p:txBody>
+        </p:sp>
+        <p:sp>
+          <p:nvSpPr>
+            <p:cNvPr id="26" name="文本框 25"/>
+            <p:cNvSpPr txBox="1"/>
+            <p:nvPr/>
+          </p:nvSpPr>
+          <p:spPr>
+            <a:xfrm>
+              <a:off x="304" y="1728"/>
+              <a:ext cx="4921" cy="1328"/>
+            </a:xfrm>
+            <a:prstGeom prst="rect">
+              <a:avLst/>
+            </a:prstGeom>
+            <a:solidFill>
+              <a:schemeClr val="bg1">
+                <a:lumMod val="95000"/>
+              </a:schemeClr>
+            </a:solidFill>
+          </p:spPr>
+          <p:txBody>
+            <a:bodyPr wrap="square" rtlCol="0">
+              <a:noAutofit/>
+            </a:bodyPr>
+            <a:p>
+              <a:pPr algn="l" fontAlgn="auto">
+                <a:lnSpc>
+                  <a:spcPct val="120000"/>
+                </a:lnSpc>
+                <a:buClrTx/>
+                <a:buSzTx/>
+                <a:buFontTx/>
+              </a:pPr>
+              <a:r>
+                <a:rPr lang="zh-CN" altLang="en-US" sz="400">
+                  <a:sym typeface="+mn-ea"/>
+                </a:rPr>
+                <a:t>--copy-mode</a:t>
+              </a:r>
+              <a:r>
+                <a:rPr lang="en-US" altLang="zh-CN" sz="400">
+                  <a:sym typeface="+mn-ea"/>
+                </a:rPr>
+                <a:t> </a:t>
+              </a:r>
+              <a:r>
+                <a:rPr lang="zh-CN" altLang="en-US" sz="400">
+                  <a:sym typeface="+mn-ea"/>
+                </a:rPr>
+                <a:t>single-copy</a:t>
+              </a:r>
+              <a:r>
+                <a:rPr lang="en-US" altLang="zh-CN" sz="400">
+                  <a:sym typeface="+mn-ea"/>
+                </a:rPr>
+                <a:t> --min-taxa 6</a:t>
+              </a:r>
+              <a:r>
+                <a:rPr lang="en-US" altLang="zh-CN" sz="400">
+                  <a:latin typeface="Ubuntu Mono" panose="020B0509030602030204" charset="0"/>
+                  <a:cs typeface="Ubuntu Mono" panose="020B0509030602030204" charset="0"/>
+                  <a:sym typeface="+mn-ea"/>
+                </a:rPr>
+                <a:t>                   </a:t>
+              </a:r>
+              <a:r>
+                <a:rPr lang="zh-CN" altLang="en-US" sz="400">
+                  <a:sym typeface="+mn-ea"/>
+                </a:rPr>
+                <a:t>--copy-mode</a:t>
+              </a:r>
+              <a:r>
+                <a:rPr lang="en-US" altLang="zh-CN" sz="400">
+                  <a:sym typeface="+mn-ea"/>
+                </a:rPr>
+                <a:t> </a:t>
+              </a:r>
+              <a:r>
+                <a:rPr lang="zh-CN" altLang="en-US" sz="400">
+                  <a:sym typeface="+mn-ea"/>
+                </a:rPr>
+                <a:t>all-copies</a:t>
+              </a:r>
+              <a:r>
+                <a:rPr lang="en-US" altLang="zh-CN" sz="400">
+                  <a:sym typeface="+mn-ea"/>
+                </a:rPr>
+                <a:t> --min-taxa 6</a:t>
+              </a:r>
+              <a:r>
+                <a:rPr lang="en-US" altLang="zh-CN" sz="400">
+                  <a:latin typeface="Ubuntu Mono" panose="020B0509030602030204" charset="0"/>
+                  <a:cs typeface="Ubuntu Mono" panose="020B0509030602030204" charset="0"/>
+                  <a:sym typeface="+mn-ea"/>
+                </a:rPr>
+                <a:t>         </a:t>
+              </a:r>
+              <a:endParaRPr lang="en-US" altLang="zh-CN" sz="400">
+                <a:sym typeface="+mn-ea"/>
+              </a:endParaRPr>
+            </a:p>
+            <a:p>
+              <a:pPr indent="0" algn="l" fontAlgn="auto">
+                <a:lnSpc>
+                  <a:spcPct val="120000"/>
+                </a:lnSpc>
+              </a:pPr>
+              <a:r>
+                <a:rPr lang="en-US" altLang="zh-CN" sz="400">
+                  <a:latin typeface="Ubuntu Mono" panose="020B0509030602030204" charset="0"/>
+                  <a:cs typeface="Ubuntu Mono" panose="020B0509030602030204" charset="0"/>
+                  <a:sym typeface="+mn-ea"/>
+                </a:rPr>
+                <a:t>OG0000000.fasta                                      OG0000000.fasta</a:t>
+              </a:r>
+              <a:endParaRPr lang="en-US" altLang="zh-CN" sz="400">
+                <a:latin typeface="Ubuntu Mono" panose="020B0509030602030204" charset="0"/>
+                <a:cs typeface="Ubuntu Mono" panose="020B0509030602030204" charset="0"/>
+                <a:sym typeface="+mn-ea"/>
+              </a:endParaRPr>
+            </a:p>
+            <a:p>
+              <a:pPr indent="0" algn="l" fontAlgn="auto">
+                <a:lnSpc>
+                  <a:spcPct val="120000"/>
+                </a:lnSpc>
+              </a:pPr>
+              <a:r>
+                <a:rPr lang="en-US" altLang="zh-CN" sz="400">
+                  <a:latin typeface="Ubuntu Mono" panose="020B0509030602030204" charset="0"/>
+                  <a:cs typeface="Ubuntu Mono" panose="020B0509030602030204" charset="0"/>
+                  <a:sym typeface="+mn-ea"/>
+                </a:rPr>
+                <a:t>OG0000002.fasta                                      OG0000002.fasta</a:t>
+              </a:r>
+              <a:endParaRPr lang="en-US" altLang="zh-CN" sz="400">
+                <a:latin typeface="Ubuntu Mono" panose="020B0509030602030204" charset="0"/>
+                <a:cs typeface="Ubuntu Mono" panose="020B0509030602030204" charset="0"/>
+                <a:sym typeface="+mn-ea"/>
+              </a:endParaRPr>
+            </a:p>
+            <a:p>
+              <a:pPr indent="0" algn="l" fontAlgn="auto">
+                <a:lnSpc>
+                  <a:spcPct val="120000"/>
+                </a:lnSpc>
+              </a:pPr>
+              <a:r>
+                <a:rPr lang="en-US" altLang="zh-CN" sz="400">
+                  <a:latin typeface="Ubuntu Mono" panose="020B0509030602030204" charset="0"/>
+                  <a:cs typeface="Ubuntu Mono" panose="020B0509030602030204" charset="0"/>
+                  <a:sym typeface="+mn-ea"/>
+                </a:rPr>
+                <a:t>                                                     OG0000003.fasta</a:t>
+              </a:r>
+              <a:endParaRPr lang="en-US" altLang="zh-CN" sz="400">
+                <a:latin typeface="Ubuntu Mono" panose="020B0509030602030204" charset="0"/>
+                <a:cs typeface="Ubuntu Mono" panose="020B0509030602030204" charset="0"/>
+                <a:sym typeface="+mn-ea"/>
+              </a:endParaRPr>
+            </a:p>
+            <a:p>
+              <a:pPr indent="0" algn="l" fontAlgn="auto">
+                <a:lnSpc>
+                  <a:spcPct val="120000"/>
+                </a:lnSpc>
+              </a:pPr>
+              <a:r>
+                <a:rPr lang="zh-CN" altLang="en-US" sz="400">
+                  <a:sym typeface="+mn-ea"/>
+                </a:rPr>
+                <a:t>--copy-mode</a:t>
+              </a:r>
+              <a:r>
+                <a:rPr lang="en-US" altLang="zh-CN" sz="400">
+                  <a:sym typeface="+mn-ea"/>
+                </a:rPr>
+                <a:t> </a:t>
+              </a:r>
+              <a:r>
+                <a:rPr lang="zh-CN" altLang="en-US" sz="400">
+                  <a:sym typeface="+mn-ea"/>
+                </a:rPr>
+                <a:t>single-copy</a:t>
+              </a:r>
+              <a:r>
+                <a:rPr lang="en-US" altLang="zh-CN" sz="400">
+                  <a:sym typeface="+mn-ea"/>
+                </a:rPr>
+                <a:t> --min-taxa 5                                </a:t>
+              </a:r>
+              <a:endParaRPr lang="en-US" altLang="zh-CN" sz="400">
+                <a:sym typeface="+mn-ea"/>
+              </a:endParaRPr>
+            </a:p>
+            <a:p>
+              <a:pPr indent="0" algn="l" fontAlgn="auto">
+                <a:lnSpc>
+                  <a:spcPct val="120000"/>
+                </a:lnSpc>
+              </a:pPr>
+              <a:r>
+                <a:rPr lang="en-US" altLang="zh-CN" sz="400">
+                  <a:latin typeface="Ubuntu Mono" panose="020B0509030602030204" charset="0"/>
+                  <a:cs typeface="Ubuntu Mono" panose="020B0509030602030204" charset="0"/>
+                  <a:sym typeface="+mn-ea"/>
+                </a:rPr>
+                <a:t>OG0000000.fasta                                      </a:t>
+              </a:r>
+              <a:r>
+                <a:rPr lang="zh-CN" altLang="en-US" sz="400">
+                  <a:sym typeface="+mn-ea"/>
+                </a:rPr>
+                <a:t>--copy-mode</a:t>
+              </a:r>
+              <a:r>
+                <a:rPr lang="en-US" altLang="zh-CN" sz="400">
+                  <a:sym typeface="+mn-ea"/>
+                </a:rPr>
+                <a:t> </a:t>
+              </a:r>
+              <a:r>
+                <a:rPr lang="zh-CN" altLang="en-US" sz="400">
+                  <a:sym typeface="+mn-ea"/>
+                </a:rPr>
+                <a:t>all-copies</a:t>
+              </a:r>
+              <a:r>
+                <a:rPr lang="en-US" altLang="zh-CN" sz="400">
+                  <a:sym typeface="+mn-ea"/>
+                </a:rPr>
+                <a:t> --min-taxa 5</a:t>
+              </a:r>
+              <a:endParaRPr lang="en-US" altLang="zh-CN" sz="400">
+                <a:latin typeface="Ubuntu Mono" panose="020B0509030602030204" charset="0"/>
+                <a:cs typeface="Ubuntu Mono" panose="020B0509030602030204" charset="0"/>
+                <a:sym typeface="+mn-ea"/>
+              </a:endParaRPr>
+            </a:p>
+            <a:p>
+              <a:pPr indent="0" algn="l" fontAlgn="auto">
+                <a:lnSpc>
+                  <a:spcPct val="120000"/>
+                </a:lnSpc>
+              </a:pPr>
+              <a:r>
+                <a:rPr lang="en-US" altLang="zh-CN" sz="400">
+                  <a:latin typeface="Ubuntu Mono" panose="020B0509030602030204" charset="0"/>
+                  <a:cs typeface="Ubuntu Mono" panose="020B0509030602030204" charset="0"/>
+                  <a:sym typeface="+mn-ea"/>
+                </a:rPr>
+                <a:t>OG0000002.fasta                                      OG0000000.fasta</a:t>
+              </a:r>
+              <a:endParaRPr lang="en-US" altLang="zh-CN" sz="400">
+                <a:latin typeface="Ubuntu Mono" panose="020B0509030602030204" charset="0"/>
+                <a:cs typeface="Ubuntu Mono" panose="020B0509030602030204" charset="0"/>
+                <a:sym typeface="+mn-ea"/>
+              </a:endParaRPr>
+            </a:p>
+            <a:p>
+              <a:pPr indent="0" algn="l" fontAlgn="auto">
+                <a:lnSpc>
+                  <a:spcPct val="120000"/>
+                </a:lnSpc>
+              </a:pPr>
+              <a:r>
+                <a:rPr lang="en-US" altLang="zh-CN" sz="400">
+                  <a:latin typeface="Ubuntu Mono" panose="020B0509030602030204" charset="0"/>
+                  <a:cs typeface="Ubuntu Mono" panose="020B0509030602030204" charset="0"/>
+                  <a:sym typeface="+mn-ea"/>
+                </a:rPr>
+                <a:t>OG0000004.fasta                                      OG0000002.fasta</a:t>
+              </a:r>
+              <a:endParaRPr lang="en-US" altLang="zh-CN" sz="400">
+                <a:latin typeface="Ubuntu Mono" panose="020B0509030602030204" charset="0"/>
+                <a:cs typeface="Ubuntu Mono" panose="020B0509030602030204" charset="0"/>
+                <a:sym typeface="+mn-ea"/>
+              </a:endParaRPr>
+            </a:p>
+            <a:p>
+              <a:pPr indent="0" algn="l" fontAlgn="auto">
+                <a:lnSpc>
+                  <a:spcPct val="120000"/>
+                </a:lnSpc>
+              </a:pPr>
+              <a:r>
+                <a:rPr lang="en-US" altLang="zh-CN" sz="400">
+                  <a:latin typeface="Ubuntu Mono" panose="020B0509030602030204" charset="0"/>
+                  <a:cs typeface="Ubuntu Mono" panose="020B0509030602030204" charset="0"/>
+                  <a:sym typeface="+mn-ea"/>
+                </a:rPr>
+                <a:t>                                                     OG0000003.fasta</a:t>
+              </a:r>
+              <a:endParaRPr lang="en-US" altLang="zh-CN" sz="400">
+                <a:latin typeface="Ubuntu Mono" panose="020B0509030602030204" charset="0"/>
+                <a:cs typeface="Ubuntu Mono" panose="020B0509030602030204" charset="0"/>
+                <a:sym typeface="+mn-ea"/>
+              </a:endParaRPr>
+            </a:p>
+            <a:p>
+              <a:pPr indent="0" algn="l" fontAlgn="auto">
+                <a:lnSpc>
+                  <a:spcPct val="120000"/>
+                </a:lnSpc>
+              </a:pPr>
+              <a:r>
+                <a:rPr lang="en-US" altLang="zh-CN" sz="400">
+                  <a:latin typeface="Ubuntu Mono" panose="020B0509030602030204" charset="0"/>
+                  <a:cs typeface="Ubuntu Mono" panose="020B0509030602030204" charset="0"/>
+                  <a:sym typeface="+mn-ea"/>
+                </a:rPr>
+                <a:t>                                                     OG0000004.fasta</a:t>
+              </a:r>
+              <a:endParaRPr lang="en-US" altLang="zh-CN" sz="400">
+                <a:solidFill>
+                  <a:schemeClr val="tx1"/>
+                </a:solidFill>
+                <a:latin typeface="Ubuntu Mono" panose="020B0509030602030204" charset="0"/>
+                <a:cs typeface="Ubuntu Mono" panose="020B0509030602030204" charset="0"/>
+                <a:sym typeface="+mn-ea"/>
+              </a:endParaRPr>
+            </a:p>
+          </p:txBody>
+        </p:sp>
+        <p:sp>
+          <p:nvSpPr>
+            <p:cNvPr id="28" name="右箭头 27"/>
+            <p:cNvSpPr/>
+            <p:nvPr/>
+          </p:nvSpPr>
+          <p:spPr>
+            <a:xfrm rot="5400000">
+              <a:off x="1191" y="1486"/>
+              <a:ext cx="225" cy="119"/>
+            </a:xfrm>
+            <a:prstGeom prst="rightArrow">
+              <a:avLst/>
+            </a:prstGeom>
+            <a:solidFill>
+              <a:schemeClr val="bg1">
+                <a:lumMod val="75000"/>
+              </a:schemeClr>
+            </a:solidFill>
+            <a:ln>
+              <a:noFill/>
+            </a:ln>
+          </p:spPr>
+          <p:style>
+            <a:lnRef idx="2">
+              <a:schemeClr val="accent1">
+                <a:lumMod val="75000"/>
+              </a:schemeClr>
+            </a:lnRef>
+            <a:fillRef idx="1">
+              <a:schemeClr val="accent1"/>
+            </a:fillRef>
+            <a:effectRef idx="0">
+              <a:srgbClr val="FFFFFF"/>
+            </a:effectRef>
+            <a:fontRef idx="minor">
+              <a:schemeClr val="lt1"/>
+            </a:fontRef>
+          </p:style>
+          <p:txBody>
+            <a:bodyPr rtlCol="0" anchor="ctr"/>
+            <a:p>
+              <a:pPr algn="ctr"/>
+              <a:endParaRPr lang="zh-CN" altLang="en-US"/>
+            </a:p>
+          </p:txBody>
+        </p:sp>
+        <p:sp>
+          <p:nvSpPr>
+            <p:cNvPr id="32" name="矩形 31"/>
+            <p:cNvSpPr/>
+            <p:nvPr/>
+          </p:nvSpPr>
+          <p:spPr>
+            <a:xfrm>
+              <a:off x="243" y="164"/>
+              <a:ext cx="5147" cy="3158"/>
+            </a:xfrm>
+            <a:prstGeom prst="rect">
+              <a:avLst/>
+            </a:prstGeom>
+            <a:noFill/>
+            <a:ln w="6350">
+              <a:solidFill>
+                <a:schemeClr val="bg1">
+                  <a:lumMod val="85000"/>
+                </a:schemeClr>
+              </a:solidFill>
+            </a:ln>
+            <a:extLst>
+              <a:ext uri="{909E8E84-426E-40DD-AFC4-6F175D3DCCD1}">
+                <a14:hiddenFill xmlns:a14="http://schemas.microsoft.com/office/drawing/2010/main">
+                  <a:solidFill>
+                    <a:schemeClr val="bg1">
+                      <a:lumMod val="85000"/>
+                    </a:schemeClr>
+                  </a:solidFill>
+                </a14:hiddenFill>
+              </a:ext>
+            </a:extLst>
+          </p:spPr>
+          <p:style>
+            <a:lnRef idx="2">
+              <a:schemeClr val="accent1">
+                <a:lumMod val="75000"/>
+              </a:schemeClr>
+            </a:lnRef>
+            <a:fillRef idx="1">
+              <a:schemeClr val="accent1"/>
+            </a:fillRef>
+            <a:effectRef idx="0">
+              <a:srgbClr val="FFFFFF"/>
+            </a:effectRef>
+            <a:fontRef idx="minor">
+              <a:schemeClr val="lt1"/>
+            </a:fontRef>
+          </p:style>
+          <p:txBody>
+            <a:bodyPr rtlCol="0" anchor="ctr"/>
+            <a:p>
+              <a:pPr algn="ctr"/>
+              <a:endParaRPr lang="zh-CN" altLang="en-US"/>
+            </a:p>
+          </p:txBody>
+        </p:sp>
+        <p:sp>
+          <p:nvSpPr>
+            <p:cNvPr id="56" name="文本框 55"/>
+            <p:cNvSpPr txBox="1"/>
+            <p:nvPr/>
+          </p:nvSpPr>
+          <p:spPr>
+            <a:xfrm>
+              <a:off x="235" y="3056"/>
+              <a:ext cx="4982" cy="265"/>
+            </a:xfrm>
+            <a:prstGeom prst="rect">
+              <a:avLst/>
+            </a:prstGeom>
+            <a:noFill/>
+          </p:spPr>
+          <p:txBody>
+            <a:bodyPr wrap="square" rtlCol="0" anchor="t">
+              <a:spAutoFit/>
+            </a:bodyPr>
+            <a:p>
+              <a:r>
+                <a:rPr lang="zh-CN" altLang="en-US" sz="500">
+                  <a:solidFill>
+                    <a:srgbClr val="0B8A98"/>
+                  </a:solidFill>
+                  <a:latin typeface="Arial" panose="020B0604020202020204" pitchFamily="34" charset="0"/>
+                  <a:cs typeface="Arial" panose="020B0604020202020204" pitchFamily="34" charset="0"/>
+                </a:rPr>
+                <a:t>extract_orthofinder_orthogroups.py</a:t>
+              </a:r>
+              <a:endParaRPr lang="zh-CN" altLang="en-US" sz="500">
+                <a:solidFill>
+                  <a:srgbClr val="0B8A98"/>
+                </a:solidFill>
+                <a:latin typeface="Arial" panose="020B0604020202020204" pitchFamily="34" charset="0"/>
+                <a:cs typeface="Arial" panose="020B0604020202020204" pitchFamily="34" charset="0"/>
+              </a:endParaRPr>
+            </a:p>
+          </p:txBody>
+        </p:sp>
+        <p:sp>
+          <p:nvSpPr>
+            <p:cNvPr id="72" name="文本框 71"/>
+            <p:cNvSpPr txBox="1"/>
+            <p:nvPr/>
+          </p:nvSpPr>
+          <p:spPr>
+            <a:xfrm>
+              <a:off x="235" y="164"/>
+              <a:ext cx="5295" cy="507"/>
+            </a:xfrm>
+            <a:prstGeom prst="rect">
+              <a:avLst/>
+            </a:prstGeom>
+            <a:noFill/>
+          </p:spPr>
+          <p:txBody>
+            <a:bodyPr wrap="square" rtlCol="0" anchor="t">
+              <a:spAutoFit/>
+            </a:bodyPr>
+            <a:p>
+              <a:pPr algn="l"/>
+              <a:r>
+                <a:rPr lang="en-US" sz="1000" b="1">
+                  <a:latin typeface="Arial" panose="020B0604020202020204" pitchFamily="34" charset="0"/>
+                  <a:cs typeface="Arial" panose="020B0604020202020204" pitchFamily="34" charset="0"/>
+                </a:rPr>
+                <a:t>A</a:t>
+              </a:r>
+              <a:endParaRPr lang="en-US" sz="1000" b="1">
+                <a:latin typeface="Arial" panose="020B0604020202020204" pitchFamily="34" charset="0"/>
+                <a:cs typeface="Arial" panose="020B0604020202020204" pitchFamily="34" charset="0"/>
+              </a:endParaRPr>
+            </a:p>
+            <a:p>
+              <a:pPr algn="l"/>
+              <a:r>
+                <a:rPr sz="500" b="1">
+                  <a:latin typeface="Arial" panose="020B0604020202020204" pitchFamily="34" charset="0"/>
+                  <a:cs typeface="Arial" panose="020B0604020202020204" pitchFamily="34" charset="0"/>
+                </a:rPr>
+                <a:t>Extract selected single-copy or multi-copy sequence orthogroups from OrthoFinder Orthogroups.tsv</a:t>
+              </a:r>
+              <a:endParaRPr sz="500" b="1">
+                <a:latin typeface="Arial" panose="020B0604020202020204" pitchFamily="34" charset="0"/>
+                <a:cs typeface="Arial" panose="020B0604020202020204" pitchFamily="34" charset="0"/>
+              </a:endParaRPr>
+            </a:p>
+          </p:txBody>
+        </p:sp>
+      </p:grpSp>
     </p:spTree>
   </p:cSld>
   <p:clrMapOvr>

--- a/docs/workflow.pptx
+++ b/docs/workflow.pptx
@@ -113,12 +113,12 @@
   <p:extLst>
     <p:ext uri="{EFAFB233-063F-42B5-8137-9DF3F51BA10A}">
       <p15:sldGuideLst xmlns:p15="http://schemas.microsoft.com/office/powerpoint/2012/main">
-        <p15:guide id="1" orient="horz" pos="3889" userDrawn="1">
+        <p15:guide id="1" orient="horz" pos="3954" userDrawn="1">
           <p15:clr>
             <a:srgbClr val="A4A3A4"/>
           </p15:clr>
         </p15:guide>
-        <p15:guide id="2" pos="2152" userDrawn="1">
+        <p15:guide id="2" pos="2137" userDrawn="1">
           <p15:clr>
             <a:srgbClr val="A4A3A4"/>
           </p15:clr>
@@ -3520,13 +3520,888 @@
       </p:grpSpPr>
       <p:grpSp>
         <p:nvGrpSpPr>
+          <p:cNvPr id="130" name="组合 129"/>
+          <p:cNvGrpSpPr/>
+          <p:nvPr/>
+        </p:nvGrpSpPr>
+        <p:grpSpPr>
+          <a:xfrm>
+            <a:off x="45085" y="49530"/>
+            <a:ext cx="6891655" cy="1392555"/>
+            <a:chOff x="79" y="78"/>
+            <a:chExt cx="10853" cy="2193"/>
+          </a:xfrm>
+        </p:grpSpPr>
+        <p:sp>
+          <p:nvSpPr>
+            <p:cNvPr id="2" name="文本框 1"/>
+            <p:cNvSpPr txBox="1"/>
+            <p:nvPr/>
+          </p:nvSpPr>
+          <p:spPr>
+            <a:xfrm>
+              <a:off x="228" y="545"/>
+              <a:ext cx="992" cy="956"/>
+            </a:xfrm>
+            <a:prstGeom prst="rect">
+              <a:avLst/>
+            </a:prstGeom>
+            <a:solidFill>
+              <a:srgbClr val="F8FAFC"/>
+            </a:solidFill>
+          </p:spPr>
+          <p:txBody>
+            <a:bodyPr wrap="square" rtlCol="0">
+              <a:noAutofit/>
+            </a:bodyPr>
+            <a:p>
+              <a:pPr algn="l" fontAlgn="auto">
+                <a:lnSpc>
+                  <a:spcPct val="120000"/>
+                </a:lnSpc>
+                <a:buClrTx/>
+                <a:buSzTx/>
+                <a:buFontTx/>
+              </a:pPr>
+              <a:r>
+                <a:rPr lang="en-US" altLang="zh-CN" sz="400" b="1">
+                  <a:latin typeface="Arial" panose="020B0604020202020204" pitchFamily="34" charset="0"/>
+                  <a:cs typeface="Arial" panose="020B0604020202020204" pitchFamily="34" charset="0"/>
+                  <a:sym typeface="+mn-ea"/>
+                </a:rPr>
+                <a:t>Taxa FASTA files</a:t>
+              </a:r>
+              <a:endParaRPr lang="en-US" altLang="zh-CN" sz="400">
+                <a:latin typeface="Arial" panose="020B0604020202020204" pitchFamily="34" charset="0"/>
+                <a:cs typeface="Arial" panose="020B0604020202020204" pitchFamily="34" charset="0"/>
+                <a:sym typeface="+mn-ea"/>
+              </a:endParaRPr>
+            </a:p>
+            <a:p>
+              <a:pPr algn="l" fontAlgn="auto">
+                <a:lnSpc>
+                  <a:spcPct val="120000"/>
+                </a:lnSpc>
+                <a:buClrTx/>
+                <a:buSzTx/>
+                <a:buFontTx/>
+              </a:pPr>
+              <a:r>
+                <a:rPr lang="en-US" altLang="zh-CN" sz="400">
+                  <a:latin typeface="Arial" panose="020B0604020202020204" pitchFamily="34" charset="0"/>
+                  <a:cs typeface="Arial" panose="020B0604020202020204" pitchFamily="34" charset="0"/>
+                  <a:sym typeface="+mn-ea"/>
+                </a:rPr>
+                <a:t>taxa</a:t>
+              </a:r>
+              <a:r>
+                <a:rPr lang="en-US" altLang="zh-CN" sz="400">
+                  <a:solidFill>
+                    <a:schemeClr val="tx1"/>
+                  </a:solidFill>
+                  <a:latin typeface="Arial" panose="020B0604020202020204" pitchFamily="34" charset="0"/>
+                  <a:cs typeface="Arial" panose="020B0604020202020204" pitchFamily="34" charset="0"/>
+                  <a:sym typeface="+mn-ea"/>
+                </a:rPr>
+                <a:t>1.fa</a:t>
+              </a:r>
+              <a:endParaRPr lang="en-US" altLang="zh-CN" sz="400">
+                <a:solidFill>
+                  <a:schemeClr val="tx1"/>
+                </a:solidFill>
+                <a:latin typeface="Arial" panose="020B0604020202020204" pitchFamily="34" charset="0"/>
+                <a:cs typeface="Arial" panose="020B0604020202020204" pitchFamily="34" charset="0"/>
+                <a:sym typeface="+mn-ea"/>
+              </a:endParaRPr>
+            </a:p>
+            <a:p>
+              <a:pPr algn="l" fontAlgn="auto">
+                <a:lnSpc>
+                  <a:spcPct val="120000"/>
+                </a:lnSpc>
+                <a:buClrTx/>
+                <a:buSzTx/>
+                <a:buFontTx/>
+              </a:pPr>
+              <a:r>
+                <a:rPr lang="en-US" altLang="zh-CN" sz="400">
+                  <a:latin typeface="Arial" panose="020B0604020202020204" pitchFamily="34" charset="0"/>
+                  <a:cs typeface="Arial" panose="020B0604020202020204" pitchFamily="34" charset="0"/>
+                  <a:sym typeface="+mn-ea"/>
+                </a:rPr>
+                <a:t>taxa</a:t>
+              </a:r>
+              <a:r>
+                <a:rPr lang="en-US" altLang="zh-CN" sz="400">
+                  <a:solidFill>
+                    <a:schemeClr val="tx1"/>
+                  </a:solidFill>
+                  <a:latin typeface="Arial" panose="020B0604020202020204" pitchFamily="34" charset="0"/>
+                  <a:cs typeface="Arial" panose="020B0604020202020204" pitchFamily="34" charset="0"/>
+                  <a:sym typeface="+mn-ea"/>
+                </a:rPr>
+                <a:t>2.fa</a:t>
+              </a:r>
+              <a:endParaRPr lang="en-US" altLang="zh-CN" sz="400">
+                <a:solidFill>
+                  <a:schemeClr val="tx1"/>
+                </a:solidFill>
+                <a:latin typeface="Arial" panose="020B0604020202020204" pitchFamily="34" charset="0"/>
+                <a:cs typeface="Arial" panose="020B0604020202020204" pitchFamily="34" charset="0"/>
+                <a:sym typeface="+mn-ea"/>
+              </a:endParaRPr>
+            </a:p>
+            <a:p>
+              <a:pPr algn="l" fontAlgn="auto">
+                <a:lnSpc>
+                  <a:spcPct val="120000"/>
+                </a:lnSpc>
+                <a:buClrTx/>
+                <a:buSzTx/>
+                <a:buFontTx/>
+              </a:pPr>
+              <a:r>
+                <a:rPr lang="en-US" altLang="zh-CN" sz="400">
+                  <a:latin typeface="Arial" panose="020B0604020202020204" pitchFamily="34" charset="0"/>
+                  <a:cs typeface="Arial" panose="020B0604020202020204" pitchFamily="34" charset="0"/>
+                  <a:sym typeface="+mn-ea"/>
+                </a:rPr>
+                <a:t>taxa</a:t>
+              </a:r>
+              <a:r>
+                <a:rPr lang="en-US" altLang="zh-CN" sz="400">
+                  <a:solidFill>
+                    <a:schemeClr val="tx1"/>
+                  </a:solidFill>
+                  <a:latin typeface="Arial" panose="020B0604020202020204" pitchFamily="34" charset="0"/>
+                  <a:cs typeface="Arial" panose="020B0604020202020204" pitchFamily="34" charset="0"/>
+                  <a:sym typeface="+mn-ea"/>
+                </a:rPr>
+                <a:t>3.fa</a:t>
+              </a:r>
+              <a:endParaRPr lang="en-US" altLang="zh-CN" sz="400">
+                <a:solidFill>
+                  <a:schemeClr val="tx1"/>
+                </a:solidFill>
+                <a:latin typeface="Arial" panose="020B0604020202020204" pitchFamily="34" charset="0"/>
+                <a:cs typeface="Arial" panose="020B0604020202020204" pitchFamily="34" charset="0"/>
+                <a:sym typeface="+mn-ea"/>
+              </a:endParaRPr>
+            </a:p>
+            <a:p>
+              <a:pPr algn="l" fontAlgn="auto">
+                <a:lnSpc>
+                  <a:spcPct val="120000"/>
+                </a:lnSpc>
+                <a:buClrTx/>
+                <a:buSzTx/>
+                <a:buFontTx/>
+              </a:pPr>
+              <a:r>
+                <a:rPr lang="en-US" altLang="zh-CN" sz="400">
+                  <a:latin typeface="Arial" panose="020B0604020202020204" pitchFamily="34" charset="0"/>
+                  <a:cs typeface="Arial" panose="020B0604020202020204" pitchFamily="34" charset="0"/>
+                  <a:sym typeface="+mn-ea"/>
+                </a:rPr>
+                <a:t>taxa4</a:t>
+              </a:r>
+              <a:r>
+                <a:rPr lang="en-US" altLang="zh-CN" sz="400">
+                  <a:solidFill>
+                    <a:schemeClr val="tx1"/>
+                  </a:solidFill>
+                  <a:latin typeface="Arial" panose="020B0604020202020204" pitchFamily="34" charset="0"/>
+                  <a:cs typeface="Arial" panose="020B0604020202020204" pitchFamily="34" charset="0"/>
+                  <a:sym typeface="+mn-ea"/>
+                </a:rPr>
+                <a:t>.fa</a:t>
+              </a:r>
+              <a:endParaRPr lang="en-US" altLang="zh-CN" sz="400">
+                <a:solidFill>
+                  <a:schemeClr val="tx1"/>
+                </a:solidFill>
+                <a:latin typeface="Arial" panose="020B0604020202020204" pitchFamily="34" charset="0"/>
+                <a:cs typeface="Arial" panose="020B0604020202020204" pitchFamily="34" charset="0"/>
+                <a:sym typeface="+mn-ea"/>
+              </a:endParaRPr>
+            </a:p>
+            <a:p>
+              <a:pPr algn="l" fontAlgn="auto">
+                <a:lnSpc>
+                  <a:spcPct val="120000"/>
+                </a:lnSpc>
+                <a:buClrTx/>
+                <a:buSzTx/>
+                <a:buFontTx/>
+              </a:pPr>
+              <a:r>
+                <a:rPr lang="en-US" altLang="zh-CN" sz="400">
+                  <a:latin typeface="Arial" panose="020B0604020202020204" pitchFamily="34" charset="0"/>
+                  <a:cs typeface="Arial" panose="020B0604020202020204" pitchFamily="34" charset="0"/>
+                  <a:sym typeface="+mn-ea"/>
+                </a:rPr>
+                <a:t>taxa5</a:t>
+              </a:r>
+              <a:r>
+                <a:rPr lang="en-US" altLang="zh-CN" sz="400">
+                  <a:solidFill>
+                    <a:schemeClr val="tx1"/>
+                  </a:solidFill>
+                  <a:latin typeface="Arial" panose="020B0604020202020204" pitchFamily="34" charset="0"/>
+                  <a:cs typeface="Arial" panose="020B0604020202020204" pitchFamily="34" charset="0"/>
+                  <a:sym typeface="+mn-ea"/>
+                </a:rPr>
+                <a:t>.fa</a:t>
+              </a:r>
+              <a:endParaRPr lang="en-US" altLang="zh-CN" sz="400">
+                <a:solidFill>
+                  <a:schemeClr val="tx1"/>
+                </a:solidFill>
+                <a:latin typeface="Arial" panose="020B0604020202020204" pitchFamily="34" charset="0"/>
+                <a:cs typeface="Arial" panose="020B0604020202020204" pitchFamily="34" charset="0"/>
+                <a:sym typeface="+mn-ea"/>
+              </a:endParaRPr>
+            </a:p>
+            <a:p>
+              <a:pPr algn="l" fontAlgn="auto">
+                <a:lnSpc>
+                  <a:spcPct val="120000"/>
+                </a:lnSpc>
+                <a:buClrTx/>
+                <a:buSzTx/>
+                <a:buFontTx/>
+              </a:pPr>
+              <a:r>
+                <a:rPr lang="en-US" altLang="zh-CN" sz="400">
+                  <a:latin typeface="Arial" panose="020B0604020202020204" pitchFamily="34" charset="0"/>
+                  <a:cs typeface="Arial" panose="020B0604020202020204" pitchFamily="34" charset="0"/>
+                  <a:sym typeface="+mn-ea"/>
+                </a:rPr>
+                <a:t>taxa6.fa</a:t>
+              </a:r>
+              <a:endParaRPr lang="en-US" altLang="zh-CN" sz="400">
+                <a:solidFill>
+                  <a:schemeClr val="tx1"/>
+                </a:solidFill>
+                <a:latin typeface="Arial" panose="020B0604020202020204" pitchFamily="34" charset="0"/>
+                <a:cs typeface="Arial" panose="020B0604020202020204" pitchFamily="34" charset="0"/>
+                <a:sym typeface="+mn-ea"/>
+              </a:endParaRPr>
+            </a:p>
+            <a:p>
+              <a:pPr algn="l" fontAlgn="auto">
+                <a:lnSpc>
+                  <a:spcPct val="120000"/>
+                </a:lnSpc>
+                <a:buClrTx/>
+                <a:buSzTx/>
+                <a:buFontTx/>
+              </a:pPr>
+              <a:endParaRPr lang="en-US" altLang="zh-CN" sz="400">
+                <a:solidFill>
+                  <a:schemeClr val="tx1"/>
+                </a:solidFill>
+                <a:latin typeface="Arial" panose="020B0604020202020204" pitchFamily="34" charset="0"/>
+                <a:cs typeface="Arial" panose="020B0604020202020204" pitchFamily="34" charset="0"/>
+                <a:sym typeface="+mn-ea"/>
+              </a:endParaRPr>
+            </a:p>
+          </p:txBody>
+        </p:sp>
+        <p:sp>
+          <p:nvSpPr>
+            <p:cNvPr id="15" name="文本框 14"/>
+            <p:cNvSpPr txBox="1"/>
+            <p:nvPr/>
+          </p:nvSpPr>
+          <p:spPr>
+            <a:xfrm>
+              <a:off x="1544" y="545"/>
+              <a:ext cx="3791" cy="956"/>
+            </a:xfrm>
+            <a:prstGeom prst="rect">
+              <a:avLst/>
+            </a:prstGeom>
+            <a:solidFill>
+              <a:srgbClr val="F8FAFC"/>
+            </a:solidFill>
+          </p:spPr>
+          <p:txBody>
+            <a:bodyPr wrap="square" rtlCol="0">
+              <a:spAutoFit/>
+            </a:bodyPr>
+            <a:p>
+              <a:pPr algn="l" fontAlgn="auto">
+                <a:lnSpc>
+                  <a:spcPct val="120000"/>
+                </a:lnSpc>
+                <a:buClrTx/>
+                <a:buSzTx/>
+                <a:buFontTx/>
+              </a:pPr>
+              <a:r>
+                <a:rPr lang="en-US" altLang="zh-CN" sz="400" b="1">
+                  <a:latin typeface="Arial" panose="020B0604020202020204" pitchFamily="34" charset="0"/>
+                  <a:cs typeface="Arial" panose="020B0604020202020204" pitchFamily="34" charset="0"/>
+                  <a:sym typeface="+mn-ea"/>
+                </a:rPr>
+                <a:t>OrthoFinder Orthogroups.tsv (example)</a:t>
+              </a:r>
+              <a:endParaRPr lang="en-US" altLang="zh-CN" sz="400">
+                <a:solidFill>
+                  <a:schemeClr val="tx1"/>
+                </a:solidFill>
+                <a:latin typeface="Arial" panose="020B0604020202020204" pitchFamily="34" charset="0"/>
+                <a:cs typeface="Arial" panose="020B0604020202020204" pitchFamily="34" charset="0"/>
+                <a:sym typeface="+mn-ea"/>
+              </a:endParaRPr>
+            </a:p>
+            <a:p>
+              <a:pPr algn="l" fontAlgn="auto">
+                <a:lnSpc>
+                  <a:spcPct val="120000"/>
+                </a:lnSpc>
+                <a:buClrTx/>
+                <a:buSzTx/>
+                <a:buFontTx/>
+              </a:pPr>
+              <a:r>
+                <a:rPr lang="en-US" altLang="zh-CN" sz="400">
+                  <a:solidFill>
+                    <a:schemeClr val="tx1"/>
+                  </a:solidFill>
+                  <a:latin typeface="Arial" panose="020B0604020202020204" pitchFamily="34" charset="0"/>
+                  <a:cs typeface="Arial" panose="020B0604020202020204" pitchFamily="34" charset="0"/>
+                  <a:sym typeface="+mn-ea"/>
+                </a:rPr>
+                <a:t>Orthogroup          </a:t>
+              </a:r>
+              <a:r>
+                <a:rPr lang="en-US" altLang="zh-CN" sz="400">
+                  <a:latin typeface="Arial" panose="020B0604020202020204" pitchFamily="34" charset="0"/>
+                  <a:cs typeface="Arial" panose="020B0604020202020204" pitchFamily="34" charset="0"/>
+                  <a:sym typeface="+mn-ea"/>
+                </a:rPr>
+                <a:t>taxa</a:t>
+              </a:r>
+              <a:r>
+                <a:rPr lang="en-US" altLang="zh-CN" sz="400">
+                  <a:solidFill>
+                    <a:schemeClr val="tx1"/>
+                  </a:solidFill>
+                  <a:latin typeface="Arial" panose="020B0604020202020204" pitchFamily="34" charset="0"/>
+                  <a:cs typeface="Arial" panose="020B0604020202020204" pitchFamily="34" charset="0"/>
+                  <a:sym typeface="+mn-ea"/>
+                </a:rPr>
+                <a:t>1</a:t>
+              </a:r>
+              <a:r>
+                <a:rPr lang="en-US" altLang="zh-CN" sz="400">
+                  <a:latin typeface="Arial" panose="020B0604020202020204" pitchFamily="34" charset="0"/>
+                  <a:cs typeface="Arial" panose="020B0604020202020204" pitchFamily="34" charset="0"/>
+                  <a:sym typeface="+mn-ea"/>
+                </a:rPr>
+                <a:t>           taxa2           taxa</a:t>
+              </a:r>
+              <a:r>
+                <a:rPr lang="en-US" altLang="zh-CN" sz="400">
+                  <a:latin typeface="Arial" panose="020B0604020202020204" pitchFamily="34" charset="0"/>
+                  <a:cs typeface="Arial" panose="020B0604020202020204" pitchFamily="34" charset="0"/>
+                  <a:sym typeface="+mn-ea"/>
+                </a:rPr>
+                <a:t>3                         taxa4           taxa</a:t>
+              </a:r>
+              <a:r>
+                <a:rPr lang="en-US" altLang="zh-CN" sz="400">
+                  <a:latin typeface="Arial" panose="020B0604020202020204" pitchFamily="34" charset="0"/>
+                  <a:cs typeface="Arial" panose="020B0604020202020204" pitchFamily="34" charset="0"/>
+                  <a:sym typeface="+mn-ea"/>
+                </a:rPr>
+                <a:t>5           taxa6</a:t>
+              </a:r>
+              <a:endParaRPr lang="en-US" altLang="zh-CN" sz="400">
+                <a:latin typeface="Arial" panose="020B0604020202020204" pitchFamily="34" charset="0"/>
+                <a:cs typeface="Arial" panose="020B0604020202020204" pitchFamily="34" charset="0"/>
+                <a:sym typeface="+mn-ea"/>
+              </a:endParaRPr>
+            </a:p>
+            <a:p>
+              <a:pPr algn="l" fontAlgn="auto">
+                <a:lnSpc>
+                  <a:spcPct val="120000"/>
+                </a:lnSpc>
+                <a:buClrTx/>
+                <a:buSzTx/>
+                <a:buFontTx/>
+              </a:pPr>
+              <a:r>
+                <a:rPr lang="en-US" altLang="zh-CN" sz="400">
+                  <a:solidFill>
+                    <a:schemeClr val="tx1"/>
+                  </a:solidFill>
+                  <a:latin typeface="Arial" panose="020B0604020202020204" pitchFamily="34" charset="0"/>
+                  <a:cs typeface="Arial" panose="020B0604020202020204" pitchFamily="34" charset="0"/>
+                  <a:sym typeface="+mn-ea"/>
+                </a:rPr>
+                <a:t>OG0000000         sp1_g1        </a:t>
+              </a:r>
+              <a:r>
+                <a:rPr lang="en-US" altLang="zh-CN" sz="400">
+                  <a:latin typeface="Arial" panose="020B0604020202020204" pitchFamily="34" charset="0"/>
+                  <a:cs typeface="Arial" panose="020B0604020202020204" pitchFamily="34" charset="0"/>
+                  <a:sym typeface="+mn-ea"/>
+                </a:rPr>
+                <a:t>sp2_g1        sp3_g1                     sp4_g1         sp5_g1        sp6_g1</a:t>
+              </a:r>
+              <a:endParaRPr lang="en-US" altLang="zh-CN" sz="400">
+                <a:solidFill>
+                  <a:schemeClr val="tx1"/>
+                </a:solidFill>
+                <a:latin typeface="Arial" panose="020B0604020202020204" pitchFamily="34" charset="0"/>
+                <a:cs typeface="Arial" panose="020B0604020202020204" pitchFamily="34" charset="0"/>
+                <a:sym typeface="+mn-ea"/>
+              </a:endParaRPr>
+            </a:p>
+            <a:p>
+              <a:pPr algn="l" fontAlgn="auto">
+                <a:lnSpc>
+                  <a:spcPct val="120000"/>
+                </a:lnSpc>
+                <a:buClrTx/>
+                <a:buSzTx/>
+                <a:buFontTx/>
+              </a:pPr>
+              <a:r>
+                <a:rPr lang="en-US" altLang="zh-CN" sz="400">
+                  <a:solidFill>
+                    <a:schemeClr val="tx1"/>
+                  </a:solidFill>
+                  <a:latin typeface="Arial" panose="020B0604020202020204" pitchFamily="34" charset="0"/>
+                  <a:cs typeface="Arial" panose="020B0604020202020204" pitchFamily="34" charset="0"/>
+                  <a:sym typeface="+mn-ea"/>
+                </a:rPr>
+                <a:t>OG0000001         </a:t>
+              </a:r>
+              <a:r>
+                <a:rPr lang="en-US" altLang="zh-CN" sz="400">
+                  <a:latin typeface="Arial" panose="020B0604020202020204" pitchFamily="34" charset="0"/>
+                  <a:cs typeface="Arial" panose="020B0604020202020204" pitchFamily="34" charset="0"/>
+                  <a:sym typeface="+mn-ea"/>
+                </a:rPr>
+                <a:t>sp1_g2                            sp3_g2,sp3_g3                             sp5_g2        sp6_g2</a:t>
+              </a:r>
+              <a:endParaRPr lang="en-US" altLang="zh-CN" sz="400">
+                <a:solidFill>
+                  <a:schemeClr val="tx1"/>
+                </a:solidFill>
+                <a:latin typeface="Arial" panose="020B0604020202020204" pitchFamily="34" charset="0"/>
+                <a:cs typeface="Arial" panose="020B0604020202020204" pitchFamily="34" charset="0"/>
+                <a:sym typeface="+mn-ea"/>
+              </a:endParaRPr>
+            </a:p>
+            <a:p>
+              <a:pPr algn="l" fontAlgn="auto">
+                <a:lnSpc>
+                  <a:spcPct val="120000"/>
+                </a:lnSpc>
+                <a:buClrTx/>
+                <a:buSzTx/>
+                <a:buFontTx/>
+              </a:pPr>
+              <a:r>
+                <a:rPr lang="en-US" altLang="zh-CN" sz="400">
+                  <a:solidFill>
+                    <a:schemeClr val="tx1"/>
+                  </a:solidFill>
+                  <a:latin typeface="Arial" panose="020B0604020202020204" pitchFamily="34" charset="0"/>
+                  <a:cs typeface="Arial" panose="020B0604020202020204" pitchFamily="34" charset="0"/>
+                  <a:sym typeface="+mn-ea"/>
+                </a:rPr>
+                <a:t>OG0000002         </a:t>
+              </a:r>
+              <a:r>
+                <a:rPr lang="en-US" altLang="zh-CN" sz="400">
+                  <a:latin typeface="Arial" panose="020B0604020202020204" pitchFamily="34" charset="0"/>
+                  <a:cs typeface="Arial" panose="020B0604020202020204" pitchFamily="34" charset="0"/>
+                  <a:sym typeface="+mn-ea"/>
+                </a:rPr>
+                <a:t>sp1_g3        sp2_g2        sp3_g4                     sp4_g3         sp5_g3        sp6_g3</a:t>
+              </a:r>
+              <a:endParaRPr lang="en-US" altLang="zh-CN" sz="400">
+                <a:solidFill>
+                  <a:schemeClr val="tx1"/>
+                </a:solidFill>
+                <a:latin typeface="Arial" panose="020B0604020202020204" pitchFamily="34" charset="0"/>
+                <a:cs typeface="Arial" panose="020B0604020202020204" pitchFamily="34" charset="0"/>
+                <a:sym typeface="+mn-ea"/>
+              </a:endParaRPr>
+            </a:p>
+            <a:p>
+              <a:pPr algn="l" fontAlgn="auto">
+                <a:lnSpc>
+                  <a:spcPct val="120000"/>
+                </a:lnSpc>
+                <a:buClrTx/>
+                <a:buSzTx/>
+                <a:buFontTx/>
+              </a:pPr>
+              <a:r>
+                <a:rPr lang="en-US" altLang="zh-CN" sz="400">
+                  <a:solidFill>
+                    <a:schemeClr val="tx1"/>
+                  </a:solidFill>
+                  <a:latin typeface="Arial" panose="020B0604020202020204" pitchFamily="34" charset="0"/>
+                  <a:cs typeface="Arial" panose="020B0604020202020204" pitchFamily="34" charset="0"/>
+                  <a:sym typeface="+mn-ea"/>
+                </a:rPr>
+                <a:t>OG0000003         </a:t>
+              </a:r>
+              <a:r>
+                <a:rPr lang="en-US" altLang="zh-CN" sz="400">
+                  <a:latin typeface="Arial" panose="020B0604020202020204" pitchFamily="34" charset="0"/>
+                  <a:cs typeface="Arial" panose="020B0604020202020204" pitchFamily="34" charset="0"/>
+                  <a:sym typeface="+mn-ea"/>
+                </a:rPr>
+                <a:t>sp1_g4        sp2_g3        sp3_g5,sp3_g6        sp4_g4         sp5_g4        sp6_g4</a:t>
+              </a:r>
+              <a:endParaRPr lang="en-US" altLang="zh-CN" sz="400">
+                <a:solidFill>
+                  <a:schemeClr val="tx1"/>
+                </a:solidFill>
+                <a:latin typeface="Arial" panose="020B0604020202020204" pitchFamily="34" charset="0"/>
+                <a:cs typeface="Arial" panose="020B0604020202020204" pitchFamily="34" charset="0"/>
+                <a:sym typeface="+mn-ea"/>
+              </a:endParaRPr>
+            </a:p>
+            <a:p>
+              <a:pPr algn="l" fontAlgn="auto">
+                <a:lnSpc>
+                  <a:spcPct val="120000"/>
+                </a:lnSpc>
+                <a:buClrTx/>
+                <a:buSzTx/>
+                <a:buFontTx/>
+              </a:pPr>
+              <a:r>
+                <a:rPr lang="en-US" altLang="zh-CN" sz="400">
+                  <a:solidFill>
+                    <a:schemeClr val="tx1"/>
+                  </a:solidFill>
+                  <a:latin typeface="Arial" panose="020B0604020202020204" pitchFamily="34" charset="0"/>
+                  <a:cs typeface="Arial" panose="020B0604020202020204" pitchFamily="34" charset="0"/>
+                  <a:sym typeface="+mn-ea"/>
+                </a:rPr>
+                <a:t>OG0000004         </a:t>
+              </a:r>
+              <a:r>
+                <a:rPr lang="en-US" altLang="zh-CN" sz="400">
+                  <a:latin typeface="Arial" panose="020B0604020202020204" pitchFamily="34" charset="0"/>
+                  <a:cs typeface="Arial" panose="020B0604020202020204" pitchFamily="34" charset="0"/>
+                  <a:sym typeface="+mn-ea"/>
+                </a:rPr>
+                <a:t>sp1_g5                            sp3_g7                     sp4_g5         sp5_g5        sp6_g5</a:t>
+              </a:r>
+              <a:endParaRPr lang="en-US" altLang="zh-CN" sz="400">
+                <a:solidFill>
+                  <a:schemeClr val="tx1"/>
+                </a:solidFill>
+                <a:latin typeface="Arial" panose="020B0604020202020204" pitchFamily="34" charset="0"/>
+                <a:cs typeface="Arial" panose="020B0604020202020204" pitchFamily="34" charset="0"/>
+                <a:sym typeface="+mn-ea"/>
+              </a:endParaRPr>
+            </a:p>
+          </p:txBody>
+        </p:sp>
+        <p:sp>
+          <p:nvSpPr>
+            <p:cNvPr id="16" name="加号 15"/>
+            <p:cNvSpPr/>
+            <p:nvPr/>
+          </p:nvSpPr>
+          <p:spPr>
+            <a:xfrm>
+              <a:off x="1287" y="850"/>
+              <a:ext cx="225" cy="201"/>
+            </a:xfrm>
+            <a:prstGeom prst="mathPlus">
+              <a:avLst/>
+            </a:prstGeom>
+            <a:solidFill>
+              <a:schemeClr val="bg1">
+                <a:lumMod val="75000"/>
+              </a:schemeClr>
+            </a:solidFill>
+            <a:ln>
+              <a:noFill/>
+            </a:ln>
+          </p:spPr>
+          <p:style>
+            <a:lnRef idx="2">
+              <a:schemeClr val="accent1">
+                <a:lumMod val="75000"/>
+              </a:schemeClr>
+            </a:lnRef>
+            <a:fillRef idx="1">
+              <a:schemeClr val="accent1"/>
+            </a:fillRef>
+            <a:effectRef idx="0">
+              <a:srgbClr val="FFFFFF"/>
+            </a:effectRef>
+            <a:fontRef idx="minor">
+              <a:schemeClr val="lt1"/>
+            </a:fontRef>
+          </p:style>
+          <p:txBody>
+            <a:bodyPr rtlCol="0" anchor="ctr"/>
+            <a:p>
+              <a:pPr algn="ctr"/>
+              <a:endParaRPr lang="zh-CN" altLang="en-US"/>
+            </a:p>
+          </p:txBody>
+        </p:sp>
+        <p:sp>
+          <p:nvSpPr>
+            <p:cNvPr id="32" name="矩形 31"/>
+            <p:cNvSpPr/>
+            <p:nvPr/>
+          </p:nvSpPr>
+          <p:spPr>
+            <a:xfrm>
+              <a:off x="152" y="134"/>
+              <a:ext cx="10519" cy="2124"/>
+            </a:xfrm>
+            <a:prstGeom prst="rect">
+              <a:avLst/>
+            </a:prstGeom>
+            <a:noFill/>
+            <a:ln w="6350">
+              <a:solidFill>
+                <a:schemeClr val="bg1">
+                  <a:lumMod val="85000"/>
+                </a:schemeClr>
+              </a:solidFill>
+            </a:ln>
+            <a:extLst>
+              <a:ext uri="{909E8E84-426E-40DD-AFC4-6F175D3DCCD1}">
+                <a14:hiddenFill xmlns:a14="http://schemas.microsoft.com/office/drawing/2010/main">
+                  <a:solidFill>
+                    <a:schemeClr val="bg1">
+                      <a:lumMod val="85000"/>
+                    </a:schemeClr>
+                  </a:solidFill>
+                </a14:hiddenFill>
+              </a:ext>
+            </a:extLst>
+          </p:spPr>
+          <p:style>
+            <a:lnRef idx="2">
+              <a:schemeClr val="accent1">
+                <a:lumMod val="75000"/>
+              </a:schemeClr>
+            </a:lnRef>
+            <a:fillRef idx="1">
+              <a:schemeClr val="accent1"/>
+            </a:fillRef>
+            <a:effectRef idx="0">
+              <a:srgbClr val="FFFFFF"/>
+            </a:effectRef>
+            <a:fontRef idx="minor">
+              <a:schemeClr val="lt1"/>
+            </a:fontRef>
+          </p:style>
+          <p:txBody>
+            <a:bodyPr rtlCol="0" anchor="ctr"/>
+            <a:p>
+              <a:pPr algn="ctr"/>
+              <a:endParaRPr lang="zh-CN" altLang="en-US"/>
+            </a:p>
+          </p:txBody>
+        </p:sp>
+        <p:sp>
+          <p:nvSpPr>
+            <p:cNvPr id="56" name="文本框 55"/>
+            <p:cNvSpPr txBox="1"/>
+            <p:nvPr/>
+          </p:nvSpPr>
+          <p:spPr>
+            <a:xfrm>
+              <a:off x="79" y="2006"/>
+              <a:ext cx="10853" cy="265"/>
+            </a:xfrm>
+            <a:prstGeom prst="rect">
+              <a:avLst/>
+            </a:prstGeom>
+            <a:noFill/>
+          </p:spPr>
+          <p:txBody>
+            <a:bodyPr wrap="square" rtlCol="0" anchor="t">
+              <a:spAutoFit/>
+            </a:bodyPr>
+            <a:p>
+              <a:r>
+                <a:rPr lang="zh-CN" altLang="en-US" sz="500">
+                  <a:solidFill>
+                    <a:srgbClr val="0F5FBD"/>
+                  </a:solidFill>
+                  <a:latin typeface="Arial" panose="020B0604020202020204" pitchFamily="34" charset="0"/>
+                  <a:cs typeface="Arial" panose="020B0604020202020204" pitchFamily="34" charset="0"/>
+                </a:rPr>
+                <a:t>extract_orthofinder_orthogroups.py</a:t>
+              </a:r>
+              <a:r>
+                <a:rPr lang="en-US" altLang="zh-CN" sz="500">
+                  <a:solidFill>
+                    <a:srgbClr val="0F5FBD"/>
+                  </a:solidFill>
+                  <a:latin typeface="Arial" panose="020B0604020202020204" pitchFamily="34" charset="0"/>
+                  <a:cs typeface="Arial" panose="020B0604020202020204" pitchFamily="34" charset="0"/>
+                </a:rPr>
+                <a:t> | </a:t>
+              </a:r>
+              <a:r>
+                <a:rPr sz="500">
+                  <a:solidFill>
+                    <a:srgbClr val="0F5FBD"/>
+                  </a:solidFill>
+                  <a:sym typeface="+mn-ea"/>
+                </a:rPr>
+                <a:t>orthomcl_to_orthogroups.py</a:t>
+              </a:r>
+              <a:r>
+                <a:rPr lang="en-US" sz="500">
+                  <a:solidFill>
+                    <a:srgbClr val="0F5FBD"/>
+                  </a:solidFill>
+                  <a:sym typeface="+mn-ea"/>
+                </a:rPr>
+                <a:t> | </a:t>
+              </a:r>
+              <a:r>
+                <a:rPr lang="en-US" altLang="zh-CN" sz="500">
+                  <a:solidFill>
+                    <a:srgbClr val="0F5FBD"/>
+                  </a:solidFill>
+                  <a:latin typeface="Arial" panose="020B0604020202020204" pitchFamily="34" charset="0"/>
+                  <a:cs typeface="Arial" panose="020B0604020202020204" pitchFamily="34" charset="0"/>
+                </a:rPr>
+                <a:t> </a:t>
+              </a:r>
+              <a:r>
+                <a:rPr sz="500">
+                  <a:solidFill>
+                    <a:srgbClr val="0F5FBD"/>
+                  </a:solidFill>
+                  <a:sym typeface="+mn-ea"/>
+                </a:rPr>
+                <a:t>oma_to_orthogroups.py</a:t>
+              </a:r>
+              <a:r>
+                <a:rPr lang="en-US" sz="500">
+                  <a:solidFill>
+                    <a:srgbClr val="0F5FBD"/>
+                  </a:solidFill>
+                  <a:sym typeface="+mn-ea"/>
+                </a:rPr>
+                <a:t> |  </a:t>
+              </a:r>
+              <a:r>
+                <a:rPr sz="500">
+                  <a:solidFill>
+                    <a:srgbClr val="0F5FBD"/>
+                  </a:solidFill>
+                  <a:sym typeface="+mn-ea"/>
+                </a:rPr>
+                <a:t>proteinortho_to_orthogroups</a:t>
+              </a:r>
+              <a:r>
+                <a:rPr lang="en-US" sz="500">
+                  <a:solidFill>
+                    <a:srgbClr val="0F5FBD"/>
+                  </a:solidFill>
+                  <a:sym typeface="+mn-ea"/>
+                </a:rPr>
+                <a:t> | </a:t>
+              </a:r>
+              <a:r>
+                <a:rPr sz="500">
+                  <a:solidFill>
+                    <a:srgbClr val="0F5FBD"/>
+                  </a:solidFill>
+                  <a:sym typeface="+mn-ea"/>
+                </a:rPr>
+                <a:t>sonicparanoid_to_orthogroups.py</a:t>
+              </a:r>
+              <a:endParaRPr lang="en-US" sz="500">
+                <a:solidFill>
+                  <a:srgbClr val="0F5FBD"/>
+                </a:solidFill>
+                <a:latin typeface="Arial" panose="020B0604020202020204" pitchFamily="34" charset="0"/>
+                <a:cs typeface="Arial" panose="020B0604020202020204" pitchFamily="34" charset="0"/>
+                <a:sym typeface="+mn-ea"/>
+              </a:endParaRPr>
+            </a:p>
+          </p:txBody>
+        </p:sp>
+        <p:sp>
+          <p:nvSpPr>
+            <p:cNvPr id="72" name="文本框 71"/>
+            <p:cNvSpPr txBox="1"/>
+            <p:nvPr/>
+          </p:nvSpPr>
+          <p:spPr>
+            <a:xfrm>
+              <a:off x="88" y="78"/>
+              <a:ext cx="5295" cy="467"/>
+            </a:xfrm>
+            <a:prstGeom prst="rect">
+              <a:avLst/>
+            </a:prstGeom>
+            <a:noFill/>
+          </p:spPr>
+          <p:txBody>
+            <a:bodyPr wrap="square" rtlCol="0" anchor="t">
+              <a:noAutofit/>
+            </a:bodyPr>
+            <a:p>
+              <a:pPr algn="l"/>
+              <a:r>
+                <a:rPr lang="en-US" sz="1000" b="1">
+                  <a:latin typeface="Arial" panose="020B0604020202020204" pitchFamily="34" charset="0"/>
+                  <a:cs typeface="Arial" panose="020B0604020202020204" pitchFamily="34" charset="0"/>
+                </a:rPr>
+                <a:t>A</a:t>
+              </a:r>
+              <a:endParaRPr lang="en-US" sz="1000" b="1">
+                <a:latin typeface="Arial" panose="020B0604020202020204" pitchFamily="34" charset="0"/>
+                <a:cs typeface="Arial" panose="020B0604020202020204" pitchFamily="34" charset="0"/>
+              </a:endParaRPr>
+            </a:p>
+            <a:p>
+              <a:pPr algn="l"/>
+              <a:r>
+                <a:rPr sz="500" b="1">
+                  <a:latin typeface="Arial" panose="020B0604020202020204" pitchFamily="34" charset="0"/>
+                  <a:cs typeface="Arial" panose="020B0604020202020204" pitchFamily="34" charset="0"/>
+                </a:rPr>
+                <a:t>Extract selected single-copy or multi-copy sequence orthogroups from OrthoFinder Orthogroups.tsv</a:t>
+              </a:r>
+              <a:endParaRPr sz="500" b="1">
+                <a:latin typeface="Arial" panose="020B0604020202020204" pitchFamily="34" charset="0"/>
+                <a:cs typeface="Arial" panose="020B0604020202020204" pitchFamily="34" charset="0"/>
+              </a:endParaRPr>
+            </a:p>
+          </p:txBody>
+        </p:sp>
+      </p:grpSp>
+      <p:grpSp>
+        <p:nvGrpSpPr>
           <p:cNvPr id="30" name="组合 29"/>
           <p:cNvGrpSpPr/>
           <p:nvPr/>
         </p:nvGrpSpPr>
         <p:grpSpPr>
           <a:xfrm>
-            <a:off x="3488690" y="91440"/>
+            <a:off x="3498850" y="5460365"/>
             <a:ext cx="3274695" cy="841375"/>
             <a:chOff x="5446" y="5908"/>
             <a:chExt cx="5157" cy="1325"/>
@@ -3547,9 +4422,7 @@
               <a:avLst/>
             </a:prstGeom>
             <a:solidFill>
-              <a:schemeClr val="bg1">
-                <a:lumMod val="95000"/>
-              </a:schemeClr>
+              <a:srgbClr val="F8FAFC"/>
             </a:solidFill>
           </p:spPr>
           <p:txBody>
@@ -3563,14 +4436,14 @@
                 </a:lnSpc>
               </a:pPr>
               <a:r>
-                <a:rPr lang="en-US" altLang="zh-CN" sz="400">
+                <a:rPr lang="en-US" altLang="zh-CN" sz="400" b="1">
                   <a:latin typeface="Arial" panose="020B0604020202020204" pitchFamily="34" charset="0"/>
                   <a:cs typeface="Arial" panose="020B0604020202020204" pitchFamily="34" charset="0"/>
                   <a:sym typeface="+mn-ea"/>
                 </a:rPr>
                 <a:t>Codon alignment</a:t>
               </a:r>
-              <a:endParaRPr lang="en-US" altLang="zh-CN" sz="400">
+              <a:endParaRPr lang="en-US" altLang="zh-CN" sz="400" b="1">
                 <a:latin typeface="Arial" panose="020B0604020202020204" pitchFamily="34" charset="0"/>
                 <a:cs typeface="Arial" panose="020B0604020202020204" pitchFamily="34" charset="0"/>
               </a:endParaRPr>
@@ -4294,9 +5167,7 @@
               <a:avLst/>
             </a:prstGeom>
             <a:solidFill>
-              <a:schemeClr val="bg1">
-                <a:lumMod val="95000"/>
-              </a:schemeClr>
+              <a:srgbClr val="F8FAFC"/>
             </a:solidFill>
           </p:spPr>
           <p:txBody>
@@ -4313,7 +5184,7 @@
                 <a:buFontTx/>
               </a:pPr>
               <a:r>
-                <a:rPr lang="en-US" altLang="zh-CN" sz="400">
+                <a:rPr lang="en-US" altLang="zh-CN" sz="400" b="1">
                   <a:latin typeface="Arial" panose="020B0604020202020204" pitchFamily="34" charset="0"/>
                   <a:cs typeface="Arial" panose="020B0604020202020204" pitchFamily="34" charset="0"/>
                   <a:sym typeface="+mn-ea"/>
@@ -4321,7 +5192,7 @@
                 <a:t>1st codon alignment</a:t>
               </a:r>
               <a:r>
-                <a:rPr lang="en-US" altLang="zh-CN" sz="400">
+                <a:rPr lang="en-US" altLang="zh-CN" sz="400" b="1">
                   <a:solidFill>
                     <a:srgbClr val="0B8A98"/>
                   </a:solidFill>
@@ -4329,10 +5200,10 @@
                   <a:cs typeface="Arial" panose="020B0604020202020204" pitchFamily="34" charset="0"/>
                   <a:sym typeface="+mn-ea"/>
                 </a:rPr>
-                <a:t>       </a:t>
-              </a:r>
-              <a:r>
-                <a:rPr lang="en-US" altLang="zh-CN" sz="400">
+                <a:t>    </a:t>
+              </a:r>
+              <a:r>
+                <a:rPr lang="en-US" altLang="zh-CN" sz="400" b="1">
                   <a:latin typeface="Arial" panose="020B0604020202020204" pitchFamily="34" charset="0"/>
                   <a:cs typeface="Arial" panose="020B0604020202020204" pitchFamily="34" charset="0"/>
                   <a:sym typeface="+mn-ea"/>
@@ -4340,7 +5211,7 @@
                 <a:t>2nd codon alignment</a:t>
               </a:r>
               <a:r>
-                <a:rPr lang="en-US" altLang="zh-CN" sz="400">
+                <a:rPr lang="en-US" altLang="zh-CN" sz="400" b="1">
                   <a:solidFill>
                     <a:srgbClr val="0B8A98"/>
                   </a:solidFill>
@@ -4348,17 +5219,17 @@
                   <a:cs typeface="Arial" panose="020B0604020202020204" pitchFamily="34" charset="0"/>
                   <a:sym typeface="+mn-ea"/>
                 </a:rPr>
-                <a:t>     </a:t>
-              </a:r>
-              <a:r>
-                <a:rPr lang="en-US" altLang="zh-CN" sz="400">
+                <a:t>   </a:t>
+              </a:r>
+              <a:r>
+                <a:rPr lang="en-US" altLang="zh-CN" sz="400" b="1">
                   <a:latin typeface="Arial" panose="020B0604020202020204" pitchFamily="34" charset="0"/>
                   <a:cs typeface="Arial" panose="020B0604020202020204" pitchFamily="34" charset="0"/>
                   <a:sym typeface="+mn-ea"/>
                 </a:rPr>
                 <a:t>3rd codon alignment</a:t>
               </a:r>
-              <a:endParaRPr lang="en-US" altLang="zh-CN" sz="400">
+              <a:endParaRPr lang="en-US" altLang="zh-CN" sz="400" b="1">
                 <a:latin typeface="Arial" panose="020B0604020202020204" pitchFamily="34" charset="0"/>
                 <a:cs typeface="Arial" panose="020B0604020202020204" pitchFamily="34" charset="0"/>
                 <a:sym typeface="+mn-ea"/>
@@ -4694,7 +5565,7 @@
                   <a:latin typeface="Arial" panose="020B0604020202020204" pitchFamily="34" charset="0"/>
                   <a:cs typeface="Arial" panose="020B0604020202020204" pitchFamily="34" charset="0"/>
                 </a:rPr>
-                <a:t>G</a:t>
+                <a:t>I</a:t>
               </a:r>
               <a:endParaRPr lang="zh-CN" altLang="en-US" sz="1000" b="1">
                 <a:latin typeface="Arial" panose="020B0604020202020204" pitchFamily="34" charset="0"/>
@@ -4741,7 +5612,7 @@
               <a:r>
                 <a:rPr lang="zh-CN" altLang="en-US" sz="500">
                   <a:solidFill>
-                    <a:srgbClr val="FF0000"/>
+                    <a:srgbClr val="0F5FBD"/>
                   </a:solidFill>
                   <a:latin typeface="Arial" panose="020B0604020202020204" pitchFamily="34" charset="0"/>
                   <a:cs typeface="Arial" panose="020B0604020202020204" pitchFamily="34" charset="0"/>
@@ -4750,7 +5621,7 @@
               </a:r>
               <a:endParaRPr lang="zh-CN" altLang="en-US" sz="500">
                 <a:solidFill>
-                  <a:srgbClr val="FF0000"/>
+                  <a:srgbClr val="0F5FBD"/>
                 </a:solidFill>
                 <a:latin typeface="Arial" panose="020B0604020202020204" pitchFamily="34" charset="0"/>
                 <a:cs typeface="Arial" panose="020B0604020202020204" pitchFamily="34" charset="0"/>
@@ -4824,7 +5695,7 @@
           </p:nvSpPr>
           <p:spPr>
             <a:xfrm>
-              <a:off x="7363" y="6603"/>
+              <a:off x="7366" y="6603"/>
               <a:ext cx="225" cy="119"/>
             </a:xfrm>
             <a:prstGeom prst="rightArrow">
@@ -4872,7 +5743,7 @@
         </p:nvGrpSpPr>
         <p:grpSpPr>
           <a:xfrm>
-            <a:off x="3495040" y="1037590"/>
+            <a:off x="3497580" y="6406515"/>
             <a:ext cx="3275965" cy="847725"/>
             <a:chOff x="5444" y="5898"/>
             <a:chExt cx="5159" cy="1335"/>
@@ -4893,9 +5764,7 @@
               <a:avLst/>
             </a:prstGeom>
             <a:solidFill>
-              <a:schemeClr val="bg1">
-                <a:lumMod val="95000"/>
-              </a:schemeClr>
+              <a:srgbClr val="F8FAFC"/>
             </a:solidFill>
           </p:spPr>
           <p:txBody>
@@ -4909,14 +5778,14 @@
                 </a:lnSpc>
               </a:pPr>
               <a:r>
-                <a:rPr lang="en-US" altLang="zh-CN" sz="400">
+                <a:rPr lang="en-US" altLang="zh-CN" sz="400" b="1">
                   <a:latin typeface="Arial" panose="020B0604020202020204" pitchFamily="34" charset="0"/>
                   <a:cs typeface="Arial" panose="020B0604020202020204" pitchFamily="34" charset="0"/>
                   <a:sym typeface="+mn-ea"/>
                 </a:rPr>
                 <a:t>Codon alignment</a:t>
               </a:r>
-              <a:endParaRPr lang="en-US" altLang="zh-CN" sz="400">
+              <a:endParaRPr lang="en-US" altLang="zh-CN" sz="400" b="1">
                 <a:latin typeface="Arial" panose="020B0604020202020204" pitchFamily="34" charset="0"/>
                 <a:cs typeface="Arial" panose="020B0604020202020204" pitchFamily="34" charset="0"/>
               </a:endParaRPr>
@@ -5018,7 +5887,7 @@
                   <a:latin typeface="Liberation Mono" panose="02070409020205020404" charset="0"/>
                   <a:cs typeface="Liberation Mono" panose="02070409020205020404" charset="0"/>
                 </a:rPr>
-                <a:t> TGG </a:t>
+                <a:t> ATC </a:t>
               </a:r>
               <a:r>
                 <a:rPr lang="en-US" altLang="zh-CN" sz="400">
@@ -5134,9 +6003,7 @@
               <a:avLst/>
             </a:prstGeom>
             <a:solidFill>
-              <a:schemeClr val="bg1">
-                <a:lumMod val="95000"/>
-              </a:schemeClr>
+              <a:srgbClr val="F8FAFC"/>
             </a:solidFill>
           </p:spPr>
           <p:txBody>
@@ -5153,14 +6020,14 @@
                 <a:buFontTx/>
               </a:pPr>
               <a:r>
-                <a:rPr lang="en-US" altLang="zh-CN" sz="400">
+                <a:rPr lang="en-US" altLang="zh-CN" sz="400" b="1">
                   <a:latin typeface="Arial" panose="020B0604020202020204" pitchFamily="34" charset="0"/>
                   <a:cs typeface="Arial" panose="020B0604020202020204" pitchFamily="34" charset="0"/>
                   <a:sym typeface="+mn-ea"/>
                 </a:rPr>
                 <a:t>Extract only third-position sites</a:t>
               </a:r>
-              <a:endParaRPr lang="en-US" altLang="zh-CN" sz="400">
+              <a:endParaRPr lang="en-US" altLang="zh-CN" sz="400" b="1">
                 <a:sym typeface="+mn-ea"/>
               </a:endParaRPr>
             </a:p>
@@ -5286,7 +6153,7 @@
                   <a:latin typeface="Arial" panose="020B0604020202020204" pitchFamily="34" charset="0"/>
                   <a:cs typeface="Arial" panose="020B0604020202020204" pitchFamily="34" charset="0"/>
                 </a:rPr>
-                <a:t>H</a:t>
+                <a:t>J</a:t>
               </a:r>
               <a:endParaRPr lang="en-US" sz="1000" b="1">
                 <a:latin typeface="Arial" panose="020B0604020202020204" pitchFamily="34" charset="0"/>
@@ -5333,7 +6200,7 @@
               <a:r>
                 <a:rPr lang="zh-CN" altLang="en-US" sz="500">
                   <a:solidFill>
-                    <a:srgbClr val="FF0000"/>
+                    <a:srgbClr val="0F5FBD"/>
                   </a:solidFill>
                   <a:latin typeface="Arial" panose="020B0604020202020204" pitchFamily="34" charset="0"/>
                   <a:cs typeface="Arial" panose="020B0604020202020204" pitchFamily="34" charset="0"/>
@@ -5342,7 +6209,7 @@
               </a:r>
               <a:endParaRPr lang="zh-CN" altLang="en-US" sz="500">
                 <a:solidFill>
-                  <a:srgbClr val="FF0000"/>
+                  <a:srgbClr val="0F5FBD"/>
                 </a:solidFill>
                 <a:latin typeface="Arial" panose="020B0604020202020204" pitchFamily="34" charset="0"/>
                 <a:cs typeface="Arial" panose="020B0604020202020204" pitchFamily="34" charset="0"/>
@@ -5464,7 +6331,7 @@
         </p:nvGrpSpPr>
         <p:grpSpPr>
           <a:xfrm>
-            <a:off x="83185" y="3875405"/>
+            <a:off x="45085" y="5224780"/>
             <a:ext cx="3274695" cy="855345"/>
             <a:chOff x="5446" y="5886"/>
             <a:chExt cx="5157" cy="1347"/>
@@ -5479,15 +6346,13 @@
           <p:spPr>
             <a:xfrm>
               <a:off x="5591" y="6359"/>
-              <a:ext cx="2461" cy="608"/>
+              <a:ext cx="2275" cy="608"/>
             </a:xfrm>
             <a:prstGeom prst="rect">
               <a:avLst/>
             </a:prstGeom>
             <a:solidFill>
-              <a:schemeClr val="bg1">
-                <a:lumMod val="95000"/>
-              </a:schemeClr>
+              <a:srgbClr val="F8FAFC"/>
             </a:solidFill>
           </p:spPr>
           <p:txBody>
@@ -5501,14 +6366,14 @@
                 </a:lnSpc>
               </a:pPr>
               <a:r>
-                <a:rPr lang="en-US" altLang="zh-CN" sz="400">
+                <a:rPr lang="en-US" altLang="zh-CN" sz="400" b="1">
                   <a:latin typeface="Arial" panose="020B0604020202020204" pitchFamily="34" charset="0"/>
                   <a:cs typeface="Arial" panose="020B0604020202020204" pitchFamily="34" charset="0"/>
                   <a:sym typeface="+mn-ea"/>
                 </a:rPr>
                 <a:t>Codon alignment</a:t>
               </a:r>
-              <a:endParaRPr lang="en-US" altLang="zh-CN" sz="400">
+              <a:endParaRPr lang="en-US" altLang="zh-CN" sz="400" b="1">
                 <a:latin typeface="Arial" panose="020B0604020202020204" pitchFamily="34" charset="0"/>
                 <a:cs typeface="Arial" panose="020B0604020202020204" pitchFamily="34" charset="0"/>
               </a:endParaRPr>
@@ -5570,13 +6435,6 @@
                 </a:rPr>
                 <a:t>TNG</a:t>
               </a:r>
-              <a:r>
-                <a:rPr lang="en-US" altLang="zh-CN" sz="400">
-                  <a:latin typeface="Liberation Mono" panose="02070409020205020404" charset="0"/>
-                  <a:cs typeface="Liberation Mono" panose="02070409020205020404" charset="0"/>
-                </a:rPr>
-                <a:t> CCT </a:t>
-              </a:r>
               <a:endParaRPr lang="en-US" altLang="zh-CN" sz="400">
                 <a:latin typeface="Liberation Mono" panose="02070409020205020404" charset="0"/>
                 <a:cs typeface="Liberation Mono" panose="02070409020205020404" charset="0"/>
@@ -5637,14 +6495,14 @@
                   <a:latin typeface="Liberation Mono" panose="02070409020205020404" charset="0"/>
                   <a:cs typeface="Liberation Mono" panose="02070409020205020404" charset="0"/>
                 </a:rPr>
-                <a:t>AAN</a:t>
-              </a:r>
-              <a:r>
-                <a:rPr lang="en-US" altLang="zh-CN" sz="400">
-                  <a:latin typeface="Liberation Mono" panose="02070409020205020404" charset="0"/>
-                  <a:cs typeface="Liberation Mono" panose="02070409020205020404" charset="0"/>
-                </a:rPr>
-                <a:t> CCC </a:t>
+                <a:t>TAN</a:t>
+              </a:r>
+              <a:r>
+                <a:rPr lang="en-US" altLang="zh-CN" sz="400">
+                  <a:latin typeface="Liberation Mono" panose="02070409020205020404" charset="0"/>
+                  <a:cs typeface="Liberation Mono" panose="02070409020205020404" charset="0"/>
+                </a:rPr>
+                <a:t> </a:t>
               </a:r>
               <a:endParaRPr lang="en-US" altLang="zh-CN" sz="400">
                 <a:latin typeface="Liberation Mono" panose="02070409020205020404" charset="0"/>
@@ -5706,14 +6564,14 @@
                   <a:latin typeface="Liberation Mono" panose="02070409020205020404" charset="0"/>
                   <a:cs typeface="Liberation Mono" panose="02070409020205020404" charset="0"/>
                 </a:rPr>
-                <a:t>NAA</a:t>
-              </a:r>
-              <a:r>
-                <a:rPr lang="en-US" altLang="zh-CN" sz="400">
-                  <a:latin typeface="Liberation Mono" panose="02070409020205020404" charset="0"/>
-                  <a:cs typeface="Liberation Mono" panose="02070409020205020404" charset="0"/>
-                </a:rPr>
-                <a:t> CCG </a:t>
+                <a:t>NAG</a:t>
+              </a:r>
+              <a:r>
+                <a:rPr lang="en-US" altLang="zh-CN" sz="400">
+                  <a:latin typeface="Liberation Mono" panose="02070409020205020404" charset="0"/>
+                  <a:cs typeface="Liberation Mono" panose="02070409020205020404" charset="0"/>
+                </a:rPr>
+                <a:t> </a:t>
               </a:r>
               <a:endParaRPr lang="en-US" altLang="zh-CN" sz="400">
                 <a:latin typeface="Liberation Mono" panose="02070409020205020404" charset="0"/>
@@ -5730,16 +6588,14 @@
           </p:nvSpPr>
           <p:spPr>
             <a:xfrm>
-              <a:off x="8537" y="6366"/>
-              <a:ext cx="1925" cy="608"/>
+              <a:off x="8258" y="6366"/>
+              <a:ext cx="2262" cy="608"/>
             </a:xfrm>
             <a:prstGeom prst="rect">
               <a:avLst/>
             </a:prstGeom>
             <a:solidFill>
-              <a:schemeClr val="bg1">
-                <a:lumMod val="95000"/>
-              </a:schemeClr>
+              <a:srgbClr val="F8FAFC"/>
             </a:solidFill>
           </p:spPr>
           <p:txBody>
@@ -5756,7 +6612,7 @@
                 <a:buFontTx/>
               </a:pPr>
               <a:r>
-                <a:rPr lang="en-US" altLang="zh-CN" sz="400">
+                <a:rPr lang="en-US" altLang="zh-CN" sz="400" b="1">
                   <a:solidFill>
                     <a:schemeClr val="tx1"/>
                   </a:solidFill>
@@ -5766,7 +6622,7 @@
                 </a:rPr>
                 <a:t>Trimmed codon alignment </a:t>
               </a:r>
-              <a:endParaRPr lang="en-US" altLang="zh-CN" sz="400">
+              <a:endParaRPr lang="en-US" altLang="zh-CN" sz="400" b="1">
                 <a:solidFill>
                   <a:schemeClr val="tx1"/>
                 </a:solidFill>
@@ -5792,7 +6648,68 @@
                   <a:latin typeface="Liberation Mono" panose="02070409020205020404" charset="0"/>
                   <a:cs typeface="Liberation Mono" panose="02070409020205020404" charset="0"/>
                 </a:rPr>
-                <a:t>Seq1: ATG ATT TGC GCA ATG GCG CCT </a:t>
+                <a:t>Seq1: ATG </a:t>
+              </a:r>
+              <a:r>
+                <a:rPr lang="en-US" altLang="zh-CN" sz="400" strike="sngStrike">
+                  <a:solidFill>
+                    <a:srgbClr val="E68822"/>
+                  </a:solidFill>
+                  <a:latin typeface="Liberation Mono" panose="02070409020205020404" charset="0"/>
+                  <a:cs typeface="Liberation Mono" panose="02070409020205020404" charset="0"/>
+                </a:rPr>
+                <a:t>---</a:t>
+              </a:r>
+              <a:r>
+                <a:rPr lang="en-US" altLang="zh-CN" sz="400">
+                  <a:solidFill>
+                    <a:schemeClr val="tx1"/>
+                  </a:solidFill>
+                  <a:latin typeface="Liberation Mono" panose="02070409020205020404" charset="0"/>
+                  <a:cs typeface="Liberation Mono" panose="02070409020205020404" charset="0"/>
+                </a:rPr>
+                <a:t> ATT TGC </a:t>
+              </a:r>
+              <a:r>
+                <a:rPr lang="en-US" altLang="zh-CN" sz="400" strike="sngStrike">
+                  <a:solidFill>
+                    <a:srgbClr val="E68822"/>
+                  </a:solidFill>
+                  <a:latin typeface="Liberation Mono" panose="02070409020205020404" charset="0"/>
+                  <a:cs typeface="Liberation Mono" panose="02070409020205020404" charset="0"/>
+                </a:rPr>
+                <a:t>NNN</a:t>
+              </a:r>
+              <a:r>
+                <a:rPr lang="en-US" altLang="zh-CN" sz="400">
+                  <a:solidFill>
+                    <a:schemeClr val="tx1"/>
+                  </a:solidFill>
+                  <a:latin typeface="Liberation Mono" panose="02070409020205020404" charset="0"/>
+                  <a:cs typeface="Liberation Mono" panose="02070409020205020404" charset="0"/>
+                </a:rPr>
+                <a:t> GCA ATG GCG </a:t>
+              </a:r>
+              <a:r>
+                <a:rPr lang="en-US" altLang="zh-CN" sz="400" strike="sngStrike">
+                  <a:solidFill>
+                    <a:srgbClr val="E68822"/>
+                  </a:solidFill>
+                  <a:latin typeface="Liberation Mono" panose="02070409020205020404" charset="0"/>
+                  <a:cs typeface="Liberation Mono" panose="02070409020205020404" charset="0"/>
+                  <a:sym typeface="+mn-ea"/>
+                </a:rPr>
+                <a:t>TNG</a:t>
+              </a:r>
+              <a:r>
+                <a:rPr lang="en-US" altLang="zh-CN" sz="400">
+                  <a:solidFill>
+                    <a:schemeClr val="tx1"/>
+                  </a:solidFill>
+                  <a:latin typeface="Liberation Mono" panose="02070409020205020404" charset="0"/>
+                  <a:cs typeface="Liberation Mono" panose="02070409020205020404" charset="0"/>
+                </a:rPr>
+                <a:t> </a:t>
               </a:r>
               <a:endParaRPr lang="en-US" altLang="zh-CN" sz="400">
                 <a:solidFill>
@@ -5819,7 +6736,68 @@
                   <a:latin typeface="Liberation Mono" panose="02070409020205020404" charset="0"/>
                   <a:cs typeface="Liberation Mono" panose="02070409020205020404" charset="0"/>
                 </a:rPr>
-                <a:t>Seq2: ATG ATC TGC GCG TGG GCA CCC </a:t>
+                <a:t>Seq2: ATG </a:t>
+              </a:r>
+              <a:r>
+                <a:rPr lang="en-US" altLang="zh-CN" sz="400" strike="sngStrike">
+                  <a:solidFill>
+                    <a:srgbClr val="E68822"/>
+                  </a:solidFill>
+                  <a:latin typeface="Liberation Mono" panose="02070409020205020404" charset="0"/>
+                  <a:cs typeface="Liberation Mono" panose="02070409020205020404" charset="0"/>
+                </a:rPr>
+                <a:t>---</a:t>
+              </a:r>
+              <a:r>
+                <a:rPr lang="en-US" altLang="zh-CN" sz="400">
+                  <a:solidFill>
+                    <a:schemeClr val="tx1"/>
+                  </a:solidFill>
+                  <a:latin typeface="Liberation Mono" panose="02070409020205020404" charset="0"/>
+                  <a:cs typeface="Liberation Mono" panose="02070409020205020404" charset="0"/>
+                </a:rPr>
+                <a:t> ATC TGC </a:t>
+              </a:r>
+              <a:r>
+                <a:rPr lang="en-US" altLang="zh-CN" sz="400" strike="sngStrike">
+                  <a:solidFill>
+                    <a:srgbClr val="E68822"/>
+                  </a:solidFill>
+                  <a:latin typeface="Liberation Mono" panose="02070409020205020404" charset="0"/>
+                  <a:cs typeface="Liberation Mono" panose="02070409020205020404" charset="0"/>
+                </a:rPr>
+                <a:t>GCC</a:t>
+              </a:r>
+              <a:r>
+                <a:rPr lang="en-US" altLang="zh-CN" sz="400">
+                  <a:solidFill>
+                    <a:schemeClr val="tx1"/>
+                  </a:solidFill>
+                  <a:latin typeface="Liberation Mono" panose="02070409020205020404" charset="0"/>
+                  <a:cs typeface="Liberation Mono" panose="02070409020205020404" charset="0"/>
+                </a:rPr>
+                <a:t> GCG TGG GCA </a:t>
+              </a:r>
+              <a:r>
+                <a:rPr lang="en-US" altLang="zh-CN" sz="400" strike="sngStrike">
+                  <a:solidFill>
+                    <a:srgbClr val="E68822"/>
+                  </a:solidFill>
+                  <a:latin typeface="Liberation Mono" panose="02070409020205020404" charset="0"/>
+                  <a:cs typeface="Liberation Mono" panose="02070409020205020404" charset="0"/>
+                  <a:sym typeface="+mn-ea"/>
+                </a:rPr>
+                <a:t>TAN</a:t>
+              </a:r>
+              <a:r>
+                <a:rPr lang="en-US" altLang="zh-CN" sz="400">
+                  <a:solidFill>
+                    <a:schemeClr val="tx1"/>
+                  </a:solidFill>
+                  <a:latin typeface="Liberation Mono" panose="02070409020205020404" charset="0"/>
+                  <a:cs typeface="Liberation Mono" panose="02070409020205020404" charset="0"/>
+                </a:rPr>
+                <a:t> </a:t>
               </a:r>
               <a:endParaRPr lang="en-US" altLang="zh-CN" sz="400">
                 <a:solidFill>
@@ -5846,14 +6824,66 @@
                   <a:latin typeface="Liberation Mono" panose="02070409020205020404" charset="0"/>
                   <a:cs typeface="Liberation Mono" panose="02070409020205020404" charset="0"/>
                 </a:rPr>
-                <a:t>Seq3: ATG ATT TGC GCT ATG GCC CCG</a:t>
-              </a:r>
-              <a:endParaRPr lang="en-US" altLang="zh-CN" sz="400">
+                <a:t>Seq3: ATG </a:t>
+              </a:r>
+              <a:r>
+                <a:rPr lang="en-US" altLang="zh-CN" sz="400" strike="sngStrike">
+                  <a:solidFill>
+                    <a:srgbClr val="E68822"/>
+                  </a:solidFill>
+                  <a:latin typeface="Liberation Mono" panose="02070409020205020404" charset="0"/>
+                  <a:cs typeface="Liberation Mono" panose="02070409020205020404" charset="0"/>
+                </a:rPr>
+                <a:t>GGG</a:t>
+              </a:r>
+              <a:r>
+                <a:rPr lang="en-US" altLang="zh-CN" sz="400">
+                  <a:solidFill>
+                    <a:schemeClr val="tx1"/>
+                  </a:solidFill>
+                  <a:latin typeface="Liberation Mono" panose="02070409020205020404" charset="0"/>
+                  <a:cs typeface="Liberation Mono" panose="02070409020205020404" charset="0"/>
+                </a:rPr>
+                <a:t> ATT TGC </a:t>
+              </a:r>
+              <a:r>
+                <a:rPr lang="en-US" altLang="zh-CN" sz="400" strike="sngStrike">
+                  <a:solidFill>
+                    <a:srgbClr val="E68822"/>
+                  </a:solidFill>
+                  <a:latin typeface="Liberation Mono" panose="02070409020205020404" charset="0"/>
+                  <a:cs typeface="Liberation Mono" panose="02070409020205020404" charset="0"/>
+                </a:rPr>
+                <a:t>NNN</a:t>
+              </a:r>
+              <a:r>
+                <a:rPr lang="en-US" altLang="zh-CN" sz="400">
+                  <a:solidFill>
+                    <a:schemeClr val="tx1"/>
+                  </a:solidFill>
+                  <a:latin typeface="Liberation Mono" panose="02070409020205020404" charset="0"/>
+                  <a:cs typeface="Liberation Mono" panose="02070409020205020404" charset="0"/>
+                </a:rPr>
+                <a:t> GCT ATG GCC </a:t>
+              </a:r>
+              <a:r>
+                <a:rPr lang="en-US" altLang="zh-CN" sz="400" strike="sngStrike">
+                  <a:solidFill>
+                    <a:srgbClr val="E68822"/>
+                  </a:solidFill>
+                  <a:latin typeface="Liberation Mono" panose="02070409020205020404" charset="0"/>
+                  <a:cs typeface="Liberation Mono" panose="02070409020205020404" charset="0"/>
+                  <a:sym typeface="+mn-ea"/>
+                </a:rPr>
+                <a:t>NAG</a:t>
+              </a:r>
+              <a:endParaRPr lang="en-US" altLang="zh-CN" sz="400" strike="sngStrike">
                 <a:solidFill>
-                  <a:schemeClr val="tx1"/>
+                  <a:srgbClr val="E68822"/>
                 </a:solidFill>
-                <a:latin typeface="Ubuntu Mono" panose="020B0509030602030204" charset="0"/>
-                <a:cs typeface="Ubuntu Mono" panose="020B0509030602030204" charset="0"/>
+                <a:latin typeface="Liberation Mono" panose="02070409020205020404" charset="0"/>
+                <a:cs typeface="Liberation Mono" panose="02070409020205020404" charset="0"/>
+                <a:sym typeface="+mn-ea"/>
               </a:endParaRPr>
             </a:p>
           </p:txBody>
@@ -5885,7 +6915,7 @@
                   <a:latin typeface="Arial" panose="020B0604020202020204" pitchFamily="34" charset="0"/>
                   <a:cs typeface="Arial" panose="020B0604020202020204" pitchFamily="34" charset="0"/>
                 </a:rPr>
-                <a:t>C</a:t>
+                <a:t>D</a:t>
               </a:r>
               <a:endParaRPr lang="en-US" sz="1000" b="1">
                 <a:latin typeface="Arial" panose="020B0604020202020204" pitchFamily="34" charset="0"/>
@@ -5932,7 +6962,7 @@
               <a:r>
                 <a:rPr lang="zh-CN" altLang="en-US" sz="500">
                   <a:solidFill>
-                    <a:srgbClr val="FF0000"/>
+                    <a:srgbClr val="0F5FBD"/>
                   </a:solidFill>
                   <a:latin typeface="Arial" panose="020B0604020202020204" pitchFamily="34" charset="0"/>
                   <a:cs typeface="Arial" panose="020B0604020202020204" pitchFamily="34" charset="0"/>
@@ -5941,7 +6971,7 @@
               </a:r>
               <a:endParaRPr lang="zh-CN" altLang="en-US" sz="500">
                 <a:solidFill>
-                  <a:srgbClr val="FF0000"/>
+                  <a:srgbClr val="0F5FBD"/>
                 </a:solidFill>
                 <a:latin typeface="Arial" panose="020B0604020202020204" pitchFamily="34" charset="0"/>
                 <a:cs typeface="Arial" panose="020B0604020202020204" pitchFamily="34" charset="0"/>
@@ -6015,7 +7045,7 @@
           </p:nvSpPr>
           <p:spPr>
             <a:xfrm>
-              <a:off x="8214" y="6584"/>
+              <a:off x="7981" y="6645"/>
               <a:ext cx="225" cy="119"/>
             </a:xfrm>
             <a:prstGeom prst="rightArrow">
@@ -6063,7 +7093,7 @@
         </p:nvGrpSpPr>
         <p:grpSpPr>
           <a:xfrm>
-            <a:off x="3481070" y="1997710"/>
+            <a:off x="3472180" y="7381240"/>
             <a:ext cx="3301365" cy="1241425"/>
             <a:chOff x="5404" y="3326"/>
             <a:chExt cx="5199" cy="1955"/>
@@ -6092,15 +7122,13 @@
             <p:spPr>
               <a:xfrm>
                 <a:off x="5591" y="6335"/>
-                <a:ext cx="1571" cy="724"/>
+                <a:ext cx="1638" cy="724"/>
               </a:xfrm>
               <a:prstGeom prst="rect">
                 <a:avLst/>
               </a:prstGeom>
               <a:solidFill>
-                <a:schemeClr val="bg1">
-                  <a:lumMod val="95000"/>
-                </a:schemeClr>
+                <a:srgbClr val="F8FAFC"/>
               </a:solidFill>
             </p:spPr>
             <p:txBody>
@@ -6114,14 +7142,14 @@
                   </a:lnSpc>
                 </a:pPr>
                 <a:r>
-                  <a:rPr lang="en-US" altLang="zh-CN" sz="400">
+                  <a:rPr lang="en-US" altLang="zh-CN" sz="400" b="1">
                     <a:latin typeface="Arial" panose="020B0604020202020204" pitchFamily="34" charset="0"/>
                     <a:cs typeface="Arial" panose="020B0604020202020204" pitchFamily="34" charset="0"/>
                     <a:sym typeface="+mn-ea"/>
                   </a:rPr>
                   <a:t>Codon alignment of FASTA format</a:t>
                 </a:r>
-                <a:endParaRPr lang="en-US" altLang="zh-CN" sz="400">
+                <a:endParaRPr lang="en-US" altLang="zh-CN" sz="400" b="1">
                   <a:latin typeface="Ubuntu Mono" panose="020B0509030602030204" charset="0"/>
                   <a:cs typeface="Ubuntu Mono" panose="020B0509030602030204" charset="0"/>
                 </a:endParaRPr>
@@ -6251,7 +7279,7 @@
                     <a:latin typeface="Arial" panose="020B0604020202020204" pitchFamily="34" charset="0"/>
                     <a:cs typeface="Arial" panose="020B0604020202020204" pitchFamily="34" charset="0"/>
                   </a:rPr>
-                  <a:t>I</a:t>
+                  <a:t>K</a:t>
                 </a:r>
                 <a:endParaRPr sz="1000" b="1">
                   <a:latin typeface="Arial" panose="020B0604020202020204" pitchFamily="34" charset="0"/>
@@ -6327,7 +7355,7 @@
                 <a:r>
                   <a:rPr lang="zh-CN" altLang="en-US" sz="500">
                     <a:solidFill>
-                      <a:srgbClr val="FF0000"/>
+                      <a:srgbClr val="0F5FBD"/>
                     </a:solidFill>
                     <a:latin typeface="Arial" panose="020B0604020202020204" pitchFamily="34" charset="0"/>
                     <a:cs typeface="Arial" panose="020B0604020202020204" pitchFamily="34" charset="0"/>
@@ -6336,7 +7364,7 @@
                 </a:r>
                 <a:endParaRPr lang="zh-CN" altLang="en-US" sz="500">
                   <a:solidFill>
-                    <a:srgbClr val="FF0000"/>
+                    <a:srgbClr val="0F5FBD"/>
                   </a:solidFill>
                   <a:latin typeface="Arial" panose="020B0604020202020204" pitchFamily="34" charset="0"/>
                   <a:cs typeface="Arial" panose="020B0604020202020204" pitchFamily="34" charset="0"/>
@@ -6346,7 +7374,7 @@
                 <a:r>
                   <a:rPr lang="zh-CN" altLang="en-US" sz="500">
                     <a:solidFill>
-                      <a:srgbClr val="FF0000"/>
+                      <a:srgbClr val="0F5FBD"/>
                     </a:solidFill>
                     <a:latin typeface="Arial" panose="020B0604020202020204" pitchFamily="34" charset="0"/>
                     <a:cs typeface="Arial" panose="020B0604020202020204" pitchFamily="34" charset="0"/>
@@ -6356,7 +7384,7 @@
                 <a:r>
                   <a:rPr lang="en-US" altLang="zh-CN" sz="500">
                     <a:solidFill>
-                      <a:srgbClr val="FF0000"/>
+                      <a:srgbClr val="0F5FBD"/>
                     </a:solidFill>
                     <a:latin typeface="Arial" panose="020B0604020202020204" pitchFamily="34" charset="0"/>
                     <a:cs typeface="Arial" panose="020B0604020202020204" pitchFamily="34" charset="0"/>
@@ -6366,7 +7394,7 @@
                 <a:r>
                   <a:rPr lang="zh-CN" altLang="en-US" sz="500">
                     <a:solidFill>
-                      <a:srgbClr val="FF0000"/>
+                      <a:srgbClr val="0F5FBD"/>
                     </a:solidFill>
                     <a:latin typeface="Arial" panose="020B0604020202020204" pitchFamily="34" charset="0"/>
                     <a:cs typeface="Arial" panose="020B0604020202020204" pitchFamily="34" charset="0"/>
@@ -6375,7 +7403,7 @@
                 </a:r>
                 <a:endParaRPr lang="zh-CN" altLang="en-US" sz="500">
                   <a:solidFill>
-                    <a:srgbClr val="FF0000"/>
+                    <a:srgbClr val="0F5FBD"/>
                   </a:solidFill>
                   <a:latin typeface="Arial" panose="020B0604020202020204" pitchFamily="34" charset="0"/>
                   <a:cs typeface="Arial" panose="020B0604020202020204" pitchFamily="34" charset="0"/>
@@ -6385,7 +7413,7 @@
                 <a:r>
                   <a:rPr lang="zh-CN" altLang="en-US" sz="500">
                     <a:solidFill>
-                      <a:srgbClr val="FF0000"/>
+                      <a:srgbClr val="0F5FBD"/>
                     </a:solidFill>
                     <a:latin typeface="Arial" panose="020B0604020202020204" pitchFamily="34" charset="0"/>
                     <a:cs typeface="Arial" panose="020B0604020202020204" pitchFamily="34" charset="0"/>
@@ -6395,7 +7423,7 @@
                 <a:r>
                   <a:rPr lang="en-US" altLang="zh-CN" sz="500">
                     <a:solidFill>
-                      <a:srgbClr val="FF0000"/>
+                      <a:srgbClr val="0F5FBD"/>
                     </a:solidFill>
                     <a:latin typeface="Arial" panose="020B0604020202020204" pitchFamily="34" charset="0"/>
                     <a:cs typeface="Arial" panose="020B0604020202020204" pitchFamily="34" charset="0"/>
@@ -6405,7 +7433,7 @@
                 <a:r>
                   <a:rPr lang="zh-CN" altLang="en-US" sz="500">
                     <a:solidFill>
-                      <a:srgbClr val="FF0000"/>
+                      <a:srgbClr val="0F5FBD"/>
                     </a:solidFill>
                     <a:latin typeface="Arial" panose="020B0604020202020204" pitchFamily="34" charset="0"/>
                     <a:cs typeface="Arial" panose="020B0604020202020204" pitchFamily="34" charset="0"/>
@@ -6414,7 +7442,7 @@
                 </a:r>
                 <a:endParaRPr lang="zh-CN" altLang="en-US" sz="500">
                   <a:solidFill>
-                    <a:srgbClr val="FF0000"/>
+                    <a:srgbClr val="0F5FBD"/>
                   </a:solidFill>
                   <a:latin typeface="Arial" panose="020B0604020202020204" pitchFamily="34" charset="0"/>
                   <a:cs typeface="Arial" panose="020B0604020202020204" pitchFamily="34" charset="0"/>
@@ -6489,10 +7517,10 @@
           </p:nvGrpSpPr>
           <p:grpSpPr>
             <a:xfrm>
-              <a:off x="7223" y="3799"/>
-              <a:ext cx="3215" cy="1421"/>
-              <a:chOff x="7223" y="3799"/>
-              <a:chExt cx="3215" cy="1421"/>
+              <a:off x="7167" y="3799"/>
+              <a:ext cx="3354" cy="1386"/>
+              <a:chOff x="7167" y="3799"/>
+              <a:chExt cx="3354" cy="1386"/>
             </a:xfrm>
           </p:grpSpPr>
           <p:sp>
@@ -6503,21 +7531,19 @@
             </p:nvSpPr>
             <p:spPr>
               <a:xfrm>
-                <a:off x="8884" y="3799"/>
-                <a:ext cx="1554" cy="1421"/>
+                <a:off x="8885" y="3799"/>
+                <a:ext cx="1636" cy="1385"/>
               </a:xfrm>
               <a:prstGeom prst="rect">
                 <a:avLst/>
               </a:prstGeom>
               <a:solidFill>
-                <a:schemeClr val="bg1">
-                  <a:lumMod val="95000"/>
-                </a:schemeClr>
+                <a:srgbClr val="F8FAFC"/>
               </a:solidFill>
             </p:spPr>
             <p:txBody>
               <a:bodyPr wrap="square" rtlCol="0">
-                <a:spAutoFit/>
+                <a:noAutofit/>
               </a:bodyPr>
               <a:p>
                 <a:pPr indent="0" algn="l" fontAlgn="auto">
@@ -6526,14 +7552,20 @@
                   </a:lnSpc>
                 </a:pPr>
                 <a:r>
-                  <a:rPr lang="en-US" altLang="zh-CN" sz="400">
+                  <a:rPr lang="en-US" altLang="zh-CN" sz="400" b="1">
+                    <a:solidFill>
+                      <a:schemeClr val="tx1"/>
+                    </a:solidFill>
                     <a:latin typeface="Arial" panose="020B0604020202020204" pitchFamily="34" charset="0"/>
                     <a:cs typeface="Arial" panose="020B0604020202020204" pitchFamily="34" charset="0"/>
                     <a:sym typeface="+mn-ea"/>
                   </a:rPr>
                   <a:t>Codon alignment of NEXUS format</a:t>
                 </a:r>
-                <a:endParaRPr lang="en-US" altLang="zh-CN" sz="400">
+                <a:endParaRPr lang="en-US" altLang="zh-CN" sz="400" b="1">
+                  <a:solidFill>
+                    <a:schemeClr val="tx1"/>
+                  </a:solidFill>
                   <a:latin typeface="Arial" panose="020B0604020202020204" pitchFamily="34" charset="0"/>
                   <a:cs typeface="Arial" panose="020B0604020202020204" pitchFamily="34" charset="0"/>
                 </a:endParaRPr>
@@ -6764,16 +7796,14 @@
             </p:nvSpPr>
             <p:spPr>
               <a:xfrm>
-                <a:off x="7223" y="4624"/>
-                <a:ext cx="1554" cy="596"/>
+                <a:off x="7167" y="4589"/>
+                <a:ext cx="1652" cy="596"/>
               </a:xfrm>
               <a:prstGeom prst="rect">
                 <a:avLst/>
               </a:prstGeom>
               <a:solidFill>
-                <a:schemeClr val="bg1">
-                  <a:lumMod val="95000"/>
-                </a:schemeClr>
+                <a:srgbClr val="F8FAFC"/>
               </a:solidFill>
             </p:spPr>
             <p:txBody>
@@ -6787,14 +7817,20 @@
                   </a:lnSpc>
                 </a:pPr>
                 <a:r>
-                  <a:rPr lang="en-US" altLang="zh-CN" sz="400">
+                  <a:rPr lang="en-US" altLang="zh-CN" sz="400" b="1">
+                    <a:solidFill>
+                      <a:schemeClr val="tx1"/>
+                    </a:solidFill>
                     <a:latin typeface="Arial" panose="020B0604020202020204" pitchFamily="34" charset="0"/>
                     <a:cs typeface="Arial" panose="020B0604020202020204" pitchFamily="34" charset="0"/>
                     <a:sym typeface="+mn-ea"/>
                   </a:rPr>
                   <a:t>Codon alignment of PHYLIP format</a:t>
                 </a:r>
-                <a:endParaRPr lang="en-US" altLang="zh-CN" sz="400">
+                <a:endParaRPr lang="en-US" altLang="zh-CN" sz="400" b="1">
+                  <a:solidFill>
+                    <a:schemeClr val="tx1"/>
+                  </a:solidFill>
                   <a:latin typeface="Arial" panose="020B0604020202020204" pitchFamily="34" charset="0"/>
                   <a:cs typeface="Arial" panose="020B0604020202020204" pitchFamily="34" charset="0"/>
                 </a:endParaRPr>
@@ -6881,16 +7917,14 @@
             </p:nvSpPr>
             <p:spPr>
               <a:xfrm>
-                <a:off x="7223" y="3799"/>
+                <a:off x="7265" y="3799"/>
                 <a:ext cx="1554" cy="724"/>
               </a:xfrm>
               <a:prstGeom prst="rect">
                 <a:avLst/>
               </a:prstGeom>
               <a:solidFill>
-                <a:schemeClr val="bg1">
-                  <a:lumMod val="95000"/>
-                </a:schemeClr>
+                <a:srgbClr val="F8FAFC"/>
               </a:solidFill>
             </p:spPr>
             <p:txBody>
@@ -6904,14 +7938,14 @@
                   </a:lnSpc>
                 </a:pPr>
                 <a:r>
-                  <a:rPr lang="en-US" altLang="zh-CN" sz="400">
+                  <a:rPr lang="en-US" altLang="zh-CN" sz="400" b="1">
                     <a:latin typeface="Arial" panose="020B0604020202020204" pitchFamily="34" charset="0"/>
                     <a:cs typeface="Arial" panose="020B0604020202020204" pitchFamily="34" charset="0"/>
                     <a:sym typeface="+mn-ea"/>
                   </a:rPr>
                   <a:t>Codon alignment of AXT format</a:t>
                 </a:r>
-                <a:endParaRPr lang="en-US" altLang="zh-CN" sz="400">
+                <a:endParaRPr lang="en-US" altLang="zh-CN" sz="400" b="1">
                   <a:latin typeface="Arial" panose="020B0604020202020204" pitchFamily="34" charset="0"/>
                   <a:cs typeface="Arial" panose="020B0604020202020204" pitchFamily="34" charset="0"/>
                 </a:endParaRPr>
@@ -7000,7 +8034,7 @@
         </p:nvGrpSpPr>
         <p:grpSpPr>
           <a:xfrm>
-            <a:off x="3495040" y="3336925"/>
+            <a:off x="3500755" y="8712200"/>
             <a:ext cx="3272790" cy="855980"/>
             <a:chOff x="5554" y="5523"/>
             <a:chExt cx="5154" cy="1348"/>
@@ -7029,15 +8063,13 @@
             <p:spPr>
               <a:xfrm>
                 <a:off x="5591" y="6335"/>
-                <a:ext cx="2253" cy="608"/>
+                <a:ext cx="2435" cy="608"/>
               </a:xfrm>
               <a:prstGeom prst="rect">
                 <a:avLst/>
               </a:prstGeom>
               <a:solidFill>
-                <a:schemeClr val="bg1">
-                  <a:lumMod val="95000"/>
-                </a:schemeClr>
+                <a:srgbClr val="F8FAFC"/>
               </a:solidFill>
             </p:spPr>
             <p:txBody>
@@ -7051,14 +8083,14 @@
                   </a:lnSpc>
                 </a:pPr>
                 <a:r>
-                  <a:rPr lang="en-US" altLang="zh-CN" sz="400">
+                  <a:rPr lang="en-US" altLang="zh-CN" sz="400" b="1">
                     <a:latin typeface="Arial" panose="020B0604020202020204" pitchFamily="34" charset="0"/>
                     <a:cs typeface="Arial" panose="020B0604020202020204" pitchFamily="34" charset="0"/>
                     <a:sym typeface="+mn-ea"/>
                   </a:rPr>
                   <a:t>Multiple results from codon alignment of two sequences</a:t>
                 </a:r>
-                <a:endParaRPr lang="en-US" altLang="zh-CN" sz="400">
+                <a:endParaRPr lang="en-US" altLang="zh-CN" sz="400" b="1">
                   <a:latin typeface="Arial" panose="020B0604020202020204" pitchFamily="34" charset="0"/>
                   <a:cs typeface="Arial" panose="020B0604020202020204" pitchFamily="34" charset="0"/>
                   <a:sym typeface="+mn-ea"/>
@@ -7161,7 +8193,7 @@
                     <a:latin typeface="Arial" panose="020B0604020202020204" pitchFamily="34" charset="0"/>
                     <a:cs typeface="Arial" panose="020B0604020202020204" pitchFamily="34" charset="0"/>
                   </a:rPr>
-                  <a:t>J</a:t>
+                  <a:t>L</a:t>
                 </a:r>
                 <a:endParaRPr sz="1000" b="1">
                   <a:latin typeface="Arial" panose="020B0604020202020204" pitchFamily="34" charset="0"/>
@@ -7258,9 +8290,7 @@
               <a:avLst/>
             </a:prstGeom>
             <a:solidFill>
-              <a:schemeClr val="bg1">
-                <a:lumMod val="95000"/>
-              </a:schemeClr>
+              <a:srgbClr val="F8FAFC"/>
             </a:solidFill>
           </p:spPr>
           <p:txBody>
@@ -7314,12 +8344,12 @@
                 <a:t> </a:t>
               </a:r>
               <a:r>
-                <a:rPr lang="en-US" altLang="zh-CN" sz="400">
+                <a:rPr lang="en-US" altLang="zh-CN" sz="400" b="1">
                   <a:sym typeface="+mn-ea"/>
                 </a:rPr>
                 <a:t>    </a:t>
               </a:r>
-              <a:endParaRPr lang="en-US" altLang="zh-CN" sz="400">
+              <a:endParaRPr lang="en-US" altLang="zh-CN" sz="400" b="1">
                 <a:sym typeface="+mn-ea"/>
               </a:endParaRPr>
             </a:p>
@@ -7509,7 +8539,7 @@
               <a:r>
                 <a:rPr lang="zh-CN" altLang="en-US" sz="500">
                   <a:solidFill>
-                    <a:srgbClr val="FF0000"/>
+                    <a:srgbClr val="0F5FBD"/>
                   </a:solidFill>
                   <a:latin typeface="Arial" panose="020B0604020202020204" pitchFamily="34" charset="0"/>
                   <a:cs typeface="Arial" panose="020B0604020202020204" pitchFamily="34" charset="0"/>
@@ -7519,7 +8549,7 @@
               </a:r>
               <a:endParaRPr lang="zh-CN" altLang="en-US" sz="500">
                 <a:solidFill>
-                  <a:srgbClr val="FF0000"/>
+                  <a:srgbClr val="0F5FBD"/>
                 </a:solidFill>
                 <a:latin typeface="Arial" panose="020B0604020202020204" pitchFamily="34" charset="0"/>
                 <a:cs typeface="Arial" panose="020B0604020202020204" pitchFamily="34" charset="0"/>
@@ -7531,16 +8561,16 @@
       </p:grpSp>
       <p:grpSp>
         <p:nvGrpSpPr>
-          <p:cNvPr id="262" name="组合 261"/>
+          <p:cNvPr id="132" name="组合 131"/>
           <p:cNvGrpSpPr/>
           <p:nvPr/>
         </p:nvGrpSpPr>
         <p:grpSpPr>
           <a:xfrm>
-            <a:off x="3495040" y="5217160"/>
-            <a:ext cx="3274695" cy="1913255"/>
-            <a:chOff x="169" y="7050"/>
-            <a:chExt cx="5157" cy="3013"/>
+            <a:off x="3498850" y="3601085"/>
+            <a:ext cx="3274695" cy="1795780"/>
+            <a:chOff x="5504" y="5569"/>
+            <a:chExt cx="5157" cy="2828"/>
           </a:xfrm>
         </p:grpSpPr>
         <p:grpSp>
@@ -7550,11 +8580,11 @@
             <p:nvPr/>
           </p:nvGrpSpPr>
           <p:grpSpPr>
-            <a:xfrm>
-              <a:off x="169" y="7050"/>
-              <a:ext cx="5079" cy="3013"/>
+            <a:xfrm rot="0">
+              <a:off x="5504" y="5569"/>
+              <a:ext cx="5079" cy="2827"/>
               <a:chOff x="69" y="3670"/>
-              <a:chExt cx="5079" cy="3013"/>
+              <a:chExt cx="5079" cy="2827"/>
             </a:xfrm>
           </p:grpSpPr>
           <p:sp>
@@ -7572,9 +8602,7 @@
                 <a:avLst/>
               </a:prstGeom>
               <a:solidFill>
-                <a:schemeClr val="bg1">
-                  <a:lumMod val="95000"/>
-                </a:schemeClr>
+                <a:srgbClr val="F8FAFC"/>
               </a:solidFill>
             </p:spPr>
             <p:txBody>
@@ -7591,73 +8619,73 @@
                   <a:buFontTx/>
                 </a:pPr>
                 <a:r>
-                  <a:rPr lang="en-US" altLang="zh-CN" sz="400">
-                    <a:latin typeface="Liberation Mono" panose="02070409020205020404" charset="0"/>
-                    <a:cs typeface="Liberation Mono" panose="02070409020205020404" charset="0"/>
+                  <a:rPr lang="en-US" altLang="zh-CN" sz="400" b="1">
+                    <a:latin typeface="Arial" panose="020B0604020202020204" pitchFamily="34" charset="0"/>
+                    <a:cs typeface="Arial" panose="020B0604020202020204" pitchFamily="34" charset="0"/>
                     <a:sym typeface="+mn-ea"/>
                   </a:rPr>
                   <a:t>Gene1 codon alignment</a:t>
                 </a:r>
                 <a:r>
-                  <a:rPr lang="en-US" altLang="zh-CN" sz="400">
+                  <a:rPr lang="en-US" altLang="zh-CN" sz="400" b="1">
                     <a:solidFill>
                       <a:srgbClr val="0B8A98"/>
                     </a:solidFill>
-                    <a:latin typeface="Liberation Mono" panose="02070409020205020404" charset="0"/>
-                    <a:cs typeface="Liberation Mono" panose="02070409020205020404" charset="0"/>
+                    <a:latin typeface="Arial" panose="020B0604020202020204" pitchFamily="34" charset="0"/>
+                    <a:cs typeface="Arial" panose="020B0604020202020204" pitchFamily="34" charset="0"/>
                     <a:sym typeface="+mn-ea"/>
                   </a:rPr>
-                  <a:t>   </a:t>
+                  <a:t>           </a:t>
                 </a:r>
                 <a:r>
-                  <a:rPr lang="en-US" altLang="zh-CN" sz="400">
-                    <a:latin typeface="Liberation Mono" panose="02070409020205020404" charset="0"/>
-                    <a:cs typeface="Liberation Mono" panose="02070409020205020404" charset="0"/>
+                  <a:rPr lang="en-US" altLang="zh-CN" sz="400" b="1">
+                    <a:latin typeface="Arial" panose="020B0604020202020204" pitchFamily="34" charset="0"/>
+                    <a:cs typeface="Arial" panose="020B0604020202020204" pitchFamily="34" charset="0"/>
                     <a:sym typeface="+mn-ea"/>
                   </a:rPr>
                   <a:t>Gene2 codon alignment</a:t>
                 </a:r>
                 <a:r>
-                  <a:rPr lang="en-US" altLang="zh-CN" sz="400">
+                  <a:rPr lang="en-US" altLang="zh-CN" sz="400" b="1">
                     <a:solidFill>
                       <a:srgbClr val="0B8A98"/>
                     </a:solidFill>
-                    <a:latin typeface="Liberation Mono" panose="02070409020205020404" charset="0"/>
-                    <a:cs typeface="Liberation Mono" panose="02070409020205020404" charset="0"/>
+                    <a:latin typeface="Arial" panose="020B0604020202020204" pitchFamily="34" charset="0"/>
+                    <a:cs typeface="Arial" panose="020B0604020202020204" pitchFamily="34" charset="0"/>
                     <a:sym typeface="+mn-ea"/>
                   </a:rPr>
-                  <a:t>   </a:t>
+                  <a:t>           </a:t>
                 </a:r>
                 <a:r>
-                  <a:rPr lang="en-US" altLang="zh-CN" sz="400">
-                    <a:latin typeface="Liberation Mono" panose="02070409020205020404" charset="0"/>
-                    <a:cs typeface="Liberation Mono" panose="02070409020205020404" charset="0"/>
+                  <a:rPr lang="en-US" altLang="zh-CN" sz="400" b="1">
+                    <a:latin typeface="Arial" panose="020B0604020202020204" pitchFamily="34" charset="0"/>
+                    <a:cs typeface="Arial" panose="020B0604020202020204" pitchFamily="34" charset="0"/>
                     <a:sym typeface="+mn-ea"/>
                   </a:rPr>
                   <a:t>Gene3 codon alignment</a:t>
                 </a:r>
                 <a:r>
-                  <a:rPr lang="en-US" altLang="zh-CN" sz="400">
+                  <a:rPr lang="en-US" altLang="zh-CN" sz="400" b="1">
                     <a:solidFill>
                       <a:srgbClr val="0B8A98"/>
                     </a:solidFill>
-                    <a:latin typeface="Liberation Mono" panose="02070409020205020404" charset="0"/>
-                    <a:cs typeface="Liberation Mono" panose="02070409020205020404" charset="0"/>
+                    <a:latin typeface="Arial" panose="020B0604020202020204" pitchFamily="34" charset="0"/>
+                    <a:cs typeface="Arial" panose="020B0604020202020204" pitchFamily="34" charset="0"/>
                     <a:sym typeface="+mn-ea"/>
                   </a:rPr>
-                  <a:t>   </a:t>
+                  <a:t>            </a:t>
                 </a:r>
                 <a:r>
-                  <a:rPr lang="en-US" altLang="zh-CN" sz="400">
-                    <a:latin typeface="Liberation Mono" panose="02070409020205020404" charset="0"/>
-                    <a:cs typeface="Liberation Mono" panose="02070409020205020404" charset="0"/>
+                  <a:rPr lang="en-US" altLang="zh-CN" sz="400" b="1">
+                    <a:latin typeface="Arial" panose="020B0604020202020204" pitchFamily="34" charset="0"/>
+                    <a:cs typeface="Arial" panose="020B0604020202020204" pitchFamily="34" charset="0"/>
                     <a:sym typeface="+mn-ea"/>
                   </a:rPr>
                   <a:t>Gene4 codon alignment</a:t>
                 </a:r>
-                <a:endParaRPr lang="en-US" altLang="zh-CN" sz="400">
-                  <a:latin typeface="Liberation Mono" panose="02070409020205020404" charset="0"/>
-                  <a:cs typeface="Liberation Mono" panose="02070409020205020404" charset="0"/>
+                <a:endParaRPr lang="en-US" altLang="zh-CN" sz="400" b="1">
+                  <a:latin typeface="Arial" panose="020B0604020202020204" pitchFamily="34" charset="0"/>
+                  <a:cs typeface="Arial" panose="020B0604020202020204" pitchFamily="34" charset="0"/>
                   <a:sym typeface="+mn-ea"/>
                 </a:endParaRPr>
               </a:p>
@@ -7959,17 +8987,6 @@
                   </a:rPr>
                   <a:t>TTA GGT GCC       </a:t>
                 </a:r>
-                <a:r>
-                  <a:rPr lang="en-US" altLang="zh-CN" sz="400">
-                    <a:solidFill>
-                      <a:schemeClr val="tx1"/>
-                    </a:solidFill>
-                    <a:latin typeface="Liberation Mono" panose="02070409020205020404" charset="0"/>
-                    <a:cs typeface="Liberation Mono" panose="02070409020205020404" charset="0"/>
-                    <a:sym typeface="+mn-ea"/>
-                  </a:rPr>
-                  <a:t>Seq3: missing</a:t>
-                </a:r>
                 <a:endParaRPr lang="en-US" altLang="zh-CN" sz="400">
                   <a:solidFill>
                     <a:schemeClr val="tx1"/>
@@ -8008,7 +9025,7 @@
                     <a:latin typeface="Arial" panose="020B0604020202020204" pitchFamily="34" charset="0"/>
                     <a:cs typeface="Arial" panose="020B0604020202020204" pitchFamily="34" charset="0"/>
                   </a:rPr>
-                  <a:t>L</a:t>
+                  <a:t>H</a:t>
                 </a:r>
                 <a:endParaRPr lang="en-US" sz="1000" b="1">
                   <a:latin typeface="Arial" panose="020B0604020202020204" pitchFamily="34" charset="0"/>
@@ -8074,55 +9091,8 @@
             </p:nvSpPr>
             <p:spPr>
               <a:xfrm rot="5400000">
-                <a:off x="999" y="4889"/>
-                <a:ext cx="225" cy="119"/>
-              </a:xfrm>
-              <a:prstGeom prst="rightArrow">
-                <a:avLst/>
-              </a:prstGeom>
-              <a:solidFill>
-                <a:schemeClr val="bg1">
-                  <a:lumMod val="75000"/>
-                </a:schemeClr>
-              </a:solidFill>
-              <a:ln>
-                <a:noFill/>
-              </a:ln>
-            </p:spPr>
-            <p:style>
-              <a:lnRef idx="2">
-                <a:schemeClr val="accent1">
-                  <a:lumMod val="75000"/>
-                </a:schemeClr>
-              </a:lnRef>
-              <a:fillRef idx="1">
-                <a:schemeClr val="accent1"/>
-              </a:fillRef>
-              <a:effectRef idx="0">
-                <a:srgbClr val="FFFFFF"/>
-              </a:effectRef>
-              <a:fontRef idx="minor">
-                <a:schemeClr val="lt1"/>
-              </a:fontRef>
-            </p:style>
-            <p:txBody>
-              <a:bodyPr rtlCol="0" anchor="ctr"/>
-              <a:p>
-                <a:pPr algn="ctr"/>
-                <a:endParaRPr lang="zh-CN" altLang="en-US"/>
-              </a:p>
-            </p:txBody>
-          </p:sp>
-          <p:sp>
-            <p:nvSpPr>
-              <p:cNvPr id="41" name="右箭头 40"/>
-              <p:cNvSpPr/>
-              <p:nvPr/>
-            </p:nvSpPr>
-            <p:spPr>
-              <a:xfrm rot="5400000">
-                <a:off x="3670" y="4889"/>
-                <a:ext cx="225" cy="119"/>
+                <a:off x="2374" y="4790"/>
+                <a:ext cx="141" cy="120"/>
               </a:xfrm>
               <a:prstGeom prst="rightArrow">
                 <a:avLst/>
@@ -8168,7 +9138,7 @@
             </p:nvSpPr>
             <p:spPr>
               <a:xfrm>
-                <a:off x="96" y="6418"/>
+                <a:off x="96" y="6232"/>
                 <a:ext cx="4982" cy="265"/>
               </a:xfrm>
               <a:prstGeom prst="rect">
@@ -8184,7 +9154,7 @@
                 <a:r>
                   <a:rPr lang="zh-CN" altLang="en-US" sz="500">
                     <a:solidFill>
-                      <a:srgbClr val="FF0000"/>
+                      <a:srgbClr val="0F5FBD"/>
                     </a:solidFill>
                     <a:latin typeface="Arial" panose="020B0604020202020204" pitchFamily="34" charset="0"/>
                     <a:cs typeface="Arial" panose="020B0604020202020204" pitchFamily="34" charset="0"/>
@@ -8193,7 +9163,7 @@
                 </a:r>
                 <a:endParaRPr lang="zh-CN" altLang="en-US" sz="500">
                   <a:solidFill>
-                    <a:srgbClr val="FF0000"/>
+                    <a:srgbClr val="0F5FBD"/>
                   </a:solidFill>
                   <a:latin typeface="Arial" panose="020B0604020202020204" pitchFamily="34" charset="0"/>
                   <a:cs typeface="Arial" panose="020B0604020202020204" pitchFamily="34" charset="0"/>
@@ -8209,16 +9179,14 @@
             </p:nvSpPr>
             <p:spPr>
               <a:xfrm>
-                <a:off x="215" y="5129"/>
+                <a:off x="215" y="4943"/>
                 <a:ext cx="4932" cy="1288"/>
               </a:xfrm>
               <a:prstGeom prst="rect">
                 <a:avLst/>
               </a:prstGeom>
               <a:solidFill>
-                <a:schemeClr val="bg1">
-                  <a:lumMod val="95000"/>
-                </a:schemeClr>
+                <a:srgbClr val="F8FAFC"/>
               </a:solidFill>
             </p:spPr>
             <p:txBody>
@@ -8235,22 +9203,14 @@
                   <a:buFontTx/>
                 </a:pPr>
                 <a:r>
-                  <a:rPr lang="en-US" altLang="zh-CN" sz="400">
+                  <a:rPr lang="en-US" altLang="zh-CN" sz="400" b="1">
                     <a:latin typeface="Arial" panose="020B0604020202020204" pitchFamily="34" charset="0"/>
                     <a:cs typeface="Arial" panose="020B0604020202020204" pitchFamily="34" charset="0"/>
                     <a:sym typeface="+mn-ea"/>
                   </a:rPr>
-                  <a:t>Supermatrix codon alignment by skip-gene model              </a:t>
+                  <a:t>Supermatrix codon alignment by skip-gene model        Supermatrix codon alignment by pad-gaps model</a:t>
                 </a:r>
-                <a:r>
-                  <a:rPr lang="en-US" altLang="zh-CN" sz="400">
-                    <a:latin typeface="Arial" panose="020B0604020202020204" pitchFamily="34" charset="0"/>
-                    <a:cs typeface="Arial" panose="020B0604020202020204" pitchFamily="34" charset="0"/>
-                    <a:sym typeface="+mn-ea"/>
-                  </a:rPr>
-                  <a:t>Supermatrix codon alignment by pad-gaps model</a:t>
-                </a:r>
-                <a:endParaRPr lang="en-US" altLang="zh-CN" sz="400">
+                <a:endParaRPr lang="en-US" altLang="zh-CN" sz="400" b="1">
                   <a:latin typeface="Arial" panose="020B0604020202020204" pitchFamily="34" charset="0"/>
                   <a:cs typeface="Arial" panose="020B0604020202020204" pitchFamily="34" charset="0"/>
                   <a:sym typeface="+mn-ea"/>
@@ -8689,6 +9649,17 @@
                   </a:lnSpc>
                 </a:pPr>
                 <a:r>
+                  <a:rPr lang="en-US" altLang="zh-CN" sz="400" b="1">
+                    <a:solidFill>
+                      <a:schemeClr val="tx1"/>
+                    </a:solidFill>
+                    <a:latin typeface="Arial" panose="020B0604020202020204" pitchFamily="34" charset="0"/>
+                    <a:cs typeface="Arial" panose="020B0604020202020204" pitchFamily="34" charset="0"/>
+                    <a:sym typeface="+mn-ea"/>
+                  </a:rPr>
+                  <a:t>Partition  </a:t>
+                </a:r>
+                <a:r>
                   <a:rPr lang="en-US" altLang="zh-CN" sz="400">
                     <a:solidFill>
                       <a:schemeClr val="tx1"/>
@@ -8697,17 +9668,17 @@
                     <a:cs typeface="Arial" panose="020B0604020202020204" pitchFamily="34" charset="0"/>
                     <a:sym typeface="+mn-ea"/>
                   </a:rPr>
-                  <a:t>Partition                                                                                 </a:t>
+                  <a:t>                                                                             </a:t>
                 </a:r>
                 <a:r>
-                  <a:rPr lang="en-US" altLang="zh-CN" sz="400">
+                  <a:rPr lang="en-US" altLang="zh-CN" sz="400" b="1">
                     <a:latin typeface="Arial" panose="020B0604020202020204" pitchFamily="34" charset="0"/>
                     <a:cs typeface="Arial" panose="020B0604020202020204" pitchFamily="34" charset="0"/>
                     <a:sym typeface="+mn-ea"/>
                   </a:rPr>
                   <a:t>Partition</a:t>
                 </a:r>
-                <a:endParaRPr lang="en-US" altLang="zh-CN" sz="400">
+                <a:endParaRPr lang="en-US" altLang="zh-CN" sz="400" b="1">
                   <a:solidFill>
                     <a:schemeClr val="tx1"/>
                   </a:solidFill>
@@ -8852,8 +9823,8 @@
           </p:nvSpPr>
           <p:spPr>
             <a:xfrm>
-              <a:off x="179" y="7080"/>
-              <a:ext cx="5147" cy="2983"/>
+              <a:off x="5514" y="5599"/>
+              <a:ext cx="5147" cy="2798"/>
             </a:xfrm>
             <a:prstGeom prst="rect">
               <a:avLst/>
@@ -8911,7 +9882,7 @@
         </p:nvGrpSpPr>
         <p:grpSpPr>
           <a:xfrm>
-            <a:off x="3495040" y="4287520"/>
+            <a:off x="45085" y="6278245"/>
             <a:ext cx="3274695" cy="828675"/>
             <a:chOff x="169" y="10388"/>
             <a:chExt cx="5157" cy="1305"/>
@@ -8932,9 +9903,7 @@
               <a:avLst/>
             </a:prstGeom>
             <a:solidFill>
-              <a:schemeClr val="bg1">
-                <a:lumMod val="95000"/>
-              </a:schemeClr>
+              <a:srgbClr val="F8FAFC"/>
             </a:solidFill>
           </p:spPr>
           <p:txBody>
@@ -8951,14 +9920,14 @@
                 <a:buFontTx/>
               </a:pPr>
               <a:r>
-                <a:rPr lang="en-US" altLang="zh-CN" sz="400">
+                <a:rPr lang="en-US" altLang="zh-CN" sz="400" b="1">
                   <a:latin typeface="Arial" panose="020B0604020202020204" pitchFamily="34" charset="0"/>
                   <a:cs typeface="Arial" panose="020B0604020202020204" pitchFamily="34" charset="0"/>
                   <a:sym typeface="+mn-ea"/>
                 </a:rPr>
                 <a:t>Supermatrix codon alignment</a:t>
               </a:r>
-              <a:endParaRPr lang="en-US" altLang="zh-CN" sz="400">
+              <a:endParaRPr lang="en-US" altLang="zh-CN" sz="400" b="1">
                 <a:latin typeface="Arial" panose="020B0604020202020204" pitchFamily="34" charset="0"/>
                 <a:cs typeface="Arial" panose="020B0604020202020204" pitchFamily="34" charset="0"/>
                 <a:sym typeface="+mn-ea"/>
@@ -9153,9 +10122,7 @@
               <a:avLst/>
             </a:prstGeom>
             <a:solidFill>
-              <a:schemeClr val="bg1">
-                <a:lumMod val="95000"/>
-              </a:schemeClr>
+              <a:srgbClr val="F8FAFC"/>
             </a:solidFill>
           </p:spPr>
           <p:txBody>
@@ -9172,14 +10139,14 @@
                 <a:buFontTx/>
               </a:pPr>
               <a:r>
-                <a:rPr lang="en-US" altLang="zh-CN" sz="400">
+                <a:rPr lang="en-US" altLang="zh-CN" sz="400" b="1">
                   <a:latin typeface="Arial" panose="020B0604020202020204" pitchFamily="34" charset="0"/>
                   <a:cs typeface="Arial" panose="020B0604020202020204" pitchFamily="34" charset="0"/>
                   <a:sym typeface="+mn-ea"/>
                 </a:rPr>
                 <a:t>Supermatrix codon alignment</a:t>
               </a:r>
-              <a:endParaRPr lang="en-US" altLang="zh-CN" sz="400">
+              <a:endParaRPr lang="en-US" altLang="zh-CN" sz="400" b="1">
                 <a:latin typeface="Arial" panose="020B0604020202020204" pitchFamily="34" charset="0"/>
                 <a:cs typeface="Arial" panose="020B0604020202020204" pitchFamily="34" charset="0"/>
                 <a:sym typeface="+mn-ea"/>
@@ -9433,7 +10400,7 @@
                   <a:latin typeface="Arial" panose="020B0604020202020204" pitchFamily="34" charset="0"/>
                   <a:cs typeface="Arial" panose="020B0604020202020204" pitchFamily="34" charset="0"/>
                 </a:rPr>
-                <a:t>K</a:t>
+                <a:t>E</a:t>
               </a:r>
               <a:endParaRPr lang="en-US" sz="1000" b="1">
                 <a:latin typeface="Arial" panose="020B0604020202020204" pitchFamily="34" charset="0"/>
@@ -9538,7 +10505,7 @@
               <a:r>
                 <a:rPr lang="zh-CN" altLang="en-US" sz="500">
                   <a:solidFill>
-                    <a:srgbClr val="FF0000"/>
+                    <a:srgbClr val="0F5FBD"/>
                   </a:solidFill>
                   <a:latin typeface="Arial" panose="020B0604020202020204" pitchFamily="34" charset="0"/>
                   <a:cs typeface="Arial" panose="020B0604020202020204" pitchFamily="34" charset="0"/>
@@ -9547,7 +10514,7 @@
               </a:r>
               <a:endParaRPr lang="zh-CN" altLang="en-US" sz="500">
                 <a:solidFill>
-                  <a:srgbClr val="FF0000"/>
+                  <a:srgbClr val="0F5FBD"/>
                 </a:solidFill>
                 <a:latin typeface="Arial" panose="020B0604020202020204" pitchFamily="34" charset="0"/>
                 <a:cs typeface="Arial" panose="020B0604020202020204" pitchFamily="34" charset="0"/>
@@ -9564,7 +10531,7 @@
         </p:nvGrpSpPr>
         <p:grpSpPr>
           <a:xfrm>
-            <a:off x="66675" y="4914265"/>
+            <a:off x="45085" y="7305040"/>
             <a:ext cx="3291205" cy="1004570"/>
             <a:chOff x="137" y="11978"/>
             <a:chExt cx="5183" cy="1582"/>
@@ -9597,7 +10564,7 @@
                   <a:latin typeface="Arial" panose="020B0604020202020204" pitchFamily="34" charset="0"/>
                   <a:cs typeface="Arial" panose="020B0604020202020204" pitchFamily="34" charset="0"/>
                 </a:rPr>
-                <a:t>D</a:t>
+                <a:t>F</a:t>
               </a:r>
               <a:endParaRPr lang="en-US" sz="1000" b="1">
                 <a:latin typeface="Arial" panose="020B0604020202020204" pitchFamily="34" charset="0"/>
@@ -9702,7 +10669,7 @@
               <a:r>
                 <a:rPr lang="zh-CN" altLang="en-US" sz="500">
                   <a:solidFill>
-                    <a:srgbClr val="FF0000"/>
+                    <a:srgbClr val="0F5FBD"/>
                   </a:solidFill>
                   <a:latin typeface="Arial" panose="020B0604020202020204" pitchFamily="34" charset="0"/>
                   <a:cs typeface="Arial" panose="020B0604020202020204" pitchFamily="34" charset="0"/>
@@ -9711,7 +10678,7 @@
               </a:r>
               <a:endParaRPr lang="zh-CN" altLang="en-US" sz="500">
                 <a:solidFill>
-                  <a:srgbClr val="FF0000"/>
+                  <a:srgbClr val="0F5FBD"/>
                 </a:solidFill>
                 <a:latin typeface="Arial" panose="020B0604020202020204" pitchFamily="34" charset="0"/>
                 <a:cs typeface="Arial" panose="020B0604020202020204" pitchFamily="34" charset="0"/>
@@ -9734,9 +10701,7 @@
               <a:avLst/>
             </a:prstGeom>
             <a:solidFill>
-              <a:schemeClr val="bg1">
-                <a:lumMod val="95000"/>
-              </a:schemeClr>
+              <a:srgbClr val="F8FAFC"/>
             </a:solidFill>
           </p:spPr>
           <p:txBody>
@@ -9753,14 +10718,14 @@
                 <a:buFontTx/>
               </a:pPr>
               <a:r>
-                <a:rPr lang="en-US" altLang="zh-CN" sz="400">
+                <a:rPr lang="en-US" altLang="zh-CN" sz="400" b="1">
                   <a:latin typeface="Arial" panose="020B0604020202020204" pitchFamily="34" charset="0"/>
                   <a:cs typeface="Arial" panose="020B0604020202020204" pitchFamily="34" charset="0"/>
                   <a:sym typeface="+mn-ea"/>
                 </a:rPr>
                 <a:t>Quality control indicators</a:t>
               </a:r>
-              <a:endParaRPr lang="en-US" altLang="zh-CN" sz="400">
+              <a:endParaRPr lang="en-US" altLang="zh-CN" sz="400" b="1">
                 <a:latin typeface="Arial" panose="020B0604020202020204" pitchFamily="34" charset="0"/>
                 <a:cs typeface="Arial" panose="020B0604020202020204" pitchFamily="34" charset="0"/>
                 <a:sym typeface="+mn-ea"/>
@@ -9965,9 +10930,7 @@
               <a:avLst/>
             </a:prstGeom>
             <a:solidFill>
-              <a:schemeClr val="bg1">
-                <a:lumMod val="95000"/>
-              </a:schemeClr>
+              <a:srgbClr val="F8FAFC"/>
             </a:solidFill>
           </p:spPr>
           <p:txBody>
@@ -9984,7 +10947,7 @@
                 <a:buFontTx/>
               </a:pPr>
               <a:r>
-                <a:rPr lang="en-US" altLang="zh-CN" sz="400">
+                <a:rPr lang="en-US" altLang="zh-CN" sz="400" b="1">
                   <a:solidFill>
                     <a:schemeClr val="tx1"/>
                   </a:solidFill>
@@ -9994,7 +10957,7 @@
                 </a:rPr>
                 <a:t>Multiple alignment matrix</a:t>
               </a:r>
-              <a:endParaRPr lang="en-US" altLang="zh-CN" sz="400">
+              <a:endParaRPr lang="en-US" altLang="zh-CN" sz="400" b="1">
                 <a:solidFill>
                   <a:schemeClr val="tx1"/>
                 </a:solidFill>
@@ -10165,9 +11128,7 @@
               <a:avLst/>
             </a:prstGeom>
             <a:solidFill>
-              <a:schemeClr val="bg1">
-                <a:lumMod val="95000"/>
-              </a:schemeClr>
+              <a:srgbClr val="F8FAFC"/>
             </a:solidFill>
           </p:spPr>
           <p:txBody>
@@ -10184,7 +11145,7 @@
                 <a:buFontTx/>
               </a:pPr>
               <a:r>
-                <a:rPr lang="en-US" altLang="zh-CN" sz="400">
+                <a:rPr lang="en-US" altLang="zh-CN" sz="400" b="1">
                   <a:solidFill>
                     <a:schemeClr val="tx1"/>
                   </a:solidFill>
@@ -10195,14 +11156,14 @@
                 <a:t>Pass list    </a:t>
               </a:r>
               <a:r>
-                <a:rPr lang="en-US" altLang="zh-CN" sz="400">
+                <a:rPr lang="en-US" altLang="zh-CN" sz="400" b="1">
                   <a:latin typeface="Arial" panose="020B0604020202020204" pitchFamily="34" charset="0"/>
                   <a:cs typeface="Arial" panose="020B0604020202020204" pitchFamily="34" charset="0"/>
                   <a:sym typeface="+mn-ea"/>
                 </a:rPr>
                 <a:t>Fail list</a:t>
               </a:r>
-              <a:endParaRPr lang="en-US" altLang="zh-CN" sz="400">
+              <a:endParaRPr lang="en-US" altLang="zh-CN" sz="400" b="1">
                 <a:solidFill>
                   <a:schemeClr val="tx1"/>
                 </a:solidFill>
@@ -10413,7 +11374,7 @@
         </p:nvGrpSpPr>
         <p:grpSpPr>
           <a:xfrm>
-            <a:off x="93345" y="6096000"/>
+            <a:off x="45085" y="8507730"/>
             <a:ext cx="3277235" cy="1060450"/>
             <a:chOff x="5463" y="10397"/>
             <a:chExt cx="5161" cy="1670"/>
@@ -10434,9 +11395,7 @@
               <a:avLst/>
             </a:prstGeom>
             <a:solidFill>
-              <a:schemeClr val="bg1">
-                <a:lumMod val="95000"/>
-              </a:schemeClr>
+              <a:srgbClr val="F8FAFC"/>
             </a:solidFill>
           </p:spPr>
           <p:txBody>
@@ -10453,7 +11412,7 @@
                 <a:buFontTx/>
               </a:pPr>
               <a:r>
-                <a:rPr lang="en-US" altLang="zh-CN" sz="400">
+                <a:rPr lang="en-US" altLang="zh-CN" sz="400" b="1">
                   <a:solidFill>
                     <a:schemeClr val="tx1"/>
                   </a:solidFill>
@@ -10463,7 +11422,7 @@
                 </a:rPr>
                 <a:t>Supermatrix codon alignment</a:t>
               </a:r>
-              <a:endParaRPr lang="en-US" altLang="zh-CN" sz="400">
+              <a:endParaRPr lang="en-US" altLang="zh-CN" sz="400" b="1">
                 <a:solidFill>
                   <a:schemeClr val="tx1"/>
                 </a:solidFill>
@@ -10764,7 +11723,7 @@
                   <a:latin typeface="Arial" panose="020B0604020202020204" pitchFamily="34" charset="0"/>
                   <a:cs typeface="Arial" panose="020B0604020202020204" pitchFamily="34" charset="0"/>
                 </a:rPr>
-                <a:t>E</a:t>
+                <a:t>G</a:t>
               </a:r>
               <a:endParaRPr lang="en-US" sz="1000" b="1">
                 <a:latin typeface="Arial" panose="020B0604020202020204" pitchFamily="34" charset="0"/>
@@ -10869,7 +11828,7 @@
               <a:r>
                 <a:rPr lang="zh-CN" altLang="en-US" sz="500">
                   <a:solidFill>
-                    <a:srgbClr val="FF0000"/>
+                    <a:srgbClr val="0F5FBD"/>
                   </a:solidFill>
                   <a:latin typeface="Arial" panose="020B0604020202020204" pitchFamily="34" charset="0"/>
                   <a:cs typeface="Arial" panose="020B0604020202020204" pitchFamily="34" charset="0"/>
@@ -10878,7 +11837,7 @@
               </a:r>
               <a:endParaRPr lang="zh-CN" altLang="en-US" sz="500">
                 <a:solidFill>
-                  <a:srgbClr val="FF0000"/>
+                  <a:srgbClr val="0F5FBD"/>
                 </a:solidFill>
                 <a:latin typeface="Arial" panose="020B0604020202020204" pitchFamily="34" charset="0"/>
                 <a:cs typeface="Arial" panose="020B0604020202020204" pitchFamily="34" charset="0"/>
@@ -10901,9 +11860,7 @@
               <a:avLst/>
             </a:prstGeom>
             <a:solidFill>
-              <a:schemeClr val="bg1">
-                <a:lumMod val="95000"/>
-              </a:schemeClr>
+              <a:srgbClr val="F8FAFC"/>
             </a:solidFill>
           </p:spPr>
           <p:txBody>
@@ -10920,7 +11877,7 @@
                 <a:buFontTx/>
               </a:pPr>
               <a:r>
-                <a:rPr lang="en-US" altLang="zh-CN" sz="400">
+                <a:rPr lang="en-US" altLang="zh-CN" sz="400" b="1">
                   <a:solidFill>
                     <a:schemeClr val="tx1"/>
                   </a:solidFill>
@@ -10930,7 +11887,7 @@
                 </a:rPr>
                 <a:t>Supermatrix codon alignment</a:t>
               </a:r>
-              <a:endParaRPr lang="en-US" altLang="zh-CN" sz="400">
+              <a:endParaRPr lang="en-US" altLang="zh-CN" sz="400" b="1">
                 <a:solidFill>
                   <a:schemeClr val="tx1"/>
                 </a:solidFill>
@@ -11208,15 +12165,13 @@
           <p:spPr>
             <a:xfrm>
               <a:off x="7313" y="10872"/>
-              <a:ext cx="1394" cy="956"/>
+              <a:ext cx="1440" cy="956"/>
             </a:xfrm>
             <a:prstGeom prst="rect">
               <a:avLst/>
             </a:prstGeom>
             <a:solidFill>
-              <a:schemeClr val="bg1">
-                <a:lumMod val="95000"/>
-              </a:schemeClr>
+              <a:srgbClr val="F8FAFC"/>
             </a:solidFill>
           </p:spPr>
           <p:txBody>
@@ -11233,7 +12188,7 @@
                 <a:buFontTx/>
               </a:pPr>
               <a:r>
-                <a:rPr lang="en-US" altLang="zh-CN" sz="400">
+                <a:rPr lang="en-US" altLang="zh-CN" sz="400" b="1">
                   <a:solidFill>
                     <a:schemeClr val="tx1"/>
                   </a:solidFill>
@@ -11243,7 +12198,7 @@
                 </a:rPr>
                 <a:t>Two-column ID mapping table</a:t>
               </a:r>
-              <a:endParaRPr lang="en-US" altLang="zh-CN" sz="400">
+              <a:endParaRPr lang="en-US" altLang="zh-CN" sz="400" b="1">
                 <a:solidFill>
                   <a:schemeClr val="tx1"/>
                 </a:solidFill>
@@ -11463,7 +12418,7 @@
         </p:nvGrpSpPr>
         <p:grpSpPr>
           <a:xfrm>
-            <a:off x="83185" y="2257425"/>
+            <a:off x="45085" y="3614420"/>
             <a:ext cx="3274060" cy="1412240"/>
             <a:chOff x="-87" y="3190"/>
             <a:chExt cx="5156" cy="2224"/>
@@ -11498,9 +12453,7 @@
                 <a:avLst/>
               </a:prstGeom>
               <a:solidFill>
-                <a:schemeClr val="bg1">
-                  <a:lumMod val="95000"/>
-                </a:schemeClr>
+                <a:srgbClr val="F8FAFC"/>
               </a:solidFill>
             </p:spPr>
             <p:txBody>
@@ -11514,14 +12467,14 @@
                   </a:lnSpc>
                 </a:pPr>
                 <a:r>
-                  <a:rPr lang="en-US" altLang="zh-CN" sz="400">
+                  <a:rPr lang="en-US" altLang="zh-CN" sz="400" b="1">
                     <a:latin typeface="Arial" panose="020B0604020202020204" pitchFamily="34" charset="0"/>
                     <a:cs typeface="Arial" panose="020B0604020202020204" pitchFamily="34" charset="0"/>
                     <a:sym typeface="+mn-ea"/>
                   </a:rPr>
                   <a:t>Protein alignment (input)</a:t>
                 </a:r>
-                <a:endParaRPr lang="en-US" altLang="zh-CN" sz="400">
+                <a:endParaRPr lang="en-US" altLang="zh-CN" sz="400" b="1">
                   <a:latin typeface="Arial" panose="020B0604020202020204" pitchFamily="34" charset="0"/>
                   <a:cs typeface="Arial" panose="020B0604020202020204" pitchFamily="34" charset="0"/>
                 </a:endParaRPr>
@@ -11597,9 +12550,7 @@
                 <a:avLst/>
               </a:prstGeom>
               <a:solidFill>
-                <a:schemeClr val="bg1">
-                  <a:lumMod val="95000"/>
-                </a:schemeClr>
+                <a:srgbClr val="F8FAFC"/>
               </a:solidFill>
             </p:spPr>
             <p:txBody>
@@ -11616,13 +12567,13 @@
                   <a:buFontTx/>
                 </a:pPr>
                 <a:r>
-                  <a:rPr lang="en-US" altLang="zh-CN" sz="400">
+                  <a:rPr lang="en-US" altLang="zh-CN" sz="400" b="1">
                     <a:latin typeface="Arial" panose="020B0604020202020204" pitchFamily="34" charset="0"/>
                     <a:cs typeface="Arial" panose="020B0604020202020204" pitchFamily="34" charset="0"/>
                   </a:rPr>
                   <a:t>Raw CDS sequences (input)</a:t>
                 </a:r>
-                <a:endParaRPr lang="en-US" altLang="zh-CN" sz="400">
+                <a:endParaRPr lang="en-US" altLang="zh-CN" sz="400" b="1">
                   <a:latin typeface="Arial" panose="020B0604020202020204" pitchFamily="34" charset="0"/>
                   <a:cs typeface="Arial" panose="020B0604020202020204" pitchFamily="34" charset="0"/>
                 </a:endParaRPr>
@@ -11743,7 +12694,7 @@
                     <a:latin typeface="Arial" panose="020B0604020202020204" pitchFamily="34" charset="0"/>
                     <a:cs typeface="Arial" panose="020B0604020202020204" pitchFamily="34" charset="0"/>
                   </a:rPr>
-                  <a:t>B</a:t>
+                  <a:t>C</a:t>
                 </a:r>
                 <a:r>
                   <a:rPr lang="en-US" sz="500" b="1">
@@ -11797,7 +12748,7 @@
                 <a:r>
                   <a:rPr lang="zh-CN" altLang="en-US" sz="500">
                     <a:solidFill>
-                      <a:srgbClr val="FF0000"/>
+                      <a:srgbClr val="0F5FBD"/>
                     </a:solidFill>
                     <a:latin typeface="Arial" panose="020B0604020202020204" pitchFamily="34" charset="0"/>
                     <a:cs typeface="Arial" panose="020B0604020202020204" pitchFamily="34" charset="0"/>
@@ -11806,7 +12757,7 @@
                 </a:r>
                 <a:endParaRPr lang="zh-CN" altLang="en-US" sz="500">
                   <a:solidFill>
-                    <a:srgbClr val="FF0000"/>
+                    <a:srgbClr val="0F5FBD"/>
                   </a:solidFill>
                   <a:latin typeface="Arial" panose="020B0604020202020204" pitchFamily="34" charset="0"/>
                   <a:cs typeface="Arial" panose="020B0604020202020204" pitchFamily="34" charset="0"/>
@@ -11884,9 +12835,7 @@
                 <a:avLst/>
               </a:prstGeom>
               <a:solidFill>
-                <a:schemeClr val="bg1">
-                  <a:lumMod val="95000"/>
-                </a:schemeClr>
+                <a:srgbClr val="F8FAFC"/>
               </a:solidFill>
             </p:spPr>
             <p:txBody>
@@ -11900,14 +12849,14 @@
                   </a:lnSpc>
                 </a:pPr>
                 <a:r>
-                  <a:rPr lang="en-US" altLang="zh-CN" sz="400">
+                  <a:rPr lang="en-US" altLang="zh-CN" sz="400" b="1">
                     <a:latin typeface="Arial" panose="020B0604020202020204" pitchFamily="34" charset="0"/>
                     <a:cs typeface="Arial" panose="020B0604020202020204" pitchFamily="34" charset="0"/>
                     <a:sym typeface="+mn-ea"/>
                   </a:rPr>
                   <a:t>Codon alignment (output)</a:t>
                 </a:r>
-                <a:endParaRPr lang="en-US" altLang="zh-CN" sz="400">
+                <a:endParaRPr lang="en-US" altLang="zh-CN" sz="400" b="1">
                   <a:latin typeface="Arial" panose="020B0604020202020204" pitchFamily="34" charset="0"/>
                   <a:cs typeface="Arial" panose="020B0604020202020204" pitchFamily="34" charset="0"/>
                 </a:endParaRPr>
@@ -12096,23 +13045,70 @@
           </p:txBody>
         </p:sp>
       </p:grpSp>
+      <p:sp>
+        <p:nvSpPr>
+          <p:cNvPr id="31" name="右箭头 30"/>
+          <p:cNvSpPr/>
+          <p:nvPr/>
+        </p:nvSpPr>
+        <p:spPr>
+          <a:xfrm>
+            <a:off x="3479800" y="591820"/>
+            <a:ext cx="142875" cy="75565"/>
+          </a:xfrm>
+          <a:prstGeom prst="rightArrow">
+            <a:avLst/>
+          </a:prstGeom>
+          <a:solidFill>
+            <a:schemeClr val="bg1">
+              <a:lumMod val="75000"/>
+            </a:schemeClr>
+          </a:solidFill>
+          <a:ln>
+            <a:noFill/>
+          </a:ln>
+        </p:spPr>
+        <p:style>
+          <a:lnRef idx="2">
+            <a:schemeClr val="accent1">
+              <a:lumMod val="75000"/>
+            </a:schemeClr>
+          </a:lnRef>
+          <a:fillRef idx="1">
+            <a:schemeClr val="accent1"/>
+          </a:fillRef>
+          <a:effectRef idx="0">
+            <a:srgbClr val="FFFFFF"/>
+          </a:effectRef>
+          <a:fontRef idx="minor">
+            <a:schemeClr val="lt1"/>
+          </a:fontRef>
+        </p:style>
+        <p:txBody>
+          <a:bodyPr rtlCol="0" anchor="ctr"/>
+          <a:p>
+            <a:pPr algn="ctr"/>
+            <a:endParaRPr lang="zh-CN" altLang="en-US"/>
+          </a:p>
+        </p:txBody>
+      </p:sp>
       <p:grpSp>
         <p:nvGrpSpPr>
-          <p:cNvPr id="17" name="组合 16"/>
+          <p:cNvPr id="37" name="组合 36"/>
           <p:cNvGrpSpPr/>
           <p:nvPr/>
         </p:nvGrpSpPr>
         <p:grpSpPr>
           <a:xfrm>
-            <a:off x="76835" y="7245985"/>
-            <a:ext cx="6692900" cy="1911985"/>
+            <a:off x="45085" y="1553210"/>
+            <a:ext cx="6728460" cy="1911985"/>
             <a:chOff x="121" y="11411"/>
-            <a:chExt cx="10540" cy="3011"/>
+            <a:chExt cx="10596" cy="3011"/>
           </a:xfrm>
         </p:grpSpPr>
         <p:sp>
           <p:nvSpPr>
-            <p:cNvPr id="177" name="矩形 176"/>
+            <p:cNvPr id="39" name="矩形 38"/>
             <p:cNvSpPr/>
             <p:nvPr/>
           </p:nvSpPr>
@@ -12170,7 +13166,7 @@
         </p:sp>
         <p:sp>
           <p:nvSpPr>
-            <p:cNvPr id="178" name="文本框 177"/>
+            <p:cNvPr id="62" name="文本框 61"/>
             <p:cNvSpPr txBox="1"/>
             <p:nvPr/>
           </p:nvSpPr>
@@ -12183,9 +13179,7 @@
               <a:avLst/>
             </a:prstGeom>
             <a:solidFill>
-              <a:schemeClr val="bg1">
-                <a:lumMod val="95000"/>
-              </a:schemeClr>
+              <a:srgbClr val="F8FAFC"/>
             </a:solidFill>
           </p:spPr>
           <p:txBody>
@@ -12199,7 +13193,7 @@
                 </a:lnSpc>
               </a:pPr>
               <a:r>
-                <a:rPr lang="en-US" altLang="zh-CN" sz="400">
+                <a:rPr lang="en-US" altLang="zh-CN" sz="400" b="1">
                   <a:solidFill>
                     <a:schemeClr val="tx1"/>
                   </a:solidFill>
@@ -12207,9 +13201,9 @@
                   <a:cs typeface="Arial" panose="020B0604020202020204" pitchFamily="34" charset="0"/>
                   <a:sym typeface="+mn-ea"/>
                 </a:rPr>
-                <a:t>Input FASTA</a:t>
-              </a:r>
-              <a:endParaRPr lang="en-US" altLang="zh-CN" sz="400">
+                <a:t>Input FASTA files</a:t>
+              </a:r>
+              <a:endParaRPr lang="en-US" altLang="zh-CN" sz="400" b="1">
                 <a:solidFill>
                   <a:schemeClr val="tx1"/>
                 </a:solidFill>
@@ -12653,7 +13647,7 @@
         </p:sp>
         <p:grpSp>
           <p:nvGrpSpPr>
-            <p:cNvPr id="189" name="组合 188"/>
+            <p:cNvPr id="63" name="组合 62"/>
             <p:cNvGrpSpPr/>
             <p:nvPr/>
           </p:nvGrpSpPr>
@@ -12667,7 +13661,7 @@
           </p:grpSpPr>
           <p:sp>
             <p:nvSpPr>
-              <p:cNvPr id="180" name="文本框 179"/>
+              <p:cNvPr id="65" name="文本框 64"/>
               <p:cNvSpPr txBox="1"/>
               <p:nvPr/>
             </p:nvSpPr>
@@ -12709,7 +13703,7 @@
           </p:sp>
           <p:sp>
             <p:nvSpPr>
-              <p:cNvPr id="188" name="文本框 187"/>
+              <p:cNvPr id="66" name="文本框 65"/>
               <p:cNvSpPr txBox="1"/>
               <p:nvPr/>
             </p:nvSpPr>
@@ -12722,9 +13716,7 @@
                 <a:avLst/>
               </a:prstGeom>
               <a:solidFill>
-                <a:schemeClr val="bg1">
-                  <a:lumMod val="95000"/>
-                </a:schemeClr>
+                <a:srgbClr val="F8FAFC"/>
               </a:solidFill>
             </p:spPr>
             <p:txBody>
@@ -12780,21 +13772,21 @@
         </p:grpSp>
         <p:grpSp>
           <p:nvGrpSpPr>
-            <p:cNvPr id="190" name="组合 189"/>
+            <p:cNvPr id="67" name="组合 66"/>
             <p:cNvGrpSpPr/>
             <p:nvPr/>
           </p:nvGrpSpPr>
           <p:grpSpPr>
             <a:xfrm rot="0">
               <a:off x="2899" y="12496"/>
-              <a:ext cx="1328" cy="491"/>
+              <a:ext cx="1461" cy="491"/>
               <a:chOff x="2391" y="9036"/>
-              <a:chExt cx="1328" cy="491"/>
+              <a:chExt cx="1461" cy="491"/>
             </a:xfrm>
           </p:grpSpPr>
           <p:sp>
             <p:nvSpPr>
-              <p:cNvPr id="191" name="文本框 190"/>
+              <p:cNvPr id="68" name="文本框 67"/>
               <p:cNvSpPr txBox="1"/>
               <p:nvPr/>
             </p:nvSpPr>
@@ -12836,22 +13828,20 @@
           </p:sp>
           <p:sp>
             <p:nvSpPr>
-              <p:cNvPr id="192" name="文本框 191"/>
+              <p:cNvPr id="69" name="文本框 68"/>
               <p:cNvSpPr txBox="1"/>
               <p:nvPr/>
             </p:nvSpPr>
             <p:spPr>
               <a:xfrm>
                 <a:off x="2549" y="9244"/>
-                <a:ext cx="1035" cy="283"/>
+                <a:ext cx="1303" cy="283"/>
               </a:xfrm>
               <a:prstGeom prst="rect">
                 <a:avLst/>
               </a:prstGeom>
               <a:solidFill>
-                <a:schemeClr val="bg1">
-                  <a:lumMod val="95000"/>
-                </a:schemeClr>
+                <a:srgbClr val="F8FAFC"/>
               </a:solidFill>
             </p:spPr>
             <p:txBody>
@@ -12886,21 +13876,21 @@
         </p:grpSp>
         <p:grpSp>
           <p:nvGrpSpPr>
-            <p:cNvPr id="193" name="组合 192"/>
+            <p:cNvPr id="70" name="组合 69"/>
             <p:cNvGrpSpPr/>
             <p:nvPr/>
           </p:nvGrpSpPr>
           <p:grpSpPr>
             <a:xfrm rot="0">
               <a:off x="2899" y="12937"/>
-              <a:ext cx="1385" cy="518"/>
+              <a:ext cx="1460" cy="518"/>
               <a:chOff x="2391" y="8774"/>
-              <a:chExt cx="1385" cy="518"/>
+              <a:chExt cx="1460" cy="518"/>
             </a:xfrm>
           </p:grpSpPr>
           <p:sp>
             <p:nvSpPr>
-              <p:cNvPr id="194" name="文本框 193"/>
+              <p:cNvPr id="71" name="文本框 70"/>
               <p:cNvSpPr txBox="1"/>
               <p:nvPr/>
             </p:nvSpPr>
@@ -12942,22 +13932,20 @@
           </p:sp>
           <p:sp>
             <p:nvSpPr>
-              <p:cNvPr id="195" name="文本框 194"/>
+              <p:cNvPr id="76" name="文本框 75"/>
               <p:cNvSpPr txBox="1"/>
               <p:nvPr/>
             </p:nvSpPr>
             <p:spPr>
               <a:xfrm>
                 <a:off x="2549" y="9009"/>
-                <a:ext cx="1035" cy="283"/>
+                <a:ext cx="1302" cy="283"/>
               </a:xfrm>
               <a:prstGeom prst="rect">
                 <a:avLst/>
               </a:prstGeom>
               <a:solidFill>
-                <a:schemeClr val="bg1">
-                  <a:lumMod val="95000"/>
-                </a:schemeClr>
+                <a:srgbClr val="F8FAFC"/>
               </a:solidFill>
             </p:spPr>
             <p:txBody>
@@ -12995,7 +13983,7 @@
         </p:grpSp>
         <p:sp>
           <p:nvSpPr>
-            <p:cNvPr id="196" name="文本框 195"/>
+            <p:cNvPr id="79" name="文本框 78"/>
             <p:cNvSpPr txBox="1"/>
             <p:nvPr/>
           </p:nvSpPr>
@@ -13008,9 +13996,7 @@
               <a:avLst/>
             </a:prstGeom>
             <a:solidFill>
-              <a:schemeClr val="bg1">
-                <a:lumMod val="95000"/>
-              </a:schemeClr>
+              <a:srgbClr val="F8FAFC"/>
             </a:solidFill>
           </p:spPr>
           <p:txBody>
@@ -13066,22 +14052,20 @@
         </p:sp>
         <p:sp>
           <p:nvSpPr>
-            <p:cNvPr id="197" name="文本框 196"/>
+            <p:cNvPr id="90" name="文本框 89"/>
             <p:cNvSpPr txBox="1"/>
             <p:nvPr/>
           </p:nvSpPr>
           <p:spPr>
             <a:xfrm>
-              <a:off x="4987" y="13171"/>
+              <a:off x="4958" y="13171"/>
               <a:ext cx="1035" cy="283"/>
             </a:xfrm>
             <a:prstGeom prst="rect">
               <a:avLst/>
             </a:prstGeom>
             <a:solidFill>
-              <a:schemeClr val="bg1">
-                <a:lumMod val="95000"/>
-              </a:schemeClr>
+              <a:srgbClr val="F8FAFC"/>
             </a:solidFill>
           </p:spPr>
           <p:txBody>
@@ -13118,7 +14102,7 @@
         </p:sp>
         <p:sp>
           <p:nvSpPr>
-            <p:cNvPr id="198" name="文本框 197"/>
+            <p:cNvPr id="92" name="文本框 91"/>
             <p:cNvSpPr txBox="1"/>
             <p:nvPr/>
           </p:nvSpPr>
@@ -13131,9 +14115,7 @@
               <a:avLst/>
             </a:prstGeom>
             <a:solidFill>
-              <a:schemeClr val="bg1">
-                <a:lumMod val="95000"/>
-              </a:schemeClr>
+              <a:srgbClr val="F8FAFC"/>
             </a:solidFill>
           </p:spPr>
           <p:txBody>
@@ -13170,7 +14152,7 @@
         </p:sp>
         <p:sp>
           <p:nvSpPr>
-            <p:cNvPr id="199" name="文本框 198"/>
+            <p:cNvPr id="93" name="文本框 92"/>
             <p:cNvSpPr txBox="1"/>
             <p:nvPr/>
           </p:nvSpPr>
@@ -13183,9 +14165,7 @@
               <a:avLst/>
             </a:prstGeom>
             <a:solidFill>
-              <a:schemeClr val="bg1">
-                <a:lumMod val="95000"/>
-              </a:schemeClr>
+              <a:srgbClr val="F8FAFC"/>
             </a:solidFill>
           </p:spPr>
           <p:txBody>
@@ -13219,7 +14199,7 @@
         </p:sp>
         <p:sp>
           <p:nvSpPr>
-            <p:cNvPr id="200" name="文本框 199"/>
+            <p:cNvPr id="94" name="文本框 93"/>
             <p:cNvSpPr txBox="1"/>
             <p:nvPr/>
           </p:nvSpPr>
@@ -13232,9 +14212,7 @@
               <a:avLst/>
             </a:prstGeom>
             <a:solidFill>
-              <a:schemeClr val="bg1">
-                <a:lumMod val="95000"/>
-              </a:schemeClr>
+              <a:srgbClr val="F8FAFC"/>
             </a:solidFill>
           </p:spPr>
           <p:txBody>
@@ -13260,19 +14238,11 @@
               </a:r>
               <a:r>
                 <a:rPr lang="en-US" altLang="zh-CN" sz="400">
-                  <a:latin typeface="Ubuntu Mono" panose="020B0509030602030204" charset="0"/>
-                  <a:cs typeface="Ubuntu Mono" panose="020B0509030602030204" charset="0"/>
-                  <a:sym typeface="+mn-ea"/>
-                </a:rPr>
-                <a:t>ucleotide </a:t>
-              </a:r>
-              <a:r>
-                <a:rPr lang="en-US" altLang="zh-CN" sz="400">
-                  <a:latin typeface="Arial" panose="020B0604020202020204" pitchFamily="34" charset="0"/>
-                  <a:cs typeface="Arial" panose="020B0604020202020204" pitchFamily="34" charset="0"/>
-                  <a:sym typeface="+mn-ea"/>
-                </a:rPr>
-                <a:t>alignments</a:t>
+                  <a:latin typeface="Arial" panose="020B0604020202020204" pitchFamily="34" charset="0"/>
+                  <a:cs typeface="Arial" panose="020B0604020202020204" pitchFamily="34" charset="0"/>
+                  <a:sym typeface="+mn-ea"/>
+                </a:rPr>
+                <a:t>ucleotide alignments</a:t>
               </a:r>
               <a:endParaRPr lang="en-US" altLang="zh-CN" sz="400">
                 <a:solidFill>
@@ -13287,7 +14257,7 @@
         </p:sp>
         <p:sp>
           <p:nvSpPr>
-            <p:cNvPr id="201" name="文本框 200"/>
+            <p:cNvPr id="95" name="文本框 94"/>
             <p:cNvSpPr txBox="1"/>
             <p:nvPr/>
           </p:nvSpPr>
@@ -13300,9 +14270,7 @@
               <a:avLst/>
             </a:prstGeom>
             <a:solidFill>
-              <a:schemeClr val="bg1">
-                <a:lumMod val="95000"/>
-              </a:schemeClr>
+              <a:srgbClr val="F8FAFC"/>
             </a:solidFill>
           </p:spPr>
           <p:txBody>
@@ -13339,7 +14307,7 @@
         </p:sp>
         <p:sp>
           <p:nvSpPr>
-            <p:cNvPr id="202" name="文本框 201"/>
+            <p:cNvPr id="96" name="文本框 95"/>
             <p:cNvSpPr txBox="1"/>
             <p:nvPr/>
           </p:nvSpPr>
@@ -13352,9 +14320,7 @@
               <a:avLst/>
             </a:prstGeom>
             <a:solidFill>
-              <a:schemeClr val="bg1">
-                <a:lumMod val="95000"/>
-              </a:schemeClr>
+              <a:srgbClr val="F8FAFC"/>
             </a:solidFill>
           </p:spPr>
           <p:txBody>
@@ -13391,7 +14357,7 @@
         </p:sp>
         <p:sp>
           <p:nvSpPr>
-            <p:cNvPr id="203" name="文本框 202"/>
+            <p:cNvPr id="97" name="文本框 96"/>
             <p:cNvSpPr txBox="1"/>
             <p:nvPr/>
           </p:nvSpPr>
@@ -13404,9 +14370,7 @@
               <a:avLst/>
             </a:prstGeom>
             <a:solidFill>
-              <a:schemeClr val="bg1">
-                <a:lumMod val="95000"/>
-              </a:schemeClr>
+              <a:srgbClr val="F8FAFC"/>
             </a:solidFill>
           </p:spPr>
           <p:txBody>
@@ -13437,7 +14401,7 @@
         </p:sp>
         <p:sp>
           <p:nvSpPr>
-            <p:cNvPr id="204" name="右箭头 203"/>
+            <p:cNvPr id="98" name="右箭头 97"/>
             <p:cNvSpPr/>
             <p:nvPr/>
           </p:nvSpPr>
@@ -13484,7 +14448,7 @@
         </p:sp>
         <p:sp>
           <p:nvSpPr>
-            <p:cNvPr id="205" name="右箭头 204"/>
+            <p:cNvPr id="99" name="右箭头 98"/>
             <p:cNvSpPr/>
             <p:nvPr/>
           </p:nvSpPr>
@@ -13531,7 +14495,7 @@
         </p:sp>
         <p:sp>
           <p:nvSpPr>
-            <p:cNvPr id="206" name="右箭头 205"/>
+            <p:cNvPr id="100" name="右箭头 99"/>
             <p:cNvSpPr/>
             <p:nvPr/>
           </p:nvSpPr>
@@ -13578,7 +14542,7 @@
         </p:sp>
         <p:sp>
           <p:nvSpPr>
-            <p:cNvPr id="207" name="右箭头 206"/>
+            <p:cNvPr id="101" name="右箭头 100"/>
             <p:cNvSpPr/>
             <p:nvPr/>
           </p:nvSpPr>
@@ -13625,13 +14589,13 @@
         </p:sp>
         <p:sp>
           <p:nvSpPr>
-            <p:cNvPr id="208" name="右箭头 207"/>
+            <p:cNvPr id="102" name="右箭头 101"/>
             <p:cNvSpPr/>
             <p:nvPr/>
           </p:nvSpPr>
           <p:spPr>
             <a:xfrm>
-              <a:off x="4403" y="12785"/>
+              <a:off x="4546" y="12785"/>
               <a:ext cx="225" cy="119"/>
             </a:xfrm>
             <a:prstGeom prst="rightArrow">
@@ -13672,13 +14636,13 @@
         </p:sp>
         <p:sp>
           <p:nvSpPr>
-            <p:cNvPr id="209" name="右箭头 208"/>
+            <p:cNvPr id="103" name="右箭头 102"/>
             <p:cNvSpPr/>
             <p:nvPr/>
           </p:nvSpPr>
           <p:spPr>
             <a:xfrm>
-              <a:off x="4403" y="13226"/>
+              <a:off x="4546" y="13226"/>
               <a:ext cx="225" cy="119"/>
             </a:xfrm>
             <a:prstGeom prst="rightArrow">
@@ -13719,7 +14683,7 @@
         </p:sp>
         <p:sp>
           <p:nvSpPr>
-            <p:cNvPr id="210" name="右箭头 209"/>
+            <p:cNvPr id="104" name="右箭头 103"/>
             <p:cNvSpPr/>
             <p:nvPr/>
           </p:nvSpPr>
@@ -13766,7 +14730,7 @@
         </p:sp>
         <p:sp>
           <p:nvSpPr>
-            <p:cNvPr id="211" name="右箭头 210"/>
+            <p:cNvPr id="105" name="右箭头 104"/>
             <p:cNvSpPr/>
             <p:nvPr/>
           </p:nvSpPr>
@@ -13813,7 +14777,7 @@
         </p:sp>
         <p:sp>
           <p:nvSpPr>
-            <p:cNvPr id="212" name="文本框 211"/>
+            <p:cNvPr id="106" name="文本框 105"/>
             <p:cNvSpPr txBox="1"/>
             <p:nvPr/>
           </p:nvSpPr>
@@ -13826,9 +14790,7 @@
               <a:avLst/>
             </a:prstGeom>
             <a:solidFill>
-              <a:schemeClr val="bg1">
-                <a:lumMod val="95000"/>
-              </a:schemeClr>
+              <a:srgbClr val="F8FAFC"/>
             </a:solidFill>
           </p:spPr>
           <p:txBody>
@@ -13842,7 +14804,7 @@
                 </a:lnSpc>
               </a:pPr>
               <a:r>
-                <a:rPr lang="en-US" altLang="zh-CN" sz="400">
+                <a:rPr lang="en-US" altLang="zh-CN" sz="400" b="1">
                   <a:solidFill>
                     <a:schemeClr val="tx1"/>
                   </a:solidFill>
@@ -13850,9 +14812,9 @@
                   <a:cs typeface="Arial" panose="020B0604020202020204" pitchFamily="34" charset="0"/>
                   <a:sym typeface="+mn-ea"/>
                 </a:rPr>
-                <a:t>Output FASTA</a:t>
-              </a:r>
-              <a:endParaRPr lang="en-US" altLang="zh-CN" sz="400">
+                <a:t>Output FASTA files</a:t>
+              </a:r>
+              <a:endParaRPr lang="en-US" altLang="zh-CN" sz="400" b="1">
                 <a:solidFill>
                   <a:schemeClr val="tx1"/>
                 </a:solidFill>
@@ -14008,7 +14970,7 @@
         </p:sp>
         <p:sp>
           <p:nvSpPr>
-            <p:cNvPr id="215" name="右箭头 214"/>
+            <p:cNvPr id="107" name="右箭头 106"/>
             <p:cNvSpPr/>
             <p:nvPr/>
           </p:nvSpPr>
@@ -14055,7 +15017,7 @@
         </p:sp>
         <p:sp>
           <p:nvSpPr>
-            <p:cNvPr id="216" name="右箭头 215"/>
+            <p:cNvPr id="108" name="右箭头 107"/>
             <p:cNvSpPr/>
             <p:nvPr/>
           </p:nvSpPr>
@@ -14102,7 +15064,7 @@
         </p:sp>
         <p:sp>
           <p:nvSpPr>
-            <p:cNvPr id="217" name="文本框 216"/>
+            <p:cNvPr id="109" name="文本框 108"/>
             <p:cNvSpPr txBox="1"/>
             <p:nvPr/>
           </p:nvSpPr>
@@ -14127,7 +15089,7 @@
                   <a:latin typeface="Arial" panose="020B0604020202020204" pitchFamily="34" charset="0"/>
                   <a:cs typeface="Arial" panose="020B0604020202020204" pitchFamily="34" charset="0"/>
                 </a:rPr>
-                <a:t>F</a:t>
+                <a:t>B</a:t>
               </a:r>
               <a:endParaRPr sz="1000" b="1">
                 <a:latin typeface="Arial" panose="020B0604020202020204" pitchFamily="34" charset="0"/>
@@ -14152,14 +15114,14 @@
         </p:sp>
         <p:sp>
           <p:nvSpPr>
-            <p:cNvPr id="218" name="矩形 217"/>
+            <p:cNvPr id="110" name="矩形 109"/>
             <p:cNvSpPr/>
             <p:nvPr/>
           </p:nvSpPr>
           <p:spPr>
             <a:xfrm>
-              <a:off x="161" y="11450"/>
-              <a:ext cx="10501" cy="2972"/>
+              <a:off x="192" y="11450"/>
+              <a:ext cx="10525" cy="2972"/>
             </a:xfrm>
             <a:prstGeom prst="rect">
               <a:avLst/>
@@ -14210,7 +15172,7 @@
         </p:sp>
         <p:sp>
           <p:nvSpPr>
-            <p:cNvPr id="220" name="文本框 219"/>
+            <p:cNvPr id="111" name="文本框 110"/>
             <p:cNvSpPr txBox="1"/>
             <p:nvPr/>
           </p:nvSpPr>
@@ -14232,7 +15194,7 @@
               <a:r>
                 <a:rPr lang="en-US" altLang="zh-CN" sz="500">
                   <a:solidFill>
-                    <a:srgbClr val="FF0000"/>
+                    <a:srgbClr val="0F5FBD"/>
                   </a:solidFill>
                   <a:latin typeface="Arial" panose="020B0604020202020204" pitchFamily="34" charset="0"/>
                   <a:cs typeface="Arial" panose="020B0604020202020204" pitchFamily="34" charset="0"/>
@@ -14241,7 +15203,7 @@
               </a:r>
               <a:endParaRPr lang="en-US" altLang="zh-CN" sz="500">
                 <a:solidFill>
-                  <a:srgbClr val="FF0000"/>
+                  <a:srgbClr val="0F5FBD"/>
                 </a:solidFill>
                 <a:latin typeface="Arial" panose="020B0604020202020204" pitchFamily="34" charset="0"/>
                 <a:cs typeface="Arial" panose="020B0604020202020204" pitchFamily="34" charset="0"/>
@@ -14251,7 +15213,7 @@
         </p:sp>
         <p:sp>
           <p:nvSpPr>
-            <p:cNvPr id="221" name="文本框 220"/>
+            <p:cNvPr id="112" name="文本框 111"/>
             <p:cNvSpPr txBox="1"/>
             <p:nvPr/>
           </p:nvSpPr>
@@ -14264,9 +15226,7 @@
               <a:avLst/>
             </a:prstGeom>
             <a:solidFill>
-              <a:schemeClr val="bg1">
-                <a:lumMod val="95000"/>
-              </a:schemeClr>
+              <a:srgbClr val="F8FAFC"/>
             </a:solidFill>
           </p:spPr>
           <p:txBody>
@@ -14303,7 +15263,7 @@
         </p:sp>
         <p:sp>
           <p:nvSpPr>
-            <p:cNvPr id="222" name="右箭头 221"/>
+            <p:cNvPr id="113" name="右箭头 112"/>
             <p:cNvSpPr/>
             <p:nvPr/>
           </p:nvSpPr>
@@ -14350,7 +15310,7 @@
         </p:sp>
         <p:sp>
           <p:nvSpPr>
-            <p:cNvPr id="266" name="文本框 265"/>
+            <p:cNvPr id="114" name="文本框 113"/>
             <p:cNvSpPr txBox="1"/>
             <p:nvPr/>
           </p:nvSpPr>
@@ -14363,9 +15323,7 @@
               <a:avLst/>
             </a:prstGeom>
             <a:solidFill>
-              <a:schemeClr val="bg1">
-                <a:lumMod val="95000"/>
-              </a:schemeClr>
+              <a:srgbClr val="F8FAFC"/>
             </a:solidFill>
           </p:spPr>
           <p:txBody>
@@ -14387,12 +15345,34 @@
                   <a:cs typeface="Arial" panose="020B0604020202020204" pitchFamily="34" charset="0"/>
                   <a:sym typeface="+mn-ea"/>
                 </a:rPr>
-                <a:t>Run MSAP.py on multiple FASTA files concurrently with validated results and resume support by </a:t>
-              </a:r>
-              <a:r>
-                <a:rPr lang="en-US" altLang="zh-CN" sz="400">
-                  <a:solidFill>
-                    <a:srgbClr val="FF0000"/>
+                <a:t>Run </a:t>
+              </a:r>
+              <a:r>
+                <a:rPr lang="en-US" altLang="zh-CN" sz="400">
+                  <a:solidFill>
+                    <a:srgbClr val="0F5FBD"/>
+                  </a:solidFill>
+                  <a:latin typeface="Arial" panose="020B0604020202020204" pitchFamily="34" charset="0"/>
+                  <a:cs typeface="Arial" panose="020B0604020202020204" pitchFamily="34" charset="0"/>
+                  <a:sym typeface="+mn-ea"/>
+                </a:rPr>
+                <a:t>MSAP.py </a:t>
+              </a:r>
+              <a:r>
+                <a:rPr lang="en-US" altLang="zh-CN" sz="400">
+                  <a:solidFill>
+                    <a:schemeClr val="tx1"/>
+                  </a:solidFill>
+                  <a:latin typeface="Arial" panose="020B0604020202020204" pitchFamily="34" charset="0"/>
+                  <a:cs typeface="Arial" panose="020B0604020202020204" pitchFamily="34" charset="0"/>
+                  <a:sym typeface="+mn-ea"/>
+                </a:rPr>
+                <a:t>on multiple FASTA files concurrently with validated results and resume support by </a:t>
+              </a:r>
+              <a:r>
+                <a:rPr lang="en-US" altLang="zh-CN" sz="400">
+                  <a:solidFill>
+                    <a:srgbClr val="0F5FBD"/>
                   </a:solidFill>
                   <a:latin typeface="Arial" panose="020B0604020202020204" pitchFamily="34" charset="0"/>
                   <a:cs typeface="Arial" panose="020B0604020202020204" pitchFamily="34" charset="0"/>
@@ -14424,7 +15404,7 @@
         </p:sp>
         <p:sp>
           <p:nvSpPr>
-            <p:cNvPr id="267" name="右箭头 266"/>
+            <p:cNvPr id="115" name="右箭头 114"/>
             <p:cNvSpPr/>
             <p:nvPr/>
           </p:nvSpPr>
@@ -14471,7 +15451,7 @@
         </p:sp>
         <p:grpSp>
           <p:nvGrpSpPr>
-            <p:cNvPr id="3" name="组合 2"/>
+            <p:cNvPr id="116" name="组合 115"/>
             <p:cNvGrpSpPr/>
             <p:nvPr/>
           </p:nvGrpSpPr>
@@ -14485,7 +15465,7 @@
           </p:grpSpPr>
           <p:sp>
             <p:nvSpPr>
-              <p:cNvPr id="4" name="文本框 3"/>
+              <p:cNvPr id="117" name="文本框 116"/>
               <p:cNvSpPr txBox="1"/>
               <p:nvPr/>
             </p:nvSpPr>
@@ -14527,7 +15507,7 @@
           </p:sp>
           <p:sp>
             <p:nvSpPr>
-              <p:cNvPr id="5" name="文本框 4"/>
+              <p:cNvPr id="118" name="文本框 117"/>
               <p:cNvSpPr txBox="1"/>
               <p:nvPr/>
             </p:nvSpPr>
@@ -14540,9 +15520,7 @@
                 <a:avLst/>
               </a:prstGeom>
               <a:solidFill>
-                <a:schemeClr val="bg1">
-                  <a:lumMod val="95000"/>
-                </a:schemeClr>
+                <a:srgbClr val="F8FAFC"/>
               </a:solidFill>
             </p:spPr>
             <p:txBody>
@@ -14601,22 +15579,20 @@
         </p:grpSp>
         <p:sp>
           <p:nvSpPr>
-            <p:cNvPr id="6" name="文本框 5"/>
+            <p:cNvPr id="119" name="文本框 118"/>
             <p:cNvSpPr txBox="1"/>
             <p:nvPr/>
           </p:nvSpPr>
           <p:spPr>
             <a:xfrm>
-              <a:off x="4987" y="13661"/>
-              <a:ext cx="1035" cy="283"/>
+              <a:off x="4957" y="13661"/>
+              <a:ext cx="1036" cy="283"/>
             </a:xfrm>
             <a:prstGeom prst="rect">
               <a:avLst/>
             </a:prstGeom>
             <a:solidFill>
-              <a:schemeClr val="bg1">
-                <a:lumMod val="95000"/>
-              </a:schemeClr>
+              <a:srgbClr val="F8FAFC"/>
             </a:solidFill>
           </p:spPr>
           <p:txBody>
@@ -14653,7 +15629,7 @@
         </p:sp>
         <p:sp>
           <p:nvSpPr>
-            <p:cNvPr id="7" name="文本框 6"/>
+            <p:cNvPr id="120" name="文本框 119"/>
             <p:cNvSpPr txBox="1"/>
             <p:nvPr/>
           </p:nvSpPr>
@@ -14666,9 +15642,7 @@
               <a:avLst/>
             </a:prstGeom>
             <a:solidFill>
-              <a:schemeClr val="bg1">
-                <a:lumMod val="95000"/>
-              </a:schemeClr>
+              <a:srgbClr val="F8FAFC"/>
             </a:solidFill>
           </p:spPr>
           <p:txBody>
@@ -14702,7 +15676,7 @@
         </p:sp>
         <p:sp>
           <p:nvSpPr>
-            <p:cNvPr id="9" name="右箭头 8"/>
+            <p:cNvPr id="121" name="右箭头 120"/>
             <p:cNvSpPr/>
             <p:nvPr/>
           </p:nvSpPr>
@@ -14749,7 +15723,7 @@
         </p:sp>
         <p:sp>
           <p:nvSpPr>
-            <p:cNvPr id="14" name="右箭头 13"/>
+            <p:cNvPr id="122" name="右箭头 121"/>
             <p:cNvSpPr/>
             <p:nvPr/>
           </p:nvSpPr>
@@ -14795,1143 +15769,558 @@
           </p:txBody>
         </p:sp>
       </p:grpSp>
-      <p:grpSp>
-        <p:nvGrpSpPr>
-          <p:cNvPr id="83" name="组合 82"/>
-          <p:cNvGrpSpPr/>
+      <p:sp>
+        <p:nvSpPr>
+          <p:cNvPr id="124" name="文本框 123"/>
+          <p:cNvSpPr txBox="1"/>
           <p:nvPr/>
-        </p:nvGrpSpPr>
-        <p:grpSpPr>
+        </p:nvSpPr>
+        <p:spPr>
           <a:xfrm>
-            <a:off x="53975" y="88265"/>
-            <a:ext cx="3362325" cy="1963420"/>
-            <a:chOff x="189" y="230"/>
-            <a:chExt cx="5295" cy="3092"/>
+            <a:off x="3691890" y="346075"/>
+            <a:ext cx="2255520" cy="909320"/>
           </a:xfrm>
-        </p:grpSpPr>
-        <p:sp>
-          <p:nvSpPr>
-            <p:cNvPr id="2" name="文本框 1"/>
-            <p:cNvSpPr txBox="1"/>
-            <p:nvPr/>
-          </p:nvSpPr>
-          <p:spPr>
-            <a:xfrm>
-              <a:off x="332" y="687"/>
-              <a:ext cx="809" cy="840"/>
-            </a:xfrm>
-            <a:prstGeom prst="rect">
-              <a:avLst/>
-            </a:prstGeom>
-            <a:solidFill>
-              <a:schemeClr val="bg1">
-                <a:lumMod val="95000"/>
-              </a:schemeClr>
-            </a:solidFill>
-          </p:spPr>
-          <p:txBody>
-            <a:bodyPr wrap="square" rtlCol="0">
-              <a:noAutofit/>
-            </a:bodyPr>
-            <a:p>
-              <a:pPr algn="l" fontAlgn="auto">
-                <a:lnSpc>
-                  <a:spcPct val="120000"/>
-                </a:lnSpc>
-                <a:buClrTx/>
-                <a:buSzTx/>
-                <a:buFontTx/>
-              </a:pPr>
-              <a:r>
-                <a:rPr lang="en-US" altLang="zh-CN" sz="400">
-                  <a:latin typeface="Arial" panose="020B0604020202020204" pitchFamily="34" charset="0"/>
-                  <a:cs typeface="Arial" panose="020B0604020202020204" pitchFamily="34" charset="0"/>
-                  <a:sym typeface="+mn-ea"/>
-                </a:rPr>
-                <a:t>taxa</a:t>
-              </a:r>
-              <a:r>
-                <a:rPr lang="en-US" altLang="zh-CN" sz="400">
-                  <a:solidFill>
-                    <a:schemeClr val="tx1"/>
-                  </a:solidFill>
-                  <a:latin typeface="Arial" panose="020B0604020202020204" pitchFamily="34" charset="0"/>
-                  <a:cs typeface="Arial" panose="020B0604020202020204" pitchFamily="34" charset="0"/>
-                  <a:sym typeface="+mn-ea"/>
-                </a:rPr>
-                <a:t>1.fa</a:t>
-              </a:r>
-              <a:endParaRPr lang="en-US" altLang="zh-CN" sz="400">
+          <a:prstGeom prst="rect">
+            <a:avLst/>
+          </a:prstGeom>
+          <a:solidFill>
+            <a:srgbClr val="F8FAFC"/>
+          </a:solidFill>
+        </p:spPr>
+        <p:txBody>
+          <a:bodyPr wrap="square" rtlCol="0">
+            <a:noAutofit/>
+          </a:bodyPr>
+          <a:p>
+            <a:pPr algn="l" fontAlgn="auto">
+              <a:lnSpc>
+                <a:spcPct val="120000"/>
+              </a:lnSpc>
+              <a:buClrTx/>
+              <a:buSzTx/>
+              <a:buFontTx/>
+            </a:pPr>
+            <a:r>
+              <a:rPr lang="en-US" altLang="zh-CN" sz="400" b="1">
+                <a:latin typeface="Arial" panose="020B0604020202020204" pitchFamily="34" charset="0"/>
+                <a:cs typeface="Arial" panose="020B0604020202020204" pitchFamily="34" charset="0"/>
+                <a:sym typeface="+mn-ea"/>
+              </a:rPr>
+              <a:t>Copy-mode examples (output FASTA files)</a:t>
+            </a:r>
+            <a:endParaRPr lang="zh-CN" altLang="en-US" sz="400">
+              <a:latin typeface="Arial" panose="020B0604020202020204" pitchFamily="34" charset="0"/>
+              <a:cs typeface="Arial" panose="020B0604020202020204" pitchFamily="34" charset="0"/>
+              <a:sym typeface="+mn-ea"/>
+            </a:endParaRPr>
+          </a:p>
+          <a:p>
+            <a:pPr algn="l" fontAlgn="auto">
+              <a:lnSpc>
+                <a:spcPct val="120000"/>
+              </a:lnSpc>
+              <a:buClrTx/>
+              <a:buSzTx/>
+              <a:buFontTx/>
+            </a:pPr>
+            <a:r>
+              <a:rPr lang="zh-CN" altLang="en-US" sz="400">
+                <a:latin typeface="Arial" panose="020B0604020202020204" pitchFamily="34" charset="0"/>
+                <a:cs typeface="Arial" panose="020B0604020202020204" pitchFamily="34" charset="0"/>
+                <a:sym typeface="+mn-ea"/>
+              </a:rPr>
+              <a:t>--copy-mode</a:t>
+            </a:r>
+            <a:r>
+              <a:rPr lang="en-US" altLang="zh-CN" sz="400">
+                <a:latin typeface="Arial" panose="020B0604020202020204" pitchFamily="34" charset="0"/>
+                <a:cs typeface="Arial" panose="020B0604020202020204" pitchFamily="34" charset="0"/>
+                <a:sym typeface="+mn-ea"/>
+              </a:rPr>
+              <a:t> </a:t>
+            </a:r>
+            <a:r>
+              <a:rPr lang="zh-CN" altLang="en-US" sz="400">
+                <a:latin typeface="Arial" panose="020B0604020202020204" pitchFamily="34" charset="0"/>
+                <a:cs typeface="Arial" panose="020B0604020202020204" pitchFamily="34" charset="0"/>
+                <a:sym typeface="+mn-ea"/>
+              </a:rPr>
+              <a:t>single-copy</a:t>
+            </a:r>
+            <a:r>
+              <a:rPr lang="en-US" altLang="zh-CN" sz="400">
+                <a:latin typeface="Arial" panose="020B0604020202020204" pitchFamily="34" charset="0"/>
+                <a:cs typeface="Arial" panose="020B0604020202020204" pitchFamily="34" charset="0"/>
+                <a:sym typeface="+mn-ea"/>
+              </a:rPr>
+              <a:t> --min-taxa 6                               </a:t>
+            </a:r>
+            <a:r>
+              <a:rPr lang="zh-CN" altLang="en-US" sz="400">
+                <a:latin typeface="Arial" panose="020B0604020202020204" pitchFamily="34" charset="0"/>
+                <a:cs typeface="Arial" panose="020B0604020202020204" pitchFamily="34" charset="0"/>
+                <a:sym typeface="+mn-ea"/>
+              </a:rPr>
+              <a:t>--copy-mode</a:t>
+            </a:r>
+            <a:r>
+              <a:rPr lang="en-US" altLang="zh-CN" sz="400">
+                <a:latin typeface="Arial" panose="020B0604020202020204" pitchFamily="34" charset="0"/>
+                <a:cs typeface="Arial" panose="020B0604020202020204" pitchFamily="34" charset="0"/>
+                <a:sym typeface="+mn-ea"/>
+              </a:rPr>
+              <a:t> </a:t>
+            </a:r>
+            <a:r>
+              <a:rPr lang="zh-CN" altLang="en-US" sz="400">
+                <a:latin typeface="Arial" panose="020B0604020202020204" pitchFamily="34" charset="0"/>
+                <a:cs typeface="Arial" panose="020B0604020202020204" pitchFamily="34" charset="0"/>
+                <a:sym typeface="+mn-ea"/>
+              </a:rPr>
+              <a:t>all-copies</a:t>
+            </a:r>
+            <a:r>
+              <a:rPr lang="en-US" altLang="zh-CN" sz="400">
+                <a:latin typeface="Arial" panose="020B0604020202020204" pitchFamily="34" charset="0"/>
+                <a:cs typeface="Arial" panose="020B0604020202020204" pitchFamily="34" charset="0"/>
+                <a:sym typeface="+mn-ea"/>
+              </a:rPr>
+              <a:t> --min-taxa 6         </a:t>
+            </a:r>
+            <a:endParaRPr lang="en-US" altLang="zh-CN" sz="400">
+              <a:latin typeface="Arial" panose="020B0604020202020204" pitchFamily="34" charset="0"/>
+              <a:cs typeface="Arial" panose="020B0604020202020204" pitchFamily="34" charset="0"/>
+              <a:sym typeface="+mn-ea"/>
+            </a:endParaRPr>
+          </a:p>
+          <a:p>
+            <a:pPr indent="0" algn="l" fontAlgn="auto">
+              <a:lnSpc>
+                <a:spcPct val="120000"/>
+              </a:lnSpc>
+            </a:pPr>
+            <a:r>
+              <a:rPr lang="en-US" altLang="zh-CN" sz="400">
+                <a:latin typeface="Arial" panose="020B0604020202020204" pitchFamily="34" charset="0"/>
+                <a:cs typeface="Arial" panose="020B0604020202020204" pitchFamily="34" charset="0"/>
+                <a:sym typeface="+mn-ea"/>
+              </a:rPr>
+              <a:t>OG0000000.fasta                                                               OG0000000.fasta</a:t>
+            </a:r>
+            <a:endParaRPr lang="en-US" altLang="zh-CN" sz="400">
+              <a:latin typeface="Arial" panose="020B0604020202020204" pitchFamily="34" charset="0"/>
+              <a:cs typeface="Arial" panose="020B0604020202020204" pitchFamily="34" charset="0"/>
+              <a:sym typeface="+mn-ea"/>
+            </a:endParaRPr>
+          </a:p>
+          <a:p>
+            <a:pPr indent="0" algn="l" fontAlgn="auto">
+              <a:lnSpc>
+                <a:spcPct val="120000"/>
+              </a:lnSpc>
+            </a:pPr>
+            <a:r>
+              <a:rPr lang="en-US" altLang="zh-CN" sz="400">
+                <a:latin typeface="Arial" panose="020B0604020202020204" pitchFamily="34" charset="0"/>
+                <a:cs typeface="Arial" panose="020B0604020202020204" pitchFamily="34" charset="0"/>
+                <a:sym typeface="+mn-ea"/>
+              </a:rPr>
+              <a:t>OG0000002.fasta                                                               OG0000002.fasta</a:t>
+            </a:r>
+            <a:endParaRPr lang="en-US" altLang="zh-CN" sz="400">
+              <a:latin typeface="Arial" panose="020B0604020202020204" pitchFamily="34" charset="0"/>
+              <a:cs typeface="Arial" panose="020B0604020202020204" pitchFamily="34" charset="0"/>
+              <a:sym typeface="+mn-ea"/>
+            </a:endParaRPr>
+          </a:p>
+          <a:p>
+            <a:pPr indent="0" algn="l" fontAlgn="auto">
+              <a:lnSpc>
+                <a:spcPct val="120000"/>
+              </a:lnSpc>
+            </a:pPr>
+            <a:r>
+              <a:rPr lang="en-US" altLang="zh-CN" sz="400">
+                <a:latin typeface="Arial" panose="020B0604020202020204" pitchFamily="34" charset="0"/>
+                <a:cs typeface="Arial" panose="020B0604020202020204" pitchFamily="34" charset="0"/>
+                <a:sym typeface="+mn-ea"/>
+              </a:rPr>
+              <a:t>                                                                                           OG0000003.fasta</a:t>
+            </a:r>
+            <a:endParaRPr lang="en-US" altLang="zh-CN" sz="400">
+              <a:latin typeface="Arial" panose="020B0604020202020204" pitchFamily="34" charset="0"/>
+              <a:cs typeface="Arial" panose="020B0604020202020204" pitchFamily="34" charset="0"/>
+              <a:sym typeface="+mn-ea"/>
+            </a:endParaRPr>
+          </a:p>
+          <a:p>
+            <a:pPr indent="0" algn="l" fontAlgn="auto">
+              <a:lnSpc>
+                <a:spcPct val="120000"/>
+              </a:lnSpc>
+            </a:pPr>
+            <a:r>
+              <a:rPr lang="en-US" altLang="zh-CN" sz="400">
+                <a:latin typeface="Arial" panose="020B0604020202020204" pitchFamily="34" charset="0"/>
+                <a:cs typeface="Arial" panose="020B0604020202020204" pitchFamily="34" charset="0"/>
+                <a:sym typeface="+mn-ea"/>
+              </a:rPr>
+              <a:t>                               </a:t>
+            </a:r>
+            <a:endParaRPr lang="en-US" altLang="zh-CN" sz="400">
+              <a:latin typeface="Arial" panose="020B0604020202020204" pitchFamily="34" charset="0"/>
+              <a:cs typeface="Arial" panose="020B0604020202020204" pitchFamily="34" charset="0"/>
+              <a:sym typeface="+mn-ea"/>
+            </a:endParaRPr>
+          </a:p>
+          <a:p>
+            <a:pPr indent="0" algn="l" fontAlgn="auto">
+              <a:lnSpc>
+                <a:spcPct val="120000"/>
+              </a:lnSpc>
+            </a:pPr>
+            <a:r>
+              <a:rPr lang="zh-CN" altLang="en-US" sz="400">
+                <a:latin typeface="Arial" panose="020B0604020202020204" pitchFamily="34" charset="0"/>
+                <a:cs typeface="Arial" panose="020B0604020202020204" pitchFamily="34" charset="0"/>
+                <a:sym typeface="+mn-ea"/>
+              </a:rPr>
+              <a:t>--copy-mode</a:t>
+            </a:r>
+            <a:r>
+              <a:rPr lang="en-US" altLang="zh-CN" sz="400">
+                <a:latin typeface="Arial" panose="020B0604020202020204" pitchFamily="34" charset="0"/>
+                <a:cs typeface="Arial" panose="020B0604020202020204" pitchFamily="34" charset="0"/>
+                <a:sym typeface="+mn-ea"/>
+              </a:rPr>
+              <a:t> </a:t>
+            </a:r>
+            <a:r>
+              <a:rPr lang="zh-CN" altLang="en-US" sz="400">
+                <a:latin typeface="Arial" panose="020B0604020202020204" pitchFamily="34" charset="0"/>
+                <a:cs typeface="Arial" panose="020B0604020202020204" pitchFamily="34" charset="0"/>
+                <a:sym typeface="+mn-ea"/>
+              </a:rPr>
+              <a:t>single-copy</a:t>
+            </a:r>
+            <a:r>
+              <a:rPr lang="en-US" altLang="zh-CN" sz="400">
+                <a:latin typeface="Arial" panose="020B0604020202020204" pitchFamily="34" charset="0"/>
+                <a:cs typeface="Arial" panose="020B0604020202020204" pitchFamily="34" charset="0"/>
+                <a:sym typeface="+mn-ea"/>
+              </a:rPr>
+              <a:t> --min-taxa 5  </a:t>
+            </a:r>
+            <a:r>
+              <a:rPr lang="en-US" altLang="zh-CN" sz="400">
+                <a:latin typeface="Arial" panose="020B0604020202020204" pitchFamily="34" charset="0"/>
+                <a:cs typeface="Arial" panose="020B0604020202020204" pitchFamily="34" charset="0"/>
+                <a:sym typeface="+mn-ea"/>
+              </a:rPr>
+              <a:t>                             </a:t>
+            </a:r>
+            <a:r>
+              <a:rPr lang="zh-CN" altLang="en-US" sz="400">
+                <a:latin typeface="Arial" panose="020B0604020202020204" pitchFamily="34" charset="0"/>
+                <a:cs typeface="Arial" panose="020B0604020202020204" pitchFamily="34" charset="0"/>
+                <a:sym typeface="+mn-ea"/>
+              </a:rPr>
+              <a:t>--copy-mode</a:t>
+            </a:r>
+            <a:r>
+              <a:rPr lang="en-US" altLang="zh-CN" sz="400">
+                <a:latin typeface="Arial" panose="020B0604020202020204" pitchFamily="34" charset="0"/>
+                <a:cs typeface="Arial" panose="020B0604020202020204" pitchFamily="34" charset="0"/>
+                <a:sym typeface="+mn-ea"/>
+              </a:rPr>
+              <a:t> </a:t>
+            </a:r>
+            <a:r>
+              <a:rPr lang="zh-CN" altLang="en-US" sz="400">
+                <a:latin typeface="Arial" panose="020B0604020202020204" pitchFamily="34" charset="0"/>
+                <a:cs typeface="Arial" panose="020B0604020202020204" pitchFamily="34" charset="0"/>
+                <a:sym typeface="+mn-ea"/>
+              </a:rPr>
+              <a:t>all-copies</a:t>
+            </a:r>
+            <a:r>
+              <a:rPr lang="en-US" altLang="zh-CN" sz="400">
+                <a:latin typeface="Arial" panose="020B0604020202020204" pitchFamily="34" charset="0"/>
+                <a:cs typeface="Arial" panose="020B0604020202020204" pitchFamily="34" charset="0"/>
+                <a:sym typeface="+mn-ea"/>
+              </a:rPr>
+              <a:t> --min-taxa 5</a:t>
+            </a:r>
+            <a:endParaRPr lang="en-US" altLang="zh-CN" sz="400">
+              <a:latin typeface="Arial" panose="020B0604020202020204" pitchFamily="34" charset="0"/>
+              <a:cs typeface="Arial" panose="020B0604020202020204" pitchFamily="34" charset="0"/>
+              <a:sym typeface="+mn-ea"/>
+            </a:endParaRPr>
+          </a:p>
+          <a:p>
+            <a:pPr indent="0" algn="l" fontAlgn="auto">
+              <a:lnSpc>
+                <a:spcPct val="120000"/>
+              </a:lnSpc>
+            </a:pPr>
+            <a:r>
+              <a:rPr lang="en-US" altLang="zh-CN" sz="400">
+                <a:latin typeface="Arial" panose="020B0604020202020204" pitchFamily="34" charset="0"/>
+                <a:cs typeface="Arial" panose="020B0604020202020204" pitchFamily="34" charset="0"/>
+                <a:sym typeface="+mn-ea"/>
+              </a:rPr>
+              <a:t>OG0000000.fasta                                                               OG0000000.fasta</a:t>
+            </a:r>
+            <a:endParaRPr lang="en-US" altLang="zh-CN" sz="400">
+              <a:latin typeface="Arial" panose="020B0604020202020204" pitchFamily="34" charset="0"/>
+              <a:cs typeface="Arial" panose="020B0604020202020204" pitchFamily="34" charset="0"/>
+              <a:sym typeface="+mn-ea"/>
+            </a:endParaRPr>
+          </a:p>
+          <a:p>
+            <a:pPr indent="0" algn="l" fontAlgn="auto">
+              <a:lnSpc>
+                <a:spcPct val="120000"/>
+              </a:lnSpc>
+            </a:pPr>
+            <a:r>
+              <a:rPr lang="en-US" altLang="zh-CN" sz="400">
+                <a:latin typeface="Arial" panose="020B0604020202020204" pitchFamily="34" charset="0"/>
+                <a:cs typeface="Arial" panose="020B0604020202020204" pitchFamily="34" charset="0"/>
+                <a:sym typeface="+mn-ea"/>
+              </a:rPr>
+              <a:t>OG0000002.fasta                                                               OG0000002.fasta</a:t>
+            </a:r>
+            <a:endParaRPr lang="en-US" altLang="zh-CN" sz="400">
+              <a:latin typeface="Arial" panose="020B0604020202020204" pitchFamily="34" charset="0"/>
+              <a:cs typeface="Arial" panose="020B0604020202020204" pitchFamily="34" charset="0"/>
+              <a:sym typeface="+mn-ea"/>
+            </a:endParaRPr>
+          </a:p>
+          <a:p>
+            <a:pPr indent="0" algn="l" fontAlgn="auto">
+              <a:lnSpc>
+                <a:spcPct val="120000"/>
+              </a:lnSpc>
+            </a:pPr>
+            <a:r>
+              <a:rPr lang="en-US" altLang="zh-CN" sz="400">
+                <a:latin typeface="Arial" panose="020B0604020202020204" pitchFamily="34" charset="0"/>
+                <a:cs typeface="Arial" panose="020B0604020202020204" pitchFamily="34" charset="0"/>
+                <a:sym typeface="+mn-ea"/>
+              </a:rPr>
+              <a:t>OG0000004.fasta </a:t>
+            </a:r>
+            <a:r>
+              <a:rPr lang="en-US" altLang="zh-CN" sz="400">
+                <a:latin typeface="Arial" panose="020B0604020202020204" pitchFamily="34" charset="0"/>
+                <a:cs typeface="Arial" panose="020B0604020202020204" pitchFamily="34" charset="0"/>
+                <a:sym typeface="+mn-ea"/>
+              </a:rPr>
+              <a:t>                                                              OG0000003.fasta</a:t>
+            </a:r>
+            <a:endParaRPr lang="en-US" altLang="zh-CN" sz="400">
+              <a:latin typeface="Arial" panose="020B0604020202020204" pitchFamily="34" charset="0"/>
+              <a:cs typeface="Arial" panose="020B0604020202020204" pitchFamily="34" charset="0"/>
+              <a:sym typeface="+mn-ea"/>
+            </a:endParaRPr>
+          </a:p>
+          <a:p>
+            <a:pPr indent="0" algn="l" fontAlgn="auto">
+              <a:lnSpc>
+                <a:spcPct val="120000"/>
+              </a:lnSpc>
+            </a:pPr>
+            <a:r>
+              <a:rPr lang="en-US" altLang="zh-CN" sz="400">
+                <a:latin typeface="Arial" panose="020B0604020202020204" pitchFamily="34" charset="0"/>
+                <a:cs typeface="Arial" panose="020B0604020202020204" pitchFamily="34" charset="0"/>
+                <a:sym typeface="+mn-ea"/>
+              </a:rPr>
+              <a:t>                                                                                           OG0000004.fasta</a:t>
+            </a:r>
+            <a:endParaRPr lang="en-US" altLang="zh-CN" sz="400">
+              <a:solidFill>
+                <a:schemeClr val="tx1"/>
+              </a:solidFill>
+              <a:latin typeface="Arial" panose="020B0604020202020204" pitchFamily="34" charset="0"/>
+              <a:cs typeface="Arial" panose="020B0604020202020204" pitchFamily="34" charset="0"/>
+              <a:sym typeface="+mn-ea"/>
+            </a:endParaRPr>
+          </a:p>
+        </p:txBody>
+      </p:sp>
+      <p:sp>
+        <p:nvSpPr>
+          <p:cNvPr id="128" name="文本框 127"/>
+          <p:cNvSpPr txBox="1"/>
+          <p:nvPr/>
+        </p:nvSpPr>
+        <p:spPr>
+          <a:xfrm>
+            <a:off x="984250" y="1108075"/>
+            <a:ext cx="2407920" cy="174625"/>
+          </a:xfrm>
+          <a:prstGeom prst="rect">
+            <a:avLst/>
+          </a:prstGeom>
+          <a:solidFill>
+            <a:srgbClr val="F8FAFC"/>
+          </a:solidFill>
+        </p:spPr>
+        <p:txBody>
+          <a:bodyPr wrap="square" rtlCol="0" anchor="ctr" anchorCtr="0">
+            <a:noAutofit/>
+          </a:bodyPr>
+          <a:p>
+            <a:pPr indent="0" algn="l" fontAlgn="auto">
+              <a:lnSpc>
+                <a:spcPct val="120000"/>
+              </a:lnSpc>
+            </a:pPr>
+            <a:r>
+              <a:rPr lang="en-US" altLang="zh-CN" sz="400" b="1">
                 <a:solidFill>
                   <a:schemeClr val="tx1"/>
                 </a:solidFill>
                 <a:latin typeface="Arial" panose="020B0604020202020204" pitchFamily="34" charset="0"/>
                 <a:cs typeface="Arial" panose="020B0604020202020204" pitchFamily="34" charset="0"/>
                 <a:sym typeface="+mn-ea"/>
-              </a:endParaRPr>
-            </a:p>
-            <a:p>
-              <a:pPr algn="l" fontAlgn="auto">
-                <a:lnSpc>
-                  <a:spcPct val="120000"/>
-                </a:lnSpc>
-                <a:buClrTx/>
-                <a:buSzTx/>
-                <a:buFontTx/>
-              </a:pPr>
-              <a:r>
-                <a:rPr lang="en-US" altLang="zh-CN" sz="400">
-                  <a:latin typeface="Arial" panose="020B0604020202020204" pitchFamily="34" charset="0"/>
-                  <a:cs typeface="Arial" panose="020B0604020202020204" pitchFamily="34" charset="0"/>
-                  <a:sym typeface="+mn-ea"/>
-                </a:rPr>
-                <a:t>taxa</a:t>
-              </a:r>
-              <a:r>
-                <a:rPr lang="en-US" altLang="zh-CN" sz="400">
-                  <a:solidFill>
-                    <a:schemeClr val="tx1"/>
-                  </a:solidFill>
-                  <a:latin typeface="Arial" panose="020B0604020202020204" pitchFamily="34" charset="0"/>
-                  <a:cs typeface="Arial" panose="020B0604020202020204" pitchFamily="34" charset="0"/>
-                  <a:sym typeface="+mn-ea"/>
-                </a:rPr>
-                <a:t>2.fa</a:t>
-              </a:r>
-              <a:endParaRPr lang="en-US" altLang="zh-CN" sz="400">
+              </a:rPr>
+              <a:t>Format conversion: </a:t>
+            </a:r>
+            <a:r>
+              <a:rPr lang="en-US" altLang="zh-CN" sz="400">
                 <a:solidFill>
                   <a:schemeClr val="tx1"/>
                 </a:solidFill>
                 <a:latin typeface="Arial" panose="020B0604020202020204" pitchFamily="34" charset="0"/>
                 <a:cs typeface="Arial" panose="020B0604020202020204" pitchFamily="34" charset="0"/>
                 <a:sym typeface="+mn-ea"/>
-              </a:endParaRPr>
-            </a:p>
-            <a:p>
-              <a:pPr algn="l" fontAlgn="auto">
-                <a:lnSpc>
-                  <a:spcPct val="120000"/>
-                </a:lnSpc>
-                <a:buClrTx/>
-                <a:buSzTx/>
-                <a:buFontTx/>
-              </a:pPr>
-              <a:r>
-                <a:rPr lang="en-US" altLang="zh-CN" sz="400">
-                  <a:latin typeface="Arial" panose="020B0604020202020204" pitchFamily="34" charset="0"/>
-                  <a:cs typeface="Arial" panose="020B0604020202020204" pitchFamily="34" charset="0"/>
-                  <a:sym typeface="+mn-ea"/>
-                </a:rPr>
-                <a:t>taxa</a:t>
-              </a:r>
-              <a:r>
-                <a:rPr lang="en-US" altLang="zh-CN" sz="400">
-                  <a:solidFill>
-                    <a:schemeClr val="tx1"/>
-                  </a:solidFill>
-                  <a:latin typeface="Arial" panose="020B0604020202020204" pitchFamily="34" charset="0"/>
-                  <a:cs typeface="Arial" panose="020B0604020202020204" pitchFamily="34" charset="0"/>
-                  <a:sym typeface="+mn-ea"/>
-                </a:rPr>
-                <a:t>3.fa</a:t>
-              </a:r>
-              <a:endParaRPr lang="en-US" altLang="zh-CN" sz="400">
+              </a:rPr>
+              <a:t>OrthoMCL </a:t>
+            </a:r>
+            <a:r>
+              <a:rPr lang="zh-CN" altLang="en-US" sz="400">
+                <a:latin typeface="Arial" panose="020B0604020202020204" pitchFamily="34" charset="0"/>
+                <a:cs typeface="Arial" panose="020B0604020202020204" pitchFamily="34" charset="0"/>
+                <a:sym typeface="+mn-ea"/>
+              </a:rPr>
+              <a:t>、</a:t>
+            </a:r>
+            <a:r>
+              <a:rPr lang="en-US" altLang="zh-CN" sz="400">
                 <a:solidFill>
                   <a:schemeClr val="tx1"/>
                 </a:solidFill>
                 <a:latin typeface="Arial" panose="020B0604020202020204" pitchFamily="34" charset="0"/>
                 <a:cs typeface="Arial" panose="020B0604020202020204" pitchFamily="34" charset="0"/>
                 <a:sym typeface="+mn-ea"/>
-              </a:endParaRPr>
-            </a:p>
-            <a:p>
-              <a:pPr algn="l" fontAlgn="auto">
-                <a:lnSpc>
-                  <a:spcPct val="120000"/>
-                </a:lnSpc>
-                <a:buClrTx/>
-                <a:buSzTx/>
-                <a:buFontTx/>
-              </a:pPr>
-              <a:r>
-                <a:rPr lang="en-US" altLang="zh-CN" sz="400">
-                  <a:latin typeface="Arial" panose="020B0604020202020204" pitchFamily="34" charset="0"/>
-                  <a:cs typeface="Arial" panose="020B0604020202020204" pitchFamily="34" charset="0"/>
-                  <a:sym typeface="+mn-ea"/>
-                </a:rPr>
-                <a:t>taxa4</a:t>
-              </a:r>
-              <a:r>
-                <a:rPr lang="en-US" altLang="zh-CN" sz="400">
-                  <a:solidFill>
-                    <a:schemeClr val="tx1"/>
-                  </a:solidFill>
-                  <a:latin typeface="Arial" panose="020B0604020202020204" pitchFamily="34" charset="0"/>
-                  <a:cs typeface="Arial" panose="020B0604020202020204" pitchFamily="34" charset="0"/>
-                  <a:sym typeface="+mn-ea"/>
-                </a:rPr>
-                <a:t>.fa</a:t>
-              </a:r>
-              <a:endParaRPr lang="en-US" altLang="zh-CN" sz="400">
+              </a:rPr>
+              <a:t>OMA</a:t>
+            </a:r>
+            <a:r>
+              <a:rPr lang="zh-CN" altLang="en-US" sz="400">
                 <a:solidFill>
                   <a:schemeClr val="tx1"/>
                 </a:solidFill>
                 <a:latin typeface="Arial" panose="020B0604020202020204" pitchFamily="34" charset="0"/>
                 <a:cs typeface="Arial" panose="020B0604020202020204" pitchFamily="34" charset="0"/>
                 <a:sym typeface="+mn-ea"/>
-              </a:endParaRPr>
-            </a:p>
-            <a:p>
-              <a:pPr algn="l" fontAlgn="auto">
-                <a:lnSpc>
-                  <a:spcPct val="120000"/>
-                </a:lnSpc>
-                <a:buClrTx/>
-                <a:buSzTx/>
-                <a:buFontTx/>
-              </a:pPr>
-              <a:r>
-                <a:rPr lang="en-US" altLang="zh-CN" sz="400">
-                  <a:latin typeface="Arial" panose="020B0604020202020204" pitchFamily="34" charset="0"/>
-                  <a:cs typeface="Arial" panose="020B0604020202020204" pitchFamily="34" charset="0"/>
-                  <a:sym typeface="+mn-ea"/>
-                </a:rPr>
-                <a:t>taxa5</a:t>
-              </a:r>
-              <a:r>
-                <a:rPr lang="en-US" altLang="zh-CN" sz="400">
-                  <a:solidFill>
-                    <a:schemeClr val="tx1"/>
-                  </a:solidFill>
-                  <a:latin typeface="Arial" panose="020B0604020202020204" pitchFamily="34" charset="0"/>
-                  <a:cs typeface="Arial" panose="020B0604020202020204" pitchFamily="34" charset="0"/>
-                  <a:sym typeface="+mn-ea"/>
-                </a:rPr>
-                <a:t>.fa</a:t>
-              </a:r>
-              <a:endParaRPr lang="en-US" altLang="zh-CN" sz="400">
+              </a:rPr>
+              <a:t>、</a:t>
+            </a:r>
+            <a:r>
+              <a:rPr lang="en-US" altLang="zh-CN" sz="400">
                 <a:solidFill>
                   <a:schemeClr val="tx1"/>
                 </a:solidFill>
                 <a:latin typeface="Arial" panose="020B0604020202020204" pitchFamily="34" charset="0"/>
                 <a:cs typeface="Arial" panose="020B0604020202020204" pitchFamily="34" charset="0"/>
                 <a:sym typeface="+mn-ea"/>
-              </a:endParaRPr>
-            </a:p>
-            <a:p>
-              <a:pPr algn="l" fontAlgn="auto">
-                <a:lnSpc>
-                  <a:spcPct val="120000"/>
-                </a:lnSpc>
-                <a:buClrTx/>
-                <a:buSzTx/>
-                <a:buFontTx/>
-              </a:pPr>
-              <a:r>
-                <a:rPr lang="en-US" altLang="zh-CN" sz="400">
-                  <a:latin typeface="Arial" panose="020B0604020202020204" pitchFamily="34" charset="0"/>
-                  <a:cs typeface="Arial" panose="020B0604020202020204" pitchFamily="34" charset="0"/>
-                  <a:sym typeface="+mn-ea"/>
-                </a:rPr>
-                <a:t>taxa6.fa</a:t>
-              </a:r>
-              <a:endParaRPr lang="en-US" altLang="zh-CN" sz="400">
+              </a:rPr>
+              <a:t>ProteinOrtho</a:t>
+            </a:r>
+            <a:r>
+              <a:rPr lang="zh-CN" altLang="en-US" sz="400">
                 <a:solidFill>
                   <a:schemeClr val="tx1"/>
                 </a:solidFill>
                 <a:latin typeface="Arial" panose="020B0604020202020204" pitchFamily="34" charset="0"/>
                 <a:cs typeface="Arial" panose="020B0604020202020204" pitchFamily="34" charset="0"/>
                 <a:sym typeface="+mn-ea"/>
-              </a:endParaRPr>
-            </a:p>
-            <a:p>
-              <a:pPr algn="l" fontAlgn="auto">
-                <a:lnSpc>
-                  <a:spcPct val="120000"/>
-                </a:lnSpc>
-                <a:buClrTx/>
-                <a:buSzTx/>
-                <a:buFontTx/>
-              </a:pPr>
-              <a:endParaRPr lang="en-US" altLang="zh-CN" sz="400">
+              </a:rPr>
+              <a:t>、</a:t>
+            </a:r>
+            <a:r>
+              <a:rPr lang="en-US" altLang="zh-CN" sz="400">
                 <a:solidFill>
                   <a:schemeClr val="tx1"/>
                 </a:solidFill>
                 <a:latin typeface="Arial" panose="020B0604020202020204" pitchFamily="34" charset="0"/>
                 <a:cs typeface="Arial" panose="020B0604020202020204" pitchFamily="34" charset="0"/>
                 <a:sym typeface="+mn-ea"/>
-              </a:endParaRPr>
-            </a:p>
-          </p:txBody>
-        </p:sp>
-        <p:sp>
-          <p:nvSpPr>
-            <p:cNvPr id="15" name="文本框 14"/>
-            <p:cNvSpPr txBox="1"/>
-            <p:nvPr/>
-          </p:nvSpPr>
-          <p:spPr>
-            <a:xfrm>
-              <a:off x="1467" y="687"/>
-              <a:ext cx="3791" cy="840"/>
-            </a:xfrm>
-            <a:prstGeom prst="rect">
-              <a:avLst/>
-            </a:prstGeom>
-            <a:solidFill>
-              <a:schemeClr val="bg1">
-                <a:lumMod val="95000"/>
-              </a:schemeClr>
-            </a:solidFill>
-          </p:spPr>
-          <p:txBody>
-            <a:bodyPr wrap="square" rtlCol="0">
-              <a:spAutoFit/>
-            </a:bodyPr>
-            <a:p>
-              <a:pPr algn="l" fontAlgn="auto">
-                <a:lnSpc>
-                  <a:spcPct val="120000"/>
-                </a:lnSpc>
-                <a:buClrTx/>
-                <a:buSzTx/>
-                <a:buFontTx/>
-              </a:pPr>
-              <a:r>
-                <a:rPr lang="en-US" altLang="zh-CN" sz="400">
-                  <a:solidFill>
-                    <a:schemeClr val="tx1"/>
-                  </a:solidFill>
-                  <a:latin typeface="Arial" panose="020B0604020202020204" pitchFamily="34" charset="0"/>
-                  <a:cs typeface="Arial" panose="020B0604020202020204" pitchFamily="34" charset="0"/>
-                  <a:sym typeface="+mn-ea"/>
-                </a:rPr>
-                <a:t>Orthogroup       </a:t>
-              </a:r>
-              <a:r>
-                <a:rPr lang="en-US" altLang="zh-CN" sz="400">
-                  <a:latin typeface="Arial" panose="020B0604020202020204" pitchFamily="34" charset="0"/>
-                  <a:cs typeface="Arial" panose="020B0604020202020204" pitchFamily="34" charset="0"/>
-                  <a:sym typeface="+mn-ea"/>
-                </a:rPr>
-                <a:t>taxa</a:t>
-              </a:r>
-              <a:r>
-                <a:rPr lang="en-US" altLang="zh-CN" sz="400">
-                  <a:solidFill>
-                    <a:schemeClr val="tx1"/>
-                  </a:solidFill>
-                  <a:latin typeface="Arial" panose="020B0604020202020204" pitchFamily="34" charset="0"/>
-                  <a:cs typeface="Arial" panose="020B0604020202020204" pitchFamily="34" charset="0"/>
-                  <a:sym typeface="+mn-ea"/>
-                </a:rPr>
-                <a:t>1</a:t>
-              </a:r>
-              <a:r>
-                <a:rPr lang="en-US" altLang="zh-CN" sz="400">
-                  <a:latin typeface="Arial" panose="020B0604020202020204" pitchFamily="34" charset="0"/>
-                  <a:cs typeface="Arial" panose="020B0604020202020204" pitchFamily="34" charset="0"/>
-                  <a:sym typeface="+mn-ea"/>
-                </a:rPr>
-                <a:t>        taxa2         taxa</a:t>
-              </a:r>
-              <a:r>
-                <a:rPr lang="en-US" altLang="zh-CN" sz="400">
-                  <a:latin typeface="Arial" panose="020B0604020202020204" pitchFamily="34" charset="0"/>
-                  <a:cs typeface="Arial" panose="020B0604020202020204" pitchFamily="34" charset="0"/>
-                  <a:sym typeface="+mn-ea"/>
-                </a:rPr>
-                <a:t>3                       taxa4         taxa</a:t>
-              </a:r>
-              <a:r>
-                <a:rPr lang="en-US" altLang="zh-CN" sz="400">
-                  <a:latin typeface="Arial" panose="020B0604020202020204" pitchFamily="34" charset="0"/>
-                  <a:cs typeface="Arial" panose="020B0604020202020204" pitchFamily="34" charset="0"/>
-                  <a:sym typeface="+mn-ea"/>
-                </a:rPr>
-                <a:t>5         taxa6</a:t>
-              </a:r>
-              <a:endParaRPr lang="en-US" altLang="zh-CN" sz="400">
-                <a:latin typeface="Arial" panose="020B0604020202020204" pitchFamily="34" charset="0"/>
-                <a:cs typeface="Arial" panose="020B0604020202020204" pitchFamily="34" charset="0"/>
-                <a:sym typeface="+mn-ea"/>
-              </a:endParaRPr>
-            </a:p>
-            <a:p>
-              <a:pPr algn="l" fontAlgn="auto">
-                <a:lnSpc>
-                  <a:spcPct val="120000"/>
-                </a:lnSpc>
-                <a:buClrTx/>
-                <a:buSzTx/>
-                <a:buFontTx/>
-              </a:pPr>
-              <a:r>
-                <a:rPr lang="en-US" altLang="zh-CN" sz="400">
-                  <a:solidFill>
-                    <a:schemeClr val="tx1"/>
-                  </a:solidFill>
-                  <a:latin typeface="Arial" panose="020B0604020202020204" pitchFamily="34" charset="0"/>
-                  <a:cs typeface="Arial" panose="020B0604020202020204" pitchFamily="34" charset="0"/>
-                  <a:sym typeface="+mn-ea"/>
-                </a:rPr>
-                <a:t>OG0000000     sp1_g1      </a:t>
-              </a:r>
-              <a:r>
-                <a:rPr lang="en-US" altLang="zh-CN" sz="400">
-                  <a:latin typeface="Arial" panose="020B0604020202020204" pitchFamily="34" charset="0"/>
-                  <a:cs typeface="Arial" panose="020B0604020202020204" pitchFamily="34" charset="0"/>
-                  <a:sym typeface="+mn-ea"/>
-                </a:rPr>
-                <a:t>sp2_g1      sp3_g1                    sp4_g1      sp5_g1      sp6_g1</a:t>
-              </a:r>
-              <a:endParaRPr lang="en-US" altLang="zh-CN" sz="400">
-                <a:solidFill>
-                  <a:schemeClr val="tx1"/>
-                </a:solidFill>
-                <a:latin typeface="Arial" panose="020B0604020202020204" pitchFamily="34" charset="0"/>
-                <a:cs typeface="Arial" panose="020B0604020202020204" pitchFamily="34" charset="0"/>
-                <a:sym typeface="+mn-ea"/>
-              </a:endParaRPr>
-            </a:p>
-            <a:p>
-              <a:pPr algn="l" fontAlgn="auto">
-                <a:lnSpc>
-                  <a:spcPct val="120000"/>
-                </a:lnSpc>
-                <a:buClrTx/>
-                <a:buSzTx/>
-                <a:buFontTx/>
-              </a:pPr>
-              <a:r>
-                <a:rPr lang="en-US" altLang="zh-CN" sz="400">
-                  <a:solidFill>
-                    <a:schemeClr val="tx1"/>
-                  </a:solidFill>
-                  <a:latin typeface="Arial" panose="020B0604020202020204" pitchFamily="34" charset="0"/>
-                  <a:cs typeface="Arial" panose="020B0604020202020204" pitchFamily="34" charset="0"/>
-                  <a:sym typeface="+mn-ea"/>
-                </a:rPr>
-                <a:t>OG0000001     </a:t>
-              </a:r>
-              <a:r>
-                <a:rPr lang="en-US" altLang="zh-CN" sz="400">
-                  <a:latin typeface="Arial" panose="020B0604020202020204" pitchFamily="34" charset="0"/>
-                  <a:cs typeface="Arial" panose="020B0604020202020204" pitchFamily="34" charset="0"/>
-                  <a:sym typeface="+mn-ea"/>
-                </a:rPr>
-                <a:t>sp1_g2                        sp3_g2,sp3_g3                         sp5_g2      sp6_g2</a:t>
-              </a:r>
-              <a:endParaRPr lang="en-US" altLang="zh-CN" sz="400">
-                <a:solidFill>
-                  <a:schemeClr val="tx1"/>
-                </a:solidFill>
-                <a:latin typeface="Arial" panose="020B0604020202020204" pitchFamily="34" charset="0"/>
-                <a:cs typeface="Arial" panose="020B0604020202020204" pitchFamily="34" charset="0"/>
-                <a:sym typeface="+mn-ea"/>
-              </a:endParaRPr>
-            </a:p>
-            <a:p>
-              <a:pPr algn="l" fontAlgn="auto">
-                <a:lnSpc>
-                  <a:spcPct val="120000"/>
-                </a:lnSpc>
-                <a:buClrTx/>
-                <a:buSzTx/>
-                <a:buFontTx/>
-              </a:pPr>
-              <a:r>
-                <a:rPr lang="en-US" altLang="zh-CN" sz="400">
-                  <a:solidFill>
-                    <a:schemeClr val="tx1"/>
-                  </a:solidFill>
-                  <a:latin typeface="Arial" panose="020B0604020202020204" pitchFamily="34" charset="0"/>
-                  <a:cs typeface="Arial" panose="020B0604020202020204" pitchFamily="34" charset="0"/>
-                  <a:sym typeface="+mn-ea"/>
-                </a:rPr>
-                <a:t>OG0000002     </a:t>
-              </a:r>
-              <a:r>
-                <a:rPr lang="en-US" altLang="zh-CN" sz="400">
-                  <a:latin typeface="Arial" panose="020B0604020202020204" pitchFamily="34" charset="0"/>
-                  <a:cs typeface="Arial" panose="020B0604020202020204" pitchFamily="34" charset="0"/>
-                  <a:sym typeface="+mn-ea"/>
-                </a:rPr>
-                <a:t>sp1_g3      sp2_g2      sp3_g4                    sp4_g3      sp5_g3      sp6_g3</a:t>
-              </a:r>
-              <a:endParaRPr lang="en-US" altLang="zh-CN" sz="400">
-                <a:solidFill>
-                  <a:schemeClr val="tx1"/>
-                </a:solidFill>
-                <a:latin typeface="Arial" panose="020B0604020202020204" pitchFamily="34" charset="0"/>
-                <a:cs typeface="Arial" panose="020B0604020202020204" pitchFamily="34" charset="0"/>
-                <a:sym typeface="+mn-ea"/>
-              </a:endParaRPr>
-            </a:p>
-            <a:p>
-              <a:pPr algn="l" fontAlgn="auto">
-                <a:lnSpc>
-                  <a:spcPct val="120000"/>
-                </a:lnSpc>
-                <a:buClrTx/>
-                <a:buSzTx/>
-                <a:buFontTx/>
-              </a:pPr>
-              <a:r>
-                <a:rPr lang="en-US" altLang="zh-CN" sz="400">
-                  <a:solidFill>
-                    <a:schemeClr val="tx1"/>
-                  </a:solidFill>
-                  <a:latin typeface="Arial" panose="020B0604020202020204" pitchFamily="34" charset="0"/>
-                  <a:cs typeface="Arial" panose="020B0604020202020204" pitchFamily="34" charset="0"/>
-                  <a:sym typeface="+mn-ea"/>
-                </a:rPr>
-                <a:t>OG0000003     </a:t>
-              </a:r>
-              <a:r>
-                <a:rPr lang="en-US" altLang="zh-CN" sz="400">
-                  <a:latin typeface="Arial" panose="020B0604020202020204" pitchFamily="34" charset="0"/>
-                  <a:cs typeface="Arial" panose="020B0604020202020204" pitchFamily="34" charset="0"/>
-                  <a:sym typeface="+mn-ea"/>
-                </a:rPr>
-                <a:t>sp1_g4      sp2_g3      sp3_g5,sp3_g6       sp4_g4      sp5_g4      sp6_g4</a:t>
-              </a:r>
-              <a:endParaRPr lang="en-US" altLang="zh-CN" sz="400">
-                <a:solidFill>
-                  <a:schemeClr val="tx1"/>
-                </a:solidFill>
-                <a:latin typeface="Arial" panose="020B0604020202020204" pitchFamily="34" charset="0"/>
-                <a:cs typeface="Arial" panose="020B0604020202020204" pitchFamily="34" charset="0"/>
-                <a:sym typeface="+mn-ea"/>
-              </a:endParaRPr>
-            </a:p>
-            <a:p>
-              <a:pPr algn="l" fontAlgn="auto">
-                <a:lnSpc>
-                  <a:spcPct val="120000"/>
-                </a:lnSpc>
-                <a:buClrTx/>
-                <a:buSzTx/>
-                <a:buFontTx/>
-              </a:pPr>
-              <a:r>
-                <a:rPr lang="en-US" altLang="zh-CN" sz="400">
-                  <a:solidFill>
-                    <a:schemeClr val="tx1"/>
-                  </a:solidFill>
-                  <a:latin typeface="Arial" panose="020B0604020202020204" pitchFamily="34" charset="0"/>
-                  <a:cs typeface="Arial" panose="020B0604020202020204" pitchFamily="34" charset="0"/>
-                  <a:sym typeface="+mn-ea"/>
-                </a:rPr>
-                <a:t>OG0000004     </a:t>
-              </a:r>
-              <a:r>
-                <a:rPr lang="en-US" altLang="zh-CN" sz="400">
-                  <a:latin typeface="Arial" panose="020B0604020202020204" pitchFamily="34" charset="0"/>
-                  <a:cs typeface="Arial" panose="020B0604020202020204" pitchFamily="34" charset="0"/>
-                  <a:sym typeface="+mn-ea"/>
-                </a:rPr>
-                <a:t>sp1_g5                        sp3_g7                    sp4_g5      sp5_g5      sp6_g5</a:t>
-              </a:r>
-              <a:endParaRPr lang="en-US" altLang="zh-CN" sz="400">
-                <a:solidFill>
-                  <a:schemeClr val="tx1"/>
-                </a:solidFill>
-                <a:latin typeface="Arial" panose="020B0604020202020204" pitchFamily="34" charset="0"/>
-                <a:cs typeface="Arial" panose="020B0604020202020204" pitchFamily="34" charset="0"/>
-                <a:sym typeface="+mn-ea"/>
-              </a:endParaRPr>
-            </a:p>
-          </p:txBody>
-        </p:sp>
-        <p:sp>
-          <p:nvSpPr>
-            <p:cNvPr id="16" name="加号 15"/>
-            <p:cNvSpPr/>
-            <p:nvPr/>
-          </p:nvSpPr>
-          <p:spPr>
-            <a:xfrm>
-              <a:off x="1191" y="1007"/>
-              <a:ext cx="225" cy="201"/>
-            </a:xfrm>
-            <a:prstGeom prst="mathPlus">
-              <a:avLst/>
-            </a:prstGeom>
-            <a:solidFill>
-              <a:schemeClr val="bg1">
-                <a:lumMod val="75000"/>
-              </a:schemeClr>
-            </a:solidFill>
-            <a:ln>
-              <a:noFill/>
-            </a:ln>
-          </p:spPr>
-          <p:style>
-            <a:lnRef idx="2">
-              <a:schemeClr val="accent1">
-                <a:lumMod val="75000"/>
-              </a:schemeClr>
-            </a:lnRef>
-            <a:fillRef idx="1">
-              <a:schemeClr val="accent1"/>
-            </a:fillRef>
-            <a:effectRef idx="0">
-              <a:srgbClr val="FFFFFF"/>
-            </a:effectRef>
-            <a:fontRef idx="minor">
-              <a:schemeClr val="lt1"/>
-            </a:fontRef>
-          </p:style>
-          <p:txBody>
-            <a:bodyPr rtlCol="0" anchor="ctr"/>
-            <a:p>
-              <a:pPr algn="ctr"/>
-              <a:endParaRPr lang="zh-CN" altLang="en-US"/>
-            </a:p>
-          </p:txBody>
-        </p:sp>
-        <p:sp>
-          <p:nvSpPr>
-            <p:cNvPr id="26" name="文本框 25"/>
-            <p:cNvSpPr txBox="1"/>
-            <p:nvPr/>
-          </p:nvSpPr>
-          <p:spPr>
-            <a:xfrm>
-              <a:off x="304" y="1728"/>
-              <a:ext cx="4921" cy="1328"/>
-            </a:xfrm>
-            <a:prstGeom prst="rect">
-              <a:avLst/>
-            </a:prstGeom>
-            <a:solidFill>
-              <a:schemeClr val="bg1">
-                <a:lumMod val="95000"/>
-              </a:schemeClr>
-            </a:solidFill>
-          </p:spPr>
-          <p:txBody>
-            <a:bodyPr wrap="square" rtlCol="0">
-              <a:noAutofit/>
-            </a:bodyPr>
-            <a:p>
-              <a:pPr algn="l" fontAlgn="auto">
-                <a:lnSpc>
-                  <a:spcPct val="120000"/>
-                </a:lnSpc>
-                <a:buClrTx/>
-                <a:buSzTx/>
-                <a:buFontTx/>
-              </a:pPr>
-              <a:r>
-                <a:rPr lang="zh-CN" altLang="en-US" sz="400">
-                  <a:latin typeface="Arial" panose="020B0604020202020204" pitchFamily="34" charset="0"/>
-                  <a:cs typeface="Arial" panose="020B0604020202020204" pitchFamily="34" charset="0"/>
-                  <a:sym typeface="+mn-ea"/>
-                </a:rPr>
-                <a:t>--copy-mode</a:t>
-              </a:r>
-              <a:r>
-                <a:rPr lang="en-US" altLang="zh-CN" sz="400">
-                  <a:latin typeface="Arial" panose="020B0604020202020204" pitchFamily="34" charset="0"/>
-                  <a:cs typeface="Arial" panose="020B0604020202020204" pitchFamily="34" charset="0"/>
-                  <a:sym typeface="+mn-ea"/>
-                </a:rPr>
-                <a:t> </a:t>
-              </a:r>
-              <a:r>
-                <a:rPr lang="zh-CN" altLang="en-US" sz="400">
-                  <a:latin typeface="Arial" panose="020B0604020202020204" pitchFamily="34" charset="0"/>
-                  <a:cs typeface="Arial" panose="020B0604020202020204" pitchFamily="34" charset="0"/>
-                  <a:sym typeface="+mn-ea"/>
-                </a:rPr>
-                <a:t>single-copy</a:t>
-              </a:r>
-              <a:r>
-                <a:rPr lang="en-US" altLang="zh-CN" sz="400">
-                  <a:latin typeface="Arial" panose="020B0604020202020204" pitchFamily="34" charset="0"/>
-                  <a:cs typeface="Arial" panose="020B0604020202020204" pitchFamily="34" charset="0"/>
-                  <a:sym typeface="+mn-ea"/>
-                </a:rPr>
-                <a:t> --min-taxa 6                               </a:t>
-              </a:r>
-              <a:r>
-                <a:rPr lang="zh-CN" altLang="en-US" sz="400">
-                  <a:latin typeface="Arial" panose="020B0604020202020204" pitchFamily="34" charset="0"/>
-                  <a:cs typeface="Arial" panose="020B0604020202020204" pitchFamily="34" charset="0"/>
-                  <a:sym typeface="+mn-ea"/>
-                </a:rPr>
-                <a:t>--copy-mode</a:t>
-              </a:r>
-              <a:r>
-                <a:rPr lang="en-US" altLang="zh-CN" sz="400">
-                  <a:latin typeface="Arial" panose="020B0604020202020204" pitchFamily="34" charset="0"/>
-                  <a:cs typeface="Arial" panose="020B0604020202020204" pitchFamily="34" charset="0"/>
-                  <a:sym typeface="+mn-ea"/>
-                </a:rPr>
-                <a:t> </a:t>
-              </a:r>
-              <a:r>
-                <a:rPr lang="zh-CN" altLang="en-US" sz="400">
-                  <a:latin typeface="Arial" panose="020B0604020202020204" pitchFamily="34" charset="0"/>
-                  <a:cs typeface="Arial" panose="020B0604020202020204" pitchFamily="34" charset="0"/>
-                  <a:sym typeface="+mn-ea"/>
-                </a:rPr>
-                <a:t>all-copies</a:t>
-              </a:r>
-              <a:r>
-                <a:rPr lang="en-US" altLang="zh-CN" sz="400">
-                  <a:latin typeface="Arial" panose="020B0604020202020204" pitchFamily="34" charset="0"/>
-                  <a:cs typeface="Arial" panose="020B0604020202020204" pitchFamily="34" charset="0"/>
-                  <a:sym typeface="+mn-ea"/>
-                </a:rPr>
-                <a:t> --min-taxa 6         </a:t>
-              </a:r>
-              <a:endParaRPr lang="en-US" altLang="zh-CN" sz="400">
-                <a:latin typeface="Arial" panose="020B0604020202020204" pitchFamily="34" charset="0"/>
-                <a:cs typeface="Arial" panose="020B0604020202020204" pitchFamily="34" charset="0"/>
-                <a:sym typeface="+mn-ea"/>
-              </a:endParaRPr>
-            </a:p>
-            <a:p>
-              <a:pPr indent="0" algn="l" fontAlgn="auto">
-                <a:lnSpc>
-                  <a:spcPct val="120000"/>
-                </a:lnSpc>
-              </a:pPr>
-              <a:r>
-                <a:rPr lang="en-US" altLang="zh-CN" sz="400">
-                  <a:latin typeface="Arial" panose="020B0604020202020204" pitchFamily="34" charset="0"/>
-                  <a:cs typeface="Arial" panose="020B0604020202020204" pitchFamily="34" charset="0"/>
-                  <a:sym typeface="+mn-ea"/>
-                </a:rPr>
-                <a:t>OG0000000.fasta                                                               OG0000000.fasta</a:t>
-              </a:r>
-              <a:endParaRPr lang="en-US" altLang="zh-CN" sz="400">
-                <a:latin typeface="Arial" panose="020B0604020202020204" pitchFamily="34" charset="0"/>
-                <a:cs typeface="Arial" panose="020B0604020202020204" pitchFamily="34" charset="0"/>
-                <a:sym typeface="+mn-ea"/>
-              </a:endParaRPr>
-            </a:p>
-            <a:p>
-              <a:pPr indent="0" algn="l" fontAlgn="auto">
-                <a:lnSpc>
-                  <a:spcPct val="120000"/>
-                </a:lnSpc>
-              </a:pPr>
-              <a:r>
-                <a:rPr lang="en-US" altLang="zh-CN" sz="400">
-                  <a:latin typeface="Arial" panose="020B0604020202020204" pitchFamily="34" charset="0"/>
-                  <a:cs typeface="Arial" panose="020B0604020202020204" pitchFamily="34" charset="0"/>
-                  <a:sym typeface="+mn-ea"/>
-                </a:rPr>
-                <a:t>OG0000002.fasta                                                               OG0000002.fasta</a:t>
-              </a:r>
-              <a:endParaRPr lang="en-US" altLang="zh-CN" sz="400">
-                <a:latin typeface="Arial" panose="020B0604020202020204" pitchFamily="34" charset="0"/>
-                <a:cs typeface="Arial" panose="020B0604020202020204" pitchFamily="34" charset="0"/>
-                <a:sym typeface="+mn-ea"/>
-              </a:endParaRPr>
-            </a:p>
-            <a:p>
-              <a:pPr indent="0" algn="l" fontAlgn="auto">
-                <a:lnSpc>
-                  <a:spcPct val="120000"/>
-                </a:lnSpc>
-              </a:pPr>
-              <a:r>
-                <a:rPr lang="en-US" altLang="zh-CN" sz="400">
-                  <a:latin typeface="Arial" panose="020B0604020202020204" pitchFamily="34" charset="0"/>
-                  <a:cs typeface="Arial" panose="020B0604020202020204" pitchFamily="34" charset="0"/>
-                  <a:sym typeface="+mn-ea"/>
-                </a:rPr>
-                <a:t>                                                                                           OG0000003.fasta</a:t>
-              </a:r>
-              <a:endParaRPr lang="en-US" altLang="zh-CN" sz="400">
-                <a:latin typeface="Arial" panose="020B0604020202020204" pitchFamily="34" charset="0"/>
-                <a:cs typeface="Arial" panose="020B0604020202020204" pitchFamily="34" charset="0"/>
-                <a:sym typeface="+mn-ea"/>
-              </a:endParaRPr>
-            </a:p>
-            <a:p>
-              <a:pPr indent="0" algn="l" fontAlgn="auto">
-                <a:lnSpc>
-                  <a:spcPct val="120000"/>
-                </a:lnSpc>
-              </a:pPr>
-              <a:r>
-                <a:rPr lang="zh-CN" altLang="en-US" sz="400">
-                  <a:latin typeface="Arial" panose="020B0604020202020204" pitchFamily="34" charset="0"/>
-                  <a:cs typeface="Arial" panose="020B0604020202020204" pitchFamily="34" charset="0"/>
-                  <a:sym typeface="+mn-ea"/>
-                </a:rPr>
-                <a:t>--copy-mode</a:t>
-              </a:r>
-              <a:r>
-                <a:rPr lang="en-US" altLang="zh-CN" sz="400">
-                  <a:latin typeface="Arial" panose="020B0604020202020204" pitchFamily="34" charset="0"/>
-                  <a:cs typeface="Arial" panose="020B0604020202020204" pitchFamily="34" charset="0"/>
-                  <a:sym typeface="+mn-ea"/>
-                </a:rPr>
-                <a:t> </a:t>
-              </a:r>
-              <a:r>
-                <a:rPr lang="zh-CN" altLang="en-US" sz="400">
-                  <a:latin typeface="Arial" panose="020B0604020202020204" pitchFamily="34" charset="0"/>
-                  <a:cs typeface="Arial" panose="020B0604020202020204" pitchFamily="34" charset="0"/>
-                  <a:sym typeface="+mn-ea"/>
-                </a:rPr>
-                <a:t>single-copy</a:t>
-              </a:r>
-              <a:r>
-                <a:rPr lang="en-US" altLang="zh-CN" sz="400">
-                  <a:latin typeface="Arial" panose="020B0604020202020204" pitchFamily="34" charset="0"/>
-                  <a:cs typeface="Arial" panose="020B0604020202020204" pitchFamily="34" charset="0"/>
-                  <a:sym typeface="+mn-ea"/>
-                </a:rPr>
-                <a:t> --min-taxa 5                                 </a:t>
-              </a:r>
-              <a:endParaRPr lang="en-US" altLang="zh-CN" sz="400">
-                <a:latin typeface="Arial" panose="020B0604020202020204" pitchFamily="34" charset="0"/>
-                <a:cs typeface="Arial" panose="020B0604020202020204" pitchFamily="34" charset="0"/>
-                <a:sym typeface="+mn-ea"/>
-              </a:endParaRPr>
-            </a:p>
-            <a:p>
-              <a:pPr indent="0" algn="l" fontAlgn="auto">
-                <a:lnSpc>
-                  <a:spcPct val="120000"/>
-                </a:lnSpc>
-              </a:pPr>
-              <a:r>
-                <a:rPr lang="en-US" altLang="zh-CN" sz="400">
-                  <a:latin typeface="Arial" panose="020B0604020202020204" pitchFamily="34" charset="0"/>
-                  <a:cs typeface="Arial" panose="020B0604020202020204" pitchFamily="34" charset="0"/>
-                  <a:sym typeface="+mn-ea"/>
-                </a:rPr>
-                <a:t>OG0000000.fasta                                                              </a:t>
-              </a:r>
-              <a:r>
-                <a:rPr lang="zh-CN" altLang="en-US" sz="400">
-                  <a:latin typeface="Arial" panose="020B0604020202020204" pitchFamily="34" charset="0"/>
-                  <a:cs typeface="Arial" panose="020B0604020202020204" pitchFamily="34" charset="0"/>
-                  <a:sym typeface="+mn-ea"/>
-                </a:rPr>
-                <a:t>--copy-mode</a:t>
-              </a:r>
-              <a:r>
-                <a:rPr lang="en-US" altLang="zh-CN" sz="400">
-                  <a:latin typeface="Arial" panose="020B0604020202020204" pitchFamily="34" charset="0"/>
-                  <a:cs typeface="Arial" panose="020B0604020202020204" pitchFamily="34" charset="0"/>
-                  <a:sym typeface="+mn-ea"/>
-                </a:rPr>
-                <a:t> </a:t>
-              </a:r>
-              <a:r>
-                <a:rPr lang="zh-CN" altLang="en-US" sz="400">
-                  <a:latin typeface="Arial" panose="020B0604020202020204" pitchFamily="34" charset="0"/>
-                  <a:cs typeface="Arial" panose="020B0604020202020204" pitchFamily="34" charset="0"/>
-                  <a:sym typeface="+mn-ea"/>
-                </a:rPr>
-                <a:t>all-copies</a:t>
-              </a:r>
-              <a:r>
-                <a:rPr lang="en-US" altLang="zh-CN" sz="400">
-                  <a:latin typeface="Arial" panose="020B0604020202020204" pitchFamily="34" charset="0"/>
-                  <a:cs typeface="Arial" panose="020B0604020202020204" pitchFamily="34" charset="0"/>
-                  <a:sym typeface="+mn-ea"/>
-                </a:rPr>
-                <a:t> --min-taxa 5</a:t>
-              </a:r>
-              <a:endParaRPr lang="en-US" altLang="zh-CN" sz="400">
-                <a:latin typeface="Arial" panose="020B0604020202020204" pitchFamily="34" charset="0"/>
-                <a:cs typeface="Arial" panose="020B0604020202020204" pitchFamily="34" charset="0"/>
-                <a:sym typeface="+mn-ea"/>
-              </a:endParaRPr>
-            </a:p>
-            <a:p>
-              <a:pPr indent="0" algn="l" fontAlgn="auto">
-                <a:lnSpc>
-                  <a:spcPct val="120000"/>
-                </a:lnSpc>
-              </a:pPr>
-              <a:r>
-                <a:rPr lang="en-US" altLang="zh-CN" sz="400">
-                  <a:latin typeface="Arial" panose="020B0604020202020204" pitchFamily="34" charset="0"/>
-                  <a:cs typeface="Arial" panose="020B0604020202020204" pitchFamily="34" charset="0"/>
-                  <a:sym typeface="+mn-ea"/>
-                </a:rPr>
-                <a:t>OG0000002.fasta                                                               OG0000000.fasta</a:t>
-              </a:r>
-              <a:endParaRPr lang="en-US" altLang="zh-CN" sz="400">
-                <a:latin typeface="Arial" panose="020B0604020202020204" pitchFamily="34" charset="0"/>
-                <a:cs typeface="Arial" panose="020B0604020202020204" pitchFamily="34" charset="0"/>
-                <a:sym typeface="+mn-ea"/>
-              </a:endParaRPr>
-            </a:p>
-            <a:p>
-              <a:pPr indent="0" algn="l" fontAlgn="auto">
-                <a:lnSpc>
-                  <a:spcPct val="120000"/>
-                </a:lnSpc>
-              </a:pPr>
-              <a:r>
-                <a:rPr lang="en-US" altLang="zh-CN" sz="400">
-                  <a:latin typeface="Arial" panose="020B0604020202020204" pitchFamily="34" charset="0"/>
-                  <a:cs typeface="Arial" panose="020B0604020202020204" pitchFamily="34" charset="0"/>
-                  <a:sym typeface="+mn-ea"/>
-                </a:rPr>
-                <a:t>OG0000004.fasta                                                               OG0000002.fasta</a:t>
-              </a:r>
-              <a:endParaRPr lang="en-US" altLang="zh-CN" sz="400">
-                <a:latin typeface="Arial" panose="020B0604020202020204" pitchFamily="34" charset="0"/>
-                <a:cs typeface="Arial" panose="020B0604020202020204" pitchFamily="34" charset="0"/>
-                <a:sym typeface="+mn-ea"/>
-              </a:endParaRPr>
-            </a:p>
-            <a:p>
-              <a:pPr indent="0" algn="l" fontAlgn="auto">
-                <a:lnSpc>
-                  <a:spcPct val="120000"/>
-                </a:lnSpc>
-              </a:pPr>
-              <a:r>
-                <a:rPr lang="en-US" altLang="zh-CN" sz="400">
-                  <a:latin typeface="Arial" panose="020B0604020202020204" pitchFamily="34" charset="0"/>
-                  <a:cs typeface="Arial" panose="020B0604020202020204" pitchFamily="34" charset="0"/>
-                  <a:sym typeface="+mn-ea"/>
-                </a:rPr>
-                <a:t>                                                                                           OG0000003.fasta</a:t>
-              </a:r>
-              <a:endParaRPr lang="en-US" altLang="zh-CN" sz="400">
-                <a:latin typeface="Arial" panose="020B0604020202020204" pitchFamily="34" charset="0"/>
-                <a:cs typeface="Arial" panose="020B0604020202020204" pitchFamily="34" charset="0"/>
-                <a:sym typeface="+mn-ea"/>
-              </a:endParaRPr>
-            </a:p>
-            <a:p>
-              <a:pPr indent="0" algn="l" fontAlgn="auto">
-                <a:lnSpc>
-                  <a:spcPct val="120000"/>
-                </a:lnSpc>
-              </a:pPr>
-              <a:r>
-                <a:rPr lang="en-US" altLang="zh-CN" sz="400">
-                  <a:latin typeface="Arial" panose="020B0604020202020204" pitchFamily="34" charset="0"/>
-                  <a:cs typeface="Arial" panose="020B0604020202020204" pitchFamily="34" charset="0"/>
-                  <a:sym typeface="+mn-ea"/>
-                </a:rPr>
-                <a:t>                                                                                           OG0000004.fasta</a:t>
-              </a:r>
-              <a:endParaRPr lang="en-US" altLang="zh-CN" sz="400">
-                <a:solidFill>
-                  <a:schemeClr val="tx1"/>
-                </a:solidFill>
-                <a:latin typeface="Arial" panose="020B0604020202020204" pitchFamily="34" charset="0"/>
-                <a:cs typeface="Arial" panose="020B0604020202020204" pitchFamily="34" charset="0"/>
-                <a:sym typeface="+mn-ea"/>
-              </a:endParaRPr>
-            </a:p>
-          </p:txBody>
-        </p:sp>
-        <p:sp>
-          <p:nvSpPr>
-            <p:cNvPr id="28" name="右箭头 27"/>
-            <p:cNvSpPr/>
-            <p:nvPr/>
-          </p:nvSpPr>
-          <p:spPr>
-            <a:xfrm rot="5400000">
-              <a:off x="1191" y="1486"/>
-              <a:ext cx="225" cy="119"/>
-            </a:xfrm>
-            <a:prstGeom prst="rightArrow">
-              <a:avLst/>
-            </a:prstGeom>
-            <a:solidFill>
-              <a:schemeClr val="bg1">
-                <a:lumMod val="75000"/>
-              </a:schemeClr>
-            </a:solidFill>
-            <a:ln>
-              <a:noFill/>
-            </a:ln>
-          </p:spPr>
-          <p:style>
-            <a:lnRef idx="2">
-              <a:schemeClr val="accent1">
-                <a:lumMod val="75000"/>
-              </a:schemeClr>
-            </a:lnRef>
-            <a:fillRef idx="1">
-              <a:schemeClr val="accent1"/>
-            </a:fillRef>
-            <a:effectRef idx="0">
-              <a:srgbClr val="FFFFFF"/>
-            </a:effectRef>
-            <a:fontRef idx="minor">
-              <a:schemeClr val="lt1"/>
-            </a:fontRef>
-          </p:style>
-          <p:txBody>
-            <a:bodyPr rtlCol="0" anchor="ctr"/>
-            <a:p>
-              <a:pPr algn="ctr"/>
-              <a:endParaRPr lang="zh-CN" altLang="en-US"/>
-            </a:p>
-          </p:txBody>
-        </p:sp>
-        <p:sp>
-          <p:nvSpPr>
-            <p:cNvPr id="32" name="矩形 31"/>
-            <p:cNvSpPr/>
-            <p:nvPr/>
-          </p:nvSpPr>
-          <p:spPr>
-            <a:xfrm>
-              <a:off x="243" y="289"/>
-              <a:ext cx="5147" cy="3033"/>
-            </a:xfrm>
-            <a:prstGeom prst="rect">
-              <a:avLst/>
-            </a:prstGeom>
+              </a:rPr>
+              <a:t>SonicParanoid  to  OrthoFinder</a:t>
+            </a:r>
+            <a:endParaRPr lang="en-US" altLang="zh-CN" sz="400">
+              <a:solidFill>
+                <a:schemeClr val="tx1"/>
+              </a:solidFill>
+              <a:latin typeface="Arial" panose="020B0604020202020204" pitchFamily="34" charset="0"/>
+              <a:cs typeface="Arial" panose="020B0604020202020204" pitchFamily="34" charset="0"/>
+              <a:sym typeface="+mn-ea"/>
+            </a:endParaRPr>
+          </a:p>
+        </p:txBody>
+      </p:sp>
+      <p:sp>
+        <p:nvSpPr>
+          <p:cNvPr id="129" name="右箭头 128"/>
+          <p:cNvSpPr/>
+          <p:nvPr/>
+        </p:nvSpPr>
+        <p:spPr>
+          <a:xfrm rot="16200000">
+            <a:off x="1576705" y="988060"/>
+            <a:ext cx="86995" cy="76200"/>
+          </a:xfrm>
+          <a:prstGeom prst="rightArrow">
+            <a:avLst/>
+          </a:prstGeom>
+          <a:solidFill>
+            <a:schemeClr val="bg1">
+              <a:lumMod val="75000"/>
+            </a:schemeClr>
+          </a:solidFill>
+          <a:ln>
             <a:noFill/>
-            <a:ln w="6350">
-              <a:solidFill>
-                <a:schemeClr val="bg1">
-                  <a:lumMod val="85000"/>
-                </a:schemeClr>
-              </a:solidFill>
-            </a:ln>
-            <a:extLst>
-              <a:ext uri="{909E8E84-426E-40DD-AFC4-6F175D3DCCD1}">
-                <a14:hiddenFill xmlns:a14="http://schemas.microsoft.com/office/drawing/2010/main">
-                  <a:solidFill>
-                    <a:schemeClr val="bg1">
-                      <a:lumMod val="85000"/>
-                    </a:schemeClr>
-                  </a:solidFill>
-                </a14:hiddenFill>
-              </a:ext>
-            </a:extLst>
-          </p:spPr>
-          <p:style>
-            <a:lnRef idx="2">
-              <a:schemeClr val="accent1">
-                <a:lumMod val="75000"/>
-              </a:schemeClr>
-            </a:lnRef>
-            <a:fillRef idx="1">
-              <a:schemeClr val="accent1"/>
-            </a:fillRef>
-            <a:effectRef idx="0">
-              <a:srgbClr val="FFFFFF"/>
-            </a:effectRef>
-            <a:fontRef idx="minor">
-              <a:schemeClr val="lt1"/>
-            </a:fontRef>
-          </p:style>
-          <p:txBody>
-            <a:bodyPr rtlCol="0" anchor="ctr"/>
-            <a:p>
-              <a:pPr algn="ctr"/>
-              <a:endParaRPr lang="zh-CN" altLang="en-US"/>
-            </a:p>
-          </p:txBody>
-        </p:sp>
-        <p:sp>
-          <p:nvSpPr>
-            <p:cNvPr id="56" name="文本框 55"/>
-            <p:cNvSpPr txBox="1"/>
-            <p:nvPr/>
-          </p:nvSpPr>
-          <p:spPr>
-            <a:xfrm>
-              <a:off x="235" y="3056"/>
-              <a:ext cx="4982" cy="265"/>
-            </a:xfrm>
-            <a:prstGeom prst="rect">
-              <a:avLst/>
-            </a:prstGeom>
-            <a:noFill/>
-          </p:spPr>
-          <p:txBody>
-            <a:bodyPr wrap="square" rtlCol="0" anchor="t">
-              <a:spAutoFit/>
-            </a:bodyPr>
-            <a:p>
-              <a:r>
-                <a:rPr lang="zh-CN" altLang="en-US" sz="500">
-                  <a:solidFill>
-                    <a:srgbClr val="FF0000"/>
-                  </a:solidFill>
-                  <a:latin typeface="Arial" panose="020B0604020202020204" pitchFamily="34" charset="0"/>
-                  <a:cs typeface="Arial" panose="020B0604020202020204" pitchFamily="34" charset="0"/>
-                </a:rPr>
-                <a:t>extract_orthofinder_orthogroups.py</a:t>
-              </a:r>
-              <a:endParaRPr lang="zh-CN" altLang="en-US" sz="500">
-                <a:solidFill>
-                  <a:srgbClr val="FF0000"/>
-                </a:solidFill>
-                <a:latin typeface="Arial" panose="020B0604020202020204" pitchFamily="34" charset="0"/>
-                <a:cs typeface="Arial" panose="020B0604020202020204" pitchFamily="34" charset="0"/>
-              </a:endParaRPr>
-            </a:p>
-          </p:txBody>
-        </p:sp>
-        <p:sp>
-          <p:nvSpPr>
-            <p:cNvPr id="72" name="文本框 71"/>
-            <p:cNvSpPr txBox="1"/>
-            <p:nvPr/>
-          </p:nvSpPr>
-          <p:spPr>
-            <a:xfrm>
-              <a:off x="189" y="230"/>
-              <a:ext cx="5295" cy="467"/>
-            </a:xfrm>
-            <a:prstGeom prst="rect">
-              <a:avLst/>
-            </a:prstGeom>
-            <a:noFill/>
-          </p:spPr>
-          <p:txBody>
-            <a:bodyPr wrap="square" rtlCol="0" anchor="t">
-              <a:noAutofit/>
-            </a:bodyPr>
-            <a:p>
-              <a:pPr algn="l"/>
-              <a:r>
-                <a:rPr lang="en-US" sz="1000" b="1">
-                  <a:latin typeface="Arial" panose="020B0604020202020204" pitchFamily="34" charset="0"/>
-                  <a:cs typeface="Arial" panose="020B0604020202020204" pitchFamily="34" charset="0"/>
-                </a:rPr>
-                <a:t>A</a:t>
-              </a:r>
-              <a:endParaRPr lang="en-US" sz="1000" b="1">
-                <a:latin typeface="Arial" panose="020B0604020202020204" pitchFamily="34" charset="0"/>
-                <a:cs typeface="Arial" panose="020B0604020202020204" pitchFamily="34" charset="0"/>
-              </a:endParaRPr>
-            </a:p>
-            <a:p>
-              <a:pPr algn="l"/>
-              <a:r>
-                <a:rPr sz="500" b="1">
-                  <a:latin typeface="Arial" panose="020B0604020202020204" pitchFamily="34" charset="0"/>
-                  <a:cs typeface="Arial" panose="020B0604020202020204" pitchFamily="34" charset="0"/>
-                </a:rPr>
-                <a:t>Extract selected single-copy or multi-copy sequence orthogroups from OrthoFinder Orthogroups.tsv</a:t>
-              </a:r>
-              <a:endParaRPr sz="500" b="1">
-                <a:latin typeface="Arial" panose="020B0604020202020204" pitchFamily="34" charset="0"/>
-                <a:cs typeface="Arial" panose="020B0604020202020204" pitchFamily="34" charset="0"/>
-              </a:endParaRPr>
-            </a:p>
-          </p:txBody>
-        </p:sp>
-      </p:grpSp>
+          </a:ln>
+        </p:spPr>
+        <p:style>
+          <a:lnRef idx="2">
+            <a:schemeClr val="accent1">
+              <a:lumMod val="75000"/>
+            </a:schemeClr>
+          </a:lnRef>
+          <a:fillRef idx="1">
+            <a:schemeClr val="accent1"/>
+          </a:fillRef>
+          <a:effectRef idx="0">
+            <a:srgbClr val="FFFFFF"/>
+          </a:effectRef>
+          <a:fontRef idx="minor">
+            <a:schemeClr val="lt1"/>
+          </a:fontRef>
+        </p:style>
+        <p:txBody>
+          <a:bodyPr rtlCol="0" anchor="ctr"/>
+          <a:p>
+            <a:pPr algn="ctr"/>
+            <a:endParaRPr lang="zh-CN" altLang="en-US"/>
+          </a:p>
+        </p:txBody>
+      </p:sp>
     </p:spTree>
   </p:cSld>
   <p:clrMapOvr>
